--- a/documents/BES-13-PPT-001-v2.0_Presentacion_Ejecutiva_Expansion_BES.pptx
+++ b/documents/BES-13-PPT-001-v2.0_Presentacion_Ejecutiva_Expansion_BES.pptx
@@ -2,26 +2,26 @@
 <file path=ppt/presentation.xml><?xml version="1.0" encoding="utf-8"?>
 <p:presentation xmlns:p="http://schemas.openxmlformats.org/presentationml/2006/main">
   <p:sldMasterIdLst>
-    <p:sldMasterId xmlns:r="http://schemas.openxmlformats.org/officeDocument/2006/relationships" id="2147483648" r:id="Rc863e32ac9234d2a"/>
+    <p:sldMasterId xmlns:r="http://schemas.openxmlformats.org/officeDocument/2006/relationships" id="2147483648" r:id="R335c75f99fe64d8c"/>
   </p:sldMasterIdLst>
   <p:notesMasterIdLst>
-    <p:notesMasterId xmlns:r="http://schemas.openxmlformats.org/officeDocument/2006/relationships" r:id="R6d278995a71e4f27"/>
+    <p:notesMasterId xmlns:r="http://schemas.openxmlformats.org/officeDocument/2006/relationships" r:id="R719e36e355a345c4"/>
   </p:notesMasterIdLst>
   <p:sldIdLst>
-    <p:sldId xmlns:r="http://schemas.openxmlformats.org/officeDocument/2006/relationships" id="256" r:id="R0be85cfd3e1848dc"/>
-    <p:sldId xmlns:r="http://schemas.openxmlformats.org/officeDocument/2006/relationships" id="257" r:id="R74cb24e4f4684519"/>
-    <p:sldId xmlns:r="http://schemas.openxmlformats.org/officeDocument/2006/relationships" id="258" r:id="R72bc0520b09f48d1"/>
-    <p:sldId xmlns:r="http://schemas.openxmlformats.org/officeDocument/2006/relationships" id="259" r:id="Rd67752e074ee4c77"/>
-    <p:sldId xmlns:r="http://schemas.openxmlformats.org/officeDocument/2006/relationships" id="260" r:id="R79348dc3981b45c0"/>
-    <p:sldId xmlns:r="http://schemas.openxmlformats.org/officeDocument/2006/relationships" id="261" r:id="R58cf9aecfc9d4369"/>
-    <p:sldId xmlns:r="http://schemas.openxmlformats.org/officeDocument/2006/relationships" id="262" r:id="Rb2ebc4571f594708"/>
-    <p:sldId xmlns:r="http://schemas.openxmlformats.org/officeDocument/2006/relationships" id="263" r:id="R4f5a4addfc744349"/>
-    <p:sldId xmlns:r="http://schemas.openxmlformats.org/officeDocument/2006/relationships" id="264" r:id="Rf21e7590662041f6"/>
-    <p:sldId xmlns:r="http://schemas.openxmlformats.org/officeDocument/2006/relationships" id="265" r:id="R5c644a0d54154a7a"/>
-    <p:sldId xmlns:r="http://schemas.openxmlformats.org/officeDocument/2006/relationships" id="266" r:id="Rf334bae87f2f442a"/>
-    <p:sldId xmlns:r="http://schemas.openxmlformats.org/officeDocument/2006/relationships" id="267" r:id="Rd00102911e7a4399"/>
-    <p:sldId xmlns:r="http://schemas.openxmlformats.org/officeDocument/2006/relationships" id="268" r:id="R8ca86592cde94199"/>
-    <p:sldId xmlns:r="http://schemas.openxmlformats.org/officeDocument/2006/relationships" id="269" r:id="Rfc1f756cd41941fb"/>
+    <p:sldId xmlns:r="http://schemas.openxmlformats.org/officeDocument/2006/relationships" id="256" r:id="R8dda29d748084845"/>
+    <p:sldId xmlns:r="http://schemas.openxmlformats.org/officeDocument/2006/relationships" id="257" r:id="Rdfd7eb274fef41cb"/>
+    <p:sldId xmlns:r="http://schemas.openxmlformats.org/officeDocument/2006/relationships" id="258" r:id="R362b8dc0d0dc46c0"/>
+    <p:sldId xmlns:r="http://schemas.openxmlformats.org/officeDocument/2006/relationships" id="259" r:id="Rfd9102c8c971443f"/>
+    <p:sldId xmlns:r="http://schemas.openxmlformats.org/officeDocument/2006/relationships" id="260" r:id="Rba57e243d5574daf"/>
+    <p:sldId xmlns:r="http://schemas.openxmlformats.org/officeDocument/2006/relationships" id="261" r:id="R71570f24d9364b8e"/>
+    <p:sldId xmlns:r="http://schemas.openxmlformats.org/officeDocument/2006/relationships" id="262" r:id="Rb03125938de44b87"/>
+    <p:sldId xmlns:r="http://schemas.openxmlformats.org/officeDocument/2006/relationships" id="263" r:id="R13952f16a4574aa4"/>
+    <p:sldId xmlns:r="http://schemas.openxmlformats.org/officeDocument/2006/relationships" id="264" r:id="R4bdae9db44bf4c0c"/>
+    <p:sldId xmlns:r="http://schemas.openxmlformats.org/officeDocument/2006/relationships" id="265" r:id="Rbd6f9c62fa774add"/>
+    <p:sldId xmlns:r="http://schemas.openxmlformats.org/officeDocument/2006/relationships" id="266" r:id="R80b2d49cf641467a"/>
+    <p:sldId xmlns:r="http://schemas.openxmlformats.org/officeDocument/2006/relationships" id="267" r:id="Rf4eba088490c4dd3"/>
+    <p:sldId xmlns:r="http://schemas.openxmlformats.org/officeDocument/2006/relationships" id="268" r:id="R6245794f27c848cc"/>
+    <p:sldId xmlns:r="http://schemas.openxmlformats.org/officeDocument/2006/relationships" id="269" r:id="R2bb6dcbea77e447c"/>
   </p:sldIdLst>
   <p:sldSz cx="12192000" cy="6858000"/>
   <p:notesSz cx="6858000" cy="9144000"/>
@@ -1377,7 +1377,7 @@
   </p:cSld>
   <p:clrMap bg1="lt1" tx1="dk1" bg2="lt2" tx2="dk2" accent1="accent1" accent2="accent2" accent3="accent3" accent4="accent4" accent5="accent5" accent6="accent6" hlink="hlink" folHlink="folHlink"/>
   <p:sldLayoutIdLst>
-    <p:sldLayoutId xmlns:r="http://schemas.openxmlformats.org/officeDocument/2006/relationships" id="2147483649" r:id="Rf415b92b51e5423c"/>
+    <p:sldLayoutId xmlns:r="http://schemas.openxmlformats.org/officeDocument/2006/relationships" id="2147483649" r:id="R6fdac3676adf40c6"/>
   </p:sldLayoutIdLst>
   <p:txStyles>
     <p:titleStyle>
@@ -1932,7 +1932,7 @@
           <p:nvPr/>
         </p:nvPicPr>
         <p:blipFill>
-          <a:blip xmlns:r="http://schemas.openxmlformats.org/officeDocument/2006/relationships" xmlns:a="http://schemas.openxmlformats.org/drawingml/2006/main" r:embed="R92fd204b2d0147b9"/>
+          <a:blip xmlns:r="http://schemas.openxmlformats.org/officeDocument/2006/relationships" xmlns:a="http://schemas.openxmlformats.org/drawingml/2006/main" r:embed="R42d55ad80af74ed4"/>
           <a:srcRect xmlns:a="http://schemas.openxmlformats.org/drawingml/2006/main" l="1023" t="0" r="1023" b="0"/>
           <a:stretch xmlns:a="http://schemas.openxmlformats.org/drawingml/2006/main">
             <a:fillRect l="0" t="0" r="0" b="0"/>
@@ -1953,7 +1953,7 @@
           <p:cNvPr id="2" name="">
             <a:extLst xmlns:a="http://schemas.openxmlformats.org/drawingml/2006/main">
               <a:ext uri="{FF2B5EF4-FFF2-40B4-BE49-F238E27FC236}">
-                <a16:creationId xmlns:a16="http://schemas.microsoft.com/office/drawing/2014/main" id="{B849090C-12B0-4885-B644-66A504C1228F}"/>
+                <a16:creationId xmlns:a16="http://schemas.microsoft.com/office/drawing/2014/main" id="{3400CFA1-7B5D-4B2B-ABA7-19EAA1AD5DFF}"/>
               </a:ext>
             </a:extLst>
           </p:cNvPr>
@@ -1984,7 +1984,7 @@
           <p:cNvPr id="3" name="">
             <a:extLst xmlns:a="http://schemas.openxmlformats.org/drawingml/2006/main">
               <a:ext uri="{FF2B5EF4-FFF2-40B4-BE49-F238E27FC236}">
-                <a16:creationId xmlns:a16="http://schemas.microsoft.com/office/drawing/2014/main" id="{FCDD706E-629F-4D7B-9ACC-558E7E512A67}"/>
+                <a16:creationId xmlns:a16="http://schemas.microsoft.com/office/drawing/2014/main" id="{325332F3-9349-4D18-9BD7-944FD4CD9809}"/>
               </a:ext>
             </a:extLst>
           </p:cNvPr>
@@ -2019,7 +2019,7 @@
           <p:cNvPr id="4" name="">
             <a:extLst xmlns:a="http://schemas.openxmlformats.org/drawingml/2006/main">
               <a:ext uri="{FF2B5EF4-FFF2-40B4-BE49-F238E27FC236}">
-                <a16:creationId xmlns:a16="http://schemas.microsoft.com/office/drawing/2014/main" id="{F719D16D-54B9-4C83-822A-E3AAFD5D1C60}"/>
+                <a16:creationId xmlns:a16="http://schemas.microsoft.com/office/drawing/2014/main" id="{6BE8B411-F996-4290-9C53-D5061001F717}"/>
               </a:ext>
             </a:extLst>
           </p:cNvPr>
@@ -2077,7 +2077,7 @@
           <p:cNvPr id="5" name="cover-title">
             <a:extLst xmlns:a="http://schemas.openxmlformats.org/drawingml/2006/main">
               <a:ext uri="{FF2B5EF4-FFF2-40B4-BE49-F238E27FC236}">
-                <a16:creationId xmlns:a16="http://schemas.microsoft.com/office/drawing/2014/main" id="{6043B1CB-DFBF-4D0B-980F-13544E06860A}"/>
+                <a16:creationId xmlns:a16="http://schemas.microsoft.com/office/drawing/2014/main" id="{5221114D-A03B-4DD9-9D27-BBE42E8AD5B6}"/>
               </a:ext>
             </a:extLst>
           </p:cNvPr>
@@ -2158,7 +2158,7 @@
           <p:cNvPr id="6" name="">
             <a:extLst xmlns:a="http://schemas.openxmlformats.org/drawingml/2006/main">
               <a:ext uri="{FF2B5EF4-FFF2-40B4-BE49-F238E27FC236}">
-                <a16:creationId xmlns:a16="http://schemas.microsoft.com/office/drawing/2014/main" id="{64DA34B0-1EE1-4B9E-AA1E-6CA353F34B81}"/>
+                <a16:creationId xmlns:a16="http://schemas.microsoft.com/office/drawing/2014/main" id="{0934F7FA-55DD-47D8-8276-399E870680D7}"/>
               </a:ext>
             </a:extLst>
           </p:cNvPr>
@@ -2216,7 +2216,7 @@
           <p:cNvPr id="7" name="">
             <a:extLst xmlns:a="http://schemas.openxmlformats.org/drawingml/2006/main">
               <a:ext uri="{FF2B5EF4-FFF2-40B4-BE49-F238E27FC236}">
-                <a16:creationId xmlns:a16="http://schemas.microsoft.com/office/drawing/2014/main" id="{A4F06E03-F2D5-4950-B867-E4FFE8EF4943}"/>
+                <a16:creationId xmlns:a16="http://schemas.microsoft.com/office/drawing/2014/main" id="{C4ADEE24-3F94-4803-BD41-C4E9A6291E61}"/>
               </a:ext>
             </a:extLst>
           </p:cNvPr>
@@ -2274,7 +2274,7 @@
           <p:cNvPr id="8" name="">
             <a:extLst xmlns:a="http://schemas.openxmlformats.org/drawingml/2006/main">
               <a:ext uri="{FF2B5EF4-FFF2-40B4-BE49-F238E27FC236}">
-                <a16:creationId xmlns:a16="http://schemas.microsoft.com/office/drawing/2014/main" id="{25E22DB1-316F-4875-8E37-3DC033898737}"/>
+                <a16:creationId xmlns:a16="http://schemas.microsoft.com/office/drawing/2014/main" id="{9028093C-69B7-4287-99D1-F656CF6578E5}"/>
               </a:ext>
             </a:extLst>
           </p:cNvPr>
@@ -2305,7 +2305,7 @@
           <p:cNvPr id="9" name="">
             <a:extLst xmlns:a="http://schemas.openxmlformats.org/drawingml/2006/main">
               <a:ext uri="{FF2B5EF4-FFF2-40B4-BE49-F238E27FC236}">
-                <a16:creationId xmlns:a16="http://schemas.microsoft.com/office/drawing/2014/main" id="{9D69B7D3-C188-4438-9B4C-337FBA970F3A}"/>
+                <a16:creationId xmlns:a16="http://schemas.microsoft.com/office/drawing/2014/main" id="{85C1142B-A743-45E2-ACF5-27659700A072}"/>
               </a:ext>
             </a:extLst>
           </p:cNvPr>
@@ -2386,7 +2386,7 @@
           <p:cNvPr id="10" name="">
             <a:extLst xmlns:a="http://schemas.openxmlformats.org/drawingml/2006/main">
               <a:ext uri="{FF2B5EF4-FFF2-40B4-BE49-F238E27FC236}">
-                <a16:creationId xmlns:a16="http://schemas.microsoft.com/office/drawing/2014/main" id="{66584A1A-B4CE-447E-ADF9-1F65C0093AED}"/>
+                <a16:creationId xmlns:a16="http://schemas.microsoft.com/office/drawing/2014/main" id="{BE8BD50A-1E45-44D0-8069-CFD36BEEF8B2}"/>
               </a:ext>
             </a:extLst>
           </p:cNvPr>
@@ -2442,7 +2442,7 @@
     </p:spTree>
     <p:extLst>
       <p:ext uri="{BB962C8B-B14F-4D97-AF65-F5344CB8AC3E}">
-        <p14:creationId xmlns:p14="http://schemas.microsoft.com/office/powerpoint/2010/main" val="2100270284"/>
+        <p14:creationId xmlns:p14="http://schemas.microsoft.com/office/powerpoint/2010/main" val="1230603525"/>
       </p:ext>
     </p:extLst>
   </p:cSld>
@@ -2473,7 +2473,7 @@
           <p:cNvPr id="40" name="eyebrow-10">
             <a:extLst xmlns:a="http://schemas.openxmlformats.org/drawingml/2006/main">
               <a:ext uri="{FF2B5EF4-FFF2-40B4-BE49-F238E27FC236}">
-                <a16:creationId xmlns:a16="http://schemas.microsoft.com/office/drawing/2014/main" id="{FFE58123-F221-4A52-A007-6B666FFFD39C}"/>
+                <a16:creationId xmlns:a16="http://schemas.microsoft.com/office/drawing/2014/main" id="{5ACDF57E-6D48-4282-A0C1-27C5D29B4444}"/>
               </a:ext>
             </a:extLst>
           </p:cNvPr>
@@ -2531,7 +2531,7 @@
           <p:cNvPr id="2" name="title-10">
             <a:extLst xmlns:a="http://schemas.openxmlformats.org/drawingml/2006/main">
               <a:ext uri="{FF2B5EF4-FFF2-40B4-BE49-F238E27FC236}">
-                <a16:creationId xmlns:a16="http://schemas.microsoft.com/office/drawing/2014/main" id="{A42182BE-A25D-42B3-9D54-FF7EA2B2510D}"/>
+                <a16:creationId xmlns:a16="http://schemas.microsoft.com/office/drawing/2014/main" id="{2E733EBB-B67F-4B04-B0FF-82C78F95ECC4}"/>
               </a:ext>
             </a:extLst>
           </p:cNvPr>
@@ -2589,7 +2589,7 @@
           <p:cNvPr id="3" name="">
             <a:extLst xmlns:a="http://schemas.openxmlformats.org/drawingml/2006/main">
               <a:ext uri="{FF2B5EF4-FFF2-40B4-BE49-F238E27FC236}">
-                <a16:creationId xmlns:a16="http://schemas.microsoft.com/office/drawing/2014/main" id="{95BA08D7-4FAC-4734-BAFF-701DD786BEAA}"/>
+                <a16:creationId xmlns:a16="http://schemas.microsoft.com/office/drawing/2014/main" id="{EAD87E38-E74C-4DA8-9712-0CC3CD5A4880}"/>
               </a:ext>
             </a:extLst>
           </p:cNvPr>
@@ -2620,7 +2620,7 @@
           <p:cNvPr id="4" name="">
             <a:extLst xmlns:a="http://schemas.openxmlformats.org/drawingml/2006/main">
               <a:ext uri="{FF2B5EF4-FFF2-40B4-BE49-F238E27FC236}">
-                <a16:creationId xmlns:a16="http://schemas.microsoft.com/office/drawing/2014/main" id="{112AF31F-02CA-4F7E-8541-17F83F0986CA}"/>
+                <a16:creationId xmlns:a16="http://schemas.microsoft.com/office/drawing/2014/main" id="{E1A36083-EB7D-41BA-B825-20730BB69260}"/>
               </a:ext>
             </a:extLst>
           </p:cNvPr>
@@ -2668,7 +2668,7 @@
                 <a:ea typeface="Aptos"/>
                 <a:cs typeface="Aptos"/>
               </a:rPr>
-              <a:t>BES v2.0 · Propuesta ejecutiva</a:t>
+              <a:t>BES v2.0 · Aprobado y liberado</a:t>
             </a:r>
           </a:p>
         </p:txBody>
@@ -2678,7 +2678,7 @@
           <p:cNvPr id="5" name="">
             <a:extLst xmlns:a="http://schemas.openxmlformats.org/drawingml/2006/main">
               <a:ext uri="{FF2B5EF4-FFF2-40B4-BE49-F238E27FC236}">
-                <a16:creationId xmlns:a16="http://schemas.microsoft.com/office/drawing/2014/main" id="{BC848348-0415-408C-B63B-DAA41769D0F9}"/>
+                <a16:creationId xmlns:a16="http://schemas.microsoft.com/office/drawing/2014/main" id="{430B2B7B-31C4-4CF9-982C-6C25958A55C3}"/>
               </a:ext>
             </a:extLst>
           </p:cNvPr>
@@ -2736,7 +2736,7 @@
           <p:cNvPr id="6" name="">
             <a:extLst xmlns:a="http://schemas.openxmlformats.org/drawingml/2006/main">
               <a:ext uri="{FF2B5EF4-FFF2-40B4-BE49-F238E27FC236}">
-                <a16:creationId xmlns:a16="http://schemas.microsoft.com/office/drawing/2014/main" id="{A2E11BB3-1029-4A51-8009-4988AB7F55C8}"/>
+                <a16:creationId xmlns:a16="http://schemas.microsoft.com/office/drawing/2014/main" id="{7A7EA105-8208-47B9-9203-858AB960EE5E}"/>
               </a:ext>
             </a:extLst>
           </p:cNvPr>
@@ -2771,7 +2771,7 @@
           <p:cNvPr id="7" name="">
             <a:extLst xmlns:a="http://schemas.openxmlformats.org/drawingml/2006/main">
               <a:ext uri="{FF2B5EF4-FFF2-40B4-BE49-F238E27FC236}">
-                <a16:creationId xmlns:a16="http://schemas.microsoft.com/office/drawing/2014/main" id="{45FD601E-1DF8-4951-9E1B-1F3690A910E4}"/>
+                <a16:creationId xmlns:a16="http://schemas.microsoft.com/office/drawing/2014/main" id="{10AEBFA2-3C64-4C98-A214-9A05C1AC7C2D}"/>
               </a:ext>
             </a:extLst>
           </p:cNvPr>
@@ -2829,7 +2829,7 @@
           <p:cNvPr id="8" name="">
             <a:extLst xmlns:a="http://schemas.openxmlformats.org/drawingml/2006/main">
               <a:ext uri="{FF2B5EF4-FFF2-40B4-BE49-F238E27FC236}">
-                <a16:creationId xmlns:a16="http://schemas.microsoft.com/office/drawing/2014/main" id="{9FF7C61E-376E-499C-90F1-7EAFBF92A752}"/>
+                <a16:creationId xmlns:a16="http://schemas.microsoft.com/office/drawing/2014/main" id="{8C677106-D806-4278-B6CF-CA4090DBC276}"/>
               </a:ext>
             </a:extLst>
           </p:cNvPr>
@@ -2887,7 +2887,7 @@
           <p:cNvPr id="9" name="">
             <a:extLst xmlns:a="http://schemas.openxmlformats.org/drawingml/2006/main">
               <a:ext uri="{FF2B5EF4-FFF2-40B4-BE49-F238E27FC236}">
-                <a16:creationId xmlns:a16="http://schemas.microsoft.com/office/drawing/2014/main" id="{BB7ECAD3-FA32-4EBC-86E0-8E5A2CE61D93}"/>
+                <a16:creationId xmlns:a16="http://schemas.microsoft.com/office/drawing/2014/main" id="{45566029-AF47-4829-96FC-9AE250E0A490}"/>
               </a:ext>
             </a:extLst>
           </p:cNvPr>
@@ -2922,7 +2922,7 @@
           <p:cNvPr id="10" name="">
             <a:extLst xmlns:a="http://schemas.openxmlformats.org/drawingml/2006/main">
               <a:ext uri="{FF2B5EF4-FFF2-40B4-BE49-F238E27FC236}">
-                <a16:creationId xmlns:a16="http://schemas.microsoft.com/office/drawing/2014/main" id="{176F5FE8-88D1-4D26-9962-658B9BBDC5B5}"/>
+                <a16:creationId xmlns:a16="http://schemas.microsoft.com/office/drawing/2014/main" id="{2677D569-DF60-481E-9ABC-82C0CA099E02}"/>
               </a:ext>
             </a:extLst>
           </p:cNvPr>
@@ -2980,7 +2980,7 @@
           <p:cNvPr id="11" name="">
             <a:extLst xmlns:a="http://schemas.openxmlformats.org/drawingml/2006/main">
               <a:ext uri="{FF2B5EF4-FFF2-40B4-BE49-F238E27FC236}">
-                <a16:creationId xmlns:a16="http://schemas.microsoft.com/office/drawing/2014/main" id="{2F924984-6AD7-4150-9F86-71E6CDE2EE36}"/>
+                <a16:creationId xmlns:a16="http://schemas.microsoft.com/office/drawing/2014/main" id="{92BCFD1E-F98B-4389-863D-EB88C7242C9F}"/>
               </a:ext>
             </a:extLst>
           </p:cNvPr>
@@ -3038,7 +3038,7 @@
           <p:cNvPr id="12" name="">
             <a:extLst xmlns:a="http://schemas.openxmlformats.org/drawingml/2006/main">
               <a:ext uri="{FF2B5EF4-FFF2-40B4-BE49-F238E27FC236}">
-                <a16:creationId xmlns:a16="http://schemas.microsoft.com/office/drawing/2014/main" id="{FC05E88B-45D2-4D56-B130-0D1D2DA8DEC7}"/>
+                <a16:creationId xmlns:a16="http://schemas.microsoft.com/office/drawing/2014/main" id="{A8A07F80-FE02-4932-BE65-FDD5D0262AE9}"/>
               </a:ext>
             </a:extLst>
           </p:cNvPr>
@@ -3073,7 +3073,7 @@
           <p:cNvPr id="13" name="">
             <a:extLst xmlns:a="http://schemas.openxmlformats.org/drawingml/2006/main">
               <a:ext uri="{FF2B5EF4-FFF2-40B4-BE49-F238E27FC236}">
-                <a16:creationId xmlns:a16="http://schemas.microsoft.com/office/drawing/2014/main" id="{F14C7E04-C7B3-402C-BB3B-99BAB6D4B102}"/>
+                <a16:creationId xmlns:a16="http://schemas.microsoft.com/office/drawing/2014/main" id="{D60C49F8-F268-4B92-B50F-88DD0B55C020}"/>
               </a:ext>
             </a:extLst>
           </p:cNvPr>
@@ -3131,7 +3131,7 @@
           <p:cNvPr id="14" name="">
             <a:extLst xmlns:a="http://schemas.openxmlformats.org/drawingml/2006/main">
               <a:ext uri="{FF2B5EF4-FFF2-40B4-BE49-F238E27FC236}">
-                <a16:creationId xmlns:a16="http://schemas.microsoft.com/office/drawing/2014/main" id="{4280BE7F-0830-4800-83F9-B7567EBA055A}"/>
+                <a16:creationId xmlns:a16="http://schemas.microsoft.com/office/drawing/2014/main" id="{C2A63D60-DF23-4650-B4EA-E1EAFF95C591}"/>
               </a:ext>
             </a:extLst>
           </p:cNvPr>
@@ -3189,7 +3189,7 @@
           <p:cNvPr id="15" name="">
             <a:extLst xmlns:a="http://schemas.openxmlformats.org/drawingml/2006/main">
               <a:ext uri="{FF2B5EF4-FFF2-40B4-BE49-F238E27FC236}">
-                <a16:creationId xmlns:a16="http://schemas.microsoft.com/office/drawing/2014/main" id="{72111986-A7C1-4CC0-99D8-C0D5B9740882}"/>
+                <a16:creationId xmlns:a16="http://schemas.microsoft.com/office/drawing/2014/main" id="{AC216969-EE89-4C7B-9FA0-1FF492DA9E69}"/>
               </a:ext>
             </a:extLst>
           </p:cNvPr>
@@ -3224,7 +3224,7 @@
           <p:cNvPr id="16" name="">
             <a:extLst xmlns:a="http://schemas.openxmlformats.org/drawingml/2006/main">
               <a:ext uri="{FF2B5EF4-FFF2-40B4-BE49-F238E27FC236}">
-                <a16:creationId xmlns:a16="http://schemas.microsoft.com/office/drawing/2014/main" id="{9A66E712-94C0-486D-BB5C-DC09306BF5A9}"/>
+                <a16:creationId xmlns:a16="http://schemas.microsoft.com/office/drawing/2014/main" id="{1A5303CE-1409-4E79-B111-B9C212A90742}"/>
               </a:ext>
             </a:extLst>
           </p:cNvPr>
@@ -3282,7 +3282,7 @@
           <p:cNvPr id="17" name="">
             <a:extLst xmlns:a="http://schemas.openxmlformats.org/drawingml/2006/main">
               <a:ext uri="{FF2B5EF4-FFF2-40B4-BE49-F238E27FC236}">
-                <a16:creationId xmlns:a16="http://schemas.microsoft.com/office/drawing/2014/main" id="{2AAF2E8D-B3BB-4F32-AE2C-BA41C14A48B9}"/>
+                <a16:creationId xmlns:a16="http://schemas.microsoft.com/office/drawing/2014/main" id="{5EE3BBEE-AA32-4FB7-96FE-42FEABC37A7B}"/>
               </a:ext>
             </a:extLst>
           </p:cNvPr>
@@ -3340,7 +3340,7 @@
           <p:cNvPr id="18" name="">
             <a:extLst xmlns:a="http://schemas.openxmlformats.org/drawingml/2006/main">
               <a:ext uri="{FF2B5EF4-FFF2-40B4-BE49-F238E27FC236}">
-                <a16:creationId xmlns:a16="http://schemas.microsoft.com/office/drawing/2014/main" id="{21F227A8-45A4-4220-A84B-B0EFC3C700C1}"/>
+                <a16:creationId xmlns:a16="http://schemas.microsoft.com/office/drawing/2014/main" id="{9CBBA7FF-397D-46B6-86F1-E98E474360D3}"/>
               </a:ext>
             </a:extLst>
           </p:cNvPr>
@@ -3375,7 +3375,7 @@
           <p:cNvPr id="19" name="">
             <a:extLst xmlns:a="http://schemas.openxmlformats.org/drawingml/2006/main">
               <a:ext uri="{FF2B5EF4-FFF2-40B4-BE49-F238E27FC236}">
-                <a16:creationId xmlns:a16="http://schemas.microsoft.com/office/drawing/2014/main" id="{918416F5-7001-4565-9906-30988BD7476B}"/>
+                <a16:creationId xmlns:a16="http://schemas.microsoft.com/office/drawing/2014/main" id="{CF375CFD-10BD-4A15-BAFE-0F2B44CEF6DD}"/>
               </a:ext>
             </a:extLst>
           </p:cNvPr>
@@ -3433,7 +3433,7 @@
           <p:cNvPr id="20" name="">
             <a:extLst xmlns:a="http://schemas.openxmlformats.org/drawingml/2006/main">
               <a:ext uri="{FF2B5EF4-FFF2-40B4-BE49-F238E27FC236}">
-                <a16:creationId xmlns:a16="http://schemas.microsoft.com/office/drawing/2014/main" id="{8126211E-FFF3-4BBA-B4BC-F6469ADC4FDF}"/>
+                <a16:creationId xmlns:a16="http://schemas.microsoft.com/office/drawing/2014/main" id="{5D657EEB-A022-4298-8171-13682F034BF9}"/>
               </a:ext>
             </a:extLst>
           </p:cNvPr>
@@ -3491,7 +3491,7 @@
           <p:cNvPr id="21" name="">
             <a:extLst xmlns:a="http://schemas.openxmlformats.org/drawingml/2006/main">
               <a:ext uri="{FF2B5EF4-FFF2-40B4-BE49-F238E27FC236}">
-                <a16:creationId xmlns:a16="http://schemas.microsoft.com/office/drawing/2014/main" id="{3F8C0A53-EDFC-4B25-979D-B1C786D0FFE9}"/>
+                <a16:creationId xmlns:a16="http://schemas.microsoft.com/office/drawing/2014/main" id="{7BC15757-E8BF-4664-A18C-E1F9B4AA03AA}"/>
               </a:ext>
             </a:extLst>
           </p:cNvPr>
@@ -3526,7 +3526,7 @@
           <p:cNvPr id="22" name="">
             <a:extLst xmlns:a="http://schemas.openxmlformats.org/drawingml/2006/main">
               <a:ext uri="{FF2B5EF4-FFF2-40B4-BE49-F238E27FC236}">
-                <a16:creationId xmlns:a16="http://schemas.microsoft.com/office/drawing/2014/main" id="{2E9A7540-C86D-42BF-B849-FEC5B07E145D}"/>
+                <a16:creationId xmlns:a16="http://schemas.microsoft.com/office/drawing/2014/main" id="{93568B4E-FDD7-4546-BAB7-4057E30ED711}"/>
               </a:ext>
             </a:extLst>
           </p:cNvPr>
@@ -3584,7 +3584,7 @@
           <p:cNvPr id="23" name="">
             <a:extLst xmlns:a="http://schemas.openxmlformats.org/drawingml/2006/main">
               <a:ext uri="{FF2B5EF4-FFF2-40B4-BE49-F238E27FC236}">
-                <a16:creationId xmlns:a16="http://schemas.microsoft.com/office/drawing/2014/main" id="{9A0E9444-0A7B-4231-877C-2B6B68742325}"/>
+                <a16:creationId xmlns:a16="http://schemas.microsoft.com/office/drawing/2014/main" id="{CCF4CAF9-629E-4DD8-B9C5-02197A6AEEB2}"/>
               </a:ext>
             </a:extLst>
           </p:cNvPr>
@@ -3642,7 +3642,7 @@
           <p:cNvPr id="24" name="">
             <a:extLst xmlns:a="http://schemas.openxmlformats.org/drawingml/2006/main">
               <a:ext uri="{FF2B5EF4-FFF2-40B4-BE49-F238E27FC236}">
-                <a16:creationId xmlns:a16="http://schemas.microsoft.com/office/drawing/2014/main" id="{073A75C0-7E0A-4580-8002-4A1A239FB834}"/>
+                <a16:creationId xmlns:a16="http://schemas.microsoft.com/office/drawing/2014/main" id="{6D599E53-88CB-4326-A6D0-ADCA9362D619}"/>
               </a:ext>
             </a:extLst>
           </p:cNvPr>
@@ -3677,7 +3677,7 @@
           <p:cNvPr id="25" name="">
             <a:extLst xmlns:a="http://schemas.openxmlformats.org/drawingml/2006/main">
               <a:ext uri="{FF2B5EF4-FFF2-40B4-BE49-F238E27FC236}">
-                <a16:creationId xmlns:a16="http://schemas.microsoft.com/office/drawing/2014/main" id="{11842D1B-2A7B-4FA7-8FFF-F5F1E2993A29}"/>
+                <a16:creationId xmlns:a16="http://schemas.microsoft.com/office/drawing/2014/main" id="{350E37FC-B1F9-42EE-AE2E-503D4E39588C}"/>
               </a:ext>
             </a:extLst>
           </p:cNvPr>
@@ -3735,7 +3735,7 @@
           <p:cNvPr id="26" name="">
             <a:extLst xmlns:a="http://schemas.openxmlformats.org/drawingml/2006/main">
               <a:ext uri="{FF2B5EF4-FFF2-40B4-BE49-F238E27FC236}">
-                <a16:creationId xmlns:a16="http://schemas.microsoft.com/office/drawing/2014/main" id="{D5D56FB8-6B9D-4905-9096-CAAE58267E79}"/>
+                <a16:creationId xmlns:a16="http://schemas.microsoft.com/office/drawing/2014/main" id="{0FCCB714-CFF5-4F7A-8046-668AB5DA640C}"/>
               </a:ext>
             </a:extLst>
           </p:cNvPr>
@@ -3793,7 +3793,7 @@
           <p:cNvPr id="27" name="">
             <a:extLst xmlns:a="http://schemas.openxmlformats.org/drawingml/2006/main">
               <a:ext uri="{FF2B5EF4-FFF2-40B4-BE49-F238E27FC236}">
-                <a16:creationId xmlns:a16="http://schemas.microsoft.com/office/drawing/2014/main" id="{1870DA0B-8BC4-4C19-A9C0-71B2ADB5D03D}"/>
+                <a16:creationId xmlns:a16="http://schemas.microsoft.com/office/drawing/2014/main" id="{6D20D34C-CAF3-4B8B-AF28-70A1CC5B05E3}"/>
               </a:ext>
             </a:extLst>
           </p:cNvPr>
@@ -3828,7 +3828,7 @@
           <p:cNvPr id="28" name="">
             <a:extLst xmlns:a="http://schemas.openxmlformats.org/drawingml/2006/main">
               <a:ext uri="{FF2B5EF4-FFF2-40B4-BE49-F238E27FC236}">
-                <a16:creationId xmlns:a16="http://schemas.microsoft.com/office/drawing/2014/main" id="{C1FF496D-27BD-4143-9096-3171D7B86FD5}"/>
+                <a16:creationId xmlns:a16="http://schemas.microsoft.com/office/drawing/2014/main" id="{9725991E-1E4B-4006-ABDD-112369A9CA7B}"/>
               </a:ext>
             </a:extLst>
           </p:cNvPr>
@@ -3886,7 +3886,7 @@
           <p:cNvPr id="29" name="">
             <a:extLst xmlns:a="http://schemas.openxmlformats.org/drawingml/2006/main">
               <a:ext uri="{FF2B5EF4-FFF2-40B4-BE49-F238E27FC236}">
-                <a16:creationId xmlns:a16="http://schemas.microsoft.com/office/drawing/2014/main" id="{7CBA93C2-8447-44BF-A5E3-D9275A2D46FA}"/>
+                <a16:creationId xmlns:a16="http://schemas.microsoft.com/office/drawing/2014/main" id="{178ED2A7-C80D-4024-9F72-CFAF240B048E}"/>
               </a:ext>
             </a:extLst>
           </p:cNvPr>
@@ -3944,7 +3944,7 @@
           <p:cNvPr id="30" name="">
             <a:extLst xmlns:a="http://schemas.openxmlformats.org/drawingml/2006/main">
               <a:ext uri="{FF2B5EF4-FFF2-40B4-BE49-F238E27FC236}">
-                <a16:creationId xmlns:a16="http://schemas.microsoft.com/office/drawing/2014/main" id="{AD41562C-554D-4873-BFE1-CC3C1DF9F85B}"/>
+                <a16:creationId xmlns:a16="http://schemas.microsoft.com/office/drawing/2014/main" id="{FC380314-9E10-4047-935F-D11BD093D0E5}"/>
               </a:ext>
             </a:extLst>
           </p:cNvPr>
@@ -3979,7 +3979,7 @@
           <p:cNvPr id="31" name="">
             <a:extLst xmlns:a="http://schemas.openxmlformats.org/drawingml/2006/main">
               <a:ext uri="{FF2B5EF4-FFF2-40B4-BE49-F238E27FC236}">
-                <a16:creationId xmlns:a16="http://schemas.microsoft.com/office/drawing/2014/main" id="{7EB5CC3D-56BF-4C7C-BCE8-56BDEE0BEC5C}"/>
+                <a16:creationId xmlns:a16="http://schemas.microsoft.com/office/drawing/2014/main" id="{3B7B67F8-4D1C-4DE5-AD8B-34D24702076E}"/>
               </a:ext>
             </a:extLst>
           </p:cNvPr>
@@ -4037,7 +4037,7 @@
           <p:cNvPr id="32" name="">
             <a:extLst xmlns:a="http://schemas.openxmlformats.org/drawingml/2006/main">
               <a:ext uri="{FF2B5EF4-FFF2-40B4-BE49-F238E27FC236}">
-                <a16:creationId xmlns:a16="http://schemas.microsoft.com/office/drawing/2014/main" id="{F9CFDF23-AC59-4478-ADDE-5BFF6EFAC42F}"/>
+                <a16:creationId xmlns:a16="http://schemas.microsoft.com/office/drawing/2014/main" id="{E6AB84D9-775C-4E3D-92DF-336E7FD136D7}"/>
               </a:ext>
             </a:extLst>
           </p:cNvPr>
@@ -4095,7 +4095,7 @@
           <p:cNvPr id="33" name="">
             <a:extLst xmlns:a="http://schemas.openxmlformats.org/drawingml/2006/main">
               <a:ext uri="{FF2B5EF4-FFF2-40B4-BE49-F238E27FC236}">
-                <a16:creationId xmlns:a16="http://schemas.microsoft.com/office/drawing/2014/main" id="{C9502A87-83B0-4861-B64E-4411B2585B1E}"/>
+                <a16:creationId xmlns:a16="http://schemas.microsoft.com/office/drawing/2014/main" id="{C4CE7BAA-8C59-4ADD-9BE7-0B04405103A1}"/>
               </a:ext>
             </a:extLst>
           </p:cNvPr>
@@ -4130,7 +4130,7 @@
           <p:cNvPr id="34" name="">
             <a:extLst xmlns:a="http://schemas.openxmlformats.org/drawingml/2006/main">
               <a:ext uri="{FF2B5EF4-FFF2-40B4-BE49-F238E27FC236}">
-                <a16:creationId xmlns:a16="http://schemas.microsoft.com/office/drawing/2014/main" id="{9D2D7D5F-D3B4-4C6A-813B-BD4E81D5BB17}"/>
+                <a16:creationId xmlns:a16="http://schemas.microsoft.com/office/drawing/2014/main" id="{E7343AE9-B332-44DC-AB31-E57EB3148D3E}"/>
               </a:ext>
             </a:extLst>
           </p:cNvPr>
@@ -4188,7 +4188,7 @@
           <p:cNvPr id="35" name="">
             <a:extLst xmlns:a="http://schemas.openxmlformats.org/drawingml/2006/main">
               <a:ext uri="{FF2B5EF4-FFF2-40B4-BE49-F238E27FC236}">
-                <a16:creationId xmlns:a16="http://schemas.microsoft.com/office/drawing/2014/main" id="{45692BBB-6E6D-4D82-B4A7-223DE11FC669}"/>
+                <a16:creationId xmlns:a16="http://schemas.microsoft.com/office/drawing/2014/main" id="{C8430C3C-B93E-4D7F-ACB5-CE966A9CB830}"/>
               </a:ext>
             </a:extLst>
           </p:cNvPr>
@@ -4246,7 +4246,7 @@
           <p:cNvPr id="36" name="">
             <a:extLst xmlns:a="http://schemas.openxmlformats.org/drawingml/2006/main">
               <a:ext uri="{FF2B5EF4-FFF2-40B4-BE49-F238E27FC236}">
-                <a16:creationId xmlns:a16="http://schemas.microsoft.com/office/drawing/2014/main" id="{FDAD6A17-7DA9-4EB6-BC2C-EB0074211EEC}"/>
+                <a16:creationId xmlns:a16="http://schemas.microsoft.com/office/drawing/2014/main" id="{EA605EE9-417A-4F5E-B616-A81857DAFF05}"/>
               </a:ext>
             </a:extLst>
           </p:cNvPr>
@@ -4281,7 +4281,7 @@
           <p:cNvPr id="37" name="">
             <a:extLst xmlns:a="http://schemas.openxmlformats.org/drawingml/2006/main">
               <a:ext uri="{FF2B5EF4-FFF2-40B4-BE49-F238E27FC236}">
-                <a16:creationId xmlns:a16="http://schemas.microsoft.com/office/drawing/2014/main" id="{363A03B9-B262-4609-9273-BCD62354751E}"/>
+                <a16:creationId xmlns:a16="http://schemas.microsoft.com/office/drawing/2014/main" id="{9DEF167A-2212-4DEA-BD9D-73F1D9DA5527}"/>
               </a:ext>
             </a:extLst>
           </p:cNvPr>
@@ -4339,7 +4339,7 @@
           <p:cNvPr id="38" name="">
             <a:extLst xmlns:a="http://schemas.openxmlformats.org/drawingml/2006/main">
               <a:ext uri="{FF2B5EF4-FFF2-40B4-BE49-F238E27FC236}">
-                <a16:creationId xmlns:a16="http://schemas.microsoft.com/office/drawing/2014/main" id="{278B3841-C8A2-4545-B9AE-C9E82091C665}"/>
+                <a16:creationId xmlns:a16="http://schemas.microsoft.com/office/drawing/2014/main" id="{15EBAC1A-B63C-4CD9-AEFD-E704DFF30432}"/>
               </a:ext>
             </a:extLst>
           </p:cNvPr>
@@ -4397,7 +4397,7 @@
           <p:cNvPr id="39" name="">
             <a:extLst xmlns:a="http://schemas.openxmlformats.org/drawingml/2006/main">
               <a:ext uri="{FF2B5EF4-FFF2-40B4-BE49-F238E27FC236}">
-                <a16:creationId xmlns:a16="http://schemas.microsoft.com/office/drawing/2014/main" id="{BE13B039-25D6-4D24-9C23-9C48FD506781}"/>
+                <a16:creationId xmlns:a16="http://schemas.microsoft.com/office/drawing/2014/main" id="{18EEAA33-D6BC-4F3A-B8AB-4FB864CFF7AE}"/>
               </a:ext>
             </a:extLst>
           </p:cNvPr>
@@ -4453,7 +4453,7 @@
     </p:spTree>
     <p:extLst>
       <p:ext uri="{BB962C8B-B14F-4D97-AF65-F5344CB8AC3E}">
-        <p14:creationId xmlns:p14="http://schemas.microsoft.com/office/powerpoint/2010/main" val="1623904646"/>
+        <p14:creationId xmlns:p14="http://schemas.microsoft.com/office/powerpoint/2010/main" val="703427161"/>
       </p:ext>
     </p:extLst>
   </p:cSld>
@@ -4484,7 +4484,7 @@
           <p:cNvPr id="48" name="eyebrow-11">
             <a:extLst xmlns:a="http://schemas.openxmlformats.org/drawingml/2006/main">
               <a:ext uri="{FF2B5EF4-FFF2-40B4-BE49-F238E27FC236}">
-                <a16:creationId xmlns:a16="http://schemas.microsoft.com/office/drawing/2014/main" id="{97870316-F9F0-4C00-9281-FBF718D05661}"/>
+                <a16:creationId xmlns:a16="http://schemas.microsoft.com/office/drawing/2014/main" id="{38F04B61-CDB3-43ED-8570-A6F5EA532CDC}"/>
               </a:ext>
             </a:extLst>
           </p:cNvPr>
@@ -4542,7 +4542,7 @@
           <p:cNvPr id="2" name="title-11">
             <a:extLst xmlns:a="http://schemas.openxmlformats.org/drawingml/2006/main">
               <a:ext uri="{FF2B5EF4-FFF2-40B4-BE49-F238E27FC236}">
-                <a16:creationId xmlns:a16="http://schemas.microsoft.com/office/drawing/2014/main" id="{C23CE179-50E6-4CD4-9F4F-73D3852E853D}"/>
+                <a16:creationId xmlns:a16="http://schemas.microsoft.com/office/drawing/2014/main" id="{1222B7A1-8C76-4E2C-BB20-9A191AAF9CD6}"/>
               </a:ext>
             </a:extLst>
           </p:cNvPr>
@@ -4600,7 +4600,7 @@
           <p:cNvPr id="3" name="">
             <a:extLst xmlns:a="http://schemas.openxmlformats.org/drawingml/2006/main">
               <a:ext uri="{FF2B5EF4-FFF2-40B4-BE49-F238E27FC236}">
-                <a16:creationId xmlns:a16="http://schemas.microsoft.com/office/drawing/2014/main" id="{4B2E1046-28C9-4DE5-8EBA-476607C81124}"/>
+                <a16:creationId xmlns:a16="http://schemas.microsoft.com/office/drawing/2014/main" id="{0B63E35F-96EF-4B8A-BD4D-9BFA659D8581}"/>
               </a:ext>
             </a:extLst>
           </p:cNvPr>
@@ -4631,7 +4631,7 @@
           <p:cNvPr id="4" name="">
             <a:extLst xmlns:a="http://schemas.openxmlformats.org/drawingml/2006/main">
               <a:ext uri="{FF2B5EF4-FFF2-40B4-BE49-F238E27FC236}">
-                <a16:creationId xmlns:a16="http://schemas.microsoft.com/office/drawing/2014/main" id="{FC8B8F1B-E51C-4A24-9B8B-868D2C574587}"/>
+                <a16:creationId xmlns:a16="http://schemas.microsoft.com/office/drawing/2014/main" id="{7016594B-6D30-486D-83C8-4D2FCE004F48}"/>
               </a:ext>
             </a:extLst>
           </p:cNvPr>
@@ -4679,7 +4679,7 @@
                 <a:ea typeface="Aptos"/>
                 <a:cs typeface="Aptos"/>
               </a:rPr>
-              <a:t>BES v2.0 · Propuesta ejecutiva</a:t>
+              <a:t>BES v2.0 · Aprobado y liberado</a:t>
             </a:r>
           </a:p>
         </p:txBody>
@@ -4689,7 +4689,7 @@
           <p:cNvPr id="5" name="">
             <a:extLst xmlns:a="http://schemas.openxmlformats.org/drawingml/2006/main">
               <a:ext uri="{FF2B5EF4-FFF2-40B4-BE49-F238E27FC236}">
-                <a16:creationId xmlns:a16="http://schemas.microsoft.com/office/drawing/2014/main" id="{DA0BFD8E-22DE-497F-B30E-462A14A4B6EE}"/>
+                <a16:creationId xmlns:a16="http://schemas.microsoft.com/office/drawing/2014/main" id="{1000F55D-D620-4392-8C4F-1A5F85ADE90B}"/>
               </a:ext>
             </a:extLst>
           </p:cNvPr>
@@ -4747,7 +4747,7 @@
           <p:cNvPr id="6" name="">
             <a:extLst xmlns:a="http://schemas.openxmlformats.org/drawingml/2006/main">
               <a:ext uri="{FF2B5EF4-FFF2-40B4-BE49-F238E27FC236}">
-                <a16:creationId xmlns:a16="http://schemas.microsoft.com/office/drawing/2014/main" id="{10F72F11-4996-42A0-BF0F-AFD9735490DE}"/>
+                <a16:creationId xmlns:a16="http://schemas.microsoft.com/office/drawing/2014/main" id="{50C08CD1-B232-444B-92D6-5E7E7E30EE3A}"/>
               </a:ext>
             </a:extLst>
           </p:cNvPr>
@@ -4782,7 +4782,7 @@
           <p:cNvPr id="7" name="">
             <a:extLst xmlns:a="http://schemas.openxmlformats.org/drawingml/2006/main">
               <a:ext uri="{FF2B5EF4-FFF2-40B4-BE49-F238E27FC236}">
-                <a16:creationId xmlns:a16="http://schemas.microsoft.com/office/drawing/2014/main" id="{5F9ABEC6-B1F1-454A-A80E-E129FFD2EA1B}"/>
+                <a16:creationId xmlns:a16="http://schemas.microsoft.com/office/drawing/2014/main" id="{0F5E712E-87F8-43E0-9008-10D426DC8984}"/>
               </a:ext>
             </a:extLst>
           </p:cNvPr>
@@ -4840,7 +4840,7 @@
           <p:cNvPr id="8" name="">
             <a:extLst xmlns:a="http://schemas.openxmlformats.org/drawingml/2006/main">
               <a:ext uri="{FF2B5EF4-FFF2-40B4-BE49-F238E27FC236}">
-                <a16:creationId xmlns:a16="http://schemas.microsoft.com/office/drawing/2014/main" id="{C5FEB785-8FDD-4861-9143-AB81D4811857}"/>
+                <a16:creationId xmlns:a16="http://schemas.microsoft.com/office/drawing/2014/main" id="{5E2769AE-1BEC-44C9-8096-2CCAC7461BA2}"/>
               </a:ext>
             </a:extLst>
           </p:cNvPr>
@@ -4875,7 +4875,7 @@
           <p:cNvPr id="9" name="">
             <a:extLst xmlns:a="http://schemas.openxmlformats.org/drawingml/2006/main">
               <a:ext uri="{FF2B5EF4-FFF2-40B4-BE49-F238E27FC236}">
-                <a16:creationId xmlns:a16="http://schemas.microsoft.com/office/drawing/2014/main" id="{F0A78783-7569-4DD0-82AA-5EDBF4B5AB68}"/>
+                <a16:creationId xmlns:a16="http://schemas.microsoft.com/office/drawing/2014/main" id="{C2CDBB22-F9E0-460B-8443-6F9AB5C5F6A7}"/>
               </a:ext>
             </a:extLst>
           </p:cNvPr>
@@ -4933,7 +4933,7 @@
           <p:cNvPr id="10" name="">
             <a:extLst xmlns:a="http://schemas.openxmlformats.org/drawingml/2006/main">
               <a:ext uri="{FF2B5EF4-FFF2-40B4-BE49-F238E27FC236}">
-                <a16:creationId xmlns:a16="http://schemas.microsoft.com/office/drawing/2014/main" id="{0643DB68-F28F-4D92-94E4-C2EAABE89BC0}"/>
+                <a16:creationId xmlns:a16="http://schemas.microsoft.com/office/drawing/2014/main" id="{D7FDC6C0-1924-4476-976F-422A3DAFA45E}"/>
               </a:ext>
             </a:extLst>
           </p:cNvPr>
@@ -4991,7 +4991,7 @@
           <p:cNvPr id="11" name="">
             <a:extLst xmlns:a="http://schemas.openxmlformats.org/drawingml/2006/main">
               <a:ext uri="{FF2B5EF4-FFF2-40B4-BE49-F238E27FC236}">
-                <a16:creationId xmlns:a16="http://schemas.microsoft.com/office/drawing/2014/main" id="{D5A2BB38-AE02-4EF3-9A18-42203A594761}"/>
+                <a16:creationId xmlns:a16="http://schemas.microsoft.com/office/drawing/2014/main" id="{2E9C3FF6-ADCE-4319-9FAB-21CA78B4166E}"/>
               </a:ext>
             </a:extLst>
           </p:cNvPr>
@@ -5026,7 +5026,7 @@
           <p:cNvPr id="12" name="">
             <a:extLst xmlns:a="http://schemas.openxmlformats.org/drawingml/2006/main">
               <a:ext uri="{FF2B5EF4-FFF2-40B4-BE49-F238E27FC236}">
-                <a16:creationId xmlns:a16="http://schemas.microsoft.com/office/drawing/2014/main" id="{16149DCD-80C4-4CDC-A6FE-A6A5A730F145}"/>
+                <a16:creationId xmlns:a16="http://schemas.microsoft.com/office/drawing/2014/main" id="{1E6FEF34-7E6C-4E28-9720-44749D2435FC}"/>
               </a:ext>
             </a:extLst>
           </p:cNvPr>
@@ -5084,7 +5084,7 @@
           <p:cNvPr id="13" name="">
             <a:extLst xmlns:a="http://schemas.openxmlformats.org/drawingml/2006/main">
               <a:ext uri="{FF2B5EF4-FFF2-40B4-BE49-F238E27FC236}">
-                <a16:creationId xmlns:a16="http://schemas.microsoft.com/office/drawing/2014/main" id="{0404C6DB-1D6C-42AC-9EEA-17797ADF1042}"/>
+                <a16:creationId xmlns:a16="http://schemas.microsoft.com/office/drawing/2014/main" id="{98FE0A53-1054-4239-9706-B003F0C6A76E}"/>
               </a:ext>
             </a:extLst>
           </p:cNvPr>
@@ -5119,7 +5119,7 @@
           <p:cNvPr id="14" name="">
             <a:extLst xmlns:a="http://schemas.openxmlformats.org/drawingml/2006/main">
               <a:ext uri="{FF2B5EF4-FFF2-40B4-BE49-F238E27FC236}">
-                <a16:creationId xmlns:a16="http://schemas.microsoft.com/office/drawing/2014/main" id="{5BB5DDAC-342E-457B-9C90-F2E490B52B05}"/>
+                <a16:creationId xmlns:a16="http://schemas.microsoft.com/office/drawing/2014/main" id="{5CD9AD2B-3703-4903-AB5C-D038A8F4E434}"/>
               </a:ext>
             </a:extLst>
           </p:cNvPr>
@@ -5177,7 +5177,7 @@
           <p:cNvPr id="15" name="">
             <a:extLst xmlns:a="http://schemas.openxmlformats.org/drawingml/2006/main">
               <a:ext uri="{FF2B5EF4-FFF2-40B4-BE49-F238E27FC236}">
-                <a16:creationId xmlns:a16="http://schemas.microsoft.com/office/drawing/2014/main" id="{5FF970DD-63ED-4820-A0CC-3E232BED574A}"/>
+                <a16:creationId xmlns:a16="http://schemas.microsoft.com/office/drawing/2014/main" id="{6D033794-E504-4E50-A32D-DD78C91E4A35}"/>
               </a:ext>
             </a:extLst>
           </p:cNvPr>
@@ -5235,7 +5235,7 @@
           <p:cNvPr id="16" name="">
             <a:extLst xmlns:a="http://schemas.openxmlformats.org/drawingml/2006/main">
               <a:ext uri="{FF2B5EF4-FFF2-40B4-BE49-F238E27FC236}">
-                <a16:creationId xmlns:a16="http://schemas.microsoft.com/office/drawing/2014/main" id="{63044D43-3520-40A7-9FF0-385842FC8096}"/>
+                <a16:creationId xmlns:a16="http://schemas.microsoft.com/office/drawing/2014/main" id="{EBEBC7A3-697C-4BAF-8AB3-14F294C2562D}"/>
               </a:ext>
             </a:extLst>
           </p:cNvPr>
@@ -5270,7 +5270,7 @@
           <p:cNvPr id="17" name="">
             <a:extLst xmlns:a="http://schemas.openxmlformats.org/drawingml/2006/main">
               <a:ext uri="{FF2B5EF4-FFF2-40B4-BE49-F238E27FC236}">
-                <a16:creationId xmlns:a16="http://schemas.microsoft.com/office/drawing/2014/main" id="{3D51F15C-93C9-44A1-96EA-5780736138A4}"/>
+                <a16:creationId xmlns:a16="http://schemas.microsoft.com/office/drawing/2014/main" id="{55634AD7-8EB9-4744-9B6B-1D9045336289}"/>
               </a:ext>
             </a:extLst>
           </p:cNvPr>
@@ -5328,7 +5328,7 @@
           <p:cNvPr id="18" name="">
             <a:extLst xmlns:a="http://schemas.openxmlformats.org/drawingml/2006/main">
               <a:ext uri="{FF2B5EF4-FFF2-40B4-BE49-F238E27FC236}">
-                <a16:creationId xmlns:a16="http://schemas.microsoft.com/office/drawing/2014/main" id="{8B235B36-674A-4799-94A8-C99195544738}"/>
+                <a16:creationId xmlns:a16="http://schemas.microsoft.com/office/drawing/2014/main" id="{9387991B-B6FB-4AD2-B17D-0AB299184235}"/>
               </a:ext>
             </a:extLst>
           </p:cNvPr>
@@ -5363,7 +5363,7 @@
           <p:cNvPr id="19" name="">
             <a:extLst xmlns:a="http://schemas.openxmlformats.org/drawingml/2006/main">
               <a:ext uri="{FF2B5EF4-FFF2-40B4-BE49-F238E27FC236}">
-                <a16:creationId xmlns:a16="http://schemas.microsoft.com/office/drawing/2014/main" id="{A45666F4-94CD-46FB-9802-57B21F1E8E50}"/>
+                <a16:creationId xmlns:a16="http://schemas.microsoft.com/office/drawing/2014/main" id="{9E3ADD59-083E-4EF2-8892-59E30F716C30}"/>
               </a:ext>
             </a:extLst>
           </p:cNvPr>
@@ -5421,7 +5421,7 @@
           <p:cNvPr id="20" name="">
             <a:extLst xmlns:a="http://schemas.openxmlformats.org/drawingml/2006/main">
               <a:ext uri="{FF2B5EF4-FFF2-40B4-BE49-F238E27FC236}">
-                <a16:creationId xmlns:a16="http://schemas.microsoft.com/office/drawing/2014/main" id="{7FA33691-6389-4D76-BDCD-793DCCFC5A3D}"/>
+                <a16:creationId xmlns:a16="http://schemas.microsoft.com/office/drawing/2014/main" id="{EA3168D4-4BD1-40BD-B42C-237D5081C905}"/>
               </a:ext>
             </a:extLst>
           </p:cNvPr>
@@ -5479,7 +5479,7 @@
           <p:cNvPr id="21" name="">
             <a:extLst xmlns:a="http://schemas.openxmlformats.org/drawingml/2006/main">
               <a:ext uri="{FF2B5EF4-FFF2-40B4-BE49-F238E27FC236}">
-                <a16:creationId xmlns:a16="http://schemas.microsoft.com/office/drawing/2014/main" id="{C1A7E5B1-C8AB-4ACF-908E-DB157AEB5F5B}"/>
+                <a16:creationId xmlns:a16="http://schemas.microsoft.com/office/drawing/2014/main" id="{4153EEC2-93F4-4CFC-B79C-9DF1146EA057}"/>
               </a:ext>
             </a:extLst>
           </p:cNvPr>
@@ -5514,7 +5514,7 @@
           <p:cNvPr id="22" name="">
             <a:extLst xmlns:a="http://schemas.openxmlformats.org/drawingml/2006/main">
               <a:ext uri="{FF2B5EF4-FFF2-40B4-BE49-F238E27FC236}">
-                <a16:creationId xmlns:a16="http://schemas.microsoft.com/office/drawing/2014/main" id="{D4831528-99B2-4812-A37E-D3A1DE2556A7}"/>
+                <a16:creationId xmlns:a16="http://schemas.microsoft.com/office/drawing/2014/main" id="{03D66A55-D5AA-4713-B353-A609FB36A39B}"/>
               </a:ext>
             </a:extLst>
           </p:cNvPr>
@@ -5572,7 +5572,7 @@
           <p:cNvPr id="23" name="">
             <a:extLst xmlns:a="http://schemas.openxmlformats.org/drawingml/2006/main">
               <a:ext uri="{FF2B5EF4-FFF2-40B4-BE49-F238E27FC236}">
-                <a16:creationId xmlns:a16="http://schemas.microsoft.com/office/drawing/2014/main" id="{ABDEAE83-ACA6-4B40-BAD2-B8D834D487B9}"/>
+                <a16:creationId xmlns:a16="http://schemas.microsoft.com/office/drawing/2014/main" id="{F0932409-D18D-4DAF-8A41-23A699061AFC}"/>
               </a:ext>
             </a:extLst>
           </p:cNvPr>
@@ -5607,7 +5607,7 @@
           <p:cNvPr id="24" name="">
             <a:extLst xmlns:a="http://schemas.openxmlformats.org/drawingml/2006/main">
               <a:ext uri="{FF2B5EF4-FFF2-40B4-BE49-F238E27FC236}">
-                <a16:creationId xmlns:a16="http://schemas.microsoft.com/office/drawing/2014/main" id="{274A5825-A26C-442B-B87C-3EDE74C046DB}"/>
+                <a16:creationId xmlns:a16="http://schemas.microsoft.com/office/drawing/2014/main" id="{0288C341-9E49-49B9-8869-B5C47C07B707}"/>
               </a:ext>
             </a:extLst>
           </p:cNvPr>
@@ -5665,7 +5665,7 @@
           <p:cNvPr id="25" name="">
             <a:extLst xmlns:a="http://schemas.openxmlformats.org/drawingml/2006/main">
               <a:ext uri="{FF2B5EF4-FFF2-40B4-BE49-F238E27FC236}">
-                <a16:creationId xmlns:a16="http://schemas.microsoft.com/office/drawing/2014/main" id="{EED8B26E-9480-4E61-809A-D94C05FFB6E4}"/>
+                <a16:creationId xmlns:a16="http://schemas.microsoft.com/office/drawing/2014/main" id="{61ED2050-DD44-410A-8A1A-E45BF4573BBA}"/>
               </a:ext>
             </a:extLst>
           </p:cNvPr>
@@ -5723,7 +5723,7 @@
           <p:cNvPr id="26" name="">
             <a:extLst xmlns:a="http://schemas.openxmlformats.org/drawingml/2006/main">
               <a:ext uri="{FF2B5EF4-FFF2-40B4-BE49-F238E27FC236}">
-                <a16:creationId xmlns:a16="http://schemas.microsoft.com/office/drawing/2014/main" id="{16D83D09-A5EA-43F5-9B76-C2EE35803AA7}"/>
+                <a16:creationId xmlns:a16="http://schemas.microsoft.com/office/drawing/2014/main" id="{F41FF452-0BEE-4F30-B579-D451474D7F50}"/>
               </a:ext>
             </a:extLst>
           </p:cNvPr>
@@ -5758,7 +5758,7 @@
           <p:cNvPr id="27" name="">
             <a:extLst xmlns:a="http://schemas.openxmlformats.org/drawingml/2006/main">
               <a:ext uri="{FF2B5EF4-FFF2-40B4-BE49-F238E27FC236}">
-                <a16:creationId xmlns:a16="http://schemas.microsoft.com/office/drawing/2014/main" id="{9D1163B9-D443-4F52-927C-7EDF962BE392}"/>
+                <a16:creationId xmlns:a16="http://schemas.microsoft.com/office/drawing/2014/main" id="{CE12525D-26D1-424B-9E80-9D1E148BFB7E}"/>
               </a:ext>
             </a:extLst>
           </p:cNvPr>
@@ -5816,7 +5816,7 @@
           <p:cNvPr id="28" name="">
             <a:extLst xmlns:a="http://schemas.openxmlformats.org/drawingml/2006/main">
               <a:ext uri="{FF2B5EF4-FFF2-40B4-BE49-F238E27FC236}">
-                <a16:creationId xmlns:a16="http://schemas.microsoft.com/office/drawing/2014/main" id="{BF764FDC-1EFA-4173-8A53-12EDB6D1F1AA}"/>
+                <a16:creationId xmlns:a16="http://schemas.microsoft.com/office/drawing/2014/main" id="{E851F7EA-CC73-47B1-8852-927E502F5133}"/>
               </a:ext>
             </a:extLst>
           </p:cNvPr>
@@ -5851,7 +5851,7 @@
           <p:cNvPr id="29" name="">
             <a:extLst xmlns:a="http://schemas.openxmlformats.org/drawingml/2006/main">
               <a:ext uri="{FF2B5EF4-FFF2-40B4-BE49-F238E27FC236}">
-                <a16:creationId xmlns:a16="http://schemas.microsoft.com/office/drawing/2014/main" id="{684C3422-6F49-419C-8D0C-0B45AFA8D782}"/>
+                <a16:creationId xmlns:a16="http://schemas.microsoft.com/office/drawing/2014/main" id="{C9766D02-E412-4F6E-AB54-51714F502ACE}"/>
               </a:ext>
             </a:extLst>
           </p:cNvPr>
@@ -5909,7 +5909,7 @@
           <p:cNvPr id="30" name="">
             <a:extLst xmlns:a="http://schemas.openxmlformats.org/drawingml/2006/main">
               <a:ext uri="{FF2B5EF4-FFF2-40B4-BE49-F238E27FC236}">
-                <a16:creationId xmlns:a16="http://schemas.microsoft.com/office/drawing/2014/main" id="{EEA53527-6CA9-4DF2-8C05-DF3FC2B6B0E5}"/>
+                <a16:creationId xmlns:a16="http://schemas.microsoft.com/office/drawing/2014/main" id="{1EA30D6E-2548-461A-8B9C-19BC9B9F13C6}"/>
               </a:ext>
             </a:extLst>
           </p:cNvPr>
@@ -5967,7 +5967,7 @@
           <p:cNvPr id="31" name="">
             <a:extLst xmlns:a="http://schemas.openxmlformats.org/drawingml/2006/main">
               <a:ext uri="{FF2B5EF4-FFF2-40B4-BE49-F238E27FC236}">
-                <a16:creationId xmlns:a16="http://schemas.microsoft.com/office/drawing/2014/main" id="{D8B25203-C4B5-4295-8F70-2B242193F522}"/>
+                <a16:creationId xmlns:a16="http://schemas.microsoft.com/office/drawing/2014/main" id="{6C69B8E8-6E14-4941-9335-E67942BBE5EE}"/>
               </a:ext>
             </a:extLst>
           </p:cNvPr>
@@ -6002,7 +6002,7 @@
           <p:cNvPr id="32" name="">
             <a:extLst xmlns:a="http://schemas.openxmlformats.org/drawingml/2006/main">
               <a:ext uri="{FF2B5EF4-FFF2-40B4-BE49-F238E27FC236}">
-                <a16:creationId xmlns:a16="http://schemas.microsoft.com/office/drawing/2014/main" id="{F43EA815-2230-46CB-8FB0-A006333AECCD}"/>
+                <a16:creationId xmlns:a16="http://schemas.microsoft.com/office/drawing/2014/main" id="{C743EC65-2CBD-4986-B431-B0012A7B4D11}"/>
               </a:ext>
             </a:extLst>
           </p:cNvPr>
@@ -6060,7 +6060,7 @@
           <p:cNvPr id="33" name="">
             <a:extLst xmlns:a="http://schemas.openxmlformats.org/drawingml/2006/main">
               <a:ext uri="{FF2B5EF4-FFF2-40B4-BE49-F238E27FC236}">
-                <a16:creationId xmlns:a16="http://schemas.microsoft.com/office/drawing/2014/main" id="{994D37D8-FCFA-4132-A822-CED5C8B39C5E}"/>
+                <a16:creationId xmlns:a16="http://schemas.microsoft.com/office/drawing/2014/main" id="{EEA09F1E-76B2-4F60-B818-1DFC3D705153}"/>
               </a:ext>
             </a:extLst>
           </p:cNvPr>
@@ -6095,7 +6095,7 @@
           <p:cNvPr id="34" name="">
             <a:extLst xmlns:a="http://schemas.openxmlformats.org/drawingml/2006/main">
               <a:ext uri="{FF2B5EF4-FFF2-40B4-BE49-F238E27FC236}">
-                <a16:creationId xmlns:a16="http://schemas.microsoft.com/office/drawing/2014/main" id="{2930554B-D4DB-4310-A059-712254C0485A}"/>
+                <a16:creationId xmlns:a16="http://schemas.microsoft.com/office/drawing/2014/main" id="{31FB04D1-4281-4EE9-B3B6-C68DEE344304}"/>
               </a:ext>
             </a:extLst>
           </p:cNvPr>
@@ -6153,7 +6153,7 @@
           <p:cNvPr id="35" name="">
             <a:extLst xmlns:a="http://schemas.openxmlformats.org/drawingml/2006/main">
               <a:ext uri="{FF2B5EF4-FFF2-40B4-BE49-F238E27FC236}">
-                <a16:creationId xmlns:a16="http://schemas.microsoft.com/office/drawing/2014/main" id="{8FD85A41-1F6B-4F71-8A8D-50266CCA3861}"/>
+                <a16:creationId xmlns:a16="http://schemas.microsoft.com/office/drawing/2014/main" id="{BC737992-AC91-40CF-B1E5-A346212072EA}"/>
               </a:ext>
             </a:extLst>
           </p:cNvPr>
@@ -6211,7 +6211,7 @@
           <p:cNvPr id="36" name="">
             <a:extLst xmlns:a="http://schemas.openxmlformats.org/drawingml/2006/main">
               <a:ext uri="{FF2B5EF4-FFF2-40B4-BE49-F238E27FC236}">
-                <a16:creationId xmlns:a16="http://schemas.microsoft.com/office/drawing/2014/main" id="{9ED41B41-CEF7-4357-91C6-2696009169E6}"/>
+                <a16:creationId xmlns:a16="http://schemas.microsoft.com/office/drawing/2014/main" id="{4E996048-6E71-44B9-8D0A-FED599B3BF54}"/>
               </a:ext>
             </a:extLst>
           </p:cNvPr>
@@ -6246,7 +6246,7 @@
           <p:cNvPr id="37" name="">
             <a:extLst xmlns:a="http://schemas.openxmlformats.org/drawingml/2006/main">
               <a:ext uri="{FF2B5EF4-FFF2-40B4-BE49-F238E27FC236}">
-                <a16:creationId xmlns:a16="http://schemas.microsoft.com/office/drawing/2014/main" id="{493024CD-F6D7-40C8-BE07-E0F7CC6EAA41}"/>
+                <a16:creationId xmlns:a16="http://schemas.microsoft.com/office/drawing/2014/main" id="{E0205164-2524-4B8A-9D2B-C16A61921A9B}"/>
               </a:ext>
             </a:extLst>
           </p:cNvPr>
@@ -6304,7 +6304,7 @@
           <p:cNvPr id="38" name="">
             <a:extLst xmlns:a="http://schemas.openxmlformats.org/drawingml/2006/main">
               <a:ext uri="{FF2B5EF4-FFF2-40B4-BE49-F238E27FC236}">
-                <a16:creationId xmlns:a16="http://schemas.microsoft.com/office/drawing/2014/main" id="{A4376293-A5EF-4057-8335-9250D249E0F1}"/>
+                <a16:creationId xmlns:a16="http://schemas.microsoft.com/office/drawing/2014/main" id="{AA0C7A76-4C00-435A-886B-7BE547B8049F}"/>
               </a:ext>
             </a:extLst>
           </p:cNvPr>
@@ -6362,7 +6362,7 @@
           <p:cNvPr id="39" name="">
             <a:extLst xmlns:a="http://schemas.openxmlformats.org/drawingml/2006/main">
               <a:ext uri="{FF2B5EF4-FFF2-40B4-BE49-F238E27FC236}">
-                <a16:creationId xmlns:a16="http://schemas.microsoft.com/office/drawing/2014/main" id="{C4D3B464-F02E-4124-9A60-AD1B4F23931D}"/>
+                <a16:creationId xmlns:a16="http://schemas.microsoft.com/office/drawing/2014/main" id="{DC459871-293D-42A6-BA20-1263CFBDF184}"/>
               </a:ext>
             </a:extLst>
           </p:cNvPr>
@@ -6397,7 +6397,7 @@
           <p:cNvPr id="40" name="">
             <a:extLst xmlns:a="http://schemas.openxmlformats.org/drawingml/2006/main">
               <a:ext uri="{FF2B5EF4-FFF2-40B4-BE49-F238E27FC236}">
-                <a16:creationId xmlns:a16="http://schemas.microsoft.com/office/drawing/2014/main" id="{0007FF98-8022-4D02-9FE3-25B986880E2C}"/>
+                <a16:creationId xmlns:a16="http://schemas.microsoft.com/office/drawing/2014/main" id="{9FECEE7D-7144-4A60-AC16-FD2019955306}"/>
               </a:ext>
             </a:extLst>
           </p:cNvPr>
@@ -6455,7 +6455,7 @@
           <p:cNvPr id="41" name="">
             <a:extLst xmlns:a="http://schemas.openxmlformats.org/drawingml/2006/main">
               <a:ext uri="{FF2B5EF4-FFF2-40B4-BE49-F238E27FC236}">
-                <a16:creationId xmlns:a16="http://schemas.microsoft.com/office/drawing/2014/main" id="{0C021F2E-DA40-48E9-A235-FAFD5D6EFD54}"/>
+                <a16:creationId xmlns:a16="http://schemas.microsoft.com/office/drawing/2014/main" id="{295C57BF-DD48-479D-B2BD-A135E7740D7A}"/>
               </a:ext>
             </a:extLst>
           </p:cNvPr>
@@ -6513,7 +6513,7 @@
           <p:cNvPr id="42" name="">
             <a:extLst xmlns:a="http://schemas.openxmlformats.org/drawingml/2006/main">
               <a:ext uri="{FF2B5EF4-FFF2-40B4-BE49-F238E27FC236}">
-                <a16:creationId xmlns:a16="http://schemas.microsoft.com/office/drawing/2014/main" id="{3E9F9FA3-BD72-4D8D-91C5-32FB273EF7C6}"/>
+                <a16:creationId xmlns:a16="http://schemas.microsoft.com/office/drawing/2014/main" id="{AC083A0A-6E0F-4E9F-BCD1-316412F78806}"/>
               </a:ext>
             </a:extLst>
           </p:cNvPr>
@@ -6548,7 +6548,7 @@
           <p:cNvPr id="43" name="">
             <a:extLst xmlns:a="http://schemas.openxmlformats.org/drawingml/2006/main">
               <a:ext uri="{FF2B5EF4-FFF2-40B4-BE49-F238E27FC236}">
-                <a16:creationId xmlns:a16="http://schemas.microsoft.com/office/drawing/2014/main" id="{D9223EF6-2363-4CF0-9A6E-26C55980ECFD}"/>
+                <a16:creationId xmlns:a16="http://schemas.microsoft.com/office/drawing/2014/main" id="{0601E93E-DF71-479B-AE28-49156798A7DA}"/>
               </a:ext>
             </a:extLst>
           </p:cNvPr>
@@ -6606,7 +6606,7 @@
           <p:cNvPr id="44" name="">
             <a:extLst xmlns:a="http://schemas.openxmlformats.org/drawingml/2006/main">
               <a:ext uri="{FF2B5EF4-FFF2-40B4-BE49-F238E27FC236}">
-                <a16:creationId xmlns:a16="http://schemas.microsoft.com/office/drawing/2014/main" id="{FE50CE3F-4A8F-44ED-A011-0D3537841A19}"/>
+                <a16:creationId xmlns:a16="http://schemas.microsoft.com/office/drawing/2014/main" id="{FACDF2B2-4BD5-4E7B-B834-16F425883E48}"/>
               </a:ext>
             </a:extLst>
           </p:cNvPr>
@@ -6664,7 +6664,7 @@
           <p:cNvPr id="45" name="">
             <a:extLst xmlns:a="http://schemas.openxmlformats.org/drawingml/2006/main">
               <a:ext uri="{FF2B5EF4-FFF2-40B4-BE49-F238E27FC236}">
-                <a16:creationId xmlns:a16="http://schemas.microsoft.com/office/drawing/2014/main" id="{2E1C6C2E-450F-49D1-B595-5E7FEE608301}"/>
+                <a16:creationId xmlns:a16="http://schemas.microsoft.com/office/drawing/2014/main" id="{965CE2B5-D5C4-4910-BF5D-1B38DA51CCB1}"/>
               </a:ext>
             </a:extLst>
           </p:cNvPr>
@@ -6699,7 +6699,7 @@
           <p:cNvPr id="46" name="">
             <a:extLst xmlns:a="http://schemas.openxmlformats.org/drawingml/2006/main">
               <a:ext uri="{FF2B5EF4-FFF2-40B4-BE49-F238E27FC236}">
-                <a16:creationId xmlns:a16="http://schemas.microsoft.com/office/drawing/2014/main" id="{882DF489-1FB7-45C3-B24E-90085649AB7A}"/>
+                <a16:creationId xmlns:a16="http://schemas.microsoft.com/office/drawing/2014/main" id="{69F8665C-114B-44BC-8CEA-B25CEB5A7E8B}"/>
               </a:ext>
             </a:extLst>
           </p:cNvPr>
@@ -6757,7 +6757,7 @@
           <p:cNvPr id="47" name="">
             <a:extLst xmlns:a="http://schemas.openxmlformats.org/drawingml/2006/main">
               <a:ext uri="{FF2B5EF4-FFF2-40B4-BE49-F238E27FC236}">
-                <a16:creationId xmlns:a16="http://schemas.microsoft.com/office/drawing/2014/main" id="{4F5BC051-AAA6-4439-9423-00C9B81A72F4}"/>
+                <a16:creationId xmlns:a16="http://schemas.microsoft.com/office/drawing/2014/main" id="{7269E459-A8E7-40A7-8CE3-2FF87B502D26}"/>
               </a:ext>
             </a:extLst>
           </p:cNvPr>
@@ -6813,7 +6813,7 @@
     </p:spTree>
     <p:extLst>
       <p:ext uri="{BB962C8B-B14F-4D97-AF65-F5344CB8AC3E}">
-        <p14:creationId xmlns:p14="http://schemas.microsoft.com/office/powerpoint/2010/main" val="1295905662"/>
+        <p14:creationId xmlns:p14="http://schemas.microsoft.com/office/powerpoint/2010/main" val="554464545"/>
       </p:ext>
     </p:extLst>
   </p:cSld>
@@ -6844,7 +6844,7 @@
           <p:cNvPr id="44" name="eyebrow-12">
             <a:extLst xmlns:a="http://schemas.openxmlformats.org/drawingml/2006/main">
               <a:ext uri="{FF2B5EF4-FFF2-40B4-BE49-F238E27FC236}">
-                <a16:creationId xmlns:a16="http://schemas.microsoft.com/office/drawing/2014/main" id="{7865DD9C-F67B-46E5-801B-A2B560528771}"/>
+                <a16:creationId xmlns:a16="http://schemas.microsoft.com/office/drawing/2014/main" id="{918DA673-472E-4DFB-9906-0A272B37D231}"/>
               </a:ext>
             </a:extLst>
           </p:cNvPr>
@@ -6902,7 +6902,7 @@
           <p:cNvPr id="2" name="title-12">
             <a:extLst xmlns:a="http://schemas.openxmlformats.org/drawingml/2006/main">
               <a:ext uri="{FF2B5EF4-FFF2-40B4-BE49-F238E27FC236}">
-                <a16:creationId xmlns:a16="http://schemas.microsoft.com/office/drawing/2014/main" id="{5E3FF03A-D98F-47EA-B29D-CA78BF78B2C3}"/>
+                <a16:creationId xmlns:a16="http://schemas.microsoft.com/office/drawing/2014/main" id="{13D04C10-520B-4C53-85E2-C2C66696508C}"/>
               </a:ext>
             </a:extLst>
           </p:cNvPr>
@@ -6960,7 +6960,7 @@
           <p:cNvPr id="3" name="">
             <a:extLst xmlns:a="http://schemas.openxmlformats.org/drawingml/2006/main">
               <a:ext uri="{FF2B5EF4-FFF2-40B4-BE49-F238E27FC236}">
-                <a16:creationId xmlns:a16="http://schemas.microsoft.com/office/drawing/2014/main" id="{EC2AF6C4-2AD8-42F6-A048-BF6049A3F6BD}"/>
+                <a16:creationId xmlns:a16="http://schemas.microsoft.com/office/drawing/2014/main" id="{20613B8D-0D68-48F0-846E-7C5A5557D934}"/>
               </a:ext>
             </a:extLst>
           </p:cNvPr>
@@ -6991,7 +6991,7 @@
           <p:cNvPr id="4" name="">
             <a:extLst xmlns:a="http://schemas.openxmlformats.org/drawingml/2006/main">
               <a:ext uri="{FF2B5EF4-FFF2-40B4-BE49-F238E27FC236}">
-                <a16:creationId xmlns:a16="http://schemas.microsoft.com/office/drawing/2014/main" id="{3BBA0371-0C60-4D71-8D1A-BE036CB696E9}"/>
+                <a16:creationId xmlns:a16="http://schemas.microsoft.com/office/drawing/2014/main" id="{4A334AF9-21F1-49A0-9695-F2C4E54E8C4F}"/>
               </a:ext>
             </a:extLst>
           </p:cNvPr>
@@ -7039,7 +7039,7 @@
                 <a:ea typeface="Aptos"/>
                 <a:cs typeface="Aptos"/>
               </a:rPr>
-              <a:t>BES v2.0 · Propuesta ejecutiva</a:t>
+              <a:t>BES v2.0 · Aprobado y liberado</a:t>
             </a:r>
           </a:p>
         </p:txBody>
@@ -7049,7 +7049,7 @@
           <p:cNvPr id="5" name="">
             <a:extLst xmlns:a="http://schemas.openxmlformats.org/drawingml/2006/main">
               <a:ext uri="{FF2B5EF4-FFF2-40B4-BE49-F238E27FC236}">
-                <a16:creationId xmlns:a16="http://schemas.microsoft.com/office/drawing/2014/main" id="{096ED4D8-AA33-4677-A732-8FD047148406}"/>
+                <a16:creationId xmlns:a16="http://schemas.microsoft.com/office/drawing/2014/main" id="{3E2CF178-44C5-4D33-B451-2B1318C13CA6}"/>
               </a:ext>
             </a:extLst>
           </p:cNvPr>
@@ -7107,7 +7107,7 @@
           <p:cNvPr id="6" name="">
             <a:extLst xmlns:a="http://schemas.openxmlformats.org/drawingml/2006/main">
               <a:ext uri="{FF2B5EF4-FFF2-40B4-BE49-F238E27FC236}">
-                <a16:creationId xmlns:a16="http://schemas.microsoft.com/office/drawing/2014/main" id="{03BD566A-4915-4FDC-9364-07D6EE391A36}"/>
+                <a16:creationId xmlns:a16="http://schemas.microsoft.com/office/drawing/2014/main" id="{57ACF1F8-A6FD-42C0-9649-0FE780942EEF}"/>
               </a:ext>
             </a:extLst>
           </p:cNvPr>
@@ -7142,7 +7142,7 @@
           <p:cNvPr id="7" name="">
             <a:extLst xmlns:a="http://schemas.openxmlformats.org/drawingml/2006/main">
               <a:ext uri="{FF2B5EF4-FFF2-40B4-BE49-F238E27FC236}">
-                <a16:creationId xmlns:a16="http://schemas.microsoft.com/office/drawing/2014/main" id="{FE1BF5E6-97DF-46D1-88B2-55AD10F907B5}"/>
+                <a16:creationId xmlns:a16="http://schemas.microsoft.com/office/drawing/2014/main" id="{86F6054F-82BF-4AC1-AA6A-85FBE7B60ED2}"/>
               </a:ext>
             </a:extLst>
           </p:cNvPr>
@@ -7173,7 +7173,7 @@
           <p:cNvPr id="8" name="">
             <a:extLst xmlns:a="http://schemas.openxmlformats.org/drawingml/2006/main">
               <a:ext uri="{FF2B5EF4-FFF2-40B4-BE49-F238E27FC236}">
-                <a16:creationId xmlns:a16="http://schemas.microsoft.com/office/drawing/2014/main" id="{2A548BA3-34F0-4BB8-9EFC-44CBC175E7DF}"/>
+                <a16:creationId xmlns:a16="http://schemas.microsoft.com/office/drawing/2014/main" id="{EDF0C2F8-5265-4C48-ADFB-E919829801DA}"/>
               </a:ext>
             </a:extLst>
           </p:cNvPr>
@@ -7231,7 +7231,7 @@
           <p:cNvPr id="9" name="">
             <a:extLst xmlns:a="http://schemas.openxmlformats.org/drawingml/2006/main">
               <a:ext uri="{FF2B5EF4-FFF2-40B4-BE49-F238E27FC236}">
-                <a16:creationId xmlns:a16="http://schemas.microsoft.com/office/drawing/2014/main" id="{676CC487-450F-4048-94C7-B789CD5D5983}"/>
+                <a16:creationId xmlns:a16="http://schemas.microsoft.com/office/drawing/2014/main" id="{5596D5C7-5C32-40BF-AEC1-16DBDA89544F}"/>
               </a:ext>
             </a:extLst>
           </p:cNvPr>
@@ -7289,7 +7289,7 @@
           <p:cNvPr id="10" name="">
             <a:extLst xmlns:a="http://schemas.openxmlformats.org/drawingml/2006/main">
               <a:ext uri="{FF2B5EF4-FFF2-40B4-BE49-F238E27FC236}">
-                <a16:creationId xmlns:a16="http://schemas.microsoft.com/office/drawing/2014/main" id="{E0B10B32-4B37-4559-8945-B21CEA693315}"/>
+                <a16:creationId xmlns:a16="http://schemas.microsoft.com/office/drawing/2014/main" id="{45607D91-0D2C-4CE9-B5AD-8CBB5AFFBC30}"/>
               </a:ext>
             </a:extLst>
           </p:cNvPr>
@@ -7324,7 +7324,7 @@
           <p:cNvPr id="11" name="">
             <a:extLst xmlns:a="http://schemas.openxmlformats.org/drawingml/2006/main">
               <a:ext uri="{FF2B5EF4-FFF2-40B4-BE49-F238E27FC236}">
-                <a16:creationId xmlns:a16="http://schemas.microsoft.com/office/drawing/2014/main" id="{96EE5D1D-AE6A-47BC-AB88-17E17E921160}"/>
+                <a16:creationId xmlns:a16="http://schemas.microsoft.com/office/drawing/2014/main" id="{C7B3CF0A-2F2A-488A-9C4F-C045332CF163}"/>
               </a:ext>
             </a:extLst>
           </p:cNvPr>
@@ -7382,7 +7382,7 @@
           <p:cNvPr id="12" name="">
             <a:extLst xmlns:a="http://schemas.openxmlformats.org/drawingml/2006/main">
               <a:ext uri="{FF2B5EF4-FFF2-40B4-BE49-F238E27FC236}">
-                <a16:creationId xmlns:a16="http://schemas.microsoft.com/office/drawing/2014/main" id="{77ECCD07-46EA-4F50-9D29-D66E6CA4231B}"/>
+                <a16:creationId xmlns:a16="http://schemas.microsoft.com/office/drawing/2014/main" id="{E1D1007D-1CAE-44BE-9F32-CBCFE7EFE8DD}"/>
               </a:ext>
             </a:extLst>
           </p:cNvPr>
@@ -7417,7 +7417,7 @@
           <p:cNvPr id="13" name="">
             <a:extLst xmlns:a="http://schemas.openxmlformats.org/drawingml/2006/main">
               <a:ext uri="{FF2B5EF4-FFF2-40B4-BE49-F238E27FC236}">
-                <a16:creationId xmlns:a16="http://schemas.microsoft.com/office/drawing/2014/main" id="{C2BED5D8-346F-4A2F-ACE1-11318966F0F7}"/>
+                <a16:creationId xmlns:a16="http://schemas.microsoft.com/office/drawing/2014/main" id="{01CB4038-008C-46FE-B170-1789EDD08C94}"/>
               </a:ext>
             </a:extLst>
           </p:cNvPr>
@@ -7448,7 +7448,7 @@
           <p:cNvPr id="14" name="">
             <a:extLst xmlns:a="http://schemas.openxmlformats.org/drawingml/2006/main">
               <a:ext uri="{FF2B5EF4-FFF2-40B4-BE49-F238E27FC236}">
-                <a16:creationId xmlns:a16="http://schemas.microsoft.com/office/drawing/2014/main" id="{C437C30D-3765-49D2-8D21-EDD8AE4F9151}"/>
+                <a16:creationId xmlns:a16="http://schemas.microsoft.com/office/drawing/2014/main" id="{337879F0-2418-44E1-927A-7386CEEF7AC8}"/>
               </a:ext>
             </a:extLst>
           </p:cNvPr>
@@ -7506,7 +7506,7 @@
           <p:cNvPr id="15" name="">
             <a:extLst xmlns:a="http://schemas.openxmlformats.org/drawingml/2006/main">
               <a:ext uri="{FF2B5EF4-FFF2-40B4-BE49-F238E27FC236}">
-                <a16:creationId xmlns:a16="http://schemas.microsoft.com/office/drawing/2014/main" id="{5BAE337A-D9FC-4668-BF8C-8A238187681F}"/>
+                <a16:creationId xmlns:a16="http://schemas.microsoft.com/office/drawing/2014/main" id="{B46E8DC2-7FCD-41A3-890B-3DE73F51DD69}"/>
               </a:ext>
             </a:extLst>
           </p:cNvPr>
@@ -7564,7 +7564,7 @@
           <p:cNvPr id="16" name="">
             <a:extLst xmlns:a="http://schemas.openxmlformats.org/drawingml/2006/main">
               <a:ext uri="{FF2B5EF4-FFF2-40B4-BE49-F238E27FC236}">
-                <a16:creationId xmlns:a16="http://schemas.microsoft.com/office/drawing/2014/main" id="{83497573-212C-45EC-9A6E-E28353DB66A7}"/>
+                <a16:creationId xmlns:a16="http://schemas.microsoft.com/office/drawing/2014/main" id="{B0F635F2-64A2-4193-916A-E8C69A5443D8}"/>
               </a:ext>
             </a:extLst>
           </p:cNvPr>
@@ -7599,7 +7599,7 @@
           <p:cNvPr id="17" name="">
             <a:extLst xmlns:a="http://schemas.openxmlformats.org/drawingml/2006/main">
               <a:ext uri="{FF2B5EF4-FFF2-40B4-BE49-F238E27FC236}">
-                <a16:creationId xmlns:a16="http://schemas.microsoft.com/office/drawing/2014/main" id="{24C89791-22CD-434B-B3A4-CACCDE724C61}"/>
+                <a16:creationId xmlns:a16="http://schemas.microsoft.com/office/drawing/2014/main" id="{FC1A4A9B-3EF3-427A-92FE-1B0635E7644A}"/>
               </a:ext>
             </a:extLst>
           </p:cNvPr>
@@ -7657,7 +7657,7 @@
           <p:cNvPr id="18" name="">
             <a:extLst xmlns:a="http://schemas.openxmlformats.org/drawingml/2006/main">
               <a:ext uri="{FF2B5EF4-FFF2-40B4-BE49-F238E27FC236}">
-                <a16:creationId xmlns:a16="http://schemas.microsoft.com/office/drawing/2014/main" id="{A05FC2B0-97F1-4276-87AE-729C9991CE43}"/>
+                <a16:creationId xmlns:a16="http://schemas.microsoft.com/office/drawing/2014/main" id="{E0871DED-B83E-4FFA-B5B9-91E468185BF4}"/>
               </a:ext>
             </a:extLst>
           </p:cNvPr>
@@ -7692,7 +7692,7 @@
           <p:cNvPr id="19" name="">
             <a:extLst xmlns:a="http://schemas.openxmlformats.org/drawingml/2006/main">
               <a:ext uri="{FF2B5EF4-FFF2-40B4-BE49-F238E27FC236}">
-                <a16:creationId xmlns:a16="http://schemas.microsoft.com/office/drawing/2014/main" id="{B74433B1-037C-4554-B8CD-F31C582ECC07}"/>
+                <a16:creationId xmlns:a16="http://schemas.microsoft.com/office/drawing/2014/main" id="{04838554-6E6B-400E-A48E-1A0899E9F76A}"/>
               </a:ext>
             </a:extLst>
           </p:cNvPr>
@@ -7723,7 +7723,7 @@
           <p:cNvPr id="20" name="">
             <a:extLst xmlns:a="http://schemas.openxmlformats.org/drawingml/2006/main">
               <a:ext uri="{FF2B5EF4-FFF2-40B4-BE49-F238E27FC236}">
-                <a16:creationId xmlns:a16="http://schemas.microsoft.com/office/drawing/2014/main" id="{62A96A71-91BD-4F1E-9F13-53DEBC7C1703}"/>
+                <a16:creationId xmlns:a16="http://schemas.microsoft.com/office/drawing/2014/main" id="{944D09F3-33FA-4EE7-9486-0D70C9311F6F}"/>
               </a:ext>
             </a:extLst>
           </p:cNvPr>
@@ -7781,7 +7781,7 @@
           <p:cNvPr id="21" name="">
             <a:extLst xmlns:a="http://schemas.openxmlformats.org/drawingml/2006/main">
               <a:ext uri="{FF2B5EF4-FFF2-40B4-BE49-F238E27FC236}">
-                <a16:creationId xmlns:a16="http://schemas.microsoft.com/office/drawing/2014/main" id="{4A2D1B01-585C-41AE-BFF6-0B4DCEF9DB70}"/>
+                <a16:creationId xmlns:a16="http://schemas.microsoft.com/office/drawing/2014/main" id="{491949D8-B3E2-444D-A449-10A8B90B863D}"/>
               </a:ext>
             </a:extLst>
           </p:cNvPr>
@@ -7839,7 +7839,7 @@
           <p:cNvPr id="22" name="">
             <a:extLst xmlns:a="http://schemas.openxmlformats.org/drawingml/2006/main">
               <a:ext uri="{FF2B5EF4-FFF2-40B4-BE49-F238E27FC236}">
-                <a16:creationId xmlns:a16="http://schemas.microsoft.com/office/drawing/2014/main" id="{5A81AD8E-F4EB-4EE7-B3D0-4036339A26E6}"/>
+                <a16:creationId xmlns:a16="http://schemas.microsoft.com/office/drawing/2014/main" id="{3FE45659-DB93-47E4-A1BB-9FC2364178CF}"/>
               </a:ext>
             </a:extLst>
           </p:cNvPr>
@@ -7874,7 +7874,7 @@
           <p:cNvPr id="23" name="">
             <a:extLst xmlns:a="http://schemas.openxmlformats.org/drawingml/2006/main">
               <a:ext uri="{FF2B5EF4-FFF2-40B4-BE49-F238E27FC236}">
-                <a16:creationId xmlns:a16="http://schemas.microsoft.com/office/drawing/2014/main" id="{7931C357-E548-4638-A679-A4DD0D9C8D7A}"/>
+                <a16:creationId xmlns:a16="http://schemas.microsoft.com/office/drawing/2014/main" id="{F9D03F7A-925D-49F3-821C-7D41E3A83915}"/>
               </a:ext>
             </a:extLst>
           </p:cNvPr>
@@ -7932,7 +7932,7 @@
           <p:cNvPr id="24" name="">
             <a:extLst xmlns:a="http://schemas.openxmlformats.org/drawingml/2006/main">
               <a:ext uri="{FF2B5EF4-FFF2-40B4-BE49-F238E27FC236}">
-                <a16:creationId xmlns:a16="http://schemas.microsoft.com/office/drawing/2014/main" id="{2E9A9683-994A-4C37-99E9-7C5BC8A4C653}"/>
+                <a16:creationId xmlns:a16="http://schemas.microsoft.com/office/drawing/2014/main" id="{5FE46308-A1A6-4407-9D99-C0A1F524E824}"/>
               </a:ext>
             </a:extLst>
           </p:cNvPr>
@@ -7967,7 +7967,7 @@
           <p:cNvPr id="25" name="">
             <a:extLst xmlns:a="http://schemas.openxmlformats.org/drawingml/2006/main">
               <a:ext uri="{FF2B5EF4-FFF2-40B4-BE49-F238E27FC236}">
-                <a16:creationId xmlns:a16="http://schemas.microsoft.com/office/drawing/2014/main" id="{EE87A7F7-4FFA-46BA-BD3B-B231379A6859}"/>
+                <a16:creationId xmlns:a16="http://schemas.microsoft.com/office/drawing/2014/main" id="{63B966CB-75F9-41E6-966B-58C6DA15856E}"/>
               </a:ext>
             </a:extLst>
           </p:cNvPr>
@@ -7998,7 +7998,7 @@
           <p:cNvPr id="26" name="">
             <a:extLst xmlns:a="http://schemas.openxmlformats.org/drawingml/2006/main">
               <a:ext uri="{FF2B5EF4-FFF2-40B4-BE49-F238E27FC236}">
-                <a16:creationId xmlns:a16="http://schemas.microsoft.com/office/drawing/2014/main" id="{D7C3620B-4AA9-418D-A79F-314C717481F1}"/>
+                <a16:creationId xmlns:a16="http://schemas.microsoft.com/office/drawing/2014/main" id="{99104882-BA96-43C2-8D76-D7C39B822B47}"/>
               </a:ext>
             </a:extLst>
           </p:cNvPr>
@@ -8056,7 +8056,7 @@
           <p:cNvPr id="27" name="">
             <a:extLst xmlns:a="http://schemas.openxmlformats.org/drawingml/2006/main">
               <a:ext uri="{FF2B5EF4-FFF2-40B4-BE49-F238E27FC236}">
-                <a16:creationId xmlns:a16="http://schemas.microsoft.com/office/drawing/2014/main" id="{477299FD-1843-4724-A9AB-498B935089E6}"/>
+                <a16:creationId xmlns:a16="http://schemas.microsoft.com/office/drawing/2014/main" id="{BCAEA63B-577B-43DD-8B62-ACF34DCAA9B6}"/>
               </a:ext>
             </a:extLst>
           </p:cNvPr>
@@ -8114,7 +8114,7 @@
           <p:cNvPr id="28" name="">
             <a:extLst xmlns:a="http://schemas.openxmlformats.org/drawingml/2006/main">
               <a:ext uri="{FF2B5EF4-FFF2-40B4-BE49-F238E27FC236}">
-                <a16:creationId xmlns:a16="http://schemas.microsoft.com/office/drawing/2014/main" id="{6A28A09A-4EC4-424A-9622-AA499C8815DE}"/>
+                <a16:creationId xmlns:a16="http://schemas.microsoft.com/office/drawing/2014/main" id="{DC9325CC-6432-453D-9F6A-762427B321C6}"/>
               </a:ext>
             </a:extLst>
           </p:cNvPr>
@@ -8149,7 +8149,7 @@
           <p:cNvPr id="29" name="">
             <a:extLst xmlns:a="http://schemas.openxmlformats.org/drawingml/2006/main">
               <a:ext uri="{FF2B5EF4-FFF2-40B4-BE49-F238E27FC236}">
-                <a16:creationId xmlns:a16="http://schemas.microsoft.com/office/drawing/2014/main" id="{4A432439-9541-49BD-AF48-D2A0BC85340B}"/>
+                <a16:creationId xmlns:a16="http://schemas.microsoft.com/office/drawing/2014/main" id="{4D48E4A2-0E62-49A9-A7A7-62FB0D5CA199}"/>
               </a:ext>
             </a:extLst>
           </p:cNvPr>
@@ -8207,7 +8207,7 @@
           <p:cNvPr id="30" name="">
             <a:extLst xmlns:a="http://schemas.openxmlformats.org/drawingml/2006/main">
               <a:ext uri="{FF2B5EF4-FFF2-40B4-BE49-F238E27FC236}">
-                <a16:creationId xmlns:a16="http://schemas.microsoft.com/office/drawing/2014/main" id="{0FA0CCAC-8C6F-4FEA-80CB-4AABAE74272E}"/>
+                <a16:creationId xmlns:a16="http://schemas.microsoft.com/office/drawing/2014/main" id="{8F968BC7-B7DF-4D3D-BADD-F4EFF54F5A1A}"/>
               </a:ext>
             </a:extLst>
           </p:cNvPr>
@@ -8242,7 +8242,7 @@
           <p:cNvPr id="31" name="">
             <a:extLst xmlns:a="http://schemas.openxmlformats.org/drawingml/2006/main">
               <a:ext uri="{FF2B5EF4-FFF2-40B4-BE49-F238E27FC236}">
-                <a16:creationId xmlns:a16="http://schemas.microsoft.com/office/drawing/2014/main" id="{BB9CAF66-60FB-4F9A-AFE3-7848CE3BC5C9}"/>
+                <a16:creationId xmlns:a16="http://schemas.microsoft.com/office/drawing/2014/main" id="{D9F75670-0D78-4E89-AB17-98BA6FD916E0}"/>
               </a:ext>
             </a:extLst>
           </p:cNvPr>
@@ -8273,7 +8273,7 @@
           <p:cNvPr id="32" name="">
             <a:extLst xmlns:a="http://schemas.openxmlformats.org/drawingml/2006/main">
               <a:ext uri="{FF2B5EF4-FFF2-40B4-BE49-F238E27FC236}">
-                <a16:creationId xmlns:a16="http://schemas.microsoft.com/office/drawing/2014/main" id="{2C5B7CAA-045B-418B-8F28-71828D8B53E7}"/>
+                <a16:creationId xmlns:a16="http://schemas.microsoft.com/office/drawing/2014/main" id="{E81D9E17-37DC-48A2-88C0-BFD3862BC90B}"/>
               </a:ext>
             </a:extLst>
           </p:cNvPr>
@@ -8331,7 +8331,7 @@
           <p:cNvPr id="33" name="">
             <a:extLst xmlns:a="http://schemas.openxmlformats.org/drawingml/2006/main">
               <a:ext uri="{FF2B5EF4-FFF2-40B4-BE49-F238E27FC236}">
-                <a16:creationId xmlns:a16="http://schemas.microsoft.com/office/drawing/2014/main" id="{E7D764A1-62BE-4F53-9E7A-D7417E4AAEE1}"/>
+                <a16:creationId xmlns:a16="http://schemas.microsoft.com/office/drawing/2014/main" id="{4E649F31-0BFB-47CB-8AA6-9D004F58ADAC}"/>
               </a:ext>
             </a:extLst>
           </p:cNvPr>
@@ -8389,7 +8389,7 @@
           <p:cNvPr id="34" name="">
             <a:extLst xmlns:a="http://schemas.openxmlformats.org/drawingml/2006/main">
               <a:ext uri="{FF2B5EF4-FFF2-40B4-BE49-F238E27FC236}">
-                <a16:creationId xmlns:a16="http://schemas.microsoft.com/office/drawing/2014/main" id="{3A7DDED1-640A-4A6F-8BEC-B6A111486653}"/>
+                <a16:creationId xmlns:a16="http://schemas.microsoft.com/office/drawing/2014/main" id="{FE354E54-4BCA-480B-A45C-05E2F370D303}"/>
               </a:ext>
             </a:extLst>
           </p:cNvPr>
@@ -8424,7 +8424,7 @@
           <p:cNvPr id="35" name="">
             <a:extLst xmlns:a="http://schemas.openxmlformats.org/drawingml/2006/main">
               <a:ext uri="{FF2B5EF4-FFF2-40B4-BE49-F238E27FC236}">
-                <a16:creationId xmlns:a16="http://schemas.microsoft.com/office/drawing/2014/main" id="{54CAEF09-9A47-44EC-82C9-7AE0CC860920}"/>
+                <a16:creationId xmlns:a16="http://schemas.microsoft.com/office/drawing/2014/main" id="{4152DD25-50B7-4E78-9C8A-6DAEC331D36E}"/>
               </a:ext>
             </a:extLst>
           </p:cNvPr>
@@ -8482,7 +8482,7 @@
           <p:cNvPr id="36" name="">
             <a:extLst xmlns:a="http://schemas.openxmlformats.org/drawingml/2006/main">
               <a:ext uri="{FF2B5EF4-FFF2-40B4-BE49-F238E27FC236}">
-                <a16:creationId xmlns:a16="http://schemas.microsoft.com/office/drawing/2014/main" id="{8B2A0B79-2C2B-486A-949D-425F57E7BE45}"/>
+                <a16:creationId xmlns:a16="http://schemas.microsoft.com/office/drawing/2014/main" id="{F45A0503-6620-411A-A45B-FCAFA2B8B139}"/>
               </a:ext>
             </a:extLst>
           </p:cNvPr>
@@ -8517,7 +8517,7 @@
           <p:cNvPr id="37" name="">
             <a:extLst xmlns:a="http://schemas.openxmlformats.org/drawingml/2006/main">
               <a:ext uri="{FF2B5EF4-FFF2-40B4-BE49-F238E27FC236}">
-                <a16:creationId xmlns:a16="http://schemas.microsoft.com/office/drawing/2014/main" id="{FB4761AD-70D6-46A0-86C6-AB10121E6497}"/>
+                <a16:creationId xmlns:a16="http://schemas.microsoft.com/office/drawing/2014/main" id="{0C8375C3-A4C1-4ECE-9E6C-35A5962252F3}"/>
               </a:ext>
             </a:extLst>
           </p:cNvPr>
@@ -8548,7 +8548,7 @@
           <p:cNvPr id="38" name="">
             <a:extLst xmlns:a="http://schemas.openxmlformats.org/drawingml/2006/main">
               <a:ext uri="{FF2B5EF4-FFF2-40B4-BE49-F238E27FC236}">
-                <a16:creationId xmlns:a16="http://schemas.microsoft.com/office/drawing/2014/main" id="{29A337E3-EAE3-4EAE-9CAA-0298BFDBE9EB}"/>
+                <a16:creationId xmlns:a16="http://schemas.microsoft.com/office/drawing/2014/main" id="{01CD2039-EBBE-4BCD-8562-7EE9131CC0DF}"/>
               </a:ext>
             </a:extLst>
           </p:cNvPr>
@@ -8606,7 +8606,7 @@
           <p:cNvPr id="39" name="">
             <a:extLst xmlns:a="http://schemas.openxmlformats.org/drawingml/2006/main">
               <a:ext uri="{FF2B5EF4-FFF2-40B4-BE49-F238E27FC236}">
-                <a16:creationId xmlns:a16="http://schemas.microsoft.com/office/drawing/2014/main" id="{B327C0CF-3A0C-43E0-9A9A-8FDAC408E631}"/>
+                <a16:creationId xmlns:a16="http://schemas.microsoft.com/office/drawing/2014/main" id="{0595F231-CB7E-47E9-8C5C-2E096BBF9814}"/>
               </a:ext>
             </a:extLst>
           </p:cNvPr>
@@ -8664,7 +8664,7 @@
           <p:cNvPr id="40" name="">
             <a:extLst xmlns:a="http://schemas.openxmlformats.org/drawingml/2006/main">
               <a:ext uri="{FF2B5EF4-FFF2-40B4-BE49-F238E27FC236}">
-                <a16:creationId xmlns:a16="http://schemas.microsoft.com/office/drawing/2014/main" id="{738A2CC5-00E5-40AA-A7A7-12EA4574A3DA}"/>
+                <a16:creationId xmlns:a16="http://schemas.microsoft.com/office/drawing/2014/main" id="{4549DA6C-1CC0-47FB-AF66-A6064E2B85FE}"/>
               </a:ext>
             </a:extLst>
           </p:cNvPr>
@@ -8699,7 +8699,7 @@
           <p:cNvPr id="41" name="">
             <a:extLst xmlns:a="http://schemas.openxmlformats.org/drawingml/2006/main">
               <a:ext uri="{FF2B5EF4-FFF2-40B4-BE49-F238E27FC236}">
-                <a16:creationId xmlns:a16="http://schemas.microsoft.com/office/drawing/2014/main" id="{642B457C-D9AA-4A65-9E8D-5D1A33C8A6E0}"/>
+                <a16:creationId xmlns:a16="http://schemas.microsoft.com/office/drawing/2014/main" id="{C39EC9AE-1A50-4DCE-8D23-DB263BE73D1D}"/>
               </a:ext>
             </a:extLst>
           </p:cNvPr>
@@ -8757,7 +8757,7 @@
           <p:cNvPr id="42" name="">
             <a:extLst xmlns:a="http://schemas.openxmlformats.org/drawingml/2006/main">
               <a:ext uri="{FF2B5EF4-FFF2-40B4-BE49-F238E27FC236}">
-                <a16:creationId xmlns:a16="http://schemas.microsoft.com/office/drawing/2014/main" id="{2764E2AE-8F6B-4BDD-8B9F-22178BC854D3}"/>
+                <a16:creationId xmlns:a16="http://schemas.microsoft.com/office/drawing/2014/main" id="{67CE5EEA-AEFB-4AFD-A7FA-A71152427791}"/>
               </a:ext>
             </a:extLst>
           </p:cNvPr>
@@ -8792,7 +8792,7 @@
           <p:cNvPr id="43" name="">
             <a:extLst xmlns:a="http://schemas.openxmlformats.org/drawingml/2006/main">
               <a:ext uri="{FF2B5EF4-FFF2-40B4-BE49-F238E27FC236}">
-                <a16:creationId xmlns:a16="http://schemas.microsoft.com/office/drawing/2014/main" id="{BF1DC266-64FC-45A4-B088-275D6BBE765A}"/>
+                <a16:creationId xmlns:a16="http://schemas.microsoft.com/office/drawing/2014/main" id="{F565E554-7011-4972-8BD9-526BDB757FF9}"/>
               </a:ext>
             </a:extLst>
           </p:cNvPr>
@@ -8848,7 +8848,7 @@
     </p:spTree>
     <p:extLst>
       <p:ext uri="{BB962C8B-B14F-4D97-AF65-F5344CB8AC3E}">
-        <p14:creationId xmlns:p14="http://schemas.microsoft.com/office/powerpoint/2010/main" val="1971806639"/>
+        <p14:creationId xmlns:p14="http://schemas.microsoft.com/office/powerpoint/2010/main" val="1864699342"/>
       </p:ext>
     </p:extLst>
   </p:cSld>
@@ -8879,7 +8879,7 @@
           <p:cNvPr id="33" name="eyebrow-13">
             <a:extLst xmlns:a="http://schemas.openxmlformats.org/drawingml/2006/main">
               <a:ext uri="{FF2B5EF4-FFF2-40B4-BE49-F238E27FC236}">
-                <a16:creationId xmlns:a16="http://schemas.microsoft.com/office/drawing/2014/main" id="{F31E60E5-64D4-4282-AE32-DB1B3CE5D035}"/>
+                <a16:creationId xmlns:a16="http://schemas.microsoft.com/office/drawing/2014/main" id="{E5EDFBC1-23A9-43D7-BA32-745CA6C7E97E}"/>
               </a:ext>
             </a:extLst>
           </p:cNvPr>
@@ -8937,7 +8937,7 @@
           <p:cNvPr id="2" name="title-13">
             <a:extLst xmlns:a="http://schemas.openxmlformats.org/drawingml/2006/main">
               <a:ext uri="{FF2B5EF4-FFF2-40B4-BE49-F238E27FC236}">
-                <a16:creationId xmlns:a16="http://schemas.microsoft.com/office/drawing/2014/main" id="{F3D78D16-A394-4746-9D12-9EBAD1621F40}"/>
+                <a16:creationId xmlns:a16="http://schemas.microsoft.com/office/drawing/2014/main" id="{B7EE899E-09E4-447E-9ACE-249BBA040B9B}"/>
               </a:ext>
             </a:extLst>
           </p:cNvPr>
@@ -8995,7 +8995,7 @@
           <p:cNvPr id="3" name="">
             <a:extLst xmlns:a="http://schemas.openxmlformats.org/drawingml/2006/main">
               <a:ext uri="{FF2B5EF4-FFF2-40B4-BE49-F238E27FC236}">
-                <a16:creationId xmlns:a16="http://schemas.microsoft.com/office/drawing/2014/main" id="{5F5E2FC3-542C-42AE-A272-619EABC8EB8E}"/>
+                <a16:creationId xmlns:a16="http://schemas.microsoft.com/office/drawing/2014/main" id="{D0641BAA-5387-4CD2-91CB-BE7C9D59A9FE}"/>
               </a:ext>
             </a:extLst>
           </p:cNvPr>
@@ -9026,7 +9026,7 @@
           <p:cNvPr id="4" name="">
             <a:extLst xmlns:a="http://schemas.openxmlformats.org/drawingml/2006/main">
               <a:ext uri="{FF2B5EF4-FFF2-40B4-BE49-F238E27FC236}">
-                <a16:creationId xmlns:a16="http://schemas.microsoft.com/office/drawing/2014/main" id="{86410F20-07E3-4B69-BA94-A1C08496CBC6}"/>
+                <a16:creationId xmlns:a16="http://schemas.microsoft.com/office/drawing/2014/main" id="{08396F00-2574-41AA-9BC4-67E3ABFCA825}"/>
               </a:ext>
             </a:extLst>
           </p:cNvPr>
@@ -9074,7 +9074,7 @@
                 <a:ea typeface="Aptos"/>
                 <a:cs typeface="Aptos"/>
               </a:rPr>
-              <a:t>BES v2.0 · Propuesta ejecutiva</a:t>
+              <a:t>BES v2.0 · Aprobado y liberado</a:t>
             </a:r>
           </a:p>
         </p:txBody>
@@ -9084,7 +9084,7 @@
           <p:cNvPr id="5" name="">
             <a:extLst xmlns:a="http://schemas.openxmlformats.org/drawingml/2006/main">
               <a:ext uri="{FF2B5EF4-FFF2-40B4-BE49-F238E27FC236}">
-                <a16:creationId xmlns:a16="http://schemas.microsoft.com/office/drawing/2014/main" id="{14D4D844-AA35-4BB8-AEB1-77223B26CCFC}"/>
+                <a16:creationId xmlns:a16="http://schemas.microsoft.com/office/drawing/2014/main" id="{3C093FDD-375A-47A5-8662-D7ED8A733572}"/>
               </a:ext>
             </a:extLst>
           </p:cNvPr>
@@ -9142,7 +9142,7 @@
           <p:cNvPr id="6" name="">
             <a:extLst xmlns:a="http://schemas.openxmlformats.org/drawingml/2006/main">
               <a:ext uri="{FF2B5EF4-FFF2-40B4-BE49-F238E27FC236}">
-                <a16:creationId xmlns:a16="http://schemas.microsoft.com/office/drawing/2014/main" id="{B3ED4274-22DF-45CD-BA65-2571A43D9B94}"/>
+                <a16:creationId xmlns:a16="http://schemas.microsoft.com/office/drawing/2014/main" id="{95FFD511-56DD-44E8-B150-1D4BF0F4AD89}"/>
               </a:ext>
             </a:extLst>
           </p:cNvPr>
@@ -9177,7 +9177,7 @@
           <p:cNvPr id="7" name="">
             <a:extLst xmlns:a="http://schemas.openxmlformats.org/drawingml/2006/main">
               <a:ext uri="{FF2B5EF4-FFF2-40B4-BE49-F238E27FC236}">
-                <a16:creationId xmlns:a16="http://schemas.microsoft.com/office/drawing/2014/main" id="{8192E9C8-D9B2-4163-B7A7-4CD3ADF8A378}"/>
+                <a16:creationId xmlns:a16="http://schemas.microsoft.com/office/drawing/2014/main" id="{D9CA4BAD-5995-4A3D-A5EC-2F9475199020}"/>
               </a:ext>
             </a:extLst>
           </p:cNvPr>
@@ -9212,7 +9212,7 @@
           <p:cNvPr id="8" name="">
             <a:extLst xmlns:a="http://schemas.openxmlformats.org/drawingml/2006/main">
               <a:ext uri="{FF2B5EF4-FFF2-40B4-BE49-F238E27FC236}">
-                <a16:creationId xmlns:a16="http://schemas.microsoft.com/office/drawing/2014/main" id="{BD95DCE5-1B8E-413C-B72D-796D5DADF90D}"/>
+                <a16:creationId xmlns:a16="http://schemas.microsoft.com/office/drawing/2014/main" id="{8EA2B4E1-00B3-4205-B71D-65C9FE172144}"/>
               </a:ext>
             </a:extLst>
           </p:cNvPr>
@@ -9270,7 +9270,7 @@
           <p:cNvPr id="9" name="">
             <a:extLst xmlns:a="http://schemas.openxmlformats.org/drawingml/2006/main">
               <a:ext uri="{FF2B5EF4-FFF2-40B4-BE49-F238E27FC236}">
-                <a16:creationId xmlns:a16="http://schemas.microsoft.com/office/drawing/2014/main" id="{E5F7050B-09E1-4F59-BA0D-FCB17845A6FF}"/>
+                <a16:creationId xmlns:a16="http://schemas.microsoft.com/office/drawing/2014/main" id="{B80E4559-4315-46B9-9F8F-3A109E9770E7}"/>
               </a:ext>
             </a:extLst>
           </p:cNvPr>
@@ -9328,7 +9328,7 @@
           <p:cNvPr id="10" name="">
             <a:extLst xmlns:a="http://schemas.openxmlformats.org/drawingml/2006/main">
               <a:ext uri="{FF2B5EF4-FFF2-40B4-BE49-F238E27FC236}">
-                <a16:creationId xmlns:a16="http://schemas.microsoft.com/office/drawing/2014/main" id="{59B3FA55-22A1-409D-9743-49AACE9D9173}"/>
+                <a16:creationId xmlns:a16="http://schemas.microsoft.com/office/drawing/2014/main" id="{25F8BA91-21BD-4F5E-8EC7-CD96450B03EF}"/>
               </a:ext>
             </a:extLst>
           </p:cNvPr>
@@ -9376,7 +9376,7 @@
                 <a:ea typeface="Aptos"/>
                 <a:cs typeface="Aptos"/>
               </a:rPr>
-              <a:t>Aprobar arquitectura, dueños, RACI, índice y backlog</a:t>
+              <a:t>Formalizar dueños, RACI, índice y backlog; activar cadencia</a:t>
             </a:r>
           </a:p>
         </p:txBody>
@@ -9386,7 +9386,7 @@
           <p:cNvPr id="11" name="">
             <a:extLst xmlns:a="http://schemas.openxmlformats.org/drawingml/2006/main">
               <a:ext uri="{FF2B5EF4-FFF2-40B4-BE49-F238E27FC236}">
-                <a16:creationId xmlns:a16="http://schemas.microsoft.com/office/drawing/2014/main" id="{8B76086F-817D-497A-A367-934416B776B4}"/>
+                <a16:creationId xmlns:a16="http://schemas.microsoft.com/office/drawing/2014/main" id="{4B79B480-8D8A-43F7-91CF-7D4D77C94555}"/>
               </a:ext>
             </a:extLst>
           </p:cNvPr>
@@ -9417,7 +9417,7 @@
           <p:cNvPr id="12" name="">
             <a:extLst xmlns:a="http://schemas.openxmlformats.org/drawingml/2006/main">
               <a:ext uri="{FF2B5EF4-FFF2-40B4-BE49-F238E27FC236}">
-                <a16:creationId xmlns:a16="http://schemas.microsoft.com/office/drawing/2014/main" id="{8FD5C90F-E3C4-40F1-8644-BCBAB0F5D66E}"/>
+                <a16:creationId xmlns:a16="http://schemas.microsoft.com/office/drawing/2014/main" id="{D627F759-CF55-4674-AF66-50624EB4C8FF}"/>
               </a:ext>
             </a:extLst>
           </p:cNvPr>
@@ -9465,7 +9465,7 @@
                 <a:ea typeface="Aptos"/>
                 <a:cs typeface="Aptos"/>
               </a:rPr>
-              <a:t>PUERTA DE CONTROL</a:t>
+              <a:t>PUERTA 1 · RESPONSABLES</a:t>
             </a:r>
           </a:p>
         </p:txBody>
@@ -9475,7 +9475,7 @@
           <p:cNvPr id="13" name="">
             <a:extLst xmlns:a="http://schemas.openxmlformats.org/drawingml/2006/main">
               <a:ext uri="{FF2B5EF4-FFF2-40B4-BE49-F238E27FC236}">
-                <a16:creationId xmlns:a16="http://schemas.microsoft.com/office/drawing/2014/main" id="{3CAF9D23-7106-44B0-B725-FBF8213527D6}"/>
+                <a16:creationId xmlns:a16="http://schemas.microsoft.com/office/drawing/2014/main" id="{BD50A441-BDCF-40D9-994F-3D8CC7D24ADD}"/>
               </a:ext>
             </a:extLst>
           </p:cNvPr>
@@ -9523,7 +9523,7 @@
                 <a:ea typeface="Aptos"/>
                 <a:cs typeface="Aptos"/>
               </a:rPr>
-              <a:t>Dirección aprueba alcance y cadencia</a:t>
+              <a:t>Dirección confirma responsables</a:t>
             </a:r>
           </a:p>
         </p:txBody>
@@ -9533,7 +9533,7 @@
           <p:cNvPr id="14" name="">
             <a:extLst xmlns:a="http://schemas.openxmlformats.org/drawingml/2006/main">
               <a:ext uri="{FF2B5EF4-FFF2-40B4-BE49-F238E27FC236}">
-                <a16:creationId xmlns:a16="http://schemas.microsoft.com/office/drawing/2014/main" id="{34DE6EC2-39C1-4B45-8441-352634714715}"/>
+                <a16:creationId xmlns:a16="http://schemas.microsoft.com/office/drawing/2014/main" id="{D36C481C-0681-4344-8A28-165195BD1DB4}"/>
               </a:ext>
             </a:extLst>
           </p:cNvPr>
@@ -9568,7 +9568,7 @@
           <p:cNvPr id="15" name="">
             <a:extLst xmlns:a="http://schemas.openxmlformats.org/drawingml/2006/main">
               <a:ext uri="{FF2B5EF4-FFF2-40B4-BE49-F238E27FC236}">
-                <a16:creationId xmlns:a16="http://schemas.microsoft.com/office/drawing/2014/main" id="{71352CDC-9CD5-41EA-BCE8-EB38B56A19A1}"/>
+                <a16:creationId xmlns:a16="http://schemas.microsoft.com/office/drawing/2014/main" id="{44250F7D-8B64-49F4-864F-3C48770CE9B1}"/>
               </a:ext>
             </a:extLst>
           </p:cNvPr>
@@ -9603,7 +9603,7 @@
           <p:cNvPr id="16" name="">
             <a:extLst xmlns:a="http://schemas.openxmlformats.org/drawingml/2006/main">
               <a:ext uri="{FF2B5EF4-FFF2-40B4-BE49-F238E27FC236}">
-                <a16:creationId xmlns:a16="http://schemas.microsoft.com/office/drawing/2014/main" id="{3C58E90D-C686-4CAA-B65C-B4F12FCAA7B5}"/>
+                <a16:creationId xmlns:a16="http://schemas.microsoft.com/office/drawing/2014/main" id="{7463459F-E8CB-4DBC-9AAA-69752BE75B3A}"/>
               </a:ext>
             </a:extLst>
           </p:cNvPr>
@@ -9661,7 +9661,7 @@
           <p:cNvPr id="17" name="">
             <a:extLst xmlns:a="http://schemas.openxmlformats.org/drawingml/2006/main">
               <a:ext uri="{FF2B5EF4-FFF2-40B4-BE49-F238E27FC236}">
-                <a16:creationId xmlns:a16="http://schemas.microsoft.com/office/drawing/2014/main" id="{A942105D-08D9-4103-923D-B356DBE84720}"/>
+                <a16:creationId xmlns:a16="http://schemas.microsoft.com/office/drawing/2014/main" id="{4698816E-4CD7-4890-96C5-4B4B9E968D10}"/>
               </a:ext>
             </a:extLst>
           </p:cNvPr>
@@ -9719,7 +9719,7 @@
           <p:cNvPr id="18" name="">
             <a:extLst xmlns:a="http://schemas.openxmlformats.org/drawingml/2006/main">
               <a:ext uri="{FF2B5EF4-FFF2-40B4-BE49-F238E27FC236}">
-                <a16:creationId xmlns:a16="http://schemas.microsoft.com/office/drawing/2014/main" id="{2BD192FF-9FFB-44DB-82A4-027520098511}"/>
+                <a16:creationId xmlns:a16="http://schemas.microsoft.com/office/drawing/2014/main" id="{82C30E09-E774-4837-AAD6-D174A64938C9}"/>
               </a:ext>
             </a:extLst>
           </p:cNvPr>
@@ -9777,7 +9777,7 @@
           <p:cNvPr id="19" name="">
             <a:extLst xmlns:a="http://schemas.openxmlformats.org/drawingml/2006/main">
               <a:ext uri="{FF2B5EF4-FFF2-40B4-BE49-F238E27FC236}">
-                <a16:creationId xmlns:a16="http://schemas.microsoft.com/office/drawing/2014/main" id="{EE54106D-DE33-429D-B03D-9EA1ADA9EF11}"/>
+                <a16:creationId xmlns:a16="http://schemas.microsoft.com/office/drawing/2014/main" id="{A813C28E-7C28-4080-8A63-A0022BDF8E75}"/>
               </a:ext>
             </a:extLst>
           </p:cNvPr>
@@ -9808,7 +9808,7 @@
           <p:cNvPr id="20" name="">
             <a:extLst xmlns:a="http://schemas.openxmlformats.org/drawingml/2006/main">
               <a:ext uri="{FF2B5EF4-FFF2-40B4-BE49-F238E27FC236}">
-                <a16:creationId xmlns:a16="http://schemas.microsoft.com/office/drawing/2014/main" id="{7FAECFEF-6F9C-499A-BCA2-FD00F7D5D319}"/>
+                <a16:creationId xmlns:a16="http://schemas.microsoft.com/office/drawing/2014/main" id="{FD5C7DD6-DE38-4200-9584-A0FEAC131027}"/>
               </a:ext>
             </a:extLst>
           </p:cNvPr>
@@ -9856,7 +9856,7 @@
                 <a:ea typeface="Aptos"/>
                 <a:cs typeface="Aptos"/>
               </a:rPr>
-              <a:t>PUERTA DE CONTROL</a:t>
+              <a:t>PUERTA 2 · EVIDENCIA</a:t>
             </a:r>
           </a:p>
         </p:txBody>
@@ -9866,7 +9866,7 @@
           <p:cNvPr id="21" name="">
             <a:extLst xmlns:a="http://schemas.openxmlformats.org/drawingml/2006/main">
               <a:ext uri="{FF2B5EF4-FFF2-40B4-BE49-F238E27FC236}">
-                <a16:creationId xmlns:a16="http://schemas.microsoft.com/office/drawing/2014/main" id="{844B26C6-5D99-4632-B610-6CBF355016C5}"/>
+                <a16:creationId xmlns:a16="http://schemas.microsoft.com/office/drawing/2014/main" id="{62E3844F-6E5F-4504-A0A8-0922DDFEBAE3}"/>
               </a:ext>
             </a:extLst>
           </p:cNvPr>
@@ -9924,7 +9924,7 @@
           <p:cNvPr id="22" name="">
             <a:extLst xmlns:a="http://schemas.openxmlformats.org/drawingml/2006/main">
               <a:ext uri="{FF2B5EF4-FFF2-40B4-BE49-F238E27FC236}">
-                <a16:creationId xmlns:a16="http://schemas.microsoft.com/office/drawing/2014/main" id="{2353C8DE-811B-4610-9C90-3A8997777265}"/>
+                <a16:creationId xmlns:a16="http://schemas.microsoft.com/office/drawing/2014/main" id="{7E17F02F-5C62-41C3-9758-56F5BC19961D}"/>
               </a:ext>
             </a:extLst>
           </p:cNvPr>
@@ -9959,7 +9959,7 @@
           <p:cNvPr id="23" name="">
             <a:extLst xmlns:a="http://schemas.openxmlformats.org/drawingml/2006/main">
               <a:ext uri="{FF2B5EF4-FFF2-40B4-BE49-F238E27FC236}">
-                <a16:creationId xmlns:a16="http://schemas.microsoft.com/office/drawing/2014/main" id="{B6B4B561-FC87-4E33-B262-E1BE9D1206D3}"/>
+                <a16:creationId xmlns:a16="http://schemas.microsoft.com/office/drawing/2014/main" id="{039BACA5-D36A-417B-AF63-7D71256E18F6}"/>
               </a:ext>
             </a:extLst>
           </p:cNvPr>
@@ -9994,7 +9994,7 @@
           <p:cNvPr id="24" name="">
             <a:extLst xmlns:a="http://schemas.openxmlformats.org/drawingml/2006/main">
               <a:ext uri="{FF2B5EF4-FFF2-40B4-BE49-F238E27FC236}">
-                <a16:creationId xmlns:a16="http://schemas.microsoft.com/office/drawing/2014/main" id="{C55EA4C9-C24F-4186-9D22-6506D861CF78}"/>
+                <a16:creationId xmlns:a16="http://schemas.microsoft.com/office/drawing/2014/main" id="{308AFFFD-B3C3-4292-B9BF-C49BAECF34B6}"/>
               </a:ext>
             </a:extLst>
           </p:cNvPr>
@@ -10052,7 +10052,7 @@
           <p:cNvPr id="25" name="">
             <a:extLst xmlns:a="http://schemas.openxmlformats.org/drawingml/2006/main">
               <a:ext uri="{FF2B5EF4-FFF2-40B4-BE49-F238E27FC236}">
-                <a16:creationId xmlns:a16="http://schemas.microsoft.com/office/drawing/2014/main" id="{4F57964F-E9F3-4824-8610-DE658DE06984}"/>
+                <a16:creationId xmlns:a16="http://schemas.microsoft.com/office/drawing/2014/main" id="{CF12723F-A897-4047-87EC-EF51BE9F70C6}"/>
               </a:ext>
             </a:extLst>
           </p:cNvPr>
@@ -10110,7 +10110,7 @@
           <p:cNvPr id="26" name="">
             <a:extLst xmlns:a="http://schemas.openxmlformats.org/drawingml/2006/main">
               <a:ext uri="{FF2B5EF4-FFF2-40B4-BE49-F238E27FC236}">
-                <a16:creationId xmlns:a16="http://schemas.microsoft.com/office/drawing/2014/main" id="{E7310F2A-F47A-4BA5-8B50-B03F58CD2671}"/>
+                <a16:creationId xmlns:a16="http://schemas.microsoft.com/office/drawing/2014/main" id="{DF5283DE-80C2-45CF-B444-52F94E6DA02C}"/>
               </a:ext>
             </a:extLst>
           </p:cNvPr>
@@ -10168,7 +10168,7 @@
           <p:cNvPr id="27" name="">
             <a:extLst xmlns:a="http://schemas.openxmlformats.org/drawingml/2006/main">
               <a:ext uri="{FF2B5EF4-FFF2-40B4-BE49-F238E27FC236}">
-                <a16:creationId xmlns:a16="http://schemas.microsoft.com/office/drawing/2014/main" id="{4581A1B7-B7C9-4C60-8255-D21C3580C91D}"/>
+                <a16:creationId xmlns:a16="http://schemas.microsoft.com/office/drawing/2014/main" id="{ACE0B256-EE79-4F13-B9CD-348396B306DD}"/>
               </a:ext>
             </a:extLst>
           </p:cNvPr>
@@ -10199,7 +10199,7 @@
           <p:cNvPr id="28" name="">
             <a:extLst xmlns:a="http://schemas.openxmlformats.org/drawingml/2006/main">
               <a:ext uri="{FF2B5EF4-FFF2-40B4-BE49-F238E27FC236}">
-                <a16:creationId xmlns:a16="http://schemas.microsoft.com/office/drawing/2014/main" id="{DF96952C-5EB1-4E72-B651-A86B7F44BE88}"/>
+                <a16:creationId xmlns:a16="http://schemas.microsoft.com/office/drawing/2014/main" id="{AF0DEECD-9E0E-49A7-A6E8-0711038251D7}"/>
               </a:ext>
             </a:extLst>
           </p:cNvPr>
@@ -10247,7 +10247,7 @@
                 <a:ea typeface="Aptos"/>
                 <a:cs typeface="Aptos"/>
               </a:rPr>
-              <a:t>PUERTA DE CONTROL</a:t>
+              <a:t>PUERTA 3 · ESCALA</a:t>
             </a:r>
           </a:p>
         </p:txBody>
@@ -10257,7 +10257,7 @@
           <p:cNvPr id="29" name="">
             <a:extLst xmlns:a="http://schemas.openxmlformats.org/drawingml/2006/main">
               <a:ext uri="{FF2B5EF4-FFF2-40B4-BE49-F238E27FC236}">
-                <a16:creationId xmlns:a16="http://schemas.microsoft.com/office/drawing/2014/main" id="{C2A9D7E7-0F31-4BB9-BF13-9C2B5CFC13EC}"/>
+                <a16:creationId xmlns:a16="http://schemas.microsoft.com/office/drawing/2014/main" id="{9F4B3D84-B6FC-4680-ACC7-7B0F54A4B47E}"/>
               </a:ext>
             </a:extLst>
           </p:cNvPr>
@@ -10315,7 +10315,7 @@
           <p:cNvPr id="30" name="">
             <a:extLst xmlns:a="http://schemas.openxmlformats.org/drawingml/2006/main">
               <a:ext uri="{FF2B5EF4-FFF2-40B4-BE49-F238E27FC236}">
-                <a16:creationId xmlns:a16="http://schemas.microsoft.com/office/drawing/2014/main" id="{E6E53348-7DDB-4CAF-8D80-E470371FE7F5}"/>
+                <a16:creationId xmlns:a16="http://schemas.microsoft.com/office/drawing/2014/main" id="{A6FB982B-59F1-4DF9-A042-0AAE14275B2C}"/>
               </a:ext>
             </a:extLst>
           </p:cNvPr>
@@ -10350,7 +10350,7 @@
           <p:cNvPr id="31" name="">
             <a:extLst xmlns:a="http://schemas.openxmlformats.org/drawingml/2006/main">
               <a:ext uri="{FF2B5EF4-FFF2-40B4-BE49-F238E27FC236}">
-                <a16:creationId xmlns:a16="http://schemas.microsoft.com/office/drawing/2014/main" id="{A51118FB-E88F-4273-9A6C-8DCE7FFFB896}"/>
+                <a16:creationId xmlns:a16="http://schemas.microsoft.com/office/drawing/2014/main" id="{71E84FA3-454D-4CF7-807E-DAF0272789AC}"/>
               </a:ext>
             </a:extLst>
           </p:cNvPr>
@@ -10398,7 +10398,7 @@
                 <a:ea typeface="Aptos"/>
                 <a:cs typeface="Aptos"/>
               </a:rPr>
-              <a:t>DECISIÓN SOLICITADA</a:t>
+              <a:t>DECISIÓN REGISTRADA</a:t>
             </a:r>
           </a:p>
         </p:txBody>
@@ -10408,7 +10408,7 @@
           <p:cNvPr id="32" name="">
             <a:extLst xmlns:a="http://schemas.openxmlformats.org/drawingml/2006/main">
               <a:ext uri="{FF2B5EF4-FFF2-40B4-BE49-F238E27FC236}">
-                <a16:creationId xmlns:a16="http://schemas.microsoft.com/office/drawing/2014/main" id="{F23EECAE-D849-47B9-84A9-A2370986A5BF}"/>
+                <a16:creationId xmlns:a16="http://schemas.microsoft.com/office/drawing/2014/main" id="{F3EFA86F-6C1B-4BF6-879D-A0DC73BE7F8B}"/>
               </a:ext>
             </a:extLst>
           </p:cNvPr>
@@ -10456,7 +10456,7 @@
                 <a:ea typeface="Georgia"/>
                 <a:cs typeface="Georgia"/>
               </a:rPr>
-              <a:t>Aprobar BES v2.0, designar propietarios de pilar y autorizar la primera ola 0–30 días.</a:t>
+              <a:t>BES v2.0 aprobado y liberado; inicia la designación de propietarios y la ola 0–30 días.</a:t>
             </a:r>
           </a:p>
         </p:txBody>
@@ -10464,7 +10464,7 @@
     </p:spTree>
     <p:extLst>
       <p:ext uri="{BB962C8B-B14F-4D97-AF65-F5344CB8AC3E}">
-        <p14:creationId xmlns:p14="http://schemas.microsoft.com/office/powerpoint/2010/main" val="1101108721"/>
+        <p14:creationId xmlns:p14="http://schemas.microsoft.com/office/powerpoint/2010/main" val="1772362574"/>
       </p:ext>
     </p:extLst>
   </p:cSld>
@@ -10499,7 +10499,7 @@
           <p:nvPr/>
         </p:nvPicPr>
         <p:blipFill>
-          <a:blip xmlns:r="http://schemas.openxmlformats.org/officeDocument/2006/relationships" xmlns:a="http://schemas.openxmlformats.org/drawingml/2006/main" r:embed="Ra655add203b74537"/>
+          <a:blip xmlns:r="http://schemas.openxmlformats.org/officeDocument/2006/relationships" xmlns:a="http://schemas.openxmlformats.org/drawingml/2006/main" r:embed="R8a0a7f2fb00a4c01"/>
           <a:srcRect xmlns:a="http://schemas.openxmlformats.org/drawingml/2006/main" l="0" t="7867" r="0" b="7867"/>
           <a:stretch xmlns:a="http://schemas.openxmlformats.org/drawingml/2006/main">
             <a:fillRect l="0" t="0" r="0" b="0"/>
@@ -10520,7 +10520,7 @@
           <p:cNvPr id="2" name="">
             <a:extLst xmlns:a="http://schemas.openxmlformats.org/drawingml/2006/main">
               <a:ext uri="{FF2B5EF4-FFF2-40B4-BE49-F238E27FC236}">
-                <a16:creationId xmlns:a16="http://schemas.microsoft.com/office/drawing/2014/main" id="{5C85C4BE-A1A6-43F8-BBD2-0DDC2A1D9955}"/>
+                <a16:creationId xmlns:a16="http://schemas.microsoft.com/office/drawing/2014/main" id="{75F81A99-2068-4C64-83C2-D53DCEE80F95}"/>
               </a:ext>
             </a:extLst>
           </p:cNvPr>
@@ -10553,7 +10553,7 @@
           <p:cNvPr id="3" name="">
             <a:extLst xmlns:a="http://schemas.openxmlformats.org/drawingml/2006/main">
               <a:ext uri="{FF2B5EF4-FFF2-40B4-BE49-F238E27FC236}">
-                <a16:creationId xmlns:a16="http://schemas.microsoft.com/office/drawing/2014/main" id="{F7DB6D47-5FF6-4D8A-A3E0-2BDAC5D1CEF0}"/>
+                <a16:creationId xmlns:a16="http://schemas.microsoft.com/office/drawing/2014/main" id="{059A4D68-1444-42A8-8354-D5B11C49D860}"/>
               </a:ext>
             </a:extLst>
           </p:cNvPr>
@@ -10588,7 +10588,7 @@
           <p:cNvPr id="4" name="">
             <a:extLst xmlns:a="http://schemas.openxmlformats.org/drawingml/2006/main">
               <a:ext uri="{FF2B5EF4-FFF2-40B4-BE49-F238E27FC236}">
-                <a16:creationId xmlns:a16="http://schemas.microsoft.com/office/drawing/2014/main" id="{CB9E4D80-EC23-49BC-8906-0E4704614B5D}"/>
+                <a16:creationId xmlns:a16="http://schemas.microsoft.com/office/drawing/2014/main" id="{2A553A26-1645-4A90-B517-6EB443BC30F7}"/>
               </a:ext>
             </a:extLst>
           </p:cNvPr>
@@ -10646,7 +10646,7 @@
           <p:cNvPr id="5" name="">
             <a:extLst xmlns:a="http://schemas.openxmlformats.org/drawingml/2006/main">
               <a:ext uri="{FF2B5EF4-FFF2-40B4-BE49-F238E27FC236}">
-                <a16:creationId xmlns:a16="http://schemas.microsoft.com/office/drawing/2014/main" id="{B5149DDE-E073-437A-89C1-DA2F07D46471}"/>
+                <a16:creationId xmlns:a16="http://schemas.microsoft.com/office/drawing/2014/main" id="{5219E3B0-A6DC-4C49-A029-0BE18827A57E}"/>
               </a:ext>
             </a:extLst>
           </p:cNvPr>
@@ -10671,7 +10671,7 @@
         </p:spPr>
         <p:txBody>
           <a:bodyPr xmlns:a="http://schemas.openxmlformats.org/drawingml/2006/main" lIns="0" tIns="0" rIns="0" bIns="0" anchor="t">
-            <a:normAutofit fontScale="95833"/>
+            <a:normAutofit fontScale="89871"/>
           </a:bodyPr>
           <a:lstStyle xmlns:a="http://schemas.openxmlformats.org/drawingml/2006/main"/>
           <a:p xmlns:a="http://schemas.openxmlformats.org/drawingml/2006/main">
@@ -10694,7 +10694,7 @@
                 <a:ea typeface="Georgia"/>
                 <a:cs typeface="Georgia"/>
               </a:rPr>
-              <a:t>La arquitectura está lista.</a:t>
+              <a:t>La arquitectura está aprobada.</a:t>
             </a:r>
           </a:p>
           <a:p xmlns:a="http://schemas.openxmlformats.org/drawingml/2006/main">
@@ -10717,7 +10717,7 @@
                 <a:ea typeface="Georgia"/>
                 <a:cs typeface="Georgia"/>
               </a:rPr>
-              <a:t>La siguiente decisión es activarla.</a:t>
+              <a:t>La siguiente acción es ejecutarla.</a:t>
             </a:r>
           </a:p>
         </p:txBody>
@@ -10727,7 +10727,7 @@
           <p:cNvPr id="6" name="">
             <a:extLst xmlns:a="http://schemas.openxmlformats.org/drawingml/2006/main">
               <a:ext uri="{FF2B5EF4-FFF2-40B4-BE49-F238E27FC236}">
-                <a16:creationId xmlns:a16="http://schemas.microsoft.com/office/drawing/2014/main" id="{58A2EF44-9CE4-4B6F-8315-944149C00CA7}"/>
+                <a16:creationId xmlns:a16="http://schemas.microsoft.com/office/drawing/2014/main" id="{24C08283-ECDE-4C2D-BE5C-E83C3ACDBBCC}"/>
               </a:ext>
             </a:extLst>
           </p:cNvPr>
@@ -10762,7 +10762,7 @@
           <p:cNvPr id="7" name="">
             <a:extLst xmlns:a="http://schemas.openxmlformats.org/drawingml/2006/main">
               <a:ext uri="{FF2B5EF4-FFF2-40B4-BE49-F238E27FC236}">
-                <a16:creationId xmlns:a16="http://schemas.microsoft.com/office/drawing/2014/main" id="{E067F055-919C-4D43-BF97-175183DC67CB}"/>
+                <a16:creationId xmlns:a16="http://schemas.microsoft.com/office/drawing/2014/main" id="{B9E3F9E3-AF82-4805-A270-194373374FCA}"/>
               </a:ext>
             </a:extLst>
           </p:cNvPr>
@@ -10820,7 +10820,7 @@
           <p:cNvPr id="8" name="">
             <a:extLst xmlns:a="http://schemas.openxmlformats.org/drawingml/2006/main">
               <a:ext uri="{FF2B5EF4-FFF2-40B4-BE49-F238E27FC236}">
-                <a16:creationId xmlns:a16="http://schemas.microsoft.com/office/drawing/2014/main" id="{F554E989-1500-4090-8139-20210EF90A37}"/>
+                <a16:creationId xmlns:a16="http://schemas.microsoft.com/office/drawing/2014/main" id="{923FF78A-EE84-48AB-B93F-12DBF3841BB5}"/>
               </a:ext>
             </a:extLst>
           </p:cNvPr>
@@ -10868,7 +10868,7 @@
                 <a:ea typeface="Aptos"/>
                 <a:cs typeface="Aptos"/>
               </a:rPr>
-              <a:t>Aprobar BES v2.0 como arquitectura rectora</a:t>
+              <a:t>Formalizar propietarios de los 14 pilares</a:t>
             </a:r>
           </a:p>
         </p:txBody>
@@ -10878,7 +10878,7 @@
           <p:cNvPr id="9" name="">
             <a:extLst xmlns:a="http://schemas.openxmlformats.org/drawingml/2006/main">
               <a:ext uri="{FF2B5EF4-FFF2-40B4-BE49-F238E27FC236}">
-                <a16:creationId xmlns:a16="http://schemas.microsoft.com/office/drawing/2014/main" id="{481A53B3-C7DF-4CCB-A6C8-CE5DAF6B1D12}"/>
+                <a16:creationId xmlns:a16="http://schemas.microsoft.com/office/drawing/2014/main" id="{97E61B0E-0B52-467A-BD07-9301687FC3CD}"/>
               </a:ext>
             </a:extLst>
           </p:cNvPr>
@@ -10913,7 +10913,7 @@
           <p:cNvPr id="10" name="">
             <a:extLst xmlns:a="http://schemas.openxmlformats.org/drawingml/2006/main">
               <a:ext uri="{FF2B5EF4-FFF2-40B4-BE49-F238E27FC236}">
-                <a16:creationId xmlns:a16="http://schemas.microsoft.com/office/drawing/2014/main" id="{9B1EE254-3908-447E-A75D-6A6C8E1BB32D}"/>
+                <a16:creationId xmlns:a16="http://schemas.microsoft.com/office/drawing/2014/main" id="{93222AAB-B14F-41ED-87C8-1E8F9190CB68}"/>
               </a:ext>
             </a:extLst>
           </p:cNvPr>
@@ -10971,7 +10971,7 @@
           <p:cNvPr id="11" name="">
             <a:extLst xmlns:a="http://schemas.openxmlformats.org/drawingml/2006/main">
               <a:ext uri="{FF2B5EF4-FFF2-40B4-BE49-F238E27FC236}">
-                <a16:creationId xmlns:a16="http://schemas.microsoft.com/office/drawing/2014/main" id="{A08375FC-0B90-448A-ACF6-E5DCBEF39000}"/>
+                <a16:creationId xmlns:a16="http://schemas.microsoft.com/office/drawing/2014/main" id="{669DDA3B-6C7F-4BCC-A44D-3BBA69F6FCAA}"/>
               </a:ext>
             </a:extLst>
           </p:cNvPr>
@@ -11019,7 +11019,7 @@
                 <a:ea typeface="Aptos"/>
                 <a:cs typeface="Aptos"/>
               </a:rPr>
-              <a:t>Nombrar propietarios de los 14 pilares</a:t>
+              <a:t>Iniciar gobierno 0–30 días y revisión mensual</a:t>
             </a:r>
           </a:p>
         </p:txBody>
@@ -11029,7 +11029,7 @@
           <p:cNvPr id="12" name="">
             <a:extLst xmlns:a="http://schemas.openxmlformats.org/drawingml/2006/main">
               <a:ext uri="{FF2B5EF4-FFF2-40B4-BE49-F238E27FC236}">
-                <a16:creationId xmlns:a16="http://schemas.microsoft.com/office/drawing/2014/main" id="{DCD94DE7-8942-43F6-A6FD-64495E3968AB}"/>
+                <a16:creationId xmlns:a16="http://schemas.microsoft.com/office/drawing/2014/main" id="{F8319888-310F-4ACA-85E2-424C52E7027B}"/>
               </a:ext>
             </a:extLst>
           </p:cNvPr>
@@ -11064,7 +11064,7 @@
           <p:cNvPr id="13" name="">
             <a:extLst xmlns:a="http://schemas.openxmlformats.org/drawingml/2006/main">
               <a:ext uri="{FF2B5EF4-FFF2-40B4-BE49-F238E27FC236}">
-                <a16:creationId xmlns:a16="http://schemas.microsoft.com/office/drawing/2014/main" id="{0A757C59-3727-4831-971D-82F7B00E86C6}"/>
+                <a16:creationId xmlns:a16="http://schemas.microsoft.com/office/drawing/2014/main" id="{D3A636D7-A0D2-4B65-BC97-865DA108BC44}"/>
               </a:ext>
             </a:extLst>
           </p:cNvPr>
@@ -11122,7 +11122,7 @@
           <p:cNvPr id="14" name="">
             <a:extLst xmlns:a="http://schemas.openxmlformats.org/drawingml/2006/main">
               <a:ext uri="{FF2B5EF4-FFF2-40B4-BE49-F238E27FC236}">
-                <a16:creationId xmlns:a16="http://schemas.microsoft.com/office/drawing/2014/main" id="{21D52EFD-C2BD-4F50-A741-C6ED808E2D84}"/>
+                <a16:creationId xmlns:a16="http://schemas.microsoft.com/office/drawing/2014/main" id="{D520E4BB-D6D4-4197-80E4-66868555D360}"/>
               </a:ext>
             </a:extLst>
           </p:cNvPr>
@@ -11170,7 +11170,7 @@
                 <a:ea typeface="Aptos"/>
                 <a:cs typeface="Aptos"/>
               </a:rPr>
-              <a:t>Iniciar gobierno 0–30 días y revisión mensual</a:t>
+              <a:t>Medir avance, evidencia y cierre de brechas</a:t>
             </a:r>
           </a:p>
         </p:txBody>
@@ -11180,7 +11180,7 @@
           <p:cNvPr id="15" name="">
             <a:extLst xmlns:a="http://schemas.openxmlformats.org/drawingml/2006/main">
               <a:ext uri="{FF2B5EF4-FFF2-40B4-BE49-F238E27FC236}">
-                <a16:creationId xmlns:a16="http://schemas.microsoft.com/office/drawing/2014/main" id="{ABC4933D-EC4D-4EF4-BA91-5A8748DFFAEC}"/>
+                <a16:creationId xmlns:a16="http://schemas.microsoft.com/office/drawing/2014/main" id="{3ADDCC29-2590-4A9B-B79B-D3DE832F841F}"/>
               </a:ext>
             </a:extLst>
           </p:cNvPr>
@@ -11211,7 +11211,7 @@
           <p:cNvPr id="16" name="">
             <a:extLst xmlns:a="http://schemas.openxmlformats.org/drawingml/2006/main">
               <a:ext uri="{FF2B5EF4-FFF2-40B4-BE49-F238E27FC236}">
-                <a16:creationId xmlns:a16="http://schemas.microsoft.com/office/drawing/2014/main" id="{3CB98C4C-ED5F-45B0-899A-F6E648C41F9D}"/>
+                <a16:creationId xmlns:a16="http://schemas.microsoft.com/office/drawing/2014/main" id="{1F8B63A5-D792-4207-B624-19F8D536F54D}"/>
               </a:ext>
             </a:extLst>
           </p:cNvPr>
@@ -11292,7 +11292,7 @@
           <p:cNvPr id="17" name="">
             <a:extLst xmlns:a="http://schemas.openxmlformats.org/drawingml/2006/main">
               <a:ext uri="{FF2B5EF4-FFF2-40B4-BE49-F238E27FC236}">
-                <a16:creationId xmlns:a16="http://schemas.microsoft.com/office/drawing/2014/main" id="{D528FF74-652A-4D39-867B-32A72F33FDC2}"/>
+                <a16:creationId xmlns:a16="http://schemas.microsoft.com/office/drawing/2014/main" id="{7CFB8DC1-71C4-4BA9-BE82-02F9E326AB41}"/>
               </a:ext>
             </a:extLst>
           </p:cNvPr>
@@ -11348,7 +11348,7 @@
     </p:spTree>
     <p:extLst>
       <p:ext uri="{BB962C8B-B14F-4D97-AF65-F5344CB8AC3E}">
-        <p14:creationId xmlns:p14="http://schemas.microsoft.com/office/powerpoint/2010/main" val="476815952"/>
+        <p14:creationId xmlns:p14="http://schemas.microsoft.com/office/powerpoint/2010/main" val="566397518"/>
       </p:ext>
     </p:extLst>
   </p:cSld>
@@ -11379,7 +11379,7 @@
           <p:cNvPr id="31" name="eyebrow-2">
             <a:extLst xmlns:a="http://schemas.openxmlformats.org/drawingml/2006/main">
               <a:ext uri="{FF2B5EF4-FFF2-40B4-BE49-F238E27FC236}">
-                <a16:creationId xmlns:a16="http://schemas.microsoft.com/office/drawing/2014/main" id="{0CE89F34-17B6-41DB-B483-3096BA4B296D}"/>
+                <a16:creationId xmlns:a16="http://schemas.microsoft.com/office/drawing/2014/main" id="{33DD5C9A-85E3-431D-BF34-49B86186817E}"/>
               </a:ext>
             </a:extLst>
           </p:cNvPr>
@@ -11437,7 +11437,7 @@
           <p:cNvPr id="2" name="title-2">
             <a:extLst xmlns:a="http://schemas.openxmlformats.org/drawingml/2006/main">
               <a:ext uri="{FF2B5EF4-FFF2-40B4-BE49-F238E27FC236}">
-                <a16:creationId xmlns:a16="http://schemas.microsoft.com/office/drawing/2014/main" id="{71141D3A-C9F7-4626-9C89-B8BE1E44683A}"/>
+                <a16:creationId xmlns:a16="http://schemas.microsoft.com/office/drawing/2014/main" id="{0D2D2703-87CC-4996-AAE0-57050A418E28}"/>
               </a:ext>
             </a:extLst>
           </p:cNvPr>
@@ -11495,7 +11495,7 @@
           <p:cNvPr id="3" name="">
             <a:extLst xmlns:a="http://schemas.openxmlformats.org/drawingml/2006/main">
               <a:ext uri="{FF2B5EF4-FFF2-40B4-BE49-F238E27FC236}">
-                <a16:creationId xmlns:a16="http://schemas.microsoft.com/office/drawing/2014/main" id="{ED939334-BCDD-4120-8891-38485E5C60AB}"/>
+                <a16:creationId xmlns:a16="http://schemas.microsoft.com/office/drawing/2014/main" id="{BBB527DA-0DEE-474D-9F20-4D039D5DE837}"/>
               </a:ext>
             </a:extLst>
           </p:cNvPr>
@@ -11526,7 +11526,7 @@
           <p:cNvPr id="4" name="">
             <a:extLst xmlns:a="http://schemas.openxmlformats.org/drawingml/2006/main">
               <a:ext uri="{FF2B5EF4-FFF2-40B4-BE49-F238E27FC236}">
-                <a16:creationId xmlns:a16="http://schemas.microsoft.com/office/drawing/2014/main" id="{CA777150-B8E1-4E68-9DE7-EB23A53DE12B}"/>
+                <a16:creationId xmlns:a16="http://schemas.microsoft.com/office/drawing/2014/main" id="{016447E6-24A9-4F02-B600-54D5239D91D0}"/>
               </a:ext>
             </a:extLst>
           </p:cNvPr>
@@ -11574,7 +11574,7 @@
                 <a:ea typeface="Aptos"/>
                 <a:cs typeface="Aptos"/>
               </a:rPr>
-              <a:t>BES v2.0 · Propuesta ejecutiva</a:t>
+              <a:t>BES v2.0 · Aprobado y liberado</a:t>
             </a:r>
           </a:p>
         </p:txBody>
@@ -11584,7 +11584,7 @@
           <p:cNvPr id="5" name="">
             <a:extLst xmlns:a="http://schemas.openxmlformats.org/drawingml/2006/main">
               <a:ext uri="{FF2B5EF4-FFF2-40B4-BE49-F238E27FC236}">
-                <a16:creationId xmlns:a16="http://schemas.microsoft.com/office/drawing/2014/main" id="{E3A25082-381E-4E17-8C35-3952DEA12094}"/>
+                <a16:creationId xmlns:a16="http://schemas.microsoft.com/office/drawing/2014/main" id="{E53D018B-4C23-4BA3-85BC-EEE431FF12C3}"/>
               </a:ext>
             </a:extLst>
           </p:cNvPr>
@@ -11642,7 +11642,7 @@
           <p:cNvPr id="6" name="">
             <a:extLst xmlns:a="http://schemas.openxmlformats.org/drawingml/2006/main">
               <a:ext uri="{FF2B5EF4-FFF2-40B4-BE49-F238E27FC236}">
-                <a16:creationId xmlns:a16="http://schemas.microsoft.com/office/drawing/2014/main" id="{5D18BC20-08F4-4B54-A49F-5497486FADC6}"/>
+                <a16:creationId xmlns:a16="http://schemas.microsoft.com/office/drawing/2014/main" id="{C61EBA5B-7102-459C-A8AE-B3E9109FA688}"/>
               </a:ext>
             </a:extLst>
           </p:cNvPr>
@@ -11677,7 +11677,7 @@
           <p:cNvPr id="7" name="">
             <a:extLst xmlns:a="http://schemas.openxmlformats.org/drawingml/2006/main">
               <a:ext uri="{FF2B5EF4-FFF2-40B4-BE49-F238E27FC236}">
-                <a16:creationId xmlns:a16="http://schemas.microsoft.com/office/drawing/2014/main" id="{DE1BC8EF-394E-413F-9AF9-CA517523568C}"/>
+                <a16:creationId xmlns:a16="http://schemas.microsoft.com/office/drawing/2014/main" id="{3125DA52-6CA5-45FA-9E78-06B87D681D8D}"/>
               </a:ext>
             </a:extLst>
           </p:cNvPr>
@@ -11735,7 +11735,7 @@
           <p:cNvPr id="8" name="">
             <a:extLst xmlns:a="http://schemas.openxmlformats.org/drawingml/2006/main">
               <a:ext uri="{FF2B5EF4-FFF2-40B4-BE49-F238E27FC236}">
-                <a16:creationId xmlns:a16="http://schemas.microsoft.com/office/drawing/2014/main" id="{AFDB0B5A-ABAF-4371-85B4-0155815B948D}"/>
+                <a16:creationId xmlns:a16="http://schemas.microsoft.com/office/drawing/2014/main" id="{B27A80CC-F4AF-4F51-A2B9-A835BB7DC8D6}"/>
               </a:ext>
             </a:extLst>
           </p:cNvPr>
@@ -11793,7 +11793,7 @@
           <p:cNvPr id="9" name="">
             <a:extLst xmlns:a="http://schemas.openxmlformats.org/drawingml/2006/main">
               <a:ext uri="{FF2B5EF4-FFF2-40B4-BE49-F238E27FC236}">
-                <a16:creationId xmlns:a16="http://schemas.microsoft.com/office/drawing/2014/main" id="{42DA8D1C-CD42-4640-A546-836F4B0D2C88}"/>
+                <a16:creationId xmlns:a16="http://schemas.microsoft.com/office/drawing/2014/main" id="{859299C6-79DD-4E0C-A574-257C0238ABA6}"/>
               </a:ext>
             </a:extLst>
           </p:cNvPr>
@@ -11851,7 +11851,7 @@
           <p:cNvPr id="10" name="">
             <a:extLst xmlns:a="http://schemas.openxmlformats.org/drawingml/2006/main">
               <a:ext uri="{FF2B5EF4-FFF2-40B4-BE49-F238E27FC236}">
-                <a16:creationId xmlns:a16="http://schemas.microsoft.com/office/drawing/2014/main" id="{F7CD926A-7788-43AC-BBCF-CB976727ABCB}"/>
+                <a16:creationId xmlns:a16="http://schemas.microsoft.com/office/drawing/2014/main" id="{76684546-0722-41F7-AAB3-09782D00F953}"/>
               </a:ext>
             </a:extLst>
           </p:cNvPr>
@@ -11886,7 +11886,7 @@
           <p:cNvPr id="11" name="">
             <a:extLst xmlns:a="http://schemas.openxmlformats.org/drawingml/2006/main">
               <a:ext uri="{FF2B5EF4-FFF2-40B4-BE49-F238E27FC236}">
-                <a16:creationId xmlns:a16="http://schemas.microsoft.com/office/drawing/2014/main" id="{1AD39ED3-818B-4703-AE85-CE8A6E8C6303}"/>
+                <a16:creationId xmlns:a16="http://schemas.microsoft.com/office/drawing/2014/main" id="{6F54C7C2-70C7-4B58-BC46-EA1AE64D0ABF}"/>
               </a:ext>
             </a:extLst>
           </p:cNvPr>
@@ -11944,7 +11944,7 @@
           <p:cNvPr id="12" name="">
             <a:extLst xmlns:a="http://schemas.openxmlformats.org/drawingml/2006/main">
               <a:ext uri="{FF2B5EF4-FFF2-40B4-BE49-F238E27FC236}">
-                <a16:creationId xmlns:a16="http://schemas.microsoft.com/office/drawing/2014/main" id="{20B0B1D5-E086-4EEB-A616-B7B09DB2861B}"/>
+                <a16:creationId xmlns:a16="http://schemas.microsoft.com/office/drawing/2014/main" id="{A7698A96-B001-41EF-A2C2-330234A06BFD}"/>
               </a:ext>
             </a:extLst>
           </p:cNvPr>
@@ -12002,7 +12002,7 @@
           <p:cNvPr id="13" name="">
             <a:extLst xmlns:a="http://schemas.openxmlformats.org/drawingml/2006/main">
               <a:ext uri="{FF2B5EF4-FFF2-40B4-BE49-F238E27FC236}">
-                <a16:creationId xmlns:a16="http://schemas.microsoft.com/office/drawing/2014/main" id="{988A6382-3754-4EDA-A130-54709E702489}"/>
+                <a16:creationId xmlns:a16="http://schemas.microsoft.com/office/drawing/2014/main" id="{12B4780E-C55D-4E08-89AB-78CE6AAF488B}"/>
               </a:ext>
             </a:extLst>
           </p:cNvPr>
@@ -12060,7 +12060,7 @@
           <p:cNvPr id="14" name="">
             <a:extLst xmlns:a="http://schemas.openxmlformats.org/drawingml/2006/main">
               <a:ext uri="{FF2B5EF4-FFF2-40B4-BE49-F238E27FC236}">
-                <a16:creationId xmlns:a16="http://schemas.microsoft.com/office/drawing/2014/main" id="{BF8D1A9C-B68D-49F1-8B28-181DB698C332}"/>
+                <a16:creationId xmlns:a16="http://schemas.microsoft.com/office/drawing/2014/main" id="{C7A6CA37-39E0-4D0A-9B03-612521F842BE}"/>
               </a:ext>
             </a:extLst>
           </p:cNvPr>
@@ -12095,7 +12095,7 @@
           <p:cNvPr id="15" name="">
             <a:extLst xmlns:a="http://schemas.openxmlformats.org/drawingml/2006/main">
               <a:ext uri="{FF2B5EF4-FFF2-40B4-BE49-F238E27FC236}">
-                <a16:creationId xmlns:a16="http://schemas.microsoft.com/office/drawing/2014/main" id="{F2075FD5-CCD5-4C16-9097-94DD1DB840B8}"/>
+                <a16:creationId xmlns:a16="http://schemas.microsoft.com/office/drawing/2014/main" id="{56639424-9F6A-4432-9F75-12D2EC811B62}"/>
               </a:ext>
             </a:extLst>
           </p:cNvPr>
@@ -12153,7 +12153,7 @@
           <p:cNvPr id="16" name="">
             <a:extLst xmlns:a="http://schemas.openxmlformats.org/drawingml/2006/main">
               <a:ext uri="{FF2B5EF4-FFF2-40B4-BE49-F238E27FC236}">
-                <a16:creationId xmlns:a16="http://schemas.microsoft.com/office/drawing/2014/main" id="{A65657AF-3E51-435F-B341-E3A4AA42CE9D}"/>
+                <a16:creationId xmlns:a16="http://schemas.microsoft.com/office/drawing/2014/main" id="{7DEE2673-4978-4AF0-A4A0-121575C4DEB3}"/>
               </a:ext>
             </a:extLst>
           </p:cNvPr>
@@ -12211,7 +12211,7 @@
           <p:cNvPr id="17" name="">
             <a:extLst xmlns:a="http://schemas.openxmlformats.org/drawingml/2006/main">
               <a:ext uri="{FF2B5EF4-FFF2-40B4-BE49-F238E27FC236}">
-                <a16:creationId xmlns:a16="http://schemas.microsoft.com/office/drawing/2014/main" id="{6EACE11F-04CB-486E-89A9-C0D69A2DF0BF}"/>
+                <a16:creationId xmlns:a16="http://schemas.microsoft.com/office/drawing/2014/main" id="{E58830CC-C270-41B3-BCC3-639717CFE4B3}"/>
               </a:ext>
             </a:extLst>
           </p:cNvPr>
@@ -12269,7 +12269,7 @@
           <p:cNvPr id="18" name="">
             <a:extLst xmlns:a="http://schemas.openxmlformats.org/drawingml/2006/main">
               <a:ext uri="{FF2B5EF4-FFF2-40B4-BE49-F238E27FC236}">
-                <a16:creationId xmlns:a16="http://schemas.microsoft.com/office/drawing/2014/main" id="{2B11068E-DCE6-44EE-9DF0-3AE0E2C754CA}"/>
+                <a16:creationId xmlns:a16="http://schemas.microsoft.com/office/drawing/2014/main" id="{58F9561E-55E1-4E21-9B65-ADA231A2ECEE}"/>
               </a:ext>
             </a:extLst>
           </p:cNvPr>
@@ -12304,7 +12304,7 @@
           <p:cNvPr id="19" name="">
             <a:extLst xmlns:a="http://schemas.openxmlformats.org/drawingml/2006/main">
               <a:ext uri="{FF2B5EF4-FFF2-40B4-BE49-F238E27FC236}">
-                <a16:creationId xmlns:a16="http://schemas.microsoft.com/office/drawing/2014/main" id="{0B5AF135-7E27-4CA2-8624-77177278166D}"/>
+                <a16:creationId xmlns:a16="http://schemas.microsoft.com/office/drawing/2014/main" id="{5353ADC9-F7B7-45C8-8172-D37EE4FEEA2B}"/>
               </a:ext>
             </a:extLst>
           </p:cNvPr>
@@ -12362,7 +12362,7 @@
           <p:cNvPr id="20" name="">
             <a:extLst xmlns:a="http://schemas.openxmlformats.org/drawingml/2006/main">
               <a:ext uri="{FF2B5EF4-FFF2-40B4-BE49-F238E27FC236}">
-                <a16:creationId xmlns:a16="http://schemas.microsoft.com/office/drawing/2014/main" id="{37E9DC03-4D3F-4439-85D7-1D943AE3DB1B}"/>
+                <a16:creationId xmlns:a16="http://schemas.microsoft.com/office/drawing/2014/main" id="{CCC0895D-BDA5-424B-96B8-539222072C0A}"/>
               </a:ext>
             </a:extLst>
           </p:cNvPr>
@@ -12420,7 +12420,7 @@
           <p:cNvPr id="21" name="">
             <a:extLst xmlns:a="http://schemas.openxmlformats.org/drawingml/2006/main">
               <a:ext uri="{FF2B5EF4-FFF2-40B4-BE49-F238E27FC236}">
-                <a16:creationId xmlns:a16="http://schemas.microsoft.com/office/drawing/2014/main" id="{95D48645-1F2D-4CC8-800F-18D7B2E1661C}"/>
+                <a16:creationId xmlns:a16="http://schemas.microsoft.com/office/drawing/2014/main" id="{74458879-2525-4ACE-878F-17933FA13D54}"/>
               </a:ext>
             </a:extLst>
           </p:cNvPr>
@@ -12478,7 +12478,7 @@
           <p:cNvPr id="22" name="">
             <a:extLst xmlns:a="http://schemas.openxmlformats.org/drawingml/2006/main">
               <a:ext uri="{FF2B5EF4-FFF2-40B4-BE49-F238E27FC236}">
-                <a16:creationId xmlns:a16="http://schemas.microsoft.com/office/drawing/2014/main" id="{0DD15368-57A4-428A-905F-129ACB1E81BC}"/>
+                <a16:creationId xmlns:a16="http://schemas.microsoft.com/office/drawing/2014/main" id="{BBB7E9C9-24CE-45C8-9354-ED2DA7B40B0A}"/>
               </a:ext>
             </a:extLst>
           </p:cNvPr>
@@ -12513,7 +12513,7 @@
           <p:cNvPr id="23" name="">
             <a:extLst xmlns:a="http://schemas.openxmlformats.org/drawingml/2006/main">
               <a:ext uri="{FF2B5EF4-FFF2-40B4-BE49-F238E27FC236}">
-                <a16:creationId xmlns:a16="http://schemas.microsoft.com/office/drawing/2014/main" id="{1BE06500-6AF5-479C-AEF3-11C80C3366C5}"/>
+                <a16:creationId xmlns:a16="http://schemas.microsoft.com/office/drawing/2014/main" id="{E7C52AA3-DD9E-4461-89E9-9512DD6D79B9}"/>
               </a:ext>
             </a:extLst>
           </p:cNvPr>
@@ -12571,7 +12571,7 @@
           <p:cNvPr id="24" name="">
             <a:extLst xmlns:a="http://schemas.openxmlformats.org/drawingml/2006/main">
               <a:ext uri="{FF2B5EF4-FFF2-40B4-BE49-F238E27FC236}">
-                <a16:creationId xmlns:a16="http://schemas.microsoft.com/office/drawing/2014/main" id="{BC6B3F1C-00E8-401D-A9EE-87EE277D08F8}"/>
+                <a16:creationId xmlns:a16="http://schemas.microsoft.com/office/drawing/2014/main" id="{37B11F6D-7DDE-45E5-8C3A-05F945E25DE3}"/>
               </a:ext>
             </a:extLst>
           </p:cNvPr>
@@ -12629,7 +12629,7 @@
           <p:cNvPr id="25" name="">
             <a:extLst xmlns:a="http://schemas.openxmlformats.org/drawingml/2006/main">
               <a:ext uri="{FF2B5EF4-FFF2-40B4-BE49-F238E27FC236}">
-                <a16:creationId xmlns:a16="http://schemas.microsoft.com/office/drawing/2014/main" id="{EAA6E736-A47F-441F-AE1B-B395962BA476}"/>
+                <a16:creationId xmlns:a16="http://schemas.microsoft.com/office/drawing/2014/main" id="{FF7D1B92-312B-4478-9881-84467EF96F0D}"/>
               </a:ext>
             </a:extLst>
           </p:cNvPr>
@@ -12687,7 +12687,7 @@
           <p:cNvPr id="26" name="">
             <a:extLst xmlns:a="http://schemas.openxmlformats.org/drawingml/2006/main">
               <a:ext uri="{FF2B5EF4-FFF2-40B4-BE49-F238E27FC236}">
-                <a16:creationId xmlns:a16="http://schemas.microsoft.com/office/drawing/2014/main" id="{861556E6-5C19-4363-80C2-712DD64CC696}"/>
+                <a16:creationId xmlns:a16="http://schemas.microsoft.com/office/drawing/2014/main" id="{8621DAFD-6276-4B4C-A783-E529D71C47D9}"/>
               </a:ext>
             </a:extLst>
           </p:cNvPr>
@@ -12722,7 +12722,7 @@
           <p:cNvPr id="27" name="">
             <a:extLst xmlns:a="http://schemas.openxmlformats.org/drawingml/2006/main">
               <a:ext uri="{FF2B5EF4-FFF2-40B4-BE49-F238E27FC236}">
-                <a16:creationId xmlns:a16="http://schemas.microsoft.com/office/drawing/2014/main" id="{0AA940E6-32A3-4175-A058-9BD74DE6195C}"/>
+                <a16:creationId xmlns:a16="http://schemas.microsoft.com/office/drawing/2014/main" id="{5656BF45-083A-4BA2-86F9-CF43F031B171}"/>
               </a:ext>
             </a:extLst>
           </p:cNvPr>
@@ -12780,7 +12780,7 @@
           <p:cNvPr id="28" name="">
             <a:extLst xmlns:a="http://schemas.openxmlformats.org/drawingml/2006/main">
               <a:ext uri="{FF2B5EF4-FFF2-40B4-BE49-F238E27FC236}">
-                <a16:creationId xmlns:a16="http://schemas.microsoft.com/office/drawing/2014/main" id="{F5862A3D-DAEE-47C5-8EB7-565D2D1E2234}"/>
+                <a16:creationId xmlns:a16="http://schemas.microsoft.com/office/drawing/2014/main" id="{9D21CB8C-0E44-4BD1-AEE8-955565858F74}"/>
               </a:ext>
             </a:extLst>
           </p:cNvPr>
@@ -12838,7 +12838,7 @@
           <p:cNvPr id="29" name="">
             <a:extLst xmlns:a="http://schemas.openxmlformats.org/drawingml/2006/main">
               <a:ext uri="{FF2B5EF4-FFF2-40B4-BE49-F238E27FC236}">
-                <a16:creationId xmlns:a16="http://schemas.microsoft.com/office/drawing/2014/main" id="{B734C9ED-CCD2-4238-BC21-F9D99B4271ED}"/>
+                <a16:creationId xmlns:a16="http://schemas.microsoft.com/office/drawing/2014/main" id="{E0FCDC8D-09BB-4814-B33F-70B23133A5F7}"/>
               </a:ext>
             </a:extLst>
           </p:cNvPr>
@@ -12873,7 +12873,7 @@
           <p:cNvPr id="30" name="">
             <a:extLst xmlns:a="http://schemas.openxmlformats.org/drawingml/2006/main">
               <a:ext uri="{FF2B5EF4-FFF2-40B4-BE49-F238E27FC236}">
-                <a16:creationId xmlns:a16="http://schemas.microsoft.com/office/drawing/2014/main" id="{202DB168-F59A-44C8-88A7-AE23236D0B5C}"/>
+                <a16:creationId xmlns:a16="http://schemas.microsoft.com/office/drawing/2014/main" id="{7F33C180-5FA4-4AD0-B91C-778D7C0B4F23}"/>
               </a:ext>
             </a:extLst>
           </p:cNvPr>
@@ -12929,7 +12929,7 @@
     </p:spTree>
     <p:extLst>
       <p:ext uri="{BB962C8B-B14F-4D97-AF65-F5344CB8AC3E}">
-        <p14:creationId xmlns:p14="http://schemas.microsoft.com/office/powerpoint/2010/main" val="1800976697"/>
+        <p14:creationId xmlns:p14="http://schemas.microsoft.com/office/powerpoint/2010/main" val="886224183"/>
       </p:ext>
     </p:extLst>
   </p:cSld>
@@ -12960,7 +12960,7 @@
           <p:cNvPr id="37" name="eyebrow-3">
             <a:extLst xmlns:a="http://schemas.openxmlformats.org/drawingml/2006/main">
               <a:ext uri="{FF2B5EF4-FFF2-40B4-BE49-F238E27FC236}">
-                <a16:creationId xmlns:a16="http://schemas.microsoft.com/office/drawing/2014/main" id="{6E1D15DB-DA48-469A-9114-DD86FF93747C}"/>
+                <a16:creationId xmlns:a16="http://schemas.microsoft.com/office/drawing/2014/main" id="{A96D26D3-92E2-471F-A541-78014D6688C5}"/>
               </a:ext>
             </a:extLst>
           </p:cNvPr>
@@ -13018,7 +13018,7 @@
           <p:cNvPr id="2" name="title-3">
             <a:extLst xmlns:a="http://schemas.openxmlformats.org/drawingml/2006/main">
               <a:ext uri="{FF2B5EF4-FFF2-40B4-BE49-F238E27FC236}">
-                <a16:creationId xmlns:a16="http://schemas.microsoft.com/office/drawing/2014/main" id="{DF216249-6648-4FCA-B0FF-B7AA71DFFD90}"/>
+                <a16:creationId xmlns:a16="http://schemas.microsoft.com/office/drawing/2014/main" id="{5F331773-56CD-4E87-9091-1082BD45D513}"/>
               </a:ext>
             </a:extLst>
           </p:cNvPr>
@@ -13076,7 +13076,7 @@
           <p:cNvPr id="3" name="">
             <a:extLst xmlns:a="http://schemas.openxmlformats.org/drawingml/2006/main">
               <a:ext uri="{FF2B5EF4-FFF2-40B4-BE49-F238E27FC236}">
-                <a16:creationId xmlns:a16="http://schemas.microsoft.com/office/drawing/2014/main" id="{045E073F-8FDC-4008-A0E5-BFAA548B5D3C}"/>
+                <a16:creationId xmlns:a16="http://schemas.microsoft.com/office/drawing/2014/main" id="{CF696D4E-3043-410E-88B0-1FE5378BE19C}"/>
               </a:ext>
             </a:extLst>
           </p:cNvPr>
@@ -13107,7 +13107,7 @@
           <p:cNvPr id="4" name="">
             <a:extLst xmlns:a="http://schemas.openxmlformats.org/drawingml/2006/main">
               <a:ext uri="{FF2B5EF4-FFF2-40B4-BE49-F238E27FC236}">
-                <a16:creationId xmlns:a16="http://schemas.microsoft.com/office/drawing/2014/main" id="{51330ACE-A1C8-45DB-8808-D43152B07C79}"/>
+                <a16:creationId xmlns:a16="http://schemas.microsoft.com/office/drawing/2014/main" id="{332DA253-8130-40D6-9DC9-C784CF268A48}"/>
               </a:ext>
             </a:extLst>
           </p:cNvPr>
@@ -13155,7 +13155,7 @@
                 <a:ea typeface="Aptos"/>
                 <a:cs typeface="Aptos"/>
               </a:rPr>
-              <a:t>BES v2.0 · Propuesta ejecutiva</a:t>
+              <a:t>BES v2.0 · Aprobado y liberado</a:t>
             </a:r>
           </a:p>
         </p:txBody>
@@ -13165,7 +13165,7 @@
           <p:cNvPr id="5" name="">
             <a:extLst xmlns:a="http://schemas.openxmlformats.org/drawingml/2006/main">
               <a:ext uri="{FF2B5EF4-FFF2-40B4-BE49-F238E27FC236}">
-                <a16:creationId xmlns:a16="http://schemas.microsoft.com/office/drawing/2014/main" id="{3A63A651-9072-47E7-B99C-D4D485A6D353}"/>
+                <a16:creationId xmlns:a16="http://schemas.microsoft.com/office/drawing/2014/main" id="{3F590318-843B-40A4-8408-11CD350FE802}"/>
               </a:ext>
             </a:extLst>
           </p:cNvPr>
@@ -13223,7 +13223,7 @@
           <p:cNvPr id="6" name="">
             <a:extLst xmlns:a="http://schemas.openxmlformats.org/drawingml/2006/main">
               <a:ext uri="{FF2B5EF4-FFF2-40B4-BE49-F238E27FC236}">
-                <a16:creationId xmlns:a16="http://schemas.microsoft.com/office/drawing/2014/main" id="{C31257A8-6E3E-4828-91AC-4DF1BFB7321E}"/>
+                <a16:creationId xmlns:a16="http://schemas.microsoft.com/office/drawing/2014/main" id="{6CE11669-A9A9-497A-AE1E-B598ECBF3DED}"/>
               </a:ext>
             </a:extLst>
           </p:cNvPr>
@@ -13258,7 +13258,7 @@
           <p:cNvPr id="7" name="">
             <a:extLst xmlns:a="http://schemas.openxmlformats.org/drawingml/2006/main">
               <a:ext uri="{FF2B5EF4-FFF2-40B4-BE49-F238E27FC236}">
-                <a16:creationId xmlns:a16="http://schemas.microsoft.com/office/drawing/2014/main" id="{645E43A5-1B1C-40ED-A574-69AEB0E90277}"/>
+                <a16:creationId xmlns:a16="http://schemas.microsoft.com/office/drawing/2014/main" id="{8230CF47-B845-4F8D-A346-CF86DEF046F2}"/>
               </a:ext>
             </a:extLst>
           </p:cNvPr>
@@ -13289,7 +13289,7 @@
           <p:cNvPr id="8" name="">
             <a:extLst xmlns:a="http://schemas.openxmlformats.org/drawingml/2006/main">
               <a:ext uri="{FF2B5EF4-FFF2-40B4-BE49-F238E27FC236}">
-                <a16:creationId xmlns:a16="http://schemas.microsoft.com/office/drawing/2014/main" id="{9048B78C-15D6-48DB-BB33-14CD9CAE34E9}"/>
+                <a16:creationId xmlns:a16="http://schemas.microsoft.com/office/drawing/2014/main" id="{FBBB49F5-73F0-4BBB-9992-310EE0E1B708}"/>
               </a:ext>
             </a:extLst>
           </p:cNvPr>
@@ -13347,7 +13347,7 @@
           <p:cNvPr id="9" name="">
             <a:extLst xmlns:a="http://schemas.openxmlformats.org/drawingml/2006/main">
               <a:ext uri="{FF2B5EF4-FFF2-40B4-BE49-F238E27FC236}">
-                <a16:creationId xmlns:a16="http://schemas.microsoft.com/office/drawing/2014/main" id="{A1C7C3E0-2E1D-4ABD-8BF5-9182580FB78D}"/>
+                <a16:creationId xmlns:a16="http://schemas.microsoft.com/office/drawing/2014/main" id="{2383C9D3-537F-4E39-BC7E-D79CB2987BFB}"/>
               </a:ext>
             </a:extLst>
           </p:cNvPr>
@@ -13405,7 +13405,7 @@
           <p:cNvPr id="10" name="">
             <a:extLst xmlns:a="http://schemas.openxmlformats.org/drawingml/2006/main">
               <a:ext uri="{FF2B5EF4-FFF2-40B4-BE49-F238E27FC236}">
-                <a16:creationId xmlns:a16="http://schemas.microsoft.com/office/drawing/2014/main" id="{94695950-1D63-4EE0-9834-6750723CF27D}"/>
+                <a16:creationId xmlns:a16="http://schemas.microsoft.com/office/drawing/2014/main" id="{B55DCFC6-64DD-4E27-A9D0-DF19225008FD}"/>
               </a:ext>
             </a:extLst>
           </p:cNvPr>
@@ -13463,7 +13463,7 @@
           <p:cNvPr id="11" name="">
             <a:extLst xmlns:a="http://schemas.openxmlformats.org/drawingml/2006/main">
               <a:ext uri="{FF2B5EF4-FFF2-40B4-BE49-F238E27FC236}">
-                <a16:creationId xmlns:a16="http://schemas.microsoft.com/office/drawing/2014/main" id="{9E9C242E-72FE-4287-BAE9-6B7A5924D020}"/>
+                <a16:creationId xmlns:a16="http://schemas.microsoft.com/office/drawing/2014/main" id="{BE242679-FFCE-46F7-9436-CBBA02D7A5F9}"/>
               </a:ext>
             </a:extLst>
           </p:cNvPr>
@@ -13521,7 +13521,7 @@
           <p:cNvPr id="12" name="">
             <a:extLst xmlns:a="http://schemas.openxmlformats.org/drawingml/2006/main">
               <a:ext uri="{FF2B5EF4-FFF2-40B4-BE49-F238E27FC236}">
-                <a16:creationId xmlns:a16="http://schemas.microsoft.com/office/drawing/2014/main" id="{9F038522-20B2-4959-9877-08790AE19C4C}"/>
+                <a16:creationId xmlns:a16="http://schemas.microsoft.com/office/drawing/2014/main" id="{1450B56E-6F23-4151-92EF-2AA6AC1DFA73}"/>
               </a:ext>
             </a:extLst>
           </p:cNvPr>
@@ -13579,7 +13579,7 @@
           <p:cNvPr id="13" name="">
             <a:extLst xmlns:a="http://schemas.openxmlformats.org/drawingml/2006/main">
               <a:ext uri="{FF2B5EF4-FFF2-40B4-BE49-F238E27FC236}">
-                <a16:creationId xmlns:a16="http://schemas.microsoft.com/office/drawing/2014/main" id="{4AFCB787-38BA-4D76-A46E-3C3B3D120A9E}"/>
+                <a16:creationId xmlns:a16="http://schemas.microsoft.com/office/drawing/2014/main" id="{D40C14DC-AFAD-4478-9C34-6E2980F3A3E3}"/>
               </a:ext>
             </a:extLst>
           </p:cNvPr>
@@ -13614,7 +13614,7 @@
           <p:cNvPr id="14" name="">
             <a:extLst xmlns:a="http://schemas.openxmlformats.org/drawingml/2006/main">
               <a:ext uri="{FF2B5EF4-FFF2-40B4-BE49-F238E27FC236}">
-                <a16:creationId xmlns:a16="http://schemas.microsoft.com/office/drawing/2014/main" id="{F7778D0D-6C09-4499-A1A3-19DFF50DE08E}"/>
+                <a16:creationId xmlns:a16="http://schemas.microsoft.com/office/drawing/2014/main" id="{0E0CEE2B-BEE5-455D-9378-8EC5BE3E430A}"/>
               </a:ext>
             </a:extLst>
           </p:cNvPr>
@@ -13645,7 +13645,7 @@
           <p:cNvPr id="15" name="">
             <a:extLst xmlns:a="http://schemas.openxmlformats.org/drawingml/2006/main">
               <a:ext uri="{FF2B5EF4-FFF2-40B4-BE49-F238E27FC236}">
-                <a16:creationId xmlns:a16="http://schemas.microsoft.com/office/drawing/2014/main" id="{6B55C300-16AE-4515-B2C8-16317E993679}"/>
+                <a16:creationId xmlns:a16="http://schemas.microsoft.com/office/drawing/2014/main" id="{4693A08E-352E-4775-BCA5-E6C1212CDEE6}"/>
               </a:ext>
             </a:extLst>
           </p:cNvPr>
@@ -13703,7 +13703,7 @@
           <p:cNvPr id="16" name="">
             <a:extLst xmlns:a="http://schemas.openxmlformats.org/drawingml/2006/main">
               <a:ext uri="{FF2B5EF4-FFF2-40B4-BE49-F238E27FC236}">
-                <a16:creationId xmlns:a16="http://schemas.microsoft.com/office/drawing/2014/main" id="{ABDA55FD-7122-4502-B2FC-3BA9B54D8342}"/>
+                <a16:creationId xmlns:a16="http://schemas.microsoft.com/office/drawing/2014/main" id="{9000F25E-4545-4E17-B250-87B03AA3B7FB}"/>
               </a:ext>
             </a:extLst>
           </p:cNvPr>
@@ -13761,7 +13761,7 @@
           <p:cNvPr id="17" name="">
             <a:extLst xmlns:a="http://schemas.openxmlformats.org/drawingml/2006/main">
               <a:ext uri="{FF2B5EF4-FFF2-40B4-BE49-F238E27FC236}">
-                <a16:creationId xmlns:a16="http://schemas.microsoft.com/office/drawing/2014/main" id="{204083D0-E436-44CA-B8C6-DCB7C4F13BD1}"/>
+                <a16:creationId xmlns:a16="http://schemas.microsoft.com/office/drawing/2014/main" id="{81C7C122-084D-4A1D-A864-56E074F10BDF}"/>
               </a:ext>
             </a:extLst>
           </p:cNvPr>
@@ -13819,7 +13819,7 @@
           <p:cNvPr id="18" name="">
             <a:extLst xmlns:a="http://schemas.openxmlformats.org/drawingml/2006/main">
               <a:ext uri="{FF2B5EF4-FFF2-40B4-BE49-F238E27FC236}">
-                <a16:creationId xmlns:a16="http://schemas.microsoft.com/office/drawing/2014/main" id="{B68BDD11-A708-44D8-B655-1225AEDF0DE7}"/>
+                <a16:creationId xmlns:a16="http://schemas.microsoft.com/office/drawing/2014/main" id="{E636EFE1-C3FD-4AD4-995F-C6A8CCF2BD79}"/>
               </a:ext>
             </a:extLst>
           </p:cNvPr>
@@ -13877,7 +13877,7 @@
           <p:cNvPr id="19" name="">
             <a:extLst xmlns:a="http://schemas.openxmlformats.org/drawingml/2006/main">
               <a:ext uri="{FF2B5EF4-FFF2-40B4-BE49-F238E27FC236}">
-                <a16:creationId xmlns:a16="http://schemas.microsoft.com/office/drawing/2014/main" id="{D0F4D081-DAE8-450A-8BB8-F18D3A352BA2}"/>
+                <a16:creationId xmlns:a16="http://schemas.microsoft.com/office/drawing/2014/main" id="{2AF3B595-35CC-44FF-A2C1-CAD3F93393E5}"/>
               </a:ext>
             </a:extLst>
           </p:cNvPr>
@@ -13935,7 +13935,7 @@
           <p:cNvPr id="20" name="">
             <a:extLst xmlns:a="http://schemas.openxmlformats.org/drawingml/2006/main">
               <a:ext uri="{FF2B5EF4-FFF2-40B4-BE49-F238E27FC236}">
-                <a16:creationId xmlns:a16="http://schemas.microsoft.com/office/drawing/2014/main" id="{B7991AEC-563C-4CED-8592-250C9F4A04B0}"/>
+                <a16:creationId xmlns:a16="http://schemas.microsoft.com/office/drawing/2014/main" id="{A1CA1149-EE8D-47C3-B346-4D542B9A141C}"/>
               </a:ext>
             </a:extLst>
           </p:cNvPr>
@@ -13970,7 +13970,7 @@
           <p:cNvPr id="21" name="">
             <a:extLst xmlns:a="http://schemas.openxmlformats.org/drawingml/2006/main">
               <a:ext uri="{FF2B5EF4-FFF2-40B4-BE49-F238E27FC236}">
-                <a16:creationId xmlns:a16="http://schemas.microsoft.com/office/drawing/2014/main" id="{447A2534-743E-4CB2-82BE-53FD8E366E5C}"/>
+                <a16:creationId xmlns:a16="http://schemas.microsoft.com/office/drawing/2014/main" id="{5CBD36D7-181A-4CDE-AED9-3557813CBF29}"/>
               </a:ext>
             </a:extLst>
           </p:cNvPr>
@@ -14001,7 +14001,7 @@
           <p:cNvPr id="22" name="">
             <a:extLst xmlns:a="http://schemas.openxmlformats.org/drawingml/2006/main">
               <a:ext uri="{FF2B5EF4-FFF2-40B4-BE49-F238E27FC236}">
-                <a16:creationId xmlns:a16="http://schemas.microsoft.com/office/drawing/2014/main" id="{6C870EE7-BF3D-4AAF-AA79-0B2C632E8695}"/>
+                <a16:creationId xmlns:a16="http://schemas.microsoft.com/office/drawing/2014/main" id="{C8667B01-9AB3-477F-A65C-DC2DDAA0CD4C}"/>
               </a:ext>
             </a:extLst>
           </p:cNvPr>
@@ -14059,7 +14059,7 @@
           <p:cNvPr id="23" name="">
             <a:extLst xmlns:a="http://schemas.openxmlformats.org/drawingml/2006/main">
               <a:ext uri="{FF2B5EF4-FFF2-40B4-BE49-F238E27FC236}">
-                <a16:creationId xmlns:a16="http://schemas.microsoft.com/office/drawing/2014/main" id="{4F816039-5F9D-42F4-A8DC-94D25E5138DE}"/>
+                <a16:creationId xmlns:a16="http://schemas.microsoft.com/office/drawing/2014/main" id="{A5C4ADA0-5A35-4C26-916A-4549802E7791}"/>
               </a:ext>
             </a:extLst>
           </p:cNvPr>
@@ -14117,7 +14117,7 @@
           <p:cNvPr id="24" name="">
             <a:extLst xmlns:a="http://schemas.openxmlformats.org/drawingml/2006/main">
               <a:ext uri="{FF2B5EF4-FFF2-40B4-BE49-F238E27FC236}">
-                <a16:creationId xmlns:a16="http://schemas.microsoft.com/office/drawing/2014/main" id="{FD435E6E-AF4D-40CF-AC0B-3F201310C32E}"/>
+                <a16:creationId xmlns:a16="http://schemas.microsoft.com/office/drawing/2014/main" id="{3712E30D-5825-4B7A-82CB-4B68D42D491D}"/>
               </a:ext>
             </a:extLst>
           </p:cNvPr>
@@ -14175,7 +14175,7 @@
           <p:cNvPr id="25" name="">
             <a:extLst xmlns:a="http://schemas.openxmlformats.org/drawingml/2006/main">
               <a:ext uri="{FF2B5EF4-FFF2-40B4-BE49-F238E27FC236}">
-                <a16:creationId xmlns:a16="http://schemas.microsoft.com/office/drawing/2014/main" id="{AA119A2D-57AC-4199-97B6-37ED6A0E38C2}"/>
+                <a16:creationId xmlns:a16="http://schemas.microsoft.com/office/drawing/2014/main" id="{A2EC404B-BD78-41DA-8F2A-8FD903DE5428}"/>
               </a:ext>
             </a:extLst>
           </p:cNvPr>
@@ -14233,7 +14233,7 @@
           <p:cNvPr id="26" name="">
             <a:extLst xmlns:a="http://schemas.openxmlformats.org/drawingml/2006/main">
               <a:ext uri="{FF2B5EF4-FFF2-40B4-BE49-F238E27FC236}">
-                <a16:creationId xmlns:a16="http://schemas.microsoft.com/office/drawing/2014/main" id="{94B74F9E-D233-4501-8FFC-DF55A406FA48}"/>
+                <a16:creationId xmlns:a16="http://schemas.microsoft.com/office/drawing/2014/main" id="{34EE963D-6C5C-40A2-859F-2C5E4C640B9A}"/>
               </a:ext>
             </a:extLst>
           </p:cNvPr>
@@ -14291,7 +14291,7 @@
           <p:cNvPr id="27" name="">
             <a:extLst xmlns:a="http://schemas.openxmlformats.org/drawingml/2006/main">
               <a:ext uri="{FF2B5EF4-FFF2-40B4-BE49-F238E27FC236}">
-                <a16:creationId xmlns:a16="http://schemas.microsoft.com/office/drawing/2014/main" id="{57ADAE40-051A-401D-A0C5-A30A08995601}"/>
+                <a16:creationId xmlns:a16="http://schemas.microsoft.com/office/drawing/2014/main" id="{ACB7A51D-9EA5-4A66-9268-0CAFAF3644D2}"/>
               </a:ext>
             </a:extLst>
           </p:cNvPr>
@@ -14326,7 +14326,7 @@
           <p:cNvPr id="28" name="">
             <a:extLst xmlns:a="http://schemas.openxmlformats.org/drawingml/2006/main">
               <a:ext uri="{FF2B5EF4-FFF2-40B4-BE49-F238E27FC236}">
-                <a16:creationId xmlns:a16="http://schemas.microsoft.com/office/drawing/2014/main" id="{6A23C4FD-93B2-40B0-9364-294F615A0A4E}"/>
+                <a16:creationId xmlns:a16="http://schemas.microsoft.com/office/drawing/2014/main" id="{1C727118-A979-49D7-ADE5-CFD2F0FBCF36}"/>
               </a:ext>
             </a:extLst>
           </p:cNvPr>
@@ -14357,7 +14357,7 @@
           <p:cNvPr id="29" name="">
             <a:extLst xmlns:a="http://schemas.openxmlformats.org/drawingml/2006/main">
               <a:ext uri="{FF2B5EF4-FFF2-40B4-BE49-F238E27FC236}">
-                <a16:creationId xmlns:a16="http://schemas.microsoft.com/office/drawing/2014/main" id="{FD8FFED7-5F0B-4271-ACE1-5AF63D3A487E}"/>
+                <a16:creationId xmlns:a16="http://schemas.microsoft.com/office/drawing/2014/main" id="{79AE3F8A-F754-4FC1-9789-5905F5C79F00}"/>
               </a:ext>
             </a:extLst>
           </p:cNvPr>
@@ -14415,7 +14415,7 @@
           <p:cNvPr id="30" name="">
             <a:extLst xmlns:a="http://schemas.openxmlformats.org/drawingml/2006/main">
               <a:ext uri="{FF2B5EF4-FFF2-40B4-BE49-F238E27FC236}">
-                <a16:creationId xmlns:a16="http://schemas.microsoft.com/office/drawing/2014/main" id="{4DB8D5FE-CC12-481E-B78C-96AE5CCE7E60}"/>
+                <a16:creationId xmlns:a16="http://schemas.microsoft.com/office/drawing/2014/main" id="{AFB56ABE-F0A3-4ED1-85D4-7F8CA9838B69}"/>
               </a:ext>
             </a:extLst>
           </p:cNvPr>
@@ -14473,7 +14473,7 @@
           <p:cNvPr id="31" name="">
             <a:extLst xmlns:a="http://schemas.openxmlformats.org/drawingml/2006/main">
               <a:ext uri="{FF2B5EF4-FFF2-40B4-BE49-F238E27FC236}">
-                <a16:creationId xmlns:a16="http://schemas.microsoft.com/office/drawing/2014/main" id="{BA9D9E64-E4A2-4F4F-9474-BEBF9B375EDB}"/>
+                <a16:creationId xmlns:a16="http://schemas.microsoft.com/office/drawing/2014/main" id="{A442C4ED-4C23-4E12-AA23-BCFE09103334}"/>
               </a:ext>
             </a:extLst>
           </p:cNvPr>
@@ -14531,7 +14531,7 @@
           <p:cNvPr id="32" name="">
             <a:extLst xmlns:a="http://schemas.openxmlformats.org/drawingml/2006/main">
               <a:ext uri="{FF2B5EF4-FFF2-40B4-BE49-F238E27FC236}">
-                <a16:creationId xmlns:a16="http://schemas.microsoft.com/office/drawing/2014/main" id="{008D991A-A359-490E-9CC0-140D21C5B417}"/>
+                <a16:creationId xmlns:a16="http://schemas.microsoft.com/office/drawing/2014/main" id="{6F246590-C1B4-4338-8810-CA92506F19C8}"/>
               </a:ext>
             </a:extLst>
           </p:cNvPr>
@@ -14589,7 +14589,7 @@
           <p:cNvPr id="33" name="">
             <a:extLst xmlns:a="http://schemas.openxmlformats.org/drawingml/2006/main">
               <a:ext uri="{FF2B5EF4-FFF2-40B4-BE49-F238E27FC236}">
-                <a16:creationId xmlns:a16="http://schemas.microsoft.com/office/drawing/2014/main" id="{5F665BC6-3877-404A-B69C-E7F06575C000}"/>
+                <a16:creationId xmlns:a16="http://schemas.microsoft.com/office/drawing/2014/main" id="{9C118D8E-15CA-47EE-8E9E-873599B2DD2E}"/>
               </a:ext>
             </a:extLst>
           </p:cNvPr>
@@ -14624,7 +14624,7 @@
           <p:cNvPr id="34" name="">
             <a:extLst xmlns:a="http://schemas.openxmlformats.org/drawingml/2006/main">
               <a:ext uri="{FF2B5EF4-FFF2-40B4-BE49-F238E27FC236}">
-                <a16:creationId xmlns:a16="http://schemas.microsoft.com/office/drawing/2014/main" id="{AAB93D27-6994-4912-89C0-37CB05E52721}"/>
+                <a16:creationId xmlns:a16="http://schemas.microsoft.com/office/drawing/2014/main" id="{6F660BD0-E492-4F90-94D9-9F82D0913C38}"/>
               </a:ext>
             </a:extLst>
           </p:cNvPr>
@@ -14682,7 +14682,7 @@
           <p:cNvPr id="35" name="">
             <a:extLst xmlns:a="http://schemas.openxmlformats.org/drawingml/2006/main">
               <a:ext uri="{FF2B5EF4-FFF2-40B4-BE49-F238E27FC236}">
-                <a16:creationId xmlns:a16="http://schemas.microsoft.com/office/drawing/2014/main" id="{B7E8AD24-7AF7-4B83-B673-4F3DEAECE280}"/>
+                <a16:creationId xmlns:a16="http://schemas.microsoft.com/office/drawing/2014/main" id="{E9B8376D-BC3E-4E5F-B49E-C3445F0DFA64}"/>
               </a:ext>
             </a:extLst>
           </p:cNvPr>
@@ -14740,7 +14740,7 @@
           <p:cNvPr id="36" name="">
             <a:extLst xmlns:a="http://schemas.openxmlformats.org/drawingml/2006/main">
               <a:ext uri="{FF2B5EF4-FFF2-40B4-BE49-F238E27FC236}">
-                <a16:creationId xmlns:a16="http://schemas.microsoft.com/office/drawing/2014/main" id="{E72682CE-4C9E-4D21-8460-7EC2AB71FEBC}"/>
+                <a16:creationId xmlns:a16="http://schemas.microsoft.com/office/drawing/2014/main" id="{6AC73CF9-3AF6-44FB-89DA-0B4A10C6874F}"/>
               </a:ext>
             </a:extLst>
           </p:cNvPr>
@@ -14796,7 +14796,7 @@
     </p:spTree>
     <p:extLst>
       <p:ext uri="{BB962C8B-B14F-4D97-AF65-F5344CB8AC3E}">
-        <p14:creationId xmlns:p14="http://schemas.microsoft.com/office/powerpoint/2010/main" val="1301021623"/>
+        <p14:creationId xmlns:p14="http://schemas.microsoft.com/office/powerpoint/2010/main" val="1588209989"/>
       </p:ext>
     </p:extLst>
   </p:cSld>
@@ -14827,7 +14827,7 @@
           <p:cNvPr id="64" name="eyebrow-4">
             <a:extLst xmlns:a="http://schemas.openxmlformats.org/drawingml/2006/main">
               <a:ext uri="{FF2B5EF4-FFF2-40B4-BE49-F238E27FC236}">
-                <a16:creationId xmlns:a16="http://schemas.microsoft.com/office/drawing/2014/main" id="{DA3CD65B-380E-4FCF-A185-8ED0891B86DA}"/>
+                <a16:creationId xmlns:a16="http://schemas.microsoft.com/office/drawing/2014/main" id="{91362A65-CFFF-47E3-8488-8B2774E8063F}"/>
               </a:ext>
             </a:extLst>
           </p:cNvPr>
@@ -14885,7 +14885,7 @@
           <p:cNvPr id="2" name="title-4">
             <a:extLst xmlns:a="http://schemas.openxmlformats.org/drawingml/2006/main">
               <a:ext uri="{FF2B5EF4-FFF2-40B4-BE49-F238E27FC236}">
-                <a16:creationId xmlns:a16="http://schemas.microsoft.com/office/drawing/2014/main" id="{0604E899-8A50-4C9C-9967-792A00657289}"/>
+                <a16:creationId xmlns:a16="http://schemas.microsoft.com/office/drawing/2014/main" id="{B254F8CA-3AE2-4987-B773-C393E223E71D}"/>
               </a:ext>
             </a:extLst>
           </p:cNvPr>
@@ -14943,7 +14943,7 @@
           <p:cNvPr id="3" name="">
             <a:extLst xmlns:a="http://schemas.openxmlformats.org/drawingml/2006/main">
               <a:ext uri="{FF2B5EF4-FFF2-40B4-BE49-F238E27FC236}">
-                <a16:creationId xmlns:a16="http://schemas.microsoft.com/office/drawing/2014/main" id="{9400855F-5197-4806-9858-133B67DCEDBF}"/>
+                <a16:creationId xmlns:a16="http://schemas.microsoft.com/office/drawing/2014/main" id="{FC45F4F3-8ACA-47A2-9595-E0A67CA1FFDF}"/>
               </a:ext>
             </a:extLst>
           </p:cNvPr>
@@ -14974,7 +14974,7 @@
           <p:cNvPr id="4" name="">
             <a:extLst xmlns:a="http://schemas.openxmlformats.org/drawingml/2006/main">
               <a:ext uri="{FF2B5EF4-FFF2-40B4-BE49-F238E27FC236}">
-                <a16:creationId xmlns:a16="http://schemas.microsoft.com/office/drawing/2014/main" id="{EB1FFE04-2551-4C59-9C09-703473327C21}"/>
+                <a16:creationId xmlns:a16="http://schemas.microsoft.com/office/drawing/2014/main" id="{58F400B3-F00C-4463-92D7-76B5071FE727}"/>
               </a:ext>
             </a:extLst>
           </p:cNvPr>
@@ -15022,7 +15022,7 @@
                 <a:ea typeface="Aptos"/>
                 <a:cs typeface="Aptos"/>
               </a:rPr>
-              <a:t>BES v2.0 · Propuesta ejecutiva</a:t>
+              <a:t>BES v2.0 · Aprobado y liberado</a:t>
             </a:r>
           </a:p>
         </p:txBody>
@@ -15032,7 +15032,7 @@
           <p:cNvPr id="5" name="">
             <a:extLst xmlns:a="http://schemas.openxmlformats.org/drawingml/2006/main">
               <a:ext uri="{FF2B5EF4-FFF2-40B4-BE49-F238E27FC236}">
-                <a16:creationId xmlns:a16="http://schemas.microsoft.com/office/drawing/2014/main" id="{B72244DE-E1CD-47BA-AE86-21B6547DAD29}"/>
+                <a16:creationId xmlns:a16="http://schemas.microsoft.com/office/drawing/2014/main" id="{5D040828-FB87-4682-9047-FB332A975F11}"/>
               </a:ext>
             </a:extLst>
           </p:cNvPr>
@@ -15090,7 +15090,7 @@
           <p:cNvPr id="6" name="">
             <a:extLst xmlns:a="http://schemas.openxmlformats.org/drawingml/2006/main">
               <a:ext uri="{FF2B5EF4-FFF2-40B4-BE49-F238E27FC236}">
-                <a16:creationId xmlns:a16="http://schemas.microsoft.com/office/drawing/2014/main" id="{F01AE76E-E573-4ACA-B0E8-482A0E440E9A}"/>
+                <a16:creationId xmlns:a16="http://schemas.microsoft.com/office/drawing/2014/main" id="{EEF06F90-6DE3-4F1F-BCDB-6E16746E7B14}"/>
               </a:ext>
             </a:extLst>
           </p:cNvPr>
@@ -15125,7 +15125,7 @@
           <p:cNvPr id="7" name="">
             <a:extLst xmlns:a="http://schemas.openxmlformats.org/drawingml/2006/main">
               <a:ext uri="{FF2B5EF4-FFF2-40B4-BE49-F238E27FC236}">
-                <a16:creationId xmlns:a16="http://schemas.microsoft.com/office/drawing/2014/main" id="{65C1E297-4718-4E05-889F-07B7DBB6FFE3}"/>
+                <a16:creationId xmlns:a16="http://schemas.microsoft.com/office/drawing/2014/main" id="{A1DC5CB0-26C0-4D71-95DE-6440EF84304D}"/>
               </a:ext>
             </a:extLst>
           </p:cNvPr>
@@ -15158,7 +15158,7 @@
           <p:cNvPr id="8" name="">
             <a:extLst xmlns:a="http://schemas.openxmlformats.org/drawingml/2006/main">
               <a:ext uri="{FF2B5EF4-FFF2-40B4-BE49-F238E27FC236}">
-                <a16:creationId xmlns:a16="http://schemas.microsoft.com/office/drawing/2014/main" id="{C02B16AD-BCD3-485A-8629-4D0A925A3AC1}"/>
+                <a16:creationId xmlns:a16="http://schemas.microsoft.com/office/drawing/2014/main" id="{F643E790-DC99-49CB-8AD6-C4CF563300F1}"/>
               </a:ext>
             </a:extLst>
           </p:cNvPr>
@@ -15216,7 +15216,7 @@
           <p:cNvPr id="9" name="">
             <a:extLst xmlns:a="http://schemas.openxmlformats.org/drawingml/2006/main">
               <a:ext uri="{FF2B5EF4-FFF2-40B4-BE49-F238E27FC236}">
-                <a16:creationId xmlns:a16="http://schemas.microsoft.com/office/drawing/2014/main" id="{729F094C-8BA0-4E71-8E49-37CB41DFB9F3}"/>
+                <a16:creationId xmlns:a16="http://schemas.microsoft.com/office/drawing/2014/main" id="{B58BD7A1-4FE4-4126-B62A-E154AE150D27}"/>
               </a:ext>
             </a:extLst>
           </p:cNvPr>
@@ -15274,7 +15274,7 @@
           <p:cNvPr id="10" name="">
             <a:extLst xmlns:a="http://schemas.openxmlformats.org/drawingml/2006/main">
               <a:ext uri="{FF2B5EF4-FFF2-40B4-BE49-F238E27FC236}">
-                <a16:creationId xmlns:a16="http://schemas.microsoft.com/office/drawing/2014/main" id="{92D674B1-C507-4CED-8AF7-31790EB2A699}"/>
+                <a16:creationId xmlns:a16="http://schemas.microsoft.com/office/drawing/2014/main" id="{CEFC9183-7049-40B5-89D2-5B3AACD0261D}"/>
               </a:ext>
             </a:extLst>
           </p:cNvPr>
@@ -15309,7 +15309,7 @@
           <p:cNvPr id="11" name="">
             <a:extLst xmlns:a="http://schemas.openxmlformats.org/drawingml/2006/main">
               <a:ext uri="{FF2B5EF4-FFF2-40B4-BE49-F238E27FC236}">
-                <a16:creationId xmlns:a16="http://schemas.microsoft.com/office/drawing/2014/main" id="{6D5551C3-C018-4914-8A26-DE7A189EBE58}"/>
+                <a16:creationId xmlns:a16="http://schemas.microsoft.com/office/drawing/2014/main" id="{25A98713-82E5-439F-950D-57BCBDCCCCCF}"/>
               </a:ext>
             </a:extLst>
           </p:cNvPr>
@@ -15342,7 +15342,7 @@
           <p:cNvPr id="12" name="">
             <a:extLst xmlns:a="http://schemas.openxmlformats.org/drawingml/2006/main">
               <a:ext uri="{FF2B5EF4-FFF2-40B4-BE49-F238E27FC236}">
-                <a16:creationId xmlns:a16="http://schemas.microsoft.com/office/drawing/2014/main" id="{FD0E2831-9A8A-4103-9AAF-01F70662A0C2}"/>
+                <a16:creationId xmlns:a16="http://schemas.microsoft.com/office/drawing/2014/main" id="{10313B9B-0B97-44C0-91ED-FDB3BF9AAB51}"/>
               </a:ext>
             </a:extLst>
           </p:cNvPr>
@@ -15400,7 +15400,7 @@
           <p:cNvPr id="13" name="">
             <a:extLst xmlns:a="http://schemas.openxmlformats.org/drawingml/2006/main">
               <a:ext uri="{FF2B5EF4-FFF2-40B4-BE49-F238E27FC236}">
-                <a16:creationId xmlns:a16="http://schemas.microsoft.com/office/drawing/2014/main" id="{7FA6C4DF-8C31-44D8-AA56-BC23ECEC0971}"/>
+                <a16:creationId xmlns:a16="http://schemas.microsoft.com/office/drawing/2014/main" id="{311B9DF5-7B03-4620-9764-0F1EA324AB71}"/>
               </a:ext>
             </a:extLst>
           </p:cNvPr>
@@ -15458,7 +15458,7 @@
           <p:cNvPr id="14" name="">
             <a:extLst xmlns:a="http://schemas.openxmlformats.org/drawingml/2006/main">
               <a:ext uri="{FF2B5EF4-FFF2-40B4-BE49-F238E27FC236}">
-                <a16:creationId xmlns:a16="http://schemas.microsoft.com/office/drawing/2014/main" id="{050F2AD9-F1CD-4053-8314-227984E2DADF}"/>
+                <a16:creationId xmlns:a16="http://schemas.microsoft.com/office/drawing/2014/main" id="{F61D77B1-9DA5-4BE0-A703-59E5CC60A806}"/>
               </a:ext>
             </a:extLst>
           </p:cNvPr>
@@ -15493,7 +15493,7 @@
           <p:cNvPr id="15" name="">
             <a:extLst xmlns:a="http://schemas.openxmlformats.org/drawingml/2006/main">
               <a:ext uri="{FF2B5EF4-FFF2-40B4-BE49-F238E27FC236}">
-                <a16:creationId xmlns:a16="http://schemas.microsoft.com/office/drawing/2014/main" id="{7FF72451-F203-4BD6-9E19-509095497F8E}"/>
+                <a16:creationId xmlns:a16="http://schemas.microsoft.com/office/drawing/2014/main" id="{84721764-415F-4EBF-848F-F7C94623DF71}"/>
               </a:ext>
             </a:extLst>
           </p:cNvPr>
@@ -15526,7 +15526,7 @@
           <p:cNvPr id="16" name="">
             <a:extLst xmlns:a="http://schemas.openxmlformats.org/drawingml/2006/main">
               <a:ext uri="{FF2B5EF4-FFF2-40B4-BE49-F238E27FC236}">
-                <a16:creationId xmlns:a16="http://schemas.microsoft.com/office/drawing/2014/main" id="{737160A6-D17E-4258-91E2-8585D060C0AD}"/>
+                <a16:creationId xmlns:a16="http://schemas.microsoft.com/office/drawing/2014/main" id="{BF59C778-E853-4E31-9B14-CA30035CC7FB}"/>
               </a:ext>
             </a:extLst>
           </p:cNvPr>
@@ -15584,7 +15584,7 @@
           <p:cNvPr id="17" name="">
             <a:extLst xmlns:a="http://schemas.openxmlformats.org/drawingml/2006/main">
               <a:ext uri="{FF2B5EF4-FFF2-40B4-BE49-F238E27FC236}">
-                <a16:creationId xmlns:a16="http://schemas.microsoft.com/office/drawing/2014/main" id="{03CB9C47-FFBC-4FB9-9E62-AE55B190BE3E}"/>
+                <a16:creationId xmlns:a16="http://schemas.microsoft.com/office/drawing/2014/main" id="{6FA67D20-6D13-4F1B-821A-2FE9189F73DD}"/>
               </a:ext>
             </a:extLst>
           </p:cNvPr>
@@ -15642,7 +15642,7 @@
           <p:cNvPr id="18" name="">
             <a:extLst xmlns:a="http://schemas.openxmlformats.org/drawingml/2006/main">
               <a:ext uri="{FF2B5EF4-FFF2-40B4-BE49-F238E27FC236}">
-                <a16:creationId xmlns:a16="http://schemas.microsoft.com/office/drawing/2014/main" id="{422B218B-ACEC-421E-9757-6734A3E8E319}"/>
+                <a16:creationId xmlns:a16="http://schemas.microsoft.com/office/drawing/2014/main" id="{03D733BD-034C-4A7B-87DE-64DA019795AE}"/>
               </a:ext>
             </a:extLst>
           </p:cNvPr>
@@ -15677,7 +15677,7 @@
           <p:cNvPr id="19" name="">
             <a:extLst xmlns:a="http://schemas.openxmlformats.org/drawingml/2006/main">
               <a:ext uri="{FF2B5EF4-FFF2-40B4-BE49-F238E27FC236}">
-                <a16:creationId xmlns:a16="http://schemas.microsoft.com/office/drawing/2014/main" id="{64BE1123-F301-44C1-8E9B-9B4237168CBF}"/>
+                <a16:creationId xmlns:a16="http://schemas.microsoft.com/office/drawing/2014/main" id="{FBA934C3-D7E0-4FBF-8240-923D50F93478}"/>
               </a:ext>
             </a:extLst>
           </p:cNvPr>
@@ -15710,7 +15710,7 @@
           <p:cNvPr id="20" name="">
             <a:extLst xmlns:a="http://schemas.openxmlformats.org/drawingml/2006/main">
               <a:ext uri="{FF2B5EF4-FFF2-40B4-BE49-F238E27FC236}">
-                <a16:creationId xmlns:a16="http://schemas.microsoft.com/office/drawing/2014/main" id="{456D0081-E314-413C-BF11-070035034B28}"/>
+                <a16:creationId xmlns:a16="http://schemas.microsoft.com/office/drawing/2014/main" id="{D8CAC5A7-A9BF-4DE7-8F7E-5F1E3D268619}"/>
               </a:ext>
             </a:extLst>
           </p:cNvPr>
@@ -15768,7 +15768,7 @@
           <p:cNvPr id="21" name="">
             <a:extLst xmlns:a="http://schemas.openxmlformats.org/drawingml/2006/main">
               <a:ext uri="{FF2B5EF4-FFF2-40B4-BE49-F238E27FC236}">
-                <a16:creationId xmlns:a16="http://schemas.microsoft.com/office/drawing/2014/main" id="{487B34C4-0B13-456A-8F9F-B264528AF7FF}"/>
+                <a16:creationId xmlns:a16="http://schemas.microsoft.com/office/drawing/2014/main" id="{03271534-99C8-482D-AE52-6B6E9F539085}"/>
               </a:ext>
             </a:extLst>
           </p:cNvPr>
@@ -15826,7 +15826,7 @@
           <p:cNvPr id="22" name="">
             <a:extLst xmlns:a="http://schemas.openxmlformats.org/drawingml/2006/main">
               <a:ext uri="{FF2B5EF4-FFF2-40B4-BE49-F238E27FC236}">
-                <a16:creationId xmlns:a16="http://schemas.microsoft.com/office/drawing/2014/main" id="{7EEA3887-67FE-46C1-8D3B-84518DB50682}"/>
+                <a16:creationId xmlns:a16="http://schemas.microsoft.com/office/drawing/2014/main" id="{022048F0-8CEB-4CD5-B4C2-86FD49C31FF7}"/>
               </a:ext>
             </a:extLst>
           </p:cNvPr>
@@ -15861,7 +15861,7 @@
           <p:cNvPr id="23" name="">
             <a:extLst xmlns:a="http://schemas.openxmlformats.org/drawingml/2006/main">
               <a:ext uri="{FF2B5EF4-FFF2-40B4-BE49-F238E27FC236}">
-                <a16:creationId xmlns:a16="http://schemas.microsoft.com/office/drawing/2014/main" id="{6E85A05C-76A1-409F-87DE-62B3D7F7D2D4}"/>
+                <a16:creationId xmlns:a16="http://schemas.microsoft.com/office/drawing/2014/main" id="{3F2D1177-D897-47D2-AB5D-85D4CB906FDD}"/>
               </a:ext>
             </a:extLst>
           </p:cNvPr>
@@ -15894,7 +15894,7 @@
           <p:cNvPr id="24" name="">
             <a:extLst xmlns:a="http://schemas.openxmlformats.org/drawingml/2006/main">
               <a:ext uri="{FF2B5EF4-FFF2-40B4-BE49-F238E27FC236}">
-                <a16:creationId xmlns:a16="http://schemas.microsoft.com/office/drawing/2014/main" id="{2824FE58-6E25-416E-BC9C-CC5B336E51C0}"/>
+                <a16:creationId xmlns:a16="http://schemas.microsoft.com/office/drawing/2014/main" id="{30414239-F6EA-467F-BEFB-95CDF7D20514}"/>
               </a:ext>
             </a:extLst>
           </p:cNvPr>
@@ -15952,7 +15952,7 @@
           <p:cNvPr id="25" name="">
             <a:extLst xmlns:a="http://schemas.openxmlformats.org/drawingml/2006/main">
               <a:ext uri="{FF2B5EF4-FFF2-40B4-BE49-F238E27FC236}">
-                <a16:creationId xmlns:a16="http://schemas.microsoft.com/office/drawing/2014/main" id="{5959349F-5CB9-48ED-876C-68EE72AB54C1}"/>
+                <a16:creationId xmlns:a16="http://schemas.microsoft.com/office/drawing/2014/main" id="{09C5D628-F69A-49CE-BCFB-9C463CD1C9F9}"/>
               </a:ext>
             </a:extLst>
           </p:cNvPr>
@@ -16010,7 +16010,7 @@
           <p:cNvPr id="26" name="">
             <a:extLst xmlns:a="http://schemas.openxmlformats.org/drawingml/2006/main">
               <a:ext uri="{FF2B5EF4-FFF2-40B4-BE49-F238E27FC236}">
-                <a16:creationId xmlns:a16="http://schemas.microsoft.com/office/drawing/2014/main" id="{9BDE51B9-437D-4360-A119-18022297A0C2}"/>
+                <a16:creationId xmlns:a16="http://schemas.microsoft.com/office/drawing/2014/main" id="{24328F19-EA75-4FD6-9249-DEFCD1F43AA7}"/>
               </a:ext>
             </a:extLst>
           </p:cNvPr>
@@ -16045,7 +16045,7 @@
           <p:cNvPr id="27" name="">
             <a:extLst xmlns:a="http://schemas.openxmlformats.org/drawingml/2006/main">
               <a:ext uri="{FF2B5EF4-FFF2-40B4-BE49-F238E27FC236}">
-                <a16:creationId xmlns:a16="http://schemas.microsoft.com/office/drawing/2014/main" id="{E02B20CA-9AA2-43A2-8DD4-EC66F20BE596}"/>
+                <a16:creationId xmlns:a16="http://schemas.microsoft.com/office/drawing/2014/main" id="{0FCB0EF8-9919-4F84-B323-395E531413FE}"/>
               </a:ext>
             </a:extLst>
           </p:cNvPr>
@@ -16078,7 +16078,7 @@
           <p:cNvPr id="28" name="">
             <a:extLst xmlns:a="http://schemas.openxmlformats.org/drawingml/2006/main">
               <a:ext uri="{FF2B5EF4-FFF2-40B4-BE49-F238E27FC236}">
-                <a16:creationId xmlns:a16="http://schemas.microsoft.com/office/drawing/2014/main" id="{61462C02-9B89-4DD6-A600-ED7C240E7E50}"/>
+                <a16:creationId xmlns:a16="http://schemas.microsoft.com/office/drawing/2014/main" id="{366379B9-467A-4386-A9BC-DA4BCAB591C4}"/>
               </a:ext>
             </a:extLst>
           </p:cNvPr>
@@ -16136,7 +16136,7 @@
           <p:cNvPr id="29" name="">
             <a:extLst xmlns:a="http://schemas.openxmlformats.org/drawingml/2006/main">
               <a:ext uri="{FF2B5EF4-FFF2-40B4-BE49-F238E27FC236}">
-                <a16:creationId xmlns:a16="http://schemas.microsoft.com/office/drawing/2014/main" id="{2A7E409A-FB2B-4729-A538-4DC50A6C9C74}"/>
+                <a16:creationId xmlns:a16="http://schemas.microsoft.com/office/drawing/2014/main" id="{510A944B-8A38-40CF-990B-4B92A25840B4}"/>
               </a:ext>
             </a:extLst>
           </p:cNvPr>
@@ -16194,7 +16194,7 @@
           <p:cNvPr id="30" name="">
             <a:extLst xmlns:a="http://schemas.openxmlformats.org/drawingml/2006/main">
               <a:ext uri="{FF2B5EF4-FFF2-40B4-BE49-F238E27FC236}">
-                <a16:creationId xmlns:a16="http://schemas.microsoft.com/office/drawing/2014/main" id="{629106F5-7E20-4A58-A9C6-2971D89A2F3B}"/>
+                <a16:creationId xmlns:a16="http://schemas.microsoft.com/office/drawing/2014/main" id="{5A86611C-0239-4C35-96CF-F033DA00F08A}"/>
               </a:ext>
             </a:extLst>
           </p:cNvPr>
@@ -16229,7 +16229,7 @@
           <p:cNvPr id="31" name="">
             <a:extLst xmlns:a="http://schemas.openxmlformats.org/drawingml/2006/main">
               <a:ext uri="{FF2B5EF4-FFF2-40B4-BE49-F238E27FC236}">
-                <a16:creationId xmlns:a16="http://schemas.microsoft.com/office/drawing/2014/main" id="{51C4A43D-2B76-433D-A7D2-A01479629AA1}"/>
+                <a16:creationId xmlns:a16="http://schemas.microsoft.com/office/drawing/2014/main" id="{DB4D3F80-DB3C-455D-900C-BB4478238AE8}"/>
               </a:ext>
             </a:extLst>
           </p:cNvPr>
@@ -16262,7 +16262,7 @@
           <p:cNvPr id="32" name="">
             <a:extLst xmlns:a="http://schemas.openxmlformats.org/drawingml/2006/main">
               <a:ext uri="{FF2B5EF4-FFF2-40B4-BE49-F238E27FC236}">
-                <a16:creationId xmlns:a16="http://schemas.microsoft.com/office/drawing/2014/main" id="{EE5C385C-D5C2-4B21-B813-4268FE9F5776}"/>
+                <a16:creationId xmlns:a16="http://schemas.microsoft.com/office/drawing/2014/main" id="{3CD2DC20-98F4-4594-9F36-48E0C2218686}"/>
               </a:ext>
             </a:extLst>
           </p:cNvPr>
@@ -16320,7 +16320,7 @@
           <p:cNvPr id="33" name="">
             <a:extLst xmlns:a="http://schemas.openxmlformats.org/drawingml/2006/main">
               <a:ext uri="{FF2B5EF4-FFF2-40B4-BE49-F238E27FC236}">
-                <a16:creationId xmlns:a16="http://schemas.microsoft.com/office/drawing/2014/main" id="{10732FBD-4701-4B1F-8EA5-F29817A92506}"/>
+                <a16:creationId xmlns:a16="http://schemas.microsoft.com/office/drawing/2014/main" id="{9BA4DC39-2A0B-4F83-B0C1-C216C26322E8}"/>
               </a:ext>
             </a:extLst>
           </p:cNvPr>
@@ -16378,7 +16378,7 @@
           <p:cNvPr id="34" name="">
             <a:extLst xmlns:a="http://schemas.openxmlformats.org/drawingml/2006/main">
               <a:ext uri="{FF2B5EF4-FFF2-40B4-BE49-F238E27FC236}">
-                <a16:creationId xmlns:a16="http://schemas.microsoft.com/office/drawing/2014/main" id="{CBDDEC37-2858-4A25-8226-59805CA8E27F}"/>
+                <a16:creationId xmlns:a16="http://schemas.microsoft.com/office/drawing/2014/main" id="{D12A0AD9-3684-4E71-88AF-94841F20F20B}"/>
               </a:ext>
             </a:extLst>
           </p:cNvPr>
@@ -16413,7 +16413,7 @@
           <p:cNvPr id="35" name="">
             <a:extLst xmlns:a="http://schemas.openxmlformats.org/drawingml/2006/main">
               <a:ext uri="{FF2B5EF4-FFF2-40B4-BE49-F238E27FC236}">
-                <a16:creationId xmlns:a16="http://schemas.microsoft.com/office/drawing/2014/main" id="{C9F08981-5CF1-4866-B107-0A8DBDCA9863}"/>
+                <a16:creationId xmlns:a16="http://schemas.microsoft.com/office/drawing/2014/main" id="{2A9AF8CE-8665-4896-A6C3-053A10B73C4D}"/>
               </a:ext>
             </a:extLst>
           </p:cNvPr>
@@ -16446,7 +16446,7 @@
           <p:cNvPr id="36" name="">
             <a:extLst xmlns:a="http://schemas.openxmlformats.org/drawingml/2006/main">
               <a:ext uri="{FF2B5EF4-FFF2-40B4-BE49-F238E27FC236}">
-                <a16:creationId xmlns:a16="http://schemas.microsoft.com/office/drawing/2014/main" id="{BF472004-DA55-4DAB-AF03-859B7C5E538B}"/>
+                <a16:creationId xmlns:a16="http://schemas.microsoft.com/office/drawing/2014/main" id="{D488025B-DEFE-4725-B121-87179E11AA41}"/>
               </a:ext>
             </a:extLst>
           </p:cNvPr>
@@ -16504,7 +16504,7 @@
           <p:cNvPr id="37" name="">
             <a:extLst xmlns:a="http://schemas.openxmlformats.org/drawingml/2006/main">
               <a:ext uri="{FF2B5EF4-FFF2-40B4-BE49-F238E27FC236}">
-                <a16:creationId xmlns:a16="http://schemas.microsoft.com/office/drawing/2014/main" id="{EA577C86-715A-48E1-B3A9-29D00AA8BAFF}"/>
+                <a16:creationId xmlns:a16="http://schemas.microsoft.com/office/drawing/2014/main" id="{3409F013-CE68-4CA7-BA9E-855AFD51C51B}"/>
               </a:ext>
             </a:extLst>
           </p:cNvPr>
@@ -16562,7 +16562,7 @@
           <p:cNvPr id="38" name="">
             <a:extLst xmlns:a="http://schemas.openxmlformats.org/drawingml/2006/main">
               <a:ext uri="{FF2B5EF4-FFF2-40B4-BE49-F238E27FC236}">
-                <a16:creationId xmlns:a16="http://schemas.microsoft.com/office/drawing/2014/main" id="{E97B5BF8-9BA2-48ED-AE74-091545F123D0}"/>
+                <a16:creationId xmlns:a16="http://schemas.microsoft.com/office/drawing/2014/main" id="{03173DE9-EA91-4C89-AF6A-D674CD68EF15}"/>
               </a:ext>
             </a:extLst>
           </p:cNvPr>
@@ -16597,7 +16597,7 @@
           <p:cNvPr id="39" name="">
             <a:extLst xmlns:a="http://schemas.openxmlformats.org/drawingml/2006/main">
               <a:ext uri="{FF2B5EF4-FFF2-40B4-BE49-F238E27FC236}">
-                <a16:creationId xmlns:a16="http://schemas.microsoft.com/office/drawing/2014/main" id="{8CAFDB05-4A18-410D-8A85-C4BA09FDF3FE}"/>
+                <a16:creationId xmlns:a16="http://schemas.microsoft.com/office/drawing/2014/main" id="{AA23D844-595B-45E0-8A8C-6812B5CFEC9C}"/>
               </a:ext>
             </a:extLst>
           </p:cNvPr>
@@ -16630,7 +16630,7 @@
           <p:cNvPr id="40" name="">
             <a:extLst xmlns:a="http://schemas.openxmlformats.org/drawingml/2006/main">
               <a:ext uri="{FF2B5EF4-FFF2-40B4-BE49-F238E27FC236}">
-                <a16:creationId xmlns:a16="http://schemas.microsoft.com/office/drawing/2014/main" id="{BF7A505C-DB3E-4790-868E-DD26B207687E}"/>
+                <a16:creationId xmlns:a16="http://schemas.microsoft.com/office/drawing/2014/main" id="{30784555-A0AC-46D4-9138-728B7F8EB6FB}"/>
               </a:ext>
             </a:extLst>
           </p:cNvPr>
@@ -16688,7 +16688,7 @@
           <p:cNvPr id="41" name="">
             <a:extLst xmlns:a="http://schemas.openxmlformats.org/drawingml/2006/main">
               <a:ext uri="{FF2B5EF4-FFF2-40B4-BE49-F238E27FC236}">
-                <a16:creationId xmlns:a16="http://schemas.microsoft.com/office/drawing/2014/main" id="{E6B08832-17F2-4B42-8BF7-3711DA10FABB}"/>
+                <a16:creationId xmlns:a16="http://schemas.microsoft.com/office/drawing/2014/main" id="{D2ED02B9-4AEB-4696-83A9-4D2F0BD0A739}"/>
               </a:ext>
             </a:extLst>
           </p:cNvPr>
@@ -16746,7 +16746,7 @@
           <p:cNvPr id="42" name="">
             <a:extLst xmlns:a="http://schemas.openxmlformats.org/drawingml/2006/main">
               <a:ext uri="{FF2B5EF4-FFF2-40B4-BE49-F238E27FC236}">
-                <a16:creationId xmlns:a16="http://schemas.microsoft.com/office/drawing/2014/main" id="{D5543527-50BD-41DF-AD5A-FEA0CA7A813D}"/>
+                <a16:creationId xmlns:a16="http://schemas.microsoft.com/office/drawing/2014/main" id="{1897A337-B69B-4485-A9CD-E5AB02FBD385}"/>
               </a:ext>
             </a:extLst>
           </p:cNvPr>
@@ -16781,7 +16781,7 @@
           <p:cNvPr id="43" name="">
             <a:extLst xmlns:a="http://schemas.openxmlformats.org/drawingml/2006/main">
               <a:ext uri="{FF2B5EF4-FFF2-40B4-BE49-F238E27FC236}">
-                <a16:creationId xmlns:a16="http://schemas.microsoft.com/office/drawing/2014/main" id="{F1D2C403-B851-41D5-91EE-2DC6FB5602F8}"/>
+                <a16:creationId xmlns:a16="http://schemas.microsoft.com/office/drawing/2014/main" id="{880BDC02-3A57-4B5E-84A1-C9559A8633F4}"/>
               </a:ext>
             </a:extLst>
           </p:cNvPr>
@@ -16814,7 +16814,7 @@
           <p:cNvPr id="44" name="">
             <a:extLst xmlns:a="http://schemas.openxmlformats.org/drawingml/2006/main">
               <a:ext uri="{FF2B5EF4-FFF2-40B4-BE49-F238E27FC236}">
-                <a16:creationId xmlns:a16="http://schemas.microsoft.com/office/drawing/2014/main" id="{983AD8D4-EAE9-42F5-9BBB-81B488343BC5}"/>
+                <a16:creationId xmlns:a16="http://schemas.microsoft.com/office/drawing/2014/main" id="{84F596D4-356F-4501-9FF8-774B06D232EF}"/>
               </a:ext>
             </a:extLst>
           </p:cNvPr>
@@ -16872,7 +16872,7 @@
           <p:cNvPr id="45" name="">
             <a:extLst xmlns:a="http://schemas.openxmlformats.org/drawingml/2006/main">
               <a:ext uri="{FF2B5EF4-FFF2-40B4-BE49-F238E27FC236}">
-                <a16:creationId xmlns:a16="http://schemas.microsoft.com/office/drawing/2014/main" id="{FA4431F5-F8CD-41FC-B477-9930A014D85B}"/>
+                <a16:creationId xmlns:a16="http://schemas.microsoft.com/office/drawing/2014/main" id="{335C0511-C16D-42AF-8CAA-9A02C9EE8B8E}"/>
               </a:ext>
             </a:extLst>
           </p:cNvPr>
@@ -16930,7 +16930,7 @@
           <p:cNvPr id="46" name="">
             <a:extLst xmlns:a="http://schemas.openxmlformats.org/drawingml/2006/main">
               <a:ext uri="{FF2B5EF4-FFF2-40B4-BE49-F238E27FC236}">
-                <a16:creationId xmlns:a16="http://schemas.microsoft.com/office/drawing/2014/main" id="{53E6606C-0FA5-4BC5-BB79-283119A6CFBB}"/>
+                <a16:creationId xmlns:a16="http://schemas.microsoft.com/office/drawing/2014/main" id="{C3A249FD-2B51-4FE6-AC87-BFC5F6EAA6C2}"/>
               </a:ext>
             </a:extLst>
           </p:cNvPr>
@@ -16965,7 +16965,7 @@
           <p:cNvPr id="47" name="">
             <a:extLst xmlns:a="http://schemas.openxmlformats.org/drawingml/2006/main">
               <a:ext uri="{FF2B5EF4-FFF2-40B4-BE49-F238E27FC236}">
-                <a16:creationId xmlns:a16="http://schemas.microsoft.com/office/drawing/2014/main" id="{232A889C-D261-45DF-BD4A-82D3F5D1FA36}"/>
+                <a16:creationId xmlns:a16="http://schemas.microsoft.com/office/drawing/2014/main" id="{F36D3111-6E01-4236-98D5-A07FF73FCA8D}"/>
               </a:ext>
             </a:extLst>
           </p:cNvPr>
@@ -16998,7 +16998,7 @@
           <p:cNvPr id="48" name="">
             <a:extLst xmlns:a="http://schemas.openxmlformats.org/drawingml/2006/main">
               <a:ext uri="{FF2B5EF4-FFF2-40B4-BE49-F238E27FC236}">
-                <a16:creationId xmlns:a16="http://schemas.microsoft.com/office/drawing/2014/main" id="{536259C6-2CF7-467B-9BC8-AF65C8E4FB95}"/>
+                <a16:creationId xmlns:a16="http://schemas.microsoft.com/office/drawing/2014/main" id="{74E8C3C0-5282-42F4-8622-D7B888FA063A}"/>
               </a:ext>
             </a:extLst>
           </p:cNvPr>
@@ -17056,7 +17056,7 @@
           <p:cNvPr id="49" name="">
             <a:extLst xmlns:a="http://schemas.openxmlformats.org/drawingml/2006/main">
               <a:ext uri="{FF2B5EF4-FFF2-40B4-BE49-F238E27FC236}">
-                <a16:creationId xmlns:a16="http://schemas.microsoft.com/office/drawing/2014/main" id="{1E69F198-B763-4D9E-8616-363BD391BFA9}"/>
+                <a16:creationId xmlns:a16="http://schemas.microsoft.com/office/drawing/2014/main" id="{F7FF01B3-CF20-4967-99C4-8B28B4E97E00}"/>
               </a:ext>
             </a:extLst>
           </p:cNvPr>
@@ -17114,7 +17114,7 @@
           <p:cNvPr id="50" name="">
             <a:extLst xmlns:a="http://schemas.openxmlformats.org/drawingml/2006/main">
               <a:ext uri="{FF2B5EF4-FFF2-40B4-BE49-F238E27FC236}">
-                <a16:creationId xmlns:a16="http://schemas.microsoft.com/office/drawing/2014/main" id="{A0C7A99E-ED4B-47D9-A8FC-EDC5E62ECE63}"/>
+                <a16:creationId xmlns:a16="http://schemas.microsoft.com/office/drawing/2014/main" id="{CFD21F2E-71CB-404F-8874-01F3550C0310}"/>
               </a:ext>
             </a:extLst>
           </p:cNvPr>
@@ -17149,7 +17149,7 @@
           <p:cNvPr id="51" name="">
             <a:extLst xmlns:a="http://schemas.openxmlformats.org/drawingml/2006/main">
               <a:ext uri="{FF2B5EF4-FFF2-40B4-BE49-F238E27FC236}">
-                <a16:creationId xmlns:a16="http://schemas.microsoft.com/office/drawing/2014/main" id="{A7F0B25E-BD96-44D7-8C37-9D6CBF2B81EB}"/>
+                <a16:creationId xmlns:a16="http://schemas.microsoft.com/office/drawing/2014/main" id="{89AB219C-E6A3-4D9A-B289-D0704F269E7F}"/>
               </a:ext>
             </a:extLst>
           </p:cNvPr>
@@ -17182,7 +17182,7 @@
           <p:cNvPr id="52" name="">
             <a:extLst xmlns:a="http://schemas.openxmlformats.org/drawingml/2006/main">
               <a:ext uri="{FF2B5EF4-FFF2-40B4-BE49-F238E27FC236}">
-                <a16:creationId xmlns:a16="http://schemas.microsoft.com/office/drawing/2014/main" id="{9DDC2988-6589-4719-9600-3079C85F1561}"/>
+                <a16:creationId xmlns:a16="http://schemas.microsoft.com/office/drawing/2014/main" id="{1AABF776-DCF4-45DD-8840-176D78F54C10}"/>
               </a:ext>
             </a:extLst>
           </p:cNvPr>
@@ -17240,7 +17240,7 @@
           <p:cNvPr id="53" name="">
             <a:extLst xmlns:a="http://schemas.openxmlformats.org/drawingml/2006/main">
               <a:ext uri="{FF2B5EF4-FFF2-40B4-BE49-F238E27FC236}">
-                <a16:creationId xmlns:a16="http://schemas.microsoft.com/office/drawing/2014/main" id="{F060D0CB-3A7E-414D-AD54-A1B547747B13}"/>
+                <a16:creationId xmlns:a16="http://schemas.microsoft.com/office/drawing/2014/main" id="{73C1349E-9551-482F-9CA7-DED27B710513}"/>
               </a:ext>
             </a:extLst>
           </p:cNvPr>
@@ -17298,7 +17298,7 @@
           <p:cNvPr id="54" name="">
             <a:extLst xmlns:a="http://schemas.openxmlformats.org/drawingml/2006/main">
               <a:ext uri="{FF2B5EF4-FFF2-40B4-BE49-F238E27FC236}">
-                <a16:creationId xmlns:a16="http://schemas.microsoft.com/office/drawing/2014/main" id="{7AFB527D-4EFE-4976-946A-459BEA9A5B03}"/>
+                <a16:creationId xmlns:a16="http://schemas.microsoft.com/office/drawing/2014/main" id="{AE838862-3EFF-47C9-AB8A-3067B496CB89}"/>
               </a:ext>
             </a:extLst>
           </p:cNvPr>
@@ -17333,7 +17333,7 @@
           <p:cNvPr id="55" name="">
             <a:extLst xmlns:a="http://schemas.openxmlformats.org/drawingml/2006/main">
               <a:ext uri="{FF2B5EF4-FFF2-40B4-BE49-F238E27FC236}">
-                <a16:creationId xmlns:a16="http://schemas.microsoft.com/office/drawing/2014/main" id="{08D32365-2DDD-4C34-9D6D-6A2D5B70597A}"/>
+                <a16:creationId xmlns:a16="http://schemas.microsoft.com/office/drawing/2014/main" id="{E6B6A73E-7B0F-4E2A-B2AD-6320E565138A}"/>
               </a:ext>
             </a:extLst>
           </p:cNvPr>
@@ -17366,7 +17366,7 @@
           <p:cNvPr id="56" name="">
             <a:extLst xmlns:a="http://schemas.openxmlformats.org/drawingml/2006/main">
               <a:ext uri="{FF2B5EF4-FFF2-40B4-BE49-F238E27FC236}">
-                <a16:creationId xmlns:a16="http://schemas.microsoft.com/office/drawing/2014/main" id="{ED548E97-1FB6-49DF-9605-47428B668B86}"/>
+                <a16:creationId xmlns:a16="http://schemas.microsoft.com/office/drawing/2014/main" id="{527BA776-FF71-4830-9059-7AE3439D8E77}"/>
               </a:ext>
             </a:extLst>
           </p:cNvPr>
@@ -17424,7 +17424,7 @@
           <p:cNvPr id="57" name="">
             <a:extLst xmlns:a="http://schemas.openxmlformats.org/drawingml/2006/main">
               <a:ext uri="{FF2B5EF4-FFF2-40B4-BE49-F238E27FC236}">
-                <a16:creationId xmlns:a16="http://schemas.microsoft.com/office/drawing/2014/main" id="{D15A5A5C-D94D-40F3-927A-21A8B3B08EA7}"/>
+                <a16:creationId xmlns:a16="http://schemas.microsoft.com/office/drawing/2014/main" id="{675C75C9-C7AF-4A11-A4ED-FAB33D961955}"/>
               </a:ext>
             </a:extLst>
           </p:cNvPr>
@@ -17482,7 +17482,7 @@
           <p:cNvPr id="58" name="">
             <a:extLst xmlns:a="http://schemas.openxmlformats.org/drawingml/2006/main">
               <a:ext uri="{FF2B5EF4-FFF2-40B4-BE49-F238E27FC236}">
-                <a16:creationId xmlns:a16="http://schemas.microsoft.com/office/drawing/2014/main" id="{E0B8BF05-9569-438B-8D63-858761EE75EB}"/>
+                <a16:creationId xmlns:a16="http://schemas.microsoft.com/office/drawing/2014/main" id="{CCB23F4D-951E-443B-B6EB-F1127C32B295}"/>
               </a:ext>
             </a:extLst>
           </p:cNvPr>
@@ -17517,7 +17517,7 @@
           <p:cNvPr id="59" name="">
             <a:extLst xmlns:a="http://schemas.openxmlformats.org/drawingml/2006/main">
               <a:ext uri="{FF2B5EF4-FFF2-40B4-BE49-F238E27FC236}">
-                <a16:creationId xmlns:a16="http://schemas.microsoft.com/office/drawing/2014/main" id="{4D76FEA1-1CFA-44DC-BC84-A4E76BDCF01F}"/>
+                <a16:creationId xmlns:a16="http://schemas.microsoft.com/office/drawing/2014/main" id="{FAB2F098-6A74-43BA-95F1-0F47758A5A5B}"/>
               </a:ext>
             </a:extLst>
           </p:cNvPr>
@@ -17550,7 +17550,7 @@
           <p:cNvPr id="60" name="">
             <a:extLst xmlns:a="http://schemas.openxmlformats.org/drawingml/2006/main">
               <a:ext uri="{FF2B5EF4-FFF2-40B4-BE49-F238E27FC236}">
-                <a16:creationId xmlns:a16="http://schemas.microsoft.com/office/drawing/2014/main" id="{35D0BAB7-3681-47FE-BE37-209E8F46BC2F}"/>
+                <a16:creationId xmlns:a16="http://schemas.microsoft.com/office/drawing/2014/main" id="{194FC767-7C3E-4230-A07B-1BA4E19FBB4E}"/>
               </a:ext>
             </a:extLst>
           </p:cNvPr>
@@ -17608,7 +17608,7 @@
           <p:cNvPr id="61" name="">
             <a:extLst xmlns:a="http://schemas.openxmlformats.org/drawingml/2006/main">
               <a:ext uri="{FF2B5EF4-FFF2-40B4-BE49-F238E27FC236}">
-                <a16:creationId xmlns:a16="http://schemas.microsoft.com/office/drawing/2014/main" id="{63ABB785-0894-4CA7-AAA8-66F3DB14E84B}"/>
+                <a16:creationId xmlns:a16="http://schemas.microsoft.com/office/drawing/2014/main" id="{3DFA46EC-87DD-4357-BA1F-3E4781B5E099}"/>
               </a:ext>
             </a:extLst>
           </p:cNvPr>
@@ -17666,7 +17666,7 @@
           <p:cNvPr id="62" name="">
             <a:extLst xmlns:a="http://schemas.openxmlformats.org/drawingml/2006/main">
               <a:ext uri="{FF2B5EF4-FFF2-40B4-BE49-F238E27FC236}">
-                <a16:creationId xmlns:a16="http://schemas.microsoft.com/office/drawing/2014/main" id="{E533DA8E-D03F-4425-BDCA-745DE62DDA30}"/>
+                <a16:creationId xmlns:a16="http://schemas.microsoft.com/office/drawing/2014/main" id="{BE692847-9280-4DD9-AECB-6B0DE1CEED5A}"/>
               </a:ext>
             </a:extLst>
           </p:cNvPr>
@@ -17701,7 +17701,7 @@
           <p:cNvPr id="63" name="">
             <a:extLst xmlns:a="http://schemas.openxmlformats.org/drawingml/2006/main">
               <a:ext uri="{FF2B5EF4-FFF2-40B4-BE49-F238E27FC236}">
-                <a16:creationId xmlns:a16="http://schemas.microsoft.com/office/drawing/2014/main" id="{3ECA9878-4F98-453C-9652-F82BEDF4B705}"/>
+                <a16:creationId xmlns:a16="http://schemas.microsoft.com/office/drawing/2014/main" id="{CCD5CC5D-A6F2-4F56-9BE4-162CBA9704EF}"/>
               </a:ext>
             </a:extLst>
           </p:cNvPr>
@@ -17757,7 +17757,7 @@
     </p:spTree>
     <p:extLst>
       <p:ext uri="{BB962C8B-B14F-4D97-AF65-F5344CB8AC3E}">
-        <p14:creationId xmlns:p14="http://schemas.microsoft.com/office/powerpoint/2010/main" val="1494963966"/>
+        <p14:creationId xmlns:p14="http://schemas.microsoft.com/office/powerpoint/2010/main" val="1622988052"/>
       </p:ext>
     </p:extLst>
   </p:cSld>
@@ -17788,7 +17788,7 @@
           <p:cNvPr id="76" name="eyebrow-5">
             <a:extLst xmlns:a="http://schemas.openxmlformats.org/drawingml/2006/main">
               <a:ext uri="{FF2B5EF4-FFF2-40B4-BE49-F238E27FC236}">
-                <a16:creationId xmlns:a16="http://schemas.microsoft.com/office/drawing/2014/main" id="{20607CE4-0211-41F3-A770-062497DB15C7}"/>
+                <a16:creationId xmlns:a16="http://schemas.microsoft.com/office/drawing/2014/main" id="{37AC757E-6B76-4DBC-80DF-DD6F7C9820E7}"/>
               </a:ext>
             </a:extLst>
           </p:cNvPr>
@@ -17846,7 +17846,7 @@
           <p:cNvPr id="2" name="title-5">
             <a:extLst xmlns:a="http://schemas.openxmlformats.org/drawingml/2006/main">
               <a:ext uri="{FF2B5EF4-FFF2-40B4-BE49-F238E27FC236}">
-                <a16:creationId xmlns:a16="http://schemas.microsoft.com/office/drawing/2014/main" id="{C8845AF4-FAFC-4D9D-B983-1287920EB0F1}"/>
+                <a16:creationId xmlns:a16="http://schemas.microsoft.com/office/drawing/2014/main" id="{2B5964DB-D068-4A7F-8D43-FE3F22071C3A}"/>
               </a:ext>
             </a:extLst>
           </p:cNvPr>
@@ -17904,7 +17904,7 @@
           <p:cNvPr id="3" name="">
             <a:extLst xmlns:a="http://schemas.openxmlformats.org/drawingml/2006/main">
               <a:ext uri="{FF2B5EF4-FFF2-40B4-BE49-F238E27FC236}">
-                <a16:creationId xmlns:a16="http://schemas.microsoft.com/office/drawing/2014/main" id="{FF198DB3-FEE5-47CC-B7F4-7D9CCCA81E0E}"/>
+                <a16:creationId xmlns:a16="http://schemas.microsoft.com/office/drawing/2014/main" id="{1AC3EDB5-CBEE-483B-849B-C2461B03ABAF}"/>
               </a:ext>
             </a:extLst>
           </p:cNvPr>
@@ -17935,7 +17935,7 @@
           <p:cNvPr id="4" name="">
             <a:extLst xmlns:a="http://schemas.openxmlformats.org/drawingml/2006/main">
               <a:ext uri="{FF2B5EF4-FFF2-40B4-BE49-F238E27FC236}">
-                <a16:creationId xmlns:a16="http://schemas.microsoft.com/office/drawing/2014/main" id="{19F07A3A-BD77-43D6-8134-B0EC7238E699}"/>
+                <a16:creationId xmlns:a16="http://schemas.microsoft.com/office/drawing/2014/main" id="{05A4B637-EB6B-4560-9C90-42E091358381}"/>
               </a:ext>
             </a:extLst>
           </p:cNvPr>
@@ -17983,7 +17983,7 @@
                 <a:ea typeface="Aptos"/>
                 <a:cs typeface="Aptos"/>
               </a:rPr>
-              <a:t>BES v2.0 · Propuesta ejecutiva</a:t>
+              <a:t>BES v2.0 · Aprobado y liberado</a:t>
             </a:r>
           </a:p>
         </p:txBody>
@@ -17993,7 +17993,7 @@
           <p:cNvPr id="5" name="">
             <a:extLst xmlns:a="http://schemas.openxmlformats.org/drawingml/2006/main">
               <a:ext uri="{FF2B5EF4-FFF2-40B4-BE49-F238E27FC236}">
-                <a16:creationId xmlns:a16="http://schemas.microsoft.com/office/drawing/2014/main" id="{B7FEC5A1-4E27-4B52-83C8-168A72C034C7}"/>
+                <a16:creationId xmlns:a16="http://schemas.microsoft.com/office/drawing/2014/main" id="{8EBFFFEF-6D0C-44DB-830E-A023E285784F}"/>
               </a:ext>
             </a:extLst>
           </p:cNvPr>
@@ -18051,7 +18051,7 @@
           <p:cNvPr id="6" name="">
             <a:extLst xmlns:a="http://schemas.openxmlformats.org/drawingml/2006/main">
               <a:ext uri="{FF2B5EF4-FFF2-40B4-BE49-F238E27FC236}">
-                <a16:creationId xmlns:a16="http://schemas.microsoft.com/office/drawing/2014/main" id="{6891FA82-7ACD-4F3C-B368-4B4E1A922939}"/>
+                <a16:creationId xmlns:a16="http://schemas.microsoft.com/office/drawing/2014/main" id="{9CE6CE0F-B97E-4726-BE32-99B6D8877FE5}"/>
               </a:ext>
             </a:extLst>
           </p:cNvPr>
@@ -18086,7 +18086,7 @@
           <p:cNvPr id="7" name="">
             <a:extLst xmlns:a="http://schemas.openxmlformats.org/drawingml/2006/main">
               <a:ext uri="{FF2B5EF4-FFF2-40B4-BE49-F238E27FC236}">
-                <a16:creationId xmlns:a16="http://schemas.microsoft.com/office/drawing/2014/main" id="{6F91981A-74BE-449E-BDD8-6056537018B1}"/>
+                <a16:creationId xmlns:a16="http://schemas.microsoft.com/office/drawing/2014/main" id="{73D38A40-C5E2-42E7-9D64-1D626800A5A1}"/>
               </a:ext>
             </a:extLst>
           </p:cNvPr>
@@ -18144,7 +18144,7 @@
           <p:cNvPr id="8" name="">
             <a:extLst xmlns:a="http://schemas.openxmlformats.org/drawingml/2006/main">
               <a:ext uri="{FF2B5EF4-FFF2-40B4-BE49-F238E27FC236}">
-                <a16:creationId xmlns:a16="http://schemas.microsoft.com/office/drawing/2014/main" id="{D5805781-8902-45C2-9E86-3DD6D9A8F838}"/>
+                <a16:creationId xmlns:a16="http://schemas.microsoft.com/office/drawing/2014/main" id="{72243638-8EA6-47F9-A8E3-22C783C919CA}"/>
               </a:ext>
             </a:extLst>
           </p:cNvPr>
@@ -18202,7 +18202,7 @@
           <p:cNvPr id="9" name="">
             <a:extLst xmlns:a="http://schemas.openxmlformats.org/drawingml/2006/main">
               <a:ext uri="{FF2B5EF4-FFF2-40B4-BE49-F238E27FC236}">
-                <a16:creationId xmlns:a16="http://schemas.microsoft.com/office/drawing/2014/main" id="{B0CE68EA-9908-42D1-9112-41655A316009}"/>
+                <a16:creationId xmlns:a16="http://schemas.microsoft.com/office/drawing/2014/main" id="{A194B7C1-8AC2-4983-AC12-B90F6B9FF96B}"/>
               </a:ext>
             </a:extLst>
           </p:cNvPr>
@@ -18233,7 +18233,7 @@
           <p:cNvPr id="10" name="">
             <a:extLst xmlns:a="http://schemas.openxmlformats.org/drawingml/2006/main">
               <a:ext uri="{FF2B5EF4-FFF2-40B4-BE49-F238E27FC236}">
-                <a16:creationId xmlns:a16="http://schemas.microsoft.com/office/drawing/2014/main" id="{B3F63898-5D5F-490A-B90D-B1249C4DA123}"/>
+                <a16:creationId xmlns:a16="http://schemas.microsoft.com/office/drawing/2014/main" id="{8C5EC0D4-5B1D-4FBD-B59B-E2E556D32438}"/>
               </a:ext>
             </a:extLst>
           </p:cNvPr>
@@ -18291,7 +18291,7 @@
           <p:cNvPr id="11" name="">
             <a:extLst xmlns:a="http://schemas.openxmlformats.org/drawingml/2006/main">
               <a:ext uri="{FF2B5EF4-FFF2-40B4-BE49-F238E27FC236}">
-                <a16:creationId xmlns:a16="http://schemas.microsoft.com/office/drawing/2014/main" id="{63CE752C-6E78-458C-8874-01CB43F8BA9A}"/>
+                <a16:creationId xmlns:a16="http://schemas.microsoft.com/office/drawing/2014/main" id="{5D2594C5-8FA4-4B5B-9151-8212B20B3569}"/>
               </a:ext>
             </a:extLst>
           </p:cNvPr>
@@ -18349,7 +18349,7 @@
           <p:cNvPr id="12" name="">
             <a:extLst xmlns:a="http://schemas.openxmlformats.org/drawingml/2006/main">
               <a:ext uri="{FF2B5EF4-FFF2-40B4-BE49-F238E27FC236}">
-                <a16:creationId xmlns:a16="http://schemas.microsoft.com/office/drawing/2014/main" id="{C12B02AB-B0F0-480C-8F1C-ABF3FE15DF26}"/>
+                <a16:creationId xmlns:a16="http://schemas.microsoft.com/office/drawing/2014/main" id="{819FBAA2-4D43-4A71-BAAD-2F85DBFA3E8B}"/>
               </a:ext>
             </a:extLst>
           </p:cNvPr>
@@ -18380,7 +18380,7 @@
           <p:cNvPr id="13" name="">
             <a:extLst xmlns:a="http://schemas.openxmlformats.org/drawingml/2006/main">
               <a:ext uri="{FF2B5EF4-FFF2-40B4-BE49-F238E27FC236}">
-                <a16:creationId xmlns:a16="http://schemas.microsoft.com/office/drawing/2014/main" id="{C5F146AD-61E2-4DEC-ABDB-F75F6A818D43}"/>
+                <a16:creationId xmlns:a16="http://schemas.microsoft.com/office/drawing/2014/main" id="{C44E9164-966F-4289-8CBA-CC00BBDFEDF5}"/>
               </a:ext>
             </a:extLst>
           </p:cNvPr>
@@ -18438,7 +18438,7 @@
           <p:cNvPr id="14" name="">
             <a:extLst xmlns:a="http://schemas.openxmlformats.org/drawingml/2006/main">
               <a:ext uri="{FF2B5EF4-FFF2-40B4-BE49-F238E27FC236}">
-                <a16:creationId xmlns:a16="http://schemas.microsoft.com/office/drawing/2014/main" id="{7283F28C-E940-43F3-8EA4-1CD3A5137A37}"/>
+                <a16:creationId xmlns:a16="http://schemas.microsoft.com/office/drawing/2014/main" id="{73DF5FA2-7F9A-4714-9EE2-2B563BA4D366}"/>
               </a:ext>
             </a:extLst>
           </p:cNvPr>
@@ -18496,7 +18496,7 @@
           <p:cNvPr id="15" name="">
             <a:extLst xmlns:a="http://schemas.openxmlformats.org/drawingml/2006/main">
               <a:ext uri="{FF2B5EF4-FFF2-40B4-BE49-F238E27FC236}">
-                <a16:creationId xmlns:a16="http://schemas.microsoft.com/office/drawing/2014/main" id="{E1BEDBA6-DF31-4008-A14D-BEACCFC7A912}"/>
+                <a16:creationId xmlns:a16="http://schemas.microsoft.com/office/drawing/2014/main" id="{8B829CD7-8589-4E4B-95B6-A4A797692062}"/>
               </a:ext>
             </a:extLst>
           </p:cNvPr>
@@ -18527,7 +18527,7 @@
           <p:cNvPr id="16" name="">
             <a:extLst xmlns:a="http://schemas.openxmlformats.org/drawingml/2006/main">
               <a:ext uri="{FF2B5EF4-FFF2-40B4-BE49-F238E27FC236}">
-                <a16:creationId xmlns:a16="http://schemas.microsoft.com/office/drawing/2014/main" id="{137C2C13-5E6C-42EB-A5DD-FA7082B99171}"/>
+                <a16:creationId xmlns:a16="http://schemas.microsoft.com/office/drawing/2014/main" id="{F1F79BEE-92DE-413D-92B2-69F63D698B50}"/>
               </a:ext>
             </a:extLst>
           </p:cNvPr>
@@ -18585,7 +18585,7 @@
           <p:cNvPr id="17" name="">
             <a:extLst xmlns:a="http://schemas.openxmlformats.org/drawingml/2006/main">
               <a:ext uri="{FF2B5EF4-FFF2-40B4-BE49-F238E27FC236}">
-                <a16:creationId xmlns:a16="http://schemas.microsoft.com/office/drawing/2014/main" id="{DBC4077D-C0BE-4A05-A1EC-77CA0D390D58}"/>
+                <a16:creationId xmlns:a16="http://schemas.microsoft.com/office/drawing/2014/main" id="{D87EDDAC-DA4C-4E2D-8B23-CB93A20FB105}"/>
               </a:ext>
             </a:extLst>
           </p:cNvPr>
@@ -18643,7 +18643,7 @@
           <p:cNvPr id="18" name="">
             <a:extLst xmlns:a="http://schemas.openxmlformats.org/drawingml/2006/main">
               <a:ext uri="{FF2B5EF4-FFF2-40B4-BE49-F238E27FC236}">
-                <a16:creationId xmlns:a16="http://schemas.microsoft.com/office/drawing/2014/main" id="{51E33650-1A98-42A1-B7E3-32C33C1265EC}"/>
+                <a16:creationId xmlns:a16="http://schemas.microsoft.com/office/drawing/2014/main" id="{79BD5A5E-4858-4D97-B1B8-905EFDF08373}"/>
               </a:ext>
             </a:extLst>
           </p:cNvPr>
@@ -18674,7 +18674,7 @@
           <p:cNvPr id="19" name="">
             <a:extLst xmlns:a="http://schemas.openxmlformats.org/drawingml/2006/main">
               <a:ext uri="{FF2B5EF4-FFF2-40B4-BE49-F238E27FC236}">
-                <a16:creationId xmlns:a16="http://schemas.microsoft.com/office/drawing/2014/main" id="{1F9A5665-8019-4AE2-B662-D620E1762788}"/>
+                <a16:creationId xmlns:a16="http://schemas.microsoft.com/office/drawing/2014/main" id="{CEB73691-02E9-4FD1-9AF5-0A8E36C48AF3}"/>
               </a:ext>
             </a:extLst>
           </p:cNvPr>
@@ -18732,7 +18732,7 @@
           <p:cNvPr id="20" name="">
             <a:extLst xmlns:a="http://schemas.openxmlformats.org/drawingml/2006/main">
               <a:ext uri="{FF2B5EF4-FFF2-40B4-BE49-F238E27FC236}">
-                <a16:creationId xmlns:a16="http://schemas.microsoft.com/office/drawing/2014/main" id="{DC02FDBF-82DA-43F5-BBC0-B7A2E96B29E6}"/>
+                <a16:creationId xmlns:a16="http://schemas.microsoft.com/office/drawing/2014/main" id="{3761EBAB-B09A-4211-881A-A593A1EBD9DF}"/>
               </a:ext>
             </a:extLst>
           </p:cNvPr>
@@ -18790,7 +18790,7 @@
           <p:cNvPr id="21" name="">
             <a:extLst xmlns:a="http://schemas.openxmlformats.org/drawingml/2006/main">
               <a:ext uri="{FF2B5EF4-FFF2-40B4-BE49-F238E27FC236}">
-                <a16:creationId xmlns:a16="http://schemas.microsoft.com/office/drawing/2014/main" id="{BDC21DFA-860C-4DB8-8D03-3ADF6EEE2A08}"/>
+                <a16:creationId xmlns:a16="http://schemas.microsoft.com/office/drawing/2014/main" id="{DA594C93-7540-441E-A559-640806013FAD}"/>
               </a:ext>
             </a:extLst>
           </p:cNvPr>
@@ -18821,7 +18821,7 @@
           <p:cNvPr id="22" name="">
             <a:extLst xmlns:a="http://schemas.openxmlformats.org/drawingml/2006/main">
               <a:ext uri="{FF2B5EF4-FFF2-40B4-BE49-F238E27FC236}">
-                <a16:creationId xmlns:a16="http://schemas.microsoft.com/office/drawing/2014/main" id="{215B36C2-8375-4E38-BC71-92267ABF2E8F}"/>
+                <a16:creationId xmlns:a16="http://schemas.microsoft.com/office/drawing/2014/main" id="{0669D560-3D6F-421E-8CBF-EA2416A312E6}"/>
               </a:ext>
             </a:extLst>
           </p:cNvPr>
@@ -18879,7 +18879,7 @@
           <p:cNvPr id="23" name="">
             <a:extLst xmlns:a="http://schemas.openxmlformats.org/drawingml/2006/main">
               <a:ext uri="{FF2B5EF4-FFF2-40B4-BE49-F238E27FC236}">
-                <a16:creationId xmlns:a16="http://schemas.microsoft.com/office/drawing/2014/main" id="{007A639D-0449-42CF-B62C-D02090CD34D6}"/>
+                <a16:creationId xmlns:a16="http://schemas.microsoft.com/office/drawing/2014/main" id="{97EB5714-3F3C-4EBF-A30A-3D66750EA187}"/>
               </a:ext>
             </a:extLst>
           </p:cNvPr>
@@ -18937,7 +18937,7 @@
           <p:cNvPr id="24" name="">
             <a:extLst xmlns:a="http://schemas.openxmlformats.org/drawingml/2006/main">
               <a:ext uri="{FF2B5EF4-FFF2-40B4-BE49-F238E27FC236}">
-                <a16:creationId xmlns:a16="http://schemas.microsoft.com/office/drawing/2014/main" id="{58BE6E1B-FDED-408E-861C-833A44294A05}"/>
+                <a16:creationId xmlns:a16="http://schemas.microsoft.com/office/drawing/2014/main" id="{DFF705A6-F642-4913-B6EF-4608858C78E9}"/>
               </a:ext>
             </a:extLst>
           </p:cNvPr>
@@ -18968,7 +18968,7 @@
           <p:cNvPr id="25" name="">
             <a:extLst xmlns:a="http://schemas.openxmlformats.org/drawingml/2006/main">
               <a:ext uri="{FF2B5EF4-FFF2-40B4-BE49-F238E27FC236}">
-                <a16:creationId xmlns:a16="http://schemas.microsoft.com/office/drawing/2014/main" id="{56CA7B78-FE72-4102-8D84-0527E48E88E8}"/>
+                <a16:creationId xmlns:a16="http://schemas.microsoft.com/office/drawing/2014/main" id="{8C1C1D4C-526C-4FD4-A392-62DB6681971B}"/>
               </a:ext>
             </a:extLst>
           </p:cNvPr>
@@ -19026,7 +19026,7 @@
           <p:cNvPr id="26" name="">
             <a:extLst xmlns:a="http://schemas.openxmlformats.org/drawingml/2006/main">
               <a:ext uri="{FF2B5EF4-FFF2-40B4-BE49-F238E27FC236}">
-                <a16:creationId xmlns:a16="http://schemas.microsoft.com/office/drawing/2014/main" id="{FF2AE461-AC99-4421-A0F4-49C7506DE9F6}"/>
+                <a16:creationId xmlns:a16="http://schemas.microsoft.com/office/drawing/2014/main" id="{9B09EDDC-C3CD-4D2F-9848-91E9659AFB54}"/>
               </a:ext>
             </a:extLst>
           </p:cNvPr>
@@ -19084,7 +19084,7 @@
           <p:cNvPr id="27" name="">
             <a:extLst xmlns:a="http://schemas.openxmlformats.org/drawingml/2006/main">
               <a:ext uri="{FF2B5EF4-FFF2-40B4-BE49-F238E27FC236}">
-                <a16:creationId xmlns:a16="http://schemas.microsoft.com/office/drawing/2014/main" id="{ED96236C-D3FC-48C4-AEE6-FD7D2F19426F}"/>
+                <a16:creationId xmlns:a16="http://schemas.microsoft.com/office/drawing/2014/main" id="{CD5A992C-5227-4CD5-BC08-B5B9C7ACC083}"/>
               </a:ext>
             </a:extLst>
           </p:cNvPr>
@@ -19115,7 +19115,7 @@
           <p:cNvPr id="28" name="">
             <a:extLst xmlns:a="http://schemas.openxmlformats.org/drawingml/2006/main">
               <a:ext uri="{FF2B5EF4-FFF2-40B4-BE49-F238E27FC236}">
-                <a16:creationId xmlns:a16="http://schemas.microsoft.com/office/drawing/2014/main" id="{B4292684-0D3F-4E8D-8C06-8853ED2F29D8}"/>
+                <a16:creationId xmlns:a16="http://schemas.microsoft.com/office/drawing/2014/main" id="{EDD5A879-1C18-4184-A304-CA5ED4362917}"/>
               </a:ext>
             </a:extLst>
           </p:cNvPr>
@@ -19173,7 +19173,7 @@
           <p:cNvPr id="29" name="">
             <a:extLst xmlns:a="http://schemas.openxmlformats.org/drawingml/2006/main">
               <a:ext uri="{FF2B5EF4-FFF2-40B4-BE49-F238E27FC236}">
-                <a16:creationId xmlns:a16="http://schemas.microsoft.com/office/drawing/2014/main" id="{C083F079-6418-4D56-AD69-A83D90D3976B}"/>
+                <a16:creationId xmlns:a16="http://schemas.microsoft.com/office/drawing/2014/main" id="{F3E18E8C-4653-4781-A64F-2D84EC6277E7}"/>
               </a:ext>
             </a:extLst>
           </p:cNvPr>
@@ -19231,7 +19231,7 @@
           <p:cNvPr id="30" name="">
             <a:extLst xmlns:a="http://schemas.openxmlformats.org/drawingml/2006/main">
               <a:ext uri="{FF2B5EF4-FFF2-40B4-BE49-F238E27FC236}">
-                <a16:creationId xmlns:a16="http://schemas.microsoft.com/office/drawing/2014/main" id="{7DC16F30-389E-4B7E-945D-FBBA451C4285}"/>
+                <a16:creationId xmlns:a16="http://schemas.microsoft.com/office/drawing/2014/main" id="{F53135CA-6FE9-4EA0-8D36-AEFDB48BEAA7}"/>
               </a:ext>
             </a:extLst>
           </p:cNvPr>
@@ -19262,7 +19262,7 @@
           <p:cNvPr id="31" name="">
             <a:extLst xmlns:a="http://schemas.openxmlformats.org/drawingml/2006/main">
               <a:ext uri="{FF2B5EF4-FFF2-40B4-BE49-F238E27FC236}">
-                <a16:creationId xmlns:a16="http://schemas.microsoft.com/office/drawing/2014/main" id="{945B68AE-94EB-4627-B5B7-01B521F2F4EF}"/>
+                <a16:creationId xmlns:a16="http://schemas.microsoft.com/office/drawing/2014/main" id="{F68F2262-EAE0-4460-939E-AF50C5AFD27B}"/>
               </a:ext>
             </a:extLst>
           </p:cNvPr>
@@ -19320,7 +19320,7 @@
           <p:cNvPr id="32" name="">
             <a:extLst xmlns:a="http://schemas.openxmlformats.org/drawingml/2006/main">
               <a:ext uri="{FF2B5EF4-FFF2-40B4-BE49-F238E27FC236}">
-                <a16:creationId xmlns:a16="http://schemas.microsoft.com/office/drawing/2014/main" id="{CFF183C7-EEF5-40E7-9827-C31D6469EF11}"/>
+                <a16:creationId xmlns:a16="http://schemas.microsoft.com/office/drawing/2014/main" id="{98B77385-AB41-4E31-8F16-D6DA6D9D00D5}"/>
               </a:ext>
             </a:extLst>
           </p:cNvPr>
@@ -19378,7 +19378,7 @@
           <p:cNvPr id="33" name="">
             <a:extLst xmlns:a="http://schemas.openxmlformats.org/drawingml/2006/main">
               <a:ext uri="{FF2B5EF4-FFF2-40B4-BE49-F238E27FC236}">
-                <a16:creationId xmlns:a16="http://schemas.microsoft.com/office/drawing/2014/main" id="{D470648A-C896-4DD3-B32D-F2B1EED0014E}"/>
+                <a16:creationId xmlns:a16="http://schemas.microsoft.com/office/drawing/2014/main" id="{9481E3AF-FD4A-411F-B86B-ECEF1BC81384}"/>
               </a:ext>
             </a:extLst>
           </p:cNvPr>
@@ -19409,7 +19409,7 @@
           <p:cNvPr id="34" name="">
             <a:extLst xmlns:a="http://schemas.openxmlformats.org/drawingml/2006/main">
               <a:ext uri="{FF2B5EF4-FFF2-40B4-BE49-F238E27FC236}">
-                <a16:creationId xmlns:a16="http://schemas.microsoft.com/office/drawing/2014/main" id="{C8A3A501-6A50-42C5-A5E7-E6815285EC7D}"/>
+                <a16:creationId xmlns:a16="http://schemas.microsoft.com/office/drawing/2014/main" id="{2689116B-BC14-4BFF-9039-F9053265B614}"/>
               </a:ext>
             </a:extLst>
           </p:cNvPr>
@@ -19467,7 +19467,7 @@
           <p:cNvPr id="35" name="">
             <a:extLst xmlns:a="http://schemas.openxmlformats.org/drawingml/2006/main">
               <a:ext uri="{FF2B5EF4-FFF2-40B4-BE49-F238E27FC236}">
-                <a16:creationId xmlns:a16="http://schemas.microsoft.com/office/drawing/2014/main" id="{17B19015-A535-48C8-9632-DFA035363E52}"/>
+                <a16:creationId xmlns:a16="http://schemas.microsoft.com/office/drawing/2014/main" id="{B947C88D-9296-4145-BB7F-B48F4098633A}"/>
               </a:ext>
             </a:extLst>
           </p:cNvPr>
@@ -19525,7 +19525,7 @@
           <p:cNvPr id="36" name="">
             <a:extLst xmlns:a="http://schemas.openxmlformats.org/drawingml/2006/main">
               <a:ext uri="{FF2B5EF4-FFF2-40B4-BE49-F238E27FC236}">
-                <a16:creationId xmlns:a16="http://schemas.microsoft.com/office/drawing/2014/main" id="{72C4F8CF-6C2D-4CDF-8653-A07D22F93105}"/>
+                <a16:creationId xmlns:a16="http://schemas.microsoft.com/office/drawing/2014/main" id="{E10F55F3-5AAE-4946-B149-F6774531C744}"/>
               </a:ext>
             </a:extLst>
           </p:cNvPr>
@@ -19556,7 +19556,7 @@
           <p:cNvPr id="37" name="">
             <a:extLst xmlns:a="http://schemas.openxmlformats.org/drawingml/2006/main">
               <a:ext uri="{FF2B5EF4-FFF2-40B4-BE49-F238E27FC236}">
-                <a16:creationId xmlns:a16="http://schemas.microsoft.com/office/drawing/2014/main" id="{2DE93891-E7F4-44B3-B89F-0EDDAC1110F2}"/>
+                <a16:creationId xmlns:a16="http://schemas.microsoft.com/office/drawing/2014/main" id="{672F9D45-F6A0-498B-A153-7ED7978196E3}"/>
               </a:ext>
             </a:extLst>
           </p:cNvPr>
@@ -19614,7 +19614,7 @@
           <p:cNvPr id="38" name="">
             <a:extLst xmlns:a="http://schemas.openxmlformats.org/drawingml/2006/main">
               <a:ext uri="{FF2B5EF4-FFF2-40B4-BE49-F238E27FC236}">
-                <a16:creationId xmlns:a16="http://schemas.microsoft.com/office/drawing/2014/main" id="{67384A9A-E67F-49B0-AF61-5013B55C790B}"/>
+                <a16:creationId xmlns:a16="http://schemas.microsoft.com/office/drawing/2014/main" id="{4ACC4386-3E49-462F-9894-B170EEAD9FFF}"/>
               </a:ext>
             </a:extLst>
           </p:cNvPr>
@@ -19672,7 +19672,7 @@
           <p:cNvPr id="39" name="">
             <a:extLst xmlns:a="http://schemas.openxmlformats.org/drawingml/2006/main">
               <a:ext uri="{FF2B5EF4-FFF2-40B4-BE49-F238E27FC236}">
-                <a16:creationId xmlns:a16="http://schemas.microsoft.com/office/drawing/2014/main" id="{4B75F4C5-8671-4067-A8A5-22280589F709}"/>
+                <a16:creationId xmlns:a16="http://schemas.microsoft.com/office/drawing/2014/main" id="{379A1133-DBC6-43C7-96E1-65B3D3470325}"/>
               </a:ext>
             </a:extLst>
           </p:cNvPr>
@@ -19707,7 +19707,7 @@
           <p:cNvPr id="40" name="">
             <a:extLst xmlns:a="http://schemas.openxmlformats.org/drawingml/2006/main">
               <a:ext uri="{FF2B5EF4-FFF2-40B4-BE49-F238E27FC236}">
-                <a16:creationId xmlns:a16="http://schemas.microsoft.com/office/drawing/2014/main" id="{DC651D31-7114-4874-8D73-9427C8AD55D2}"/>
+                <a16:creationId xmlns:a16="http://schemas.microsoft.com/office/drawing/2014/main" id="{2CBDC561-0679-49EF-BDE9-AA90F8BC7C07}"/>
               </a:ext>
             </a:extLst>
           </p:cNvPr>
@@ -19765,7 +19765,7 @@
           <p:cNvPr id="41" name="">
             <a:extLst xmlns:a="http://schemas.openxmlformats.org/drawingml/2006/main">
               <a:ext uri="{FF2B5EF4-FFF2-40B4-BE49-F238E27FC236}">
-                <a16:creationId xmlns:a16="http://schemas.microsoft.com/office/drawing/2014/main" id="{DA5B6459-F931-43F2-85F6-7A1E9A19EACE}"/>
+                <a16:creationId xmlns:a16="http://schemas.microsoft.com/office/drawing/2014/main" id="{1A2097DB-6E77-4D66-BBF9-C3E1D1DCB37A}"/>
               </a:ext>
             </a:extLst>
           </p:cNvPr>
@@ -19823,7 +19823,7 @@
           <p:cNvPr id="42" name="">
             <a:extLst xmlns:a="http://schemas.openxmlformats.org/drawingml/2006/main">
               <a:ext uri="{FF2B5EF4-FFF2-40B4-BE49-F238E27FC236}">
-                <a16:creationId xmlns:a16="http://schemas.microsoft.com/office/drawing/2014/main" id="{B6BC6BBF-6E9F-4FC0-873B-438F5D8EC7AD}"/>
+                <a16:creationId xmlns:a16="http://schemas.microsoft.com/office/drawing/2014/main" id="{94C543D9-F550-46EB-A677-B62FD53FCB86}"/>
               </a:ext>
             </a:extLst>
           </p:cNvPr>
@@ -19854,7 +19854,7 @@
           <p:cNvPr id="43" name="">
             <a:extLst xmlns:a="http://schemas.openxmlformats.org/drawingml/2006/main">
               <a:ext uri="{FF2B5EF4-FFF2-40B4-BE49-F238E27FC236}">
-                <a16:creationId xmlns:a16="http://schemas.microsoft.com/office/drawing/2014/main" id="{6BF8B9DF-4F19-41ED-AD2D-873F921A8637}"/>
+                <a16:creationId xmlns:a16="http://schemas.microsoft.com/office/drawing/2014/main" id="{5064B94A-05E4-49D0-AA26-4F6D625946A0}"/>
               </a:ext>
             </a:extLst>
           </p:cNvPr>
@@ -19912,7 +19912,7 @@
           <p:cNvPr id="44" name="">
             <a:extLst xmlns:a="http://schemas.openxmlformats.org/drawingml/2006/main">
               <a:ext uri="{FF2B5EF4-FFF2-40B4-BE49-F238E27FC236}">
-                <a16:creationId xmlns:a16="http://schemas.microsoft.com/office/drawing/2014/main" id="{C06B05B8-0785-45FD-A8CA-9051C3882BD1}"/>
+                <a16:creationId xmlns:a16="http://schemas.microsoft.com/office/drawing/2014/main" id="{DD5E5301-E969-496B-877E-88EED09EE004}"/>
               </a:ext>
             </a:extLst>
           </p:cNvPr>
@@ -19970,7 +19970,7 @@
           <p:cNvPr id="45" name="">
             <a:extLst xmlns:a="http://schemas.openxmlformats.org/drawingml/2006/main">
               <a:ext uri="{FF2B5EF4-FFF2-40B4-BE49-F238E27FC236}">
-                <a16:creationId xmlns:a16="http://schemas.microsoft.com/office/drawing/2014/main" id="{DA9A87E7-A691-432E-9BD8-0F524AF7698B}"/>
+                <a16:creationId xmlns:a16="http://schemas.microsoft.com/office/drawing/2014/main" id="{A53D5FD9-8756-4ABC-B3EB-79A452707D87}"/>
               </a:ext>
             </a:extLst>
           </p:cNvPr>
@@ -20001,7 +20001,7 @@
           <p:cNvPr id="46" name="">
             <a:extLst xmlns:a="http://schemas.openxmlformats.org/drawingml/2006/main">
               <a:ext uri="{FF2B5EF4-FFF2-40B4-BE49-F238E27FC236}">
-                <a16:creationId xmlns:a16="http://schemas.microsoft.com/office/drawing/2014/main" id="{DD36E3EB-C37A-44E5-91C4-4935EF326B80}"/>
+                <a16:creationId xmlns:a16="http://schemas.microsoft.com/office/drawing/2014/main" id="{A22FF758-B363-4567-B4EB-01FB14CDEDC4}"/>
               </a:ext>
             </a:extLst>
           </p:cNvPr>
@@ -20059,7 +20059,7 @@
           <p:cNvPr id="47" name="">
             <a:extLst xmlns:a="http://schemas.openxmlformats.org/drawingml/2006/main">
               <a:ext uri="{FF2B5EF4-FFF2-40B4-BE49-F238E27FC236}">
-                <a16:creationId xmlns:a16="http://schemas.microsoft.com/office/drawing/2014/main" id="{E18F3899-2BD3-483A-9CB2-94B614383983}"/>
+                <a16:creationId xmlns:a16="http://schemas.microsoft.com/office/drawing/2014/main" id="{1E025E55-7CCD-4946-8788-3EDAB2C2F3E1}"/>
               </a:ext>
             </a:extLst>
           </p:cNvPr>
@@ -20117,7 +20117,7 @@
           <p:cNvPr id="48" name="">
             <a:extLst xmlns:a="http://schemas.openxmlformats.org/drawingml/2006/main">
               <a:ext uri="{FF2B5EF4-FFF2-40B4-BE49-F238E27FC236}">
-                <a16:creationId xmlns:a16="http://schemas.microsoft.com/office/drawing/2014/main" id="{DCA0736D-EAC5-4E09-B5F9-F7DB77296220}"/>
+                <a16:creationId xmlns:a16="http://schemas.microsoft.com/office/drawing/2014/main" id="{C77BD89C-62CA-41EB-A20A-0A57175717DE}"/>
               </a:ext>
             </a:extLst>
           </p:cNvPr>
@@ -20148,7 +20148,7 @@
           <p:cNvPr id="49" name="">
             <a:extLst xmlns:a="http://schemas.openxmlformats.org/drawingml/2006/main">
               <a:ext uri="{FF2B5EF4-FFF2-40B4-BE49-F238E27FC236}">
-                <a16:creationId xmlns:a16="http://schemas.microsoft.com/office/drawing/2014/main" id="{1565B003-D637-49E5-9E65-F7C16C358C88}"/>
+                <a16:creationId xmlns:a16="http://schemas.microsoft.com/office/drawing/2014/main" id="{993AC947-C76E-464C-BFF8-86D93B9506BA}"/>
               </a:ext>
             </a:extLst>
           </p:cNvPr>
@@ -20206,7 +20206,7 @@
           <p:cNvPr id="50" name="">
             <a:extLst xmlns:a="http://schemas.openxmlformats.org/drawingml/2006/main">
               <a:ext uri="{FF2B5EF4-FFF2-40B4-BE49-F238E27FC236}">
-                <a16:creationId xmlns:a16="http://schemas.microsoft.com/office/drawing/2014/main" id="{0E624A0C-44C3-4BF6-AD2C-46ECFDECAF4E}"/>
+                <a16:creationId xmlns:a16="http://schemas.microsoft.com/office/drawing/2014/main" id="{1161D7A9-C06D-4F88-8300-7A5E8FC8CC5C}"/>
               </a:ext>
             </a:extLst>
           </p:cNvPr>
@@ -20264,7 +20264,7 @@
           <p:cNvPr id="51" name="">
             <a:extLst xmlns:a="http://schemas.openxmlformats.org/drawingml/2006/main">
               <a:ext uri="{FF2B5EF4-FFF2-40B4-BE49-F238E27FC236}">
-                <a16:creationId xmlns:a16="http://schemas.microsoft.com/office/drawing/2014/main" id="{2E61E98F-B956-4373-93A1-C4FF3DA43738}"/>
+                <a16:creationId xmlns:a16="http://schemas.microsoft.com/office/drawing/2014/main" id="{C32D66D1-5D99-4539-9770-2E2298C93CDB}"/>
               </a:ext>
             </a:extLst>
           </p:cNvPr>
@@ -20295,7 +20295,7 @@
           <p:cNvPr id="52" name="">
             <a:extLst xmlns:a="http://schemas.openxmlformats.org/drawingml/2006/main">
               <a:ext uri="{FF2B5EF4-FFF2-40B4-BE49-F238E27FC236}">
-                <a16:creationId xmlns:a16="http://schemas.microsoft.com/office/drawing/2014/main" id="{29B34870-37F8-4F9A-BD12-A7509B0B2048}"/>
+                <a16:creationId xmlns:a16="http://schemas.microsoft.com/office/drawing/2014/main" id="{5FFD7ACE-E372-4CD8-B8FA-526A33CBCB0B}"/>
               </a:ext>
             </a:extLst>
           </p:cNvPr>
@@ -20353,7 +20353,7 @@
           <p:cNvPr id="53" name="">
             <a:extLst xmlns:a="http://schemas.openxmlformats.org/drawingml/2006/main">
               <a:ext uri="{FF2B5EF4-FFF2-40B4-BE49-F238E27FC236}">
-                <a16:creationId xmlns:a16="http://schemas.microsoft.com/office/drawing/2014/main" id="{F9E22B40-D667-427C-AD19-3385CA4407E2}"/>
+                <a16:creationId xmlns:a16="http://schemas.microsoft.com/office/drawing/2014/main" id="{D4434C06-0300-4ED5-90FC-0D8819EDC440}"/>
               </a:ext>
             </a:extLst>
           </p:cNvPr>
@@ -20411,7 +20411,7 @@
           <p:cNvPr id="54" name="">
             <a:extLst xmlns:a="http://schemas.openxmlformats.org/drawingml/2006/main">
               <a:ext uri="{FF2B5EF4-FFF2-40B4-BE49-F238E27FC236}">
-                <a16:creationId xmlns:a16="http://schemas.microsoft.com/office/drawing/2014/main" id="{FE373A1F-BD0A-43C2-939A-DDD17C678CFF}"/>
+                <a16:creationId xmlns:a16="http://schemas.microsoft.com/office/drawing/2014/main" id="{7D7FE948-B154-48D6-829B-02D2FB831737}"/>
               </a:ext>
             </a:extLst>
           </p:cNvPr>
@@ -20442,7 +20442,7 @@
           <p:cNvPr id="55" name="">
             <a:extLst xmlns:a="http://schemas.openxmlformats.org/drawingml/2006/main">
               <a:ext uri="{FF2B5EF4-FFF2-40B4-BE49-F238E27FC236}">
-                <a16:creationId xmlns:a16="http://schemas.microsoft.com/office/drawing/2014/main" id="{29A47BB6-8405-4285-8F06-ED565E3D861C}"/>
+                <a16:creationId xmlns:a16="http://schemas.microsoft.com/office/drawing/2014/main" id="{8BFDF6F7-7382-46B7-882E-F051C237F208}"/>
               </a:ext>
             </a:extLst>
           </p:cNvPr>
@@ -20500,7 +20500,7 @@
           <p:cNvPr id="56" name="">
             <a:extLst xmlns:a="http://schemas.openxmlformats.org/drawingml/2006/main">
               <a:ext uri="{FF2B5EF4-FFF2-40B4-BE49-F238E27FC236}">
-                <a16:creationId xmlns:a16="http://schemas.microsoft.com/office/drawing/2014/main" id="{AA664D1B-FD33-444C-A988-A62D864B532B}"/>
+                <a16:creationId xmlns:a16="http://schemas.microsoft.com/office/drawing/2014/main" id="{BA9BC849-7FDF-4BD3-8FFF-720C2B6F8193}"/>
               </a:ext>
             </a:extLst>
           </p:cNvPr>
@@ -20558,7 +20558,7 @@
           <p:cNvPr id="57" name="">
             <a:extLst xmlns:a="http://schemas.openxmlformats.org/drawingml/2006/main">
               <a:ext uri="{FF2B5EF4-FFF2-40B4-BE49-F238E27FC236}">
-                <a16:creationId xmlns:a16="http://schemas.microsoft.com/office/drawing/2014/main" id="{9B6D232C-52ED-401E-835F-5866169124C3}"/>
+                <a16:creationId xmlns:a16="http://schemas.microsoft.com/office/drawing/2014/main" id="{6DE201A8-4E52-4A5E-8758-A5311F97970D}"/>
               </a:ext>
             </a:extLst>
           </p:cNvPr>
@@ -20589,7 +20589,7 @@
           <p:cNvPr id="58" name="">
             <a:extLst xmlns:a="http://schemas.openxmlformats.org/drawingml/2006/main">
               <a:ext uri="{FF2B5EF4-FFF2-40B4-BE49-F238E27FC236}">
-                <a16:creationId xmlns:a16="http://schemas.microsoft.com/office/drawing/2014/main" id="{94ADED8F-D068-4EBA-A4D6-345E662A6AA7}"/>
+                <a16:creationId xmlns:a16="http://schemas.microsoft.com/office/drawing/2014/main" id="{C1EA0435-9337-479B-9E8A-3588DDFDFD8C}"/>
               </a:ext>
             </a:extLst>
           </p:cNvPr>
@@ -20647,7 +20647,7 @@
           <p:cNvPr id="59" name="">
             <a:extLst xmlns:a="http://schemas.openxmlformats.org/drawingml/2006/main">
               <a:ext uri="{FF2B5EF4-FFF2-40B4-BE49-F238E27FC236}">
-                <a16:creationId xmlns:a16="http://schemas.microsoft.com/office/drawing/2014/main" id="{3EDD3509-8A5B-476C-AD74-1758A75CFA74}"/>
+                <a16:creationId xmlns:a16="http://schemas.microsoft.com/office/drawing/2014/main" id="{0FAFF0FB-8D80-48A6-A9C6-7F2BF48DEC51}"/>
               </a:ext>
             </a:extLst>
           </p:cNvPr>
@@ -20705,7 +20705,7 @@
           <p:cNvPr id="60" name="">
             <a:extLst xmlns:a="http://schemas.openxmlformats.org/drawingml/2006/main">
               <a:ext uri="{FF2B5EF4-FFF2-40B4-BE49-F238E27FC236}">
-                <a16:creationId xmlns:a16="http://schemas.microsoft.com/office/drawing/2014/main" id="{527C1328-0B2C-4B9D-9817-8845D31EE4C1}"/>
+                <a16:creationId xmlns:a16="http://schemas.microsoft.com/office/drawing/2014/main" id="{23239664-BF31-4DA9-8ABE-DDF2270B1A73}"/>
               </a:ext>
             </a:extLst>
           </p:cNvPr>
@@ -20736,7 +20736,7 @@
           <p:cNvPr id="61" name="">
             <a:extLst xmlns:a="http://schemas.openxmlformats.org/drawingml/2006/main">
               <a:ext uri="{FF2B5EF4-FFF2-40B4-BE49-F238E27FC236}">
-                <a16:creationId xmlns:a16="http://schemas.microsoft.com/office/drawing/2014/main" id="{20891CF1-B1F5-4061-9B1A-F5A751855DB6}"/>
+                <a16:creationId xmlns:a16="http://schemas.microsoft.com/office/drawing/2014/main" id="{2BBB92EE-1A87-439E-A1EF-5F3876EEE5E3}"/>
               </a:ext>
             </a:extLst>
           </p:cNvPr>
@@ -20794,7 +20794,7 @@
           <p:cNvPr id="62" name="">
             <a:extLst xmlns:a="http://schemas.openxmlformats.org/drawingml/2006/main">
               <a:ext uri="{FF2B5EF4-FFF2-40B4-BE49-F238E27FC236}">
-                <a16:creationId xmlns:a16="http://schemas.microsoft.com/office/drawing/2014/main" id="{8BA7D46F-4C9D-4C75-8F35-EDBD3EF39885}"/>
+                <a16:creationId xmlns:a16="http://schemas.microsoft.com/office/drawing/2014/main" id="{AABAE6B5-1727-452E-BD2B-CE9ED5ECB022}"/>
               </a:ext>
             </a:extLst>
           </p:cNvPr>
@@ -20852,7 +20852,7 @@
           <p:cNvPr id="63" name="">
             <a:extLst xmlns:a="http://schemas.openxmlformats.org/drawingml/2006/main">
               <a:ext uri="{FF2B5EF4-FFF2-40B4-BE49-F238E27FC236}">
-                <a16:creationId xmlns:a16="http://schemas.microsoft.com/office/drawing/2014/main" id="{846DF6D3-BEA4-4AD4-8F4A-35B90897528C}"/>
+                <a16:creationId xmlns:a16="http://schemas.microsoft.com/office/drawing/2014/main" id="{632ADF41-AEC3-4A07-A327-9496D79130CE}"/>
               </a:ext>
             </a:extLst>
           </p:cNvPr>
@@ -20883,7 +20883,7 @@
           <p:cNvPr id="64" name="">
             <a:extLst xmlns:a="http://schemas.openxmlformats.org/drawingml/2006/main">
               <a:ext uri="{FF2B5EF4-FFF2-40B4-BE49-F238E27FC236}">
-                <a16:creationId xmlns:a16="http://schemas.microsoft.com/office/drawing/2014/main" id="{74BC2BF3-5FAC-4D18-A4CC-D8431A8A7CCC}"/>
+                <a16:creationId xmlns:a16="http://schemas.microsoft.com/office/drawing/2014/main" id="{519FFA1D-FE71-4DA9-8F04-C2C464957988}"/>
               </a:ext>
             </a:extLst>
           </p:cNvPr>
@@ -20941,7 +20941,7 @@
           <p:cNvPr id="65" name="">
             <a:extLst xmlns:a="http://schemas.openxmlformats.org/drawingml/2006/main">
               <a:ext uri="{FF2B5EF4-FFF2-40B4-BE49-F238E27FC236}">
-                <a16:creationId xmlns:a16="http://schemas.microsoft.com/office/drawing/2014/main" id="{F080A420-F8BC-482F-A8E1-F799306769EA}"/>
+                <a16:creationId xmlns:a16="http://schemas.microsoft.com/office/drawing/2014/main" id="{3F3AD06C-E400-4986-AE61-063ACD2A0991}"/>
               </a:ext>
             </a:extLst>
           </p:cNvPr>
@@ -20999,7 +20999,7 @@
           <p:cNvPr id="66" name="">
             <a:extLst xmlns:a="http://schemas.openxmlformats.org/drawingml/2006/main">
               <a:ext uri="{FF2B5EF4-FFF2-40B4-BE49-F238E27FC236}">
-                <a16:creationId xmlns:a16="http://schemas.microsoft.com/office/drawing/2014/main" id="{E2677CD2-120F-455F-91D9-3A73E250B841}"/>
+                <a16:creationId xmlns:a16="http://schemas.microsoft.com/office/drawing/2014/main" id="{0E6CAEF0-FA62-4AC0-BABB-B11347E8AE4A}"/>
               </a:ext>
             </a:extLst>
           </p:cNvPr>
@@ -21030,7 +21030,7 @@
           <p:cNvPr id="67" name="">
             <a:extLst xmlns:a="http://schemas.openxmlformats.org/drawingml/2006/main">
               <a:ext uri="{FF2B5EF4-FFF2-40B4-BE49-F238E27FC236}">
-                <a16:creationId xmlns:a16="http://schemas.microsoft.com/office/drawing/2014/main" id="{299710D5-6191-4F6E-A664-E7F66F9E569A}"/>
+                <a16:creationId xmlns:a16="http://schemas.microsoft.com/office/drawing/2014/main" id="{3462D4F7-E4C7-4691-BCB1-747E3057D4AB}"/>
               </a:ext>
             </a:extLst>
           </p:cNvPr>
@@ -21088,7 +21088,7 @@
           <p:cNvPr id="68" name="">
             <a:extLst xmlns:a="http://schemas.openxmlformats.org/drawingml/2006/main">
               <a:ext uri="{FF2B5EF4-FFF2-40B4-BE49-F238E27FC236}">
-                <a16:creationId xmlns:a16="http://schemas.microsoft.com/office/drawing/2014/main" id="{A4924B64-8F35-4CDA-8037-0438B44251BB}"/>
+                <a16:creationId xmlns:a16="http://schemas.microsoft.com/office/drawing/2014/main" id="{31757095-5709-4B36-9325-DE594967F923}"/>
               </a:ext>
             </a:extLst>
           </p:cNvPr>
@@ -21146,7 +21146,7 @@
           <p:cNvPr id="69" name="">
             <a:extLst xmlns:a="http://schemas.openxmlformats.org/drawingml/2006/main">
               <a:ext uri="{FF2B5EF4-FFF2-40B4-BE49-F238E27FC236}">
-                <a16:creationId xmlns:a16="http://schemas.microsoft.com/office/drawing/2014/main" id="{C7DD6C72-871A-49BC-83EC-62A6D7DCCBA8}"/>
+                <a16:creationId xmlns:a16="http://schemas.microsoft.com/office/drawing/2014/main" id="{D6A6A443-ECDC-4CCC-8D53-73C904A7EC94}"/>
               </a:ext>
             </a:extLst>
           </p:cNvPr>
@@ -21177,7 +21177,7 @@
           <p:cNvPr id="70" name="">
             <a:extLst xmlns:a="http://schemas.openxmlformats.org/drawingml/2006/main">
               <a:ext uri="{FF2B5EF4-FFF2-40B4-BE49-F238E27FC236}">
-                <a16:creationId xmlns:a16="http://schemas.microsoft.com/office/drawing/2014/main" id="{E6704BC5-7432-4098-A2E5-CE1933359515}"/>
+                <a16:creationId xmlns:a16="http://schemas.microsoft.com/office/drawing/2014/main" id="{D521DC75-6901-4FC4-8884-B07C51049A06}"/>
               </a:ext>
             </a:extLst>
           </p:cNvPr>
@@ -21235,7 +21235,7 @@
           <p:cNvPr id="71" name="">
             <a:extLst xmlns:a="http://schemas.openxmlformats.org/drawingml/2006/main">
               <a:ext uri="{FF2B5EF4-FFF2-40B4-BE49-F238E27FC236}">
-                <a16:creationId xmlns:a16="http://schemas.microsoft.com/office/drawing/2014/main" id="{EC0C78F4-5F5B-4B57-966D-C03B58A40C17}"/>
+                <a16:creationId xmlns:a16="http://schemas.microsoft.com/office/drawing/2014/main" id="{5946FEE1-3C5C-45FF-9B9F-59C8816A2DD1}"/>
               </a:ext>
             </a:extLst>
           </p:cNvPr>
@@ -21293,7 +21293,7 @@
           <p:cNvPr id="72" name="">
             <a:extLst xmlns:a="http://schemas.openxmlformats.org/drawingml/2006/main">
               <a:ext uri="{FF2B5EF4-FFF2-40B4-BE49-F238E27FC236}">
-                <a16:creationId xmlns:a16="http://schemas.microsoft.com/office/drawing/2014/main" id="{DC5F1597-745D-46A9-AFCA-092F2F499623}"/>
+                <a16:creationId xmlns:a16="http://schemas.microsoft.com/office/drawing/2014/main" id="{F69CDE96-4272-4CC8-80F1-4910D481F2BC}"/>
               </a:ext>
             </a:extLst>
           </p:cNvPr>
@@ -21328,7 +21328,7 @@
           <p:cNvPr id="73" name="">
             <a:extLst xmlns:a="http://schemas.openxmlformats.org/drawingml/2006/main">
               <a:ext uri="{FF2B5EF4-FFF2-40B4-BE49-F238E27FC236}">
-                <a16:creationId xmlns:a16="http://schemas.microsoft.com/office/drawing/2014/main" id="{2C23971D-C6C6-4698-B43B-36C685BC2A8B}"/>
+                <a16:creationId xmlns:a16="http://schemas.microsoft.com/office/drawing/2014/main" id="{66B9B1BB-EA40-4756-BE1D-BFBC3A9E3379}"/>
               </a:ext>
             </a:extLst>
           </p:cNvPr>
@@ -21432,7 +21432,7 @@
           <p:cNvPr id="74" name="">
             <a:extLst xmlns:a="http://schemas.openxmlformats.org/drawingml/2006/main">
               <a:ext uri="{FF2B5EF4-FFF2-40B4-BE49-F238E27FC236}">
-                <a16:creationId xmlns:a16="http://schemas.microsoft.com/office/drawing/2014/main" id="{8F3F0BF6-5F30-4A84-A4F5-7FA98EFDCBB0}"/>
+                <a16:creationId xmlns:a16="http://schemas.microsoft.com/office/drawing/2014/main" id="{8CC436F2-D143-4F93-BEE6-BD76A58DB511}"/>
               </a:ext>
             </a:extLst>
           </p:cNvPr>
@@ -21463,7 +21463,7 @@
           <p:cNvPr id="75" name="">
             <a:extLst xmlns:a="http://schemas.openxmlformats.org/drawingml/2006/main">
               <a:ext uri="{FF2B5EF4-FFF2-40B4-BE49-F238E27FC236}">
-                <a16:creationId xmlns:a16="http://schemas.microsoft.com/office/drawing/2014/main" id="{665CE84E-CFF8-4209-9EA3-93ECE2A8B632}"/>
+                <a16:creationId xmlns:a16="http://schemas.microsoft.com/office/drawing/2014/main" id="{0D59F15A-DF57-4CFE-AD97-6B249B328F7B}"/>
               </a:ext>
             </a:extLst>
           </p:cNvPr>
@@ -21657,7 +21657,7 @@
     </p:spTree>
     <p:extLst>
       <p:ext uri="{BB962C8B-B14F-4D97-AF65-F5344CB8AC3E}">
-        <p14:creationId xmlns:p14="http://schemas.microsoft.com/office/powerpoint/2010/main" val="1955654335"/>
+        <p14:creationId xmlns:p14="http://schemas.microsoft.com/office/powerpoint/2010/main" val="635449911"/>
       </p:ext>
     </p:extLst>
   </p:cSld>
@@ -21688,7 +21688,7 @@
           <p:cNvPr id="21" name="eyebrow-6">
             <a:extLst xmlns:a="http://schemas.openxmlformats.org/drawingml/2006/main">
               <a:ext uri="{FF2B5EF4-FFF2-40B4-BE49-F238E27FC236}">
-                <a16:creationId xmlns:a16="http://schemas.microsoft.com/office/drawing/2014/main" id="{FB16C703-A54F-49BA-8187-4D217DF7B833}"/>
+                <a16:creationId xmlns:a16="http://schemas.microsoft.com/office/drawing/2014/main" id="{D288E057-9C15-4605-9EC2-48AB558E16EA}"/>
               </a:ext>
             </a:extLst>
           </p:cNvPr>
@@ -21746,7 +21746,7 @@
           <p:cNvPr id="2" name="title-6">
             <a:extLst xmlns:a="http://schemas.openxmlformats.org/drawingml/2006/main">
               <a:ext uri="{FF2B5EF4-FFF2-40B4-BE49-F238E27FC236}">
-                <a16:creationId xmlns:a16="http://schemas.microsoft.com/office/drawing/2014/main" id="{ED867B5E-CD6E-4781-A1DA-4990092FAD3D}"/>
+                <a16:creationId xmlns:a16="http://schemas.microsoft.com/office/drawing/2014/main" id="{62249C84-965E-4DF4-B3E7-0A5B92FFA40B}"/>
               </a:ext>
             </a:extLst>
           </p:cNvPr>
@@ -21804,7 +21804,7 @@
           <p:cNvPr id="3" name="">
             <a:extLst xmlns:a="http://schemas.openxmlformats.org/drawingml/2006/main">
               <a:ext uri="{FF2B5EF4-FFF2-40B4-BE49-F238E27FC236}">
-                <a16:creationId xmlns:a16="http://schemas.microsoft.com/office/drawing/2014/main" id="{6A1C5F76-3700-4A47-86E8-48763E0BA8A3}"/>
+                <a16:creationId xmlns:a16="http://schemas.microsoft.com/office/drawing/2014/main" id="{0E7B80CD-A7F6-4191-A893-E56518ED3738}"/>
               </a:ext>
             </a:extLst>
           </p:cNvPr>
@@ -21835,7 +21835,7 @@
           <p:cNvPr id="4" name="">
             <a:extLst xmlns:a="http://schemas.openxmlformats.org/drawingml/2006/main">
               <a:ext uri="{FF2B5EF4-FFF2-40B4-BE49-F238E27FC236}">
-                <a16:creationId xmlns:a16="http://schemas.microsoft.com/office/drawing/2014/main" id="{A5482332-5318-4219-B131-9C669C81D5DF}"/>
+                <a16:creationId xmlns:a16="http://schemas.microsoft.com/office/drawing/2014/main" id="{58EC7B7C-ACCA-41D9-A966-9FE0C98AB82C}"/>
               </a:ext>
             </a:extLst>
           </p:cNvPr>
@@ -21883,7 +21883,7 @@
                 <a:ea typeface="Aptos"/>
                 <a:cs typeface="Aptos"/>
               </a:rPr>
-              <a:t>BES v2.0 · Propuesta ejecutiva</a:t>
+              <a:t>BES v2.0 · Aprobado y liberado</a:t>
             </a:r>
           </a:p>
         </p:txBody>
@@ -21893,7 +21893,7 @@
           <p:cNvPr id="5" name="">
             <a:extLst xmlns:a="http://schemas.openxmlformats.org/drawingml/2006/main">
               <a:ext uri="{FF2B5EF4-FFF2-40B4-BE49-F238E27FC236}">
-                <a16:creationId xmlns:a16="http://schemas.microsoft.com/office/drawing/2014/main" id="{DC9EE0DF-B821-48A9-BE43-8F8798C40F19}"/>
+                <a16:creationId xmlns:a16="http://schemas.microsoft.com/office/drawing/2014/main" id="{4304C469-C745-43FB-A9A5-8D4D37B27E28}"/>
               </a:ext>
             </a:extLst>
           </p:cNvPr>
@@ -21951,7 +21951,7 @@
           <p:cNvPr id="6" name="">
             <a:extLst xmlns:a="http://schemas.openxmlformats.org/drawingml/2006/main">
               <a:ext uri="{FF2B5EF4-FFF2-40B4-BE49-F238E27FC236}">
-                <a16:creationId xmlns:a16="http://schemas.microsoft.com/office/drawing/2014/main" id="{81C4C20F-0EFA-4AC4-9EF8-29C7B7994640}"/>
+                <a16:creationId xmlns:a16="http://schemas.microsoft.com/office/drawing/2014/main" id="{A0548152-0805-4581-A91F-77A8E9CD3EEA}"/>
               </a:ext>
             </a:extLst>
           </p:cNvPr>
@@ -21986,7 +21986,7 @@
           <p:cNvPr id="7" name="">
             <a:extLst xmlns:a="http://schemas.openxmlformats.org/drawingml/2006/main">
               <a:ext uri="{FF2B5EF4-FFF2-40B4-BE49-F238E27FC236}">
-                <a16:creationId xmlns:a16="http://schemas.microsoft.com/office/drawing/2014/main" id="{191FE193-F48E-4CFB-B152-051AB74A241F}"/>
+                <a16:creationId xmlns:a16="http://schemas.microsoft.com/office/drawing/2014/main" id="{B763A5EA-CC91-4FF3-A5D7-6F8DEB20A384}"/>
               </a:ext>
             </a:extLst>
           </p:cNvPr>
@@ -22044,7 +22044,7 @@
           <p:cNvPr id="8" name="">
             <a:extLst xmlns:a="http://schemas.openxmlformats.org/drawingml/2006/main">
               <a:ext uri="{FF2B5EF4-FFF2-40B4-BE49-F238E27FC236}">
-                <a16:creationId xmlns:a16="http://schemas.microsoft.com/office/drawing/2014/main" id="{B10E2FAF-04A3-4FC6-A842-222F070362DF}"/>
+                <a16:creationId xmlns:a16="http://schemas.microsoft.com/office/drawing/2014/main" id="{13157BE9-6CEB-4AF5-B725-914D4A246E7B}"/>
               </a:ext>
             </a:extLst>
           </p:cNvPr>
@@ -22102,7 +22102,7 @@
           <p:cNvPr id="9" name="">
             <a:extLst xmlns:a="http://schemas.openxmlformats.org/drawingml/2006/main">
               <a:ext uri="{FF2B5EF4-FFF2-40B4-BE49-F238E27FC236}">
-                <a16:creationId xmlns:a16="http://schemas.microsoft.com/office/drawing/2014/main" id="{0F55041F-94B9-4AF9-ACDB-4EA4195E36E4}"/>
+                <a16:creationId xmlns:a16="http://schemas.microsoft.com/office/drawing/2014/main" id="{E4D8BC18-29B3-4174-B4AB-A50AACD57789}"/>
               </a:ext>
             </a:extLst>
           </p:cNvPr>
@@ -22137,7 +22137,7 @@
           <p:cNvPr id="10" name="">
             <a:extLst xmlns:a="http://schemas.openxmlformats.org/drawingml/2006/main">
               <a:ext uri="{FF2B5EF4-FFF2-40B4-BE49-F238E27FC236}">
-                <a16:creationId xmlns:a16="http://schemas.microsoft.com/office/drawing/2014/main" id="{F295B53B-6650-4444-9391-7702F232E6F0}"/>
+                <a16:creationId xmlns:a16="http://schemas.microsoft.com/office/drawing/2014/main" id="{DF090671-FC5C-412B-8CC8-AD154D0B61A9}"/>
               </a:ext>
             </a:extLst>
           </p:cNvPr>
@@ -22195,7 +22195,7 @@
           <p:cNvPr id="11" name="">
             <a:extLst xmlns:a="http://schemas.openxmlformats.org/drawingml/2006/main">
               <a:ext uri="{FF2B5EF4-FFF2-40B4-BE49-F238E27FC236}">
-                <a16:creationId xmlns:a16="http://schemas.microsoft.com/office/drawing/2014/main" id="{0D1806DA-2C24-48CF-B052-C5DBD742DB45}"/>
+                <a16:creationId xmlns:a16="http://schemas.microsoft.com/office/drawing/2014/main" id="{1B0CD393-B7FA-4551-926C-44EDA66FBE09}"/>
               </a:ext>
             </a:extLst>
           </p:cNvPr>
@@ -22253,7 +22253,7 @@
           <p:cNvPr id="12" name="">
             <a:extLst xmlns:a="http://schemas.openxmlformats.org/drawingml/2006/main">
               <a:ext uri="{FF2B5EF4-FFF2-40B4-BE49-F238E27FC236}">
-                <a16:creationId xmlns:a16="http://schemas.microsoft.com/office/drawing/2014/main" id="{0411C20F-5051-457C-B993-94675C40F5EA}"/>
+                <a16:creationId xmlns:a16="http://schemas.microsoft.com/office/drawing/2014/main" id="{BC5D2BEE-FBAC-47F2-BAF5-B85701461BAC}"/>
               </a:ext>
             </a:extLst>
           </p:cNvPr>
@@ -22288,7 +22288,7 @@
           <p:cNvPr id="13" name="">
             <a:extLst xmlns:a="http://schemas.openxmlformats.org/drawingml/2006/main">
               <a:ext uri="{FF2B5EF4-FFF2-40B4-BE49-F238E27FC236}">
-                <a16:creationId xmlns:a16="http://schemas.microsoft.com/office/drawing/2014/main" id="{6EF3CEF2-3A29-4A09-97FD-05BE5301DF93}"/>
+                <a16:creationId xmlns:a16="http://schemas.microsoft.com/office/drawing/2014/main" id="{1549BDA7-E4F3-4341-A7D3-D8822DCC33AE}"/>
               </a:ext>
             </a:extLst>
           </p:cNvPr>
@@ -22346,7 +22346,7 @@
           <p:cNvPr id="14" name="">
             <a:extLst xmlns:a="http://schemas.openxmlformats.org/drawingml/2006/main">
               <a:ext uri="{FF2B5EF4-FFF2-40B4-BE49-F238E27FC236}">
-                <a16:creationId xmlns:a16="http://schemas.microsoft.com/office/drawing/2014/main" id="{68103FC5-18BA-43D1-B9B8-3DA16913D80B}"/>
+                <a16:creationId xmlns:a16="http://schemas.microsoft.com/office/drawing/2014/main" id="{9CC0B1CB-6883-41B8-8856-87D4457190CC}"/>
               </a:ext>
             </a:extLst>
           </p:cNvPr>
@@ -22404,7 +22404,7 @@
           <p:cNvPr id="15" name="">
             <a:extLst xmlns:a="http://schemas.openxmlformats.org/drawingml/2006/main">
               <a:ext uri="{FF2B5EF4-FFF2-40B4-BE49-F238E27FC236}">
-                <a16:creationId xmlns:a16="http://schemas.microsoft.com/office/drawing/2014/main" id="{6A58373C-973F-4E3A-B2D8-6E97E292A07D}"/>
+                <a16:creationId xmlns:a16="http://schemas.microsoft.com/office/drawing/2014/main" id="{6FB1F4FE-90B5-4F5E-9EBD-C854DEED2360}"/>
               </a:ext>
             </a:extLst>
           </p:cNvPr>
@@ -22439,7 +22439,7 @@
           <p:cNvPr id="16" name="">
             <a:extLst xmlns:a="http://schemas.openxmlformats.org/drawingml/2006/main">
               <a:ext uri="{FF2B5EF4-FFF2-40B4-BE49-F238E27FC236}">
-                <a16:creationId xmlns:a16="http://schemas.microsoft.com/office/drawing/2014/main" id="{D64CBB4D-D64A-4F6C-A7EE-142D6474B658}"/>
+                <a16:creationId xmlns:a16="http://schemas.microsoft.com/office/drawing/2014/main" id="{DF77D42F-3165-4B38-BFCF-1E225976A945}"/>
               </a:ext>
             </a:extLst>
           </p:cNvPr>
@@ -22497,7 +22497,7 @@
           <p:cNvPr id="17" name="">
             <a:extLst xmlns:a="http://schemas.openxmlformats.org/drawingml/2006/main">
               <a:ext uri="{FF2B5EF4-FFF2-40B4-BE49-F238E27FC236}">
-                <a16:creationId xmlns:a16="http://schemas.microsoft.com/office/drawing/2014/main" id="{0DD6D437-D8BC-4237-BF14-3D9D67BE79E0}"/>
+                <a16:creationId xmlns:a16="http://schemas.microsoft.com/office/drawing/2014/main" id="{DE3DC215-BF7D-49F5-B385-3D34E1D1B426}"/>
               </a:ext>
             </a:extLst>
           </p:cNvPr>
@@ -22555,7 +22555,7 @@
           <p:cNvPr id="18" name="">
             <a:extLst xmlns:a="http://schemas.openxmlformats.org/drawingml/2006/main">
               <a:ext uri="{FF2B5EF4-FFF2-40B4-BE49-F238E27FC236}">
-                <a16:creationId xmlns:a16="http://schemas.microsoft.com/office/drawing/2014/main" id="{B18FFDB4-6C9E-470F-8419-04C583A68E69}"/>
+                <a16:creationId xmlns:a16="http://schemas.microsoft.com/office/drawing/2014/main" id="{17B5C1EE-29AA-4EAD-B8A2-F10907ACA3F7}"/>
               </a:ext>
             </a:extLst>
           </p:cNvPr>
@@ -22590,7 +22590,7 @@
           <p:cNvPr id="19" name="">
             <a:extLst xmlns:a="http://schemas.openxmlformats.org/drawingml/2006/main">
               <a:ext uri="{FF2B5EF4-FFF2-40B4-BE49-F238E27FC236}">
-                <a16:creationId xmlns:a16="http://schemas.microsoft.com/office/drawing/2014/main" id="{54E77F6B-9AB9-47EE-84CE-BBA3802A6820}"/>
+                <a16:creationId xmlns:a16="http://schemas.microsoft.com/office/drawing/2014/main" id="{8A6B3158-BFAF-46E2-8263-8C202FFB2A99}"/>
               </a:ext>
             </a:extLst>
           </p:cNvPr>
@@ -22648,7 +22648,7 @@
           <p:cNvPr id="20" name="">
             <a:extLst xmlns:a="http://schemas.openxmlformats.org/drawingml/2006/main">
               <a:ext uri="{FF2B5EF4-FFF2-40B4-BE49-F238E27FC236}">
-                <a16:creationId xmlns:a16="http://schemas.microsoft.com/office/drawing/2014/main" id="{EB20F1F9-83BD-4F80-8041-583F21F76B60}"/>
+                <a16:creationId xmlns:a16="http://schemas.microsoft.com/office/drawing/2014/main" id="{0C103AE8-0A35-444D-9A83-F627D86102D5}"/>
               </a:ext>
             </a:extLst>
           </p:cNvPr>
@@ -22704,7 +22704,7 @@
     </p:spTree>
     <p:extLst>
       <p:ext uri="{BB962C8B-B14F-4D97-AF65-F5344CB8AC3E}">
-        <p14:creationId xmlns:p14="http://schemas.microsoft.com/office/powerpoint/2010/main" val="1899005112"/>
+        <p14:creationId xmlns:p14="http://schemas.microsoft.com/office/powerpoint/2010/main" val="283078570"/>
       </p:ext>
     </p:extLst>
   </p:cSld>
@@ -22735,7 +22735,7 @@
           <p:cNvPr id="53" name="eyebrow-7">
             <a:extLst xmlns:a="http://schemas.openxmlformats.org/drawingml/2006/main">
               <a:ext uri="{FF2B5EF4-FFF2-40B4-BE49-F238E27FC236}">
-                <a16:creationId xmlns:a16="http://schemas.microsoft.com/office/drawing/2014/main" id="{700D8AA2-9249-4054-93EC-563A38F72E7F}"/>
+                <a16:creationId xmlns:a16="http://schemas.microsoft.com/office/drawing/2014/main" id="{6FBADEA6-8D27-4E25-8ECB-1C76C308D0E7}"/>
               </a:ext>
             </a:extLst>
           </p:cNvPr>
@@ -22793,7 +22793,7 @@
           <p:cNvPr id="2" name="title-7">
             <a:extLst xmlns:a="http://schemas.openxmlformats.org/drawingml/2006/main">
               <a:ext uri="{FF2B5EF4-FFF2-40B4-BE49-F238E27FC236}">
-                <a16:creationId xmlns:a16="http://schemas.microsoft.com/office/drawing/2014/main" id="{255DBA34-6887-4A63-A753-097A23444366}"/>
+                <a16:creationId xmlns:a16="http://schemas.microsoft.com/office/drawing/2014/main" id="{487FF7D9-250C-4EB1-ADA0-8E2868FDF0B4}"/>
               </a:ext>
             </a:extLst>
           </p:cNvPr>
@@ -22851,7 +22851,7 @@
           <p:cNvPr id="3" name="">
             <a:extLst xmlns:a="http://schemas.openxmlformats.org/drawingml/2006/main">
               <a:ext uri="{FF2B5EF4-FFF2-40B4-BE49-F238E27FC236}">
-                <a16:creationId xmlns:a16="http://schemas.microsoft.com/office/drawing/2014/main" id="{D72A974B-F6C3-4829-AD4B-FAC7F0E6451D}"/>
+                <a16:creationId xmlns:a16="http://schemas.microsoft.com/office/drawing/2014/main" id="{2901C8B8-3481-45E4-8565-84F82C437838}"/>
               </a:ext>
             </a:extLst>
           </p:cNvPr>
@@ -22882,7 +22882,7 @@
           <p:cNvPr id="4" name="">
             <a:extLst xmlns:a="http://schemas.openxmlformats.org/drawingml/2006/main">
               <a:ext uri="{FF2B5EF4-FFF2-40B4-BE49-F238E27FC236}">
-                <a16:creationId xmlns:a16="http://schemas.microsoft.com/office/drawing/2014/main" id="{75FBCCBF-047B-43D6-AF48-1AF7D11A112F}"/>
+                <a16:creationId xmlns:a16="http://schemas.microsoft.com/office/drawing/2014/main" id="{DBF087B8-425E-4DB9-A418-DC33B4B26C4B}"/>
               </a:ext>
             </a:extLst>
           </p:cNvPr>
@@ -22930,7 +22930,7 @@
                 <a:ea typeface="Aptos"/>
                 <a:cs typeface="Aptos"/>
               </a:rPr>
-              <a:t>BES v2.0 · Propuesta ejecutiva</a:t>
+              <a:t>BES v2.0 · Aprobado y liberado</a:t>
             </a:r>
           </a:p>
         </p:txBody>
@@ -22940,7 +22940,7 @@
           <p:cNvPr id="5" name="">
             <a:extLst xmlns:a="http://schemas.openxmlformats.org/drawingml/2006/main">
               <a:ext uri="{FF2B5EF4-FFF2-40B4-BE49-F238E27FC236}">
-                <a16:creationId xmlns:a16="http://schemas.microsoft.com/office/drawing/2014/main" id="{48BEE81C-C733-4FFF-A351-7B56B6348C6F}"/>
+                <a16:creationId xmlns:a16="http://schemas.microsoft.com/office/drawing/2014/main" id="{FF09F3F0-7D7B-460B-92BD-B32B76E9310B}"/>
               </a:ext>
             </a:extLst>
           </p:cNvPr>
@@ -22998,7 +22998,7 @@
           <p:cNvPr id="6" name="">
             <a:extLst xmlns:a="http://schemas.openxmlformats.org/drawingml/2006/main">
               <a:ext uri="{FF2B5EF4-FFF2-40B4-BE49-F238E27FC236}">
-                <a16:creationId xmlns:a16="http://schemas.microsoft.com/office/drawing/2014/main" id="{90F219EB-E6C3-4660-B136-2D7AF741E836}"/>
+                <a16:creationId xmlns:a16="http://schemas.microsoft.com/office/drawing/2014/main" id="{9640DD86-E19A-4FC3-A7F7-3E425307AC7E}"/>
               </a:ext>
             </a:extLst>
           </p:cNvPr>
@@ -23033,7 +23033,7 @@
           <p:cNvPr id="7" name="">
             <a:extLst xmlns:a="http://schemas.openxmlformats.org/drawingml/2006/main">
               <a:ext uri="{FF2B5EF4-FFF2-40B4-BE49-F238E27FC236}">
-                <a16:creationId xmlns:a16="http://schemas.microsoft.com/office/drawing/2014/main" id="{908DF33E-D596-4E0F-96B5-D5C598A1386F}"/>
+                <a16:creationId xmlns:a16="http://schemas.microsoft.com/office/drawing/2014/main" id="{4EC721C7-06D5-4969-9490-89208C0DBBDA}"/>
               </a:ext>
             </a:extLst>
           </p:cNvPr>
@@ -23091,7 +23091,7 @@
           <p:cNvPr id="8" name="">
             <a:extLst xmlns:a="http://schemas.openxmlformats.org/drawingml/2006/main">
               <a:ext uri="{FF2B5EF4-FFF2-40B4-BE49-F238E27FC236}">
-                <a16:creationId xmlns:a16="http://schemas.microsoft.com/office/drawing/2014/main" id="{B726388D-29BE-46AD-A3BC-A8AF42E14006}"/>
+                <a16:creationId xmlns:a16="http://schemas.microsoft.com/office/drawing/2014/main" id="{B5DCF9BC-19B1-4829-8F07-476F8EB723DC}"/>
               </a:ext>
             </a:extLst>
           </p:cNvPr>
@@ -23149,7 +23149,7 @@
           <p:cNvPr id="9" name="">
             <a:extLst xmlns:a="http://schemas.openxmlformats.org/drawingml/2006/main">
               <a:ext uri="{FF2B5EF4-FFF2-40B4-BE49-F238E27FC236}">
-                <a16:creationId xmlns:a16="http://schemas.microsoft.com/office/drawing/2014/main" id="{2900C51B-ABF6-493C-846D-E0CC54DC6F04}"/>
+                <a16:creationId xmlns:a16="http://schemas.microsoft.com/office/drawing/2014/main" id="{CE752E80-C233-49A3-8078-6298452D2393}"/>
               </a:ext>
             </a:extLst>
           </p:cNvPr>
@@ -23207,7 +23207,7 @@
           <p:cNvPr id="10" name="">
             <a:extLst xmlns:a="http://schemas.openxmlformats.org/drawingml/2006/main">
               <a:ext uri="{FF2B5EF4-FFF2-40B4-BE49-F238E27FC236}">
-                <a16:creationId xmlns:a16="http://schemas.microsoft.com/office/drawing/2014/main" id="{F1EBE5BF-3E4F-4293-856C-0527BC2B29C3}"/>
+                <a16:creationId xmlns:a16="http://schemas.microsoft.com/office/drawing/2014/main" id="{966B8B21-B286-436C-ADAC-AB3F2C99D3F6}"/>
               </a:ext>
             </a:extLst>
           </p:cNvPr>
@@ -23242,7 +23242,7 @@
           <p:cNvPr id="11" name="">
             <a:extLst xmlns:a="http://schemas.openxmlformats.org/drawingml/2006/main">
               <a:ext uri="{FF2B5EF4-FFF2-40B4-BE49-F238E27FC236}">
-                <a16:creationId xmlns:a16="http://schemas.microsoft.com/office/drawing/2014/main" id="{12BD566A-92D0-40CF-AAF4-5F1CCEFE5600}"/>
+                <a16:creationId xmlns:a16="http://schemas.microsoft.com/office/drawing/2014/main" id="{8C8B4155-EC6A-466D-BC17-D9BAE8B24C2E}"/>
               </a:ext>
             </a:extLst>
           </p:cNvPr>
@@ -23300,7 +23300,7 @@
           <p:cNvPr id="12" name="">
             <a:extLst xmlns:a="http://schemas.openxmlformats.org/drawingml/2006/main">
               <a:ext uri="{FF2B5EF4-FFF2-40B4-BE49-F238E27FC236}">
-                <a16:creationId xmlns:a16="http://schemas.microsoft.com/office/drawing/2014/main" id="{DD496F55-70A1-4DD8-A793-D855B8FFBF22}"/>
+                <a16:creationId xmlns:a16="http://schemas.microsoft.com/office/drawing/2014/main" id="{5984B517-A6B1-458C-BF0D-4CB4F93CA4F4}"/>
               </a:ext>
             </a:extLst>
           </p:cNvPr>
@@ -23358,7 +23358,7 @@
           <p:cNvPr id="13" name="">
             <a:extLst xmlns:a="http://schemas.openxmlformats.org/drawingml/2006/main">
               <a:ext uri="{FF2B5EF4-FFF2-40B4-BE49-F238E27FC236}">
-                <a16:creationId xmlns:a16="http://schemas.microsoft.com/office/drawing/2014/main" id="{122584B2-E7D3-433A-95B0-63D2C5FD72EB}"/>
+                <a16:creationId xmlns:a16="http://schemas.microsoft.com/office/drawing/2014/main" id="{47916BCB-E399-4E33-94BB-CF20D25358F5}"/>
               </a:ext>
             </a:extLst>
           </p:cNvPr>
@@ -23416,7 +23416,7 @@
           <p:cNvPr id="14" name="">
             <a:extLst xmlns:a="http://schemas.openxmlformats.org/drawingml/2006/main">
               <a:ext uri="{FF2B5EF4-FFF2-40B4-BE49-F238E27FC236}">
-                <a16:creationId xmlns:a16="http://schemas.microsoft.com/office/drawing/2014/main" id="{FA83FFBE-0F5C-49ED-BC50-95C3533EC64F}"/>
+                <a16:creationId xmlns:a16="http://schemas.microsoft.com/office/drawing/2014/main" id="{DDA386CB-4A4F-4E16-9FF9-4B72353C1DD9}"/>
               </a:ext>
             </a:extLst>
           </p:cNvPr>
@@ -23451,7 +23451,7 @@
           <p:cNvPr id="15" name="">
             <a:extLst xmlns:a="http://schemas.openxmlformats.org/drawingml/2006/main">
               <a:ext uri="{FF2B5EF4-FFF2-40B4-BE49-F238E27FC236}">
-                <a16:creationId xmlns:a16="http://schemas.microsoft.com/office/drawing/2014/main" id="{C7E64A67-A0E4-4C7F-BA9F-00BD16DFDDFA}"/>
+                <a16:creationId xmlns:a16="http://schemas.microsoft.com/office/drawing/2014/main" id="{DBD507AE-F465-4C9F-9883-9E627F8A7503}"/>
               </a:ext>
             </a:extLst>
           </p:cNvPr>
@@ -23509,7 +23509,7 @@
           <p:cNvPr id="16" name="">
             <a:extLst xmlns:a="http://schemas.openxmlformats.org/drawingml/2006/main">
               <a:ext uri="{FF2B5EF4-FFF2-40B4-BE49-F238E27FC236}">
-                <a16:creationId xmlns:a16="http://schemas.microsoft.com/office/drawing/2014/main" id="{5B08C76D-9EF8-45C1-B626-681758B7D706}"/>
+                <a16:creationId xmlns:a16="http://schemas.microsoft.com/office/drawing/2014/main" id="{13460B87-C87D-480D-AF26-E028D4900DBD}"/>
               </a:ext>
             </a:extLst>
           </p:cNvPr>
@@ -23567,7 +23567,7 @@
           <p:cNvPr id="17" name="">
             <a:extLst xmlns:a="http://schemas.openxmlformats.org/drawingml/2006/main">
               <a:ext uri="{FF2B5EF4-FFF2-40B4-BE49-F238E27FC236}">
-                <a16:creationId xmlns:a16="http://schemas.microsoft.com/office/drawing/2014/main" id="{BEBFF9E3-649C-4037-B7DB-C6A5476C875B}"/>
+                <a16:creationId xmlns:a16="http://schemas.microsoft.com/office/drawing/2014/main" id="{C27BB8DA-F65E-4FFE-9587-6B282DD17915}"/>
               </a:ext>
             </a:extLst>
           </p:cNvPr>
@@ -23625,7 +23625,7 @@
           <p:cNvPr id="18" name="">
             <a:extLst xmlns:a="http://schemas.openxmlformats.org/drawingml/2006/main">
               <a:ext uri="{FF2B5EF4-FFF2-40B4-BE49-F238E27FC236}">
-                <a16:creationId xmlns:a16="http://schemas.microsoft.com/office/drawing/2014/main" id="{D9CE78FD-D99C-4795-8E81-61F9A040509F}"/>
+                <a16:creationId xmlns:a16="http://schemas.microsoft.com/office/drawing/2014/main" id="{C79FD0EC-4221-4EC3-BFA0-F3F7287F49CB}"/>
               </a:ext>
             </a:extLst>
           </p:cNvPr>
@@ -23660,7 +23660,7 @@
           <p:cNvPr id="19" name="">
             <a:extLst xmlns:a="http://schemas.openxmlformats.org/drawingml/2006/main">
               <a:ext uri="{FF2B5EF4-FFF2-40B4-BE49-F238E27FC236}">
-                <a16:creationId xmlns:a16="http://schemas.microsoft.com/office/drawing/2014/main" id="{70F7D380-2642-44FF-A56A-FFDAFB3B65CE}"/>
+                <a16:creationId xmlns:a16="http://schemas.microsoft.com/office/drawing/2014/main" id="{A3096B2E-2F4E-4440-A788-01AA5064F881}"/>
               </a:ext>
             </a:extLst>
           </p:cNvPr>
@@ -23718,7 +23718,7 @@
           <p:cNvPr id="20" name="">
             <a:extLst xmlns:a="http://schemas.openxmlformats.org/drawingml/2006/main">
               <a:ext uri="{FF2B5EF4-FFF2-40B4-BE49-F238E27FC236}">
-                <a16:creationId xmlns:a16="http://schemas.microsoft.com/office/drawing/2014/main" id="{7167E183-C0F5-4405-8B48-3ECBA6F07661}"/>
+                <a16:creationId xmlns:a16="http://schemas.microsoft.com/office/drawing/2014/main" id="{9288D121-9295-441D-9EB8-11AF39F56651}"/>
               </a:ext>
             </a:extLst>
           </p:cNvPr>
@@ -23776,7 +23776,7 @@
           <p:cNvPr id="21" name="">
             <a:extLst xmlns:a="http://schemas.openxmlformats.org/drawingml/2006/main">
               <a:ext uri="{FF2B5EF4-FFF2-40B4-BE49-F238E27FC236}">
-                <a16:creationId xmlns:a16="http://schemas.microsoft.com/office/drawing/2014/main" id="{B0E29A77-EC67-4B8F-A1B7-FB22D61F4973}"/>
+                <a16:creationId xmlns:a16="http://schemas.microsoft.com/office/drawing/2014/main" id="{3FABACB4-0707-43E2-B6B1-1ACF62797395}"/>
               </a:ext>
             </a:extLst>
           </p:cNvPr>
@@ -23834,7 +23834,7 @@
           <p:cNvPr id="22" name="">
             <a:extLst xmlns:a="http://schemas.openxmlformats.org/drawingml/2006/main">
               <a:ext uri="{FF2B5EF4-FFF2-40B4-BE49-F238E27FC236}">
-                <a16:creationId xmlns:a16="http://schemas.microsoft.com/office/drawing/2014/main" id="{9F135924-F09D-4175-B1DA-DD6E34192114}"/>
+                <a16:creationId xmlns:a16="http://schemas.microsoft.com/office/drawing/2014/main" id="{1592E697-6EA3-4A17-BF3E-892EE9B59F13}"/>
               </a:ext>
             </a:extLst>
           </p:cNvPr>
@@ -23869,7 +23869,7 @@
           <p:cNvPr id="23" name="">
             <a:extLst xmlns:a="http://schemas.openxmlformats.org/drawingml/2006/main">
               <a:ext uri="{FF2B5EF4-FFF2-40B4-BE49-F238E27FC236}">
-                <a16:creationId xmlns:a16="http://schemas.microsoft.com/office/drawing/2014/main" id="{C6D0B746-7D9C-4951-AD2C-A5B38235AF2D}"/>
+                <a16:creationId xmlns:a16="http://schemas.microsoft.com/office/drawing/2014/main" id="{B8E059AB-E700-4F64-81BB-D001C82219C4}"/>
               </a:ext>
             </a:extLst>
           </p:cNvPr>
@@ -23927,7 +23927,7 @@
           <p:cNvPr id="24" name="">
             <a:extLst xmlns:a="http://schemas.openxmlformats.org/drawingml/2006/main">
               <a:ext uri="{FF2B5EF4-FFF2-40B4-BE49-F238E27FC236}">
-                <a16:creationId xmlns:a16="http://schemas.microsoft.com/office/drawing/2014/main" id="{DB3E8692-7BE2-42A2-A1D5-EAFE9BEB3E34}"/>
+                <a16:creationId xmlns:a16="http://schemas.microsoft.com/office/drawing/2014/main" id="{A7F633A1-4CF8-4A5F-A012-63C258542CFA}"/>
               </a:ext>
             </a:extLst>
           </p:cNvPr>
@@ -23985,7 +23985,7 @@
           <p:cNvPr id="25" name="">
             <a:extLst xmlns:a="http://schemas.openxmlformats.org/drawingml/2006/main">
               <a:ext uri="{FF2B5EF4-FFF2-40B4-BE49-F238E27FC236}">
-                <a16:creationId xmlns:a16="http://schemas.microsoft.com/office/drawing/2014/main" id="{EAFCBCA3-FB2B-4421-ADB8-847020984880}"/>
+                <a16:creationId xmlns:a16="http://schemas.microsoft.com/office/drawing/2014/main" id="{BB527906-FC05-4C2F-AB0D-401981117C13}"/>
               </a:ext>
             </a:extLst>
           </p:cNvPr>
@@ -24043,7 +24043,7 @@
           <p:cNvPr id="26" name="">
             <a:extLst xmlns:a="http://schemas.openxmlformats.org/drawingml/2006/main">
               <a:ext uri="{FF2B5EF4-FFF2-40B4-BE49-F238E27FC236}">
-                <a16:creationId xmlns:a16="http://schemas.microsoft.com/office/drawing/2014/main" id="{32AB030D-E43E-4D3F-BD2A-96FE85281FEF}"/>
+                <a16:creationId xmlns:a16="http://schemas.microsoft.com/office/drawing/2014/main" id="{6563558F-C90C-4AA7-A025-E1E152419B11}"/>
               </a:ext>
             </a:extLst>
           </p:cNvPr>
@@ -24078,7 +24078,7 @@
           <p:cNvPr id="27" name="">
             <a:extLst xmlns:a="http://schemas.openxmlformats.org/drawingml/2006/main">
               <a:ext uri="{FF2B5EF4-FFF2-40B4-BE49-F238E27FC236}">
-                <a16:creationId xmlns:a16="http://schemas.microsoft.com/office/drawing/2014/main" id="{610D4A1E-12CA-41C3-8047-E565F44D55AE}"/>
+                <a16:creationId xmlns:a16="http://schemas.microsoft.com/office/drawing/2014/main" id="{A566E0FE-5C0D-46BF-8837-0320CBBB5284}"/>
               </a:ext>
             </a:extLst>
           </p:cNvPr>
@@ -24136,7 +24136,7 @@
           <p:cNvPr id="28" name="">
             <a:extLst xmlns:a="http://schemas.openxmlformats.org/drawingml/2006/main">
               <a:ext uri="{FF2B5EF4-FFF2-40B4-BE49-F238E27FC236}">
-                <a16:creationId xmlns:a16="http://schemas.microsoft.com/office/drawing/2014/main" id="{5F97D03A-A6EA-4B87-AC39-C784E56709B4}"/>
+                <a16:creationId xmlns:a16="http://schemas.microsoft.com/office/drawing/2014/main" id="{23CD4F02-3CC6-4785-8467-229F0EC5EBAA}"/>
               </a:ext>
             </a:extLst>
           </p:cNvPr>
@@ -24194,7 +24194,7 @@
           <p:cNvPr id="29" name="">
             <a:extLst xmlns:a="http://schemas.openxmlformats.org/drawingml/2006/main">
               <a:ext uri="{FF2B5EF4-FFF2-40B4-BE49-F238E27FC236}">
-                <a16:creationId xmlns:a16="http://schemas.microsoft.com/office/drawing/2014/main" id="{3C37232D-8E1B-4EB5-8F82-5D81EF11236A}"/>
+                <a16:creationId xmlns:a16="http://schemas.microsoft.com/office/drawing/2014/main" id="{55B9631B-FAAD-4E48-8293-9285022577D7}"/>
               </a:ext>
             </a:extLst>
           </p:cNvPr>
@@ -24252,7 +24252,7 @@
           <p:cNvPr id="30" name="">
             <a:extLst xmlns:a="http://schemas.openxmlformats.org/drawingml/2006/main">
               <a:ext uri="{FF2B5EF4-FFF2-40B4-BE49-F238E27FC236}">
-                <a16:creationId xmlns:a16="http://schemas.microsoft.com/office/drawing/2014/main" id="{D7FA3E7B-A206-40D8-AA76-9281629B867E}"/>
+                <a16:creationId xmlns:a16="http://schemas.microsoft.com/office/drawing/2014/main" id="{33D06F56-1407-4016-8562-869173445152}"/>
               </a:ext>
             </a:extLst>
           </p:cNvPr>
@@ -24287,7 +24287,7 @@
           <p:cNvPr id="31" name="">
             <a:extLst xmlns:a="http://schemas.openxmlformats.org/drawingml/2006/main">
               <a:ext uri="{FF2B5EF4-FFF2-40B4-BE49-F238E27FC236}">
-                <a16:creationId xmlns:a16="http://schemas.microsoft.com/office/drawing/2014/main" id="{B1F94780-A51C-44A2-9DD4-B0B362F65374}"/>
+                <a16:creationId xmlns:a16="http://schemas.microsoft.com/office/drawing/2014/main" id="{CC3B42F2-0B84-463C-85AD-9914FCD9F659}"/>
               </a:ext>
             </a:extLst>
           </p:cNvPr>
@@ -24345,7 +24345,7 @@
           <p:cNvPr id="32" name="">
             <a:extLst xmlns:a="http://schemas.openxmlformats.org/drawingml/2006/main">
               <a:ext uri="{FF2B5EF4-FFF2-40B4-BE49-F238E27FC236}">
-                <a16:creationId xmlns:a16="http://schemas.microsoft.com/office/drawing/2014/main" id="{C5F51EAB-F785-4503-8D23-816CC2295251}"/>
+                <a16:creationId xmlns:a16="http://schemas.microsoft.com/office/drawing/2014/main" id="{6AC6B6AB-8546-4420-8085-CF5D1042AA28}"/>
               </a:ext>
             </a:extLst>
           </p:cNvPr>
@@ -24403,7 +24403,7 @@
           <p:cNvPr id="33" name="">
             <a:extLst xmlns:a="http://schemas.openxmlformats.org/drawingml/2006/main">
               <a:ext uri="{FF2B5EF4-FFF2-40B4-BE49-F238E27FC236}">
-                <a16:creationId xmlns:a16="http://schemas.microsoft.com/office/drawing/2014/main" id="{A69F8BB3-AFD8-4F70-8EBF-218CAFF935AE}"/>
+                <a16:creationId xmlns:a16="http://schemas.microsoft.com/office/drawing/2014/main" id="{783E1B5C-0FA3-475D-ADC8-EB0CE82367F9}"/>
               </a:ext>
             </a:extLst>
           </p:cNvPr>
@@ -24461,7 +24461,7 @@
           <p:cNvPr id="34" name="">
             <a:extLst xmlns:a="http://schemas.openxmlformats.org/drawingml/2006/main">
               <a:ext uri="{FF2B5EF4-FFF2-40B4-BE49-F238E27FC236}">
-                <a16:creationId xmlns:a16="http://schemas.microsoft.com/office/drawing/2014/main" id="{4050EC13-B204-4468-A055-E32ACABE211A}"/>
+                <a16:creationId xmlns:a16="http://schemas.microsoft.com/office/drawing/2014/main" id="{F8B1C97F-A44F-4C3A-9BDE-8CEA555EFA47}"/>
               </a:ext>
             </a:extLst>
           </p:cNvPr>
@@ -24496,7 +24496,7 @@
           <p:cNvPr id="35" name="">
             <a:extLst xmlns:a="http://schemas.openxmlformats.org/drawingml/2006/main">
               <a:ext uri="{FF2B5EF4-FFF2-40B4-BE49-F238E27FC236}">
-                <a16:creationId xmlns:a16="http://schemas.microsoft.com/office/drawing/2014/main" id="{4127F443-0158-4734-9185-D7639238165A}"/>
+                <a16:creationId xmlns:a16="http://schemas.microsoft.com/office/drawing/2014/main" id="{7B12FEA0-20BB-4E9F-8061-2A4ACDF20F27}"/>
               </a:ext>
             </a:extLst>
           </p:cNvPr>
@@ -24554,7 +24554,7 @@
           <p:cNvPr id="36" name="">
             <a:extLst xmlns:a="http://schemas.openxmlformats.org/drawingml/2006/main">
               <a:ext uri="{FF2B5EF4-FFF2-40B4-BE49-F238E27FC236}">
-                <a16:creationId xmlns:a16="http://schemas.microsoft.com/office/drawing/2014/main" id="{FD818221-74EB-418E-8003-C50986D4369A}"/>
+                <a16:creationId xmlns:a16="http://schemas.microsoft.com/office/drawing/2014/main" id="{82B97D9A-8014-4172-8BEF-42CF78FB8AE9}"/>
               </a:ext>
             </a:extLst>
           </p:cNvPr>
@@ -24612,7 +24612,7 @@
           <p:cNvPr id="37" name="">
             <a:extLst xmlns:a="http://schemas.openxmlformats.org/drawingml/2006/main">
               <a:ext uri="{FF2B5EF4-FFF2-40B4-BE49-F238E27FC236}">
-                <a16:creationId xmlns:a16="http://schemas.microsoft.com/office/drawing/2014/main" id="{DF51B7D5-CC22-418D-86AB-EE799471FB9C}"/>
+                <a16:creationId xmlns:a16="http://schemas.microsoft.com/office/drawing/2014/main" id="{24D8950F-F2C5-4053-B2C7-CA3AF82047EA}"/>
               </a:ext>
             </a:extLst>
           </p:cNvPr>
@@ -24647,7 +24647,7 @@
           <p:cNvPr id="38" name="">
             <a:extLst xmlns:a="http://schemas.openxmlformats.org/drawingml/2006/main">
               <a:ext uri="{FF2B5EF4-FFF2-40B4-BE49-F238E27FC236}">
-                <a16:creationId xmlns:a16="http://schemas.microsoft.com/office/drawing/2014/main" id="{943F76CE-6C45-43BD-B4FA-3974502EE840}"/>
+                <a16:creationId xmlns:a16="http://schemas.microsoft.com/office/drawing/2014/main" id="{C3649315-ABB6-46BB-B728-AA261907886D}"/>
               </a:ext>
             </a:extLst>
           </p:cNvPr>
@@ -24678,7 +24678,7 @@
           <p:cNvPr id="39" name="">
             <a:extLst xmlns:a="http://schemas.openxmlformats.org/drawingml/2006/main">
               <a:ext uri="{FF2B5EF4-FFF2-40B4-BE49-F238E27FC236}">
-                <a16:creationId xmlns:a16="http://schemas.microsoft.com/office/drawing/2014/main" id="{43044DC1-BB98-4F12-B804-42A27BC99788}"/>
+                <a16:creationId xmlns:a16="http://schemas.microsoft.com/office/drawing/2014/main" id="{4784369C-0BC4-4282-AE2E-62B34FB0D308}"/>
               </a:ext>
             </a:extLst>
           </p:cNvPr>
@@ -24736,7 +24736,7 @@
           <p:cNvPr id="40" name="">
             <a:extLst xmlns:a="http://schemas.openxmlformats.org/drawingml/2006/main">
               <a:ext uri="{FF2B5EF4-FFF2-40B4-BE49-F238E27FC236}">
-                <a16:creationId xmlns:a16="http://schemas.microsoft.com/office/drawing/2014/main" id="{1DBD062C-422C-404F-9EBC-F4EF12774DEA}"/>
+                <a16:creationId xmlns:a16="http://schemas.microsoft.com/office/drawing/2014/main" id="{2574B793-4B60-4B40-A937-D0CDD0185641}"/>
               </a:ext>
             </a:extLst>
           </p:cNvPr>
@@ -24794,7 +24794,7 @@
           <p:cNvPr id="41" name="">
             <a:extLst xmlns:a="http://schemas.openxmlformats.org/drawingml/2006/main">
               <a:ext uri="{FF2B5EF4-FFF2-40B4-BE49-F238E27FC236}">
-                <a16:creationId xmlns:a16="http://schemas.microsoft.com/office/drawing/2014/main" id="{476374F0-664C-4332-AEAA-4957C3447387}"/>
+                <a16:creationId xmlns:a16="http://schemas.microsoft.com/office/drawing/2014/main" id="{9AE4C86A-CAFE-49B3-BCAE-8F1C8B2E2480}"/>
               </a:ext>
             </a:extLst>
           </p:cNvPr>
@@ -24829,7 +24829,7 @@
           <p:cNvPr id="42" name="">
             <a:extLst xmlns:a="http://schemas.openxmlformats.org/drawingml/2006/main">
               <a:ext uri="{FF2B5EF4-FFF2-40B4-BE49-F238E27FC236}">
-                <a16:creationId xmlns:a16="http://schemas.microsoft.com/office/drawing/2014/main" id="{F33A2BC2-3C6F-4F7E-A852-5AB465D218CC}"/>
+                <a16:creationId xmlns:a16="http://schemas.microsoft.com/office/drawing/2014/main" id="{F7AD40BB-09B9-4863-9E32-5639056B86CF}"/>
               </a:ext>
             </a:extLst>
           </p:cNvPr>
@@ -24860,7 +24860,7 @@
           <p:cNvPr id="43" name="">
             <a:extLst xmlns:a="http://schemas.openxmlformats.org/drawingml/2006/main">
               <a:ext uri="{FF2B5EF4-FFF2-40B4-BE49-F238E27FC236}">
-                <a16:creationId xmlns:a16="http://schemas.microsoft.com/office/drawing/2014/main" id="{2AEBA8F3-198C-441F-AFA5-E7990B079D74}"/>
+                <a16:creationId xmlns:a16="http://schemas.microsoft.com/office/drawing/2014/main" id="{6C6BB8D9-2342-4538-AC6B-72B0EA48089C}"/>
               </a:ext>
             </a:extLst>
           </p:cNvPr>
@@ -24918,7 +24918,7 @@
           <p:cNvPr id="44" name="">
             <a:extLst xmlns:a="http://schemas.openxmlformats.org/drawingml/2006/main">
               <a:ext uri="{FF2B5EF4-FFF2-40B4-BE49-F238E27FC236}">
-                <a16:creationId xmlns:a16="http://schemas.microsoft.com/office/drawing/2014/main" id="{5C1CC57B-9090-4F45-9630-923E8FA1B92E}"/>
+                <a16:creationId xmlns:a16="http://schemas.microsoft.com/office/drawing/2014/main" id="{C0EABDD3-7E37-4580-9800-EE54B8D23B71}"/>
               </a:ext>
             </a:extLst>
           </p:cNvPr>
@@ -24976,7 +24976,7 @@
           <p:cNvPr id="45" name="">
             <a:extLst xmlns:a="http://schemas.openxmlformats.org/drawingml/2006/main">
               <a:ext uri="{FF2B5EF4-FFF2-40B4-BE49-F238E27FC236}">
-                <a16:creationId xmlns:a16="http://schemas.microsoft.com/office/drawing/2014/main" id="{13F20B5F-5EF3-4413-B137-4AE85BA4D464}"/>
+                <a16:creationId xmlns:a16="http://schemas.microsoft.com/office/drawing/2014/main" id="{25820FB8-2A85-4BED-875D-47D8655DA889}"/>
               </a:ext>
             </a:extLst>
           </p:cNvPr>
@@ -25011,7 +25011,7 @@
           <p:cNvPr id="46" name="">
             <a:extLst xmlns:a="http://schemas.openxmlformats.org/drawingml/2006/main">
               <a:ext uri="{FF2B5EF4-FFF2-40B4-BE49-F238E27FC236}">
-                <a16:creationId xmlns:a16="http://schemas.microsoft.com/office/drawing/2014/main" id="{9967D61F-25B3-41A8-B0EC-DCC646ADAA27}"/>
+                <a16:creationId xmlns:a16="http://schemas.microsoft.com/office/drawing/2014/main" id="{25F051E5-F634-42FA-98C5-424CF28EDBDA}"/>
               </a:ext>
             </a:extLst>
           </p:cNvPr>
@@ -25042,7 +25042,7 @@
           <p:cNvPr id="47" name="">
             <a:extLst xmlns:a="http://schemas.openxmlformats.org/drawingml/2006/main">
               <a:ext uri="{FF2B5EF4-FFF2-40B4-BE49-F238E27FC236}">
-                <a16:creationId xmlns:a16="http://schemas.microsoft.com/office/drawing/2014/main" id="{D3833AB0-EE58-45DA-B794-543FFC3316AC}"/>
+                <a16:creationId xmlns:a16="http://schemas.microsoft.com/office/drawing/2014/main" id="{16642C66-2B60-4D48-8E8A-D7C3896FD01A}"/>
               </a:ext>
             </a:extLst>
           </p:cNvPr>
@@ -25100,7 +25100,7 @@
           <p:cNvPr id="48" name="">
             <a:extLst xmlns:a="http://schemas.openxmlformats.org/drawingml/2006/main">
               <a:ext uri="{FF2B5EF4-FFF2-40B4-BE49-F238E27FC236}">
-                <a16:creationId xmlns:a16="http://schemas.microsoft.com/office/drawing/2014/main" id="{2FD0D92C-A43A-4469-A1E2-764481D67616}"/>
+                <a16:creationId xmlns:a16="http://schemas.microsoft.com/office/drawing/2014/main" id="{E73EA98D-5487-4E7B-B3EA-3FE3B8BA4D2E}"/>
               </a:ext>
             </a:extLst>
           </p:cNvPr>
@@ -25158,7 +25158,7 @@
           <p:cNvPr id="49" name="">
             <a:extLst xmlns:a="http://schemas.openxmlformats.org/drawingml/2006/main">
               <a:ext uri="{FF2B5EF4-FFF2-40B4-BE49-F238E27FC236}">
-                <a16:creationId xmlns:a16="http://schemas.microsoft.com/office/drawing/2014/main" id="{90568B2F-3CD8-4080-8D84-AE04F39A9A31}"/>
+                <a16:creationId xmlns:a16="http://schemas.microsoft.com/office/drawing/2014/main" id="{92D8C032-C098-49F0-9232-3E01D3701CD3}"/>
               </a:ext>
             </a:extLst>
           </p:cNvPr>
@@ -25193,7 +25193,7 @@
           <p:cNvPr id="50" name="">
             <a:extLst xmlns:a="http://schemas.openxmlformats.org/drawingml/2006/main">
               <a:ext uri="{FF2B5EF4-FFF2-40B4-BE49-F238E27FC236}">
-                <a16:creationId xmlns:a16="http://schemas.microsoft.com/office/drawing/2014/main" id="{A9CDDD2E-57C0-4B84-90A5-F8D0730AB907}"/>
+                <a16:creationId xmlns:a16="http://schemas.microsoft.com/office/drawing/2014/main" id="{AF5E3C6A-D655-4D3B-9B60-92D8B6AC82A5}"/>
               </a:ext>
             </a:extLst>
           </p:cNvPr>
@@ -25224,7 +25224,7 @@
           <p:cNvPr id="51" name="">
             <a:extLst xmlns:a="http://schemas.openxmlformats.org/drawingml/2006/main">
               <a:ext uri="{FF2B5EF4-FFF2-40B4-BE49-F238E27FC236}">
-                <a16:creationId xmlns:a16="http://schemas.microsoft.com/office/drawing/2014/main" id="{2C25A5B1-219A-4DD8-A2C3-E8DE08772508}"/>
+                <a16:creationId xmlns:a16="http://schemas.microsoft.com/office/drawing/2014/main" id="{302A9B8B-CCDB-4F2E-8950-24D71A833D9F}"/>
               </a:ext>
             </a:extLst>
           </p:cNvPr>
@@ -25282,7 +25282,7 @@
           <p:cNvPr id="52" name="">
             <a:extLst xmlns:a="http://schemas.openxmlformats.org/drawingml/2006/main">
               <a:ext uri="{FF2B5EF4-FFF2-40B4-BE49-F238E27FC236}">
-                <a16:creationId xmlns:a16="http://schemas.microsoft.com/office/drawing/2014/main" id="{915B3C04-1A67-4980-AF4A-C99677870EA5}"/>
+                <a16:creationId xmlns:a16="http://schemas.microsoft.com/office/drawing/2014/main" id="{139DD330-3CFC-4F87-A439-F5F5A78FF345}"/>
               </a:ext>
             </a:extLst>
           </p:cNvPr>
@@ -25338,7 +25338,7 @@
     </p:spTree>
     <p:extLst>
       <p:ext uri="{BB962C8B-B14F-4D97-AF65-F5344CB8AC3E}">
-        <p14:creationId xmlns:p14="http://schemas.microsoft.com/office/powerpoint/2010/main" val="1897081576"/>
+        <p14:creationId xmlns:p14="http://schemas.microsoft.com/office/powerpoint/2010/main" val="258281588"/>
       </p:ext>
     </p:extLst>
   </p:cSld>
@@ -25369,7 +25369,7 @@
           <p:cNvPr id="72" name="eyebrow-8">
             <a:extLst xmlns:a="http://schemas.openxmlformats.org/drawingml/2006/main">
               <a:ext uri="{FF2B5EF4-FFF2-40B4-BE49-F238E27FC236}">
-                <a16:creationId xmlns:a16="http://schemas.microsoft.com/office/drawing/2014/main" id="{58DD5F17-A052-44F7-8BF8-11F1C9A0394A}"/>
+                <a16:creationId xmlns:a16="http://schemas.microsoft.com/office/drawing/2014/main" id="{F221BB79-D54B-4A18-A9B5-C07736B348D3}"/>
               </a:ext>
             </a:extLst>
           </p:cNvPr>
@@ -25427,7 +25427,7 @@
           <p:cNvPr id="2" name="title-8">
             <a:extLst xmlns:a="http://schemas.openxmlformats.org/drawingml/2006/main">
               <a:ext uri="{FF2B5EF4-FFF2-40B4-BE49-F238E27FC236}">
-                <a16:creationId xmlns:a16="http://schemas.microsoft.com/office/drawing/2014/main" id="{7886A2DB-77D7-49CC-9D5D-09B9FCD45A06}"/>
+                <a16:creationId xmlns:a16="http://schemas.microsoft.com/office/drawing/2014/main" id="{811BE20A-8ABD-4E9B-B206-930C846E65FF}"/>
               </a:ext>
             </a:extLst>
           </p:cNvPr>
@@ -25485,7 +25485,7 @@
           <p:cNvPr id="3" name="">
             <a:extLst xmlns:a="http://schemas.openxmlformats.org/drawingml/2006/main">
               <a:ext uri="{FF2B5EF4-FFF2-40B4-BE49-F238E27FC236}">
-                <a16:creationId xmlns:a16="http://schemas.microsoft.com/office/drawing/2014/main" id="{8499CF5D-B83B-4CC2-B0F1-22471B3C8E6A}"/>
+                <a16:creationId xmlns:a16="http://schemas.microsoft.com/office/drawing/2014/main" id="{3D4D722E-CD09-481C-9170-3F71C0E85CAF}"/>
               </a:ext>
             </a:extLst>
           </p:cNvPr>
@@ -25516,7 +25516,7 @@
           <p:cNvPr id="4" name="">
             <a:extLst xmlns:a="http://schemas.openxmlformats.org/drawingml/2006/main">
               <a:ext uri="{FF2B5EF4-FFF2-40B4-BE49-F238E27FC236}">
-                <a16:creationId xmlns:a16="http://schemas.microsoft.com/office/drawing/2014/main" id="{6024F122-D8D8-40C8-A9B8-F620C4A31ED0}"/>
+                <a16:creationId xmlns:a16="http://schemas.microsoft.com/office/drawing/2014/main" id="{3F664AE6-112E-46D7-8D60-660D27775903}"/>
               </a:ext>
             </a:extLst>
           </p:cNvPr>
@@ -25564,7 +25564,7 @@
                 <a:ea typeface="Aptos"/>
                 <a:cs typeface="Aptos"/>
               </a:rPr>
-              <a:t>BES v2.0 · Propuesta ejecutiva</a:t>
+              <a:t>BES v2.0 · Aprobado y liberado</a:t>
             </a:r>
           </a:p>
         </p:txBody>
@@ -25574,7 +25574,7 @@
           <p:cNvPr id="5" name="">
             <a:extLst xmlns:a="http://schemas.openxmlformats.org/drawingml/2006/main">
               <a:ext uri="{FF2B5EF4-FFF2-40B4-BE49-F238E27FC236}">
-                <a16:creationId xmlns:a16="http://schemas.microsoft.com/office/drawing/2014/main" id="{DC62B9BD-FD47-4A76-AE26-C90859906409}"/>
+                <a16:creationId xmlns:a16="http://schemas.microsoft.com/office/drawing/2014/main" id="{8CF66002-6D07-4687-93FE-FB16381629F4}"/>
               </a:ext>
             </a:extLst>
           </p:cNvPr>
@@ -25632,7 +25632,7 @@
           <p:cNvPr id="6" name="">
             <a:extLst xmlns:a="http://schemas.openxmlformats.org/drawingml/2006/main">
               <a:ext uri="{FF2B5EF4-FFF2-40B4-BE49-F238E27FC236}">
-                <a16:creationId xmlns:a16="http://schemas.microsoft.com/office/drawing/2014/main" id="{E0D48C3B-CA85-448C-9FD2-8767ABD17F19}"/>
+                <a16:creationId xmlns:a16="http://schemas.microsoft.com/office/drawing/2014/main" id="{6BEA5AD9-6973-43B4-96AE-7DC7D932A033}"/>
               </a:ext>
             </a:extLst>
           </p:cNvPr>
@@ -25665,7 +25665,7 @@
           <p:cNvPr id="7" name="">
             <a:extLst xmlns:a="http://schemas.openxmlformats.org/drawingml/2006/main">
               <a:ext uri="{FF2B5EF4-FFF2-40B4-BE49-F238E27FC236}">
-                <a16:creationId xmlns:a16="http://schemas.microsoft.com/office/drawing/2014/main" id="{63B76115-7B74-4A37-9D96-16A917E06297}"/>
+                <a16:creationId xmlns:a16="http://schemas.microsoft.com/office/drawing/2014/main" id="{33482DC8-B0F1-4E5B-9960-7D7AA17F39D3}"/>
               </a:ext>
             </a:extLst>
           </p:cNvPr>
@@ -25723,7 +25723,7 @@
           <p:cNvPr id="8" name="">
             <a:extLst xmlns:a="http://schemas.openxmlformats.org/drawingml/2006/main">
               <a:ext uri="{FF2B5EF4-FFF2-40B4-BE49-F238E27FC236}">
-                <a16:creationId xmlns:a16="http://schemas.microsoft.com/office/drawing/2014/main" id="{ED68C5AA-50CF-4E6F-825B-9B821075D5D0}"/>
+                <a16:creationId xmlns:a16="http://schemas.microsoft.com/office/drawing/2014/main" id="{4A556DA6-3F8F-4280-9192-1B5FE5CF0624}"/>
               </a:ext>
             </a:extLst>
           </p:cNvPr>
@@ -25756,7 +25756,7 @@
           <p:cNvPr id="9" name="">
             <a:extLst xmlns:a="http://schemas.openxmlformats.org/drawingml/2006/main">
               <a:ext uri="{FF2B5EF4-FFF2-40B4-BE49-F238E27FC236}">
-                <a16:creationId xmlns:a16="http://schemas.microsoft.com/office/drawing/2014/main" id="{8093CD19-C1D3-4FFB-B023-306CEDB1A495}"/>
+                <a16:creationId xmlns:a16="http://schemas.microsoft.com/office/drawing/2014/main" id="{F1544E7B-EAC2-4842-A500-16AC44BFB266}"/>
               </a:ext>
             </a:extLst>
           </p:cNvPr>
@@ -25814,7 +25814,7 @@
           <p:cNvPr id="10" name="">
             <a:extLst xmlns:a="http://schemas.openxmlformats.org/drawingml/2006/main">
               <a:ext uri="{FF2B5EF4-FFF2-40B4-BE49-F238E27FC236}">
-                <a16:creationId xmlns:a16="http://schemas.microsoft.com/office/drawing/2014/main" id="{5FBCD35F-CD7B-4F71-82B6-D48347390895}"/>
+                <a16:creationId xmlns:a16="http://schemas.microsoft.com/office/drawing/2014/main" id="{18D036C7-9D08-4E00-91A4-F70F0BA6600F}"/>
               </a:ext>
             </a:extLst>
           </p:cNvPr>
@@ -25847,7 +25847,7 @@
           <p:cNvPr id="11" name="">
             <a:extLst xmlns:a="http://schemas.openxmlformats.org/drawingml/2006/main">
               <a:ext uri="{FF2B5EF4-FFF2-40B4-BE49-F238E27FC236}">
-                <a16:creationId xmlns:a16="http://schemas.microsoft.com/office/drawing/2014/main" id="{D18D2B43-CAC2-4E33-9FC6-CA74933627BB}"/>
+                <a16:creationId xmlns:a16="http://schemas.microsoft.com/office/drawing/2014/main" id="{ED23F9A3-CD3C-4839-AAD7-170CAC34E393}"/>
               </a:ext>
             </a:extLst>
           </p:cNvPr>
@@ -25905,7 +25905,7 @@
           <p:cNvPr id="12" name="">
             <a:extLst xmlns:a="http://schemas.openxmlformats.org/drawingml/2006/main">
               <a:ext uri="{FF2B5EF4-FFF2-40B4-BE49-F238E27FC236}">
-                <a16:creationId xmlns:a16="http://schemas.microsoft.com/office/drawing/2014/main" id="{75F89B3D-C04E-479C-940E-4BA90932FC0E}"/>
+                <a16:creationId xmlns:a16="http://schemas.microsoft.com/office/drawing/2014/main" id="{42FCC9DC-341E-484A-8448-68E6B87E6F39}"/>
               </a:ext>
             </a:extLst>
           </p:cNvPr>
@@ -25938,7 +25938,7 @@
           <p:cNvPr id="13" name="">
             <a:extLst xmlns:a="http://schemas.openxmlformats.org/drawingml/2006/main">
               <a:ext uri="{FF2B5EF4-FFF2-40B4-BE49-F238E27FC236}">
-                <a16:creationId xmlns:a16="http://schemas.microsoft.com/office/drawing/2014/main" id="{F1AC416D-DF6D-4FBB-BEBB-25FCAEEA2822}"/>
+                <a16:creationId xmlns:a16="http://schemas.microsoft.com/office/drawing/2014/main" id="{FF1D2EC3-B9EF-40AD-907A-E287AAEBE763}"/>
               </a:ext>
             </a:extLst>
           </p:cNvPr>
@@ -25996,7 +25996,7 @@
           <p:cNvPr id="14" name="">
             <a:extLst xmlns:a="http://schemas.openxmlformats.org/drawingml/2006/main">
               <a:ext uri="{FF2B5EF4-FFF2-40B4-BE49-F238E27FC236}">
-                <a16:creationId xmlns:a16="http://schemas.microsoft.com/office/drawing/2014/main" id="{7BF0EEBF-453B-4476-82C3-A5B70D0C18FD}"/>
+                <a16:creationId xmlns:a16="http://schemas.microsoft.com/office/drawing/2014/main" id="{5381B162-F968-49BB-9B8C-27400CB00B2A}"/>
               </a:ext>
             </a:extLst>
           </p:cNvPr>
@@ -26029,7 +26029,7 @@
           <p:cNvPr id="15" name="">
             <a:extLst xmlns:a="http://schemas.openxmlformats.org/drawingml/2006/main">
               <a:ext uri="{FF2B5EF4-FFF2-40B4-BE49-F238E27FC236}">
-                <a16:creationId xmlns:a16="http://schemas.microsoft.com/office/drawing/2014/main" id="{559FE2BE-BCB4-43EF-BDDD-79E1CA08BD8A}"/>
+                <a16:creationId xmlns:a16="http://schemas.microsoft.com/office/drawing/2014/main" id="{B6430782-1092-43CD-81FA-04F17454F631}"/>
               </a:ext>
             </a:extLst>
           </p:cNvPr>
@@ -26087,7 +26087,7 @@
           <p:cNvPr id="16" name="">
             <a:extLst xmlns:a="http://schemas.openxmlformats.org/drawingml/2006/main">
               <a:ext uri="{FF2B5EF4-FFF2-40B4-BE49-F238E27FC236}">
-                <a16:creationId xmlns:a16="http://schemas.microsoft.com/office/drawing/2014/main" id="{7E987105-11EC-4245-BC55-E37BE3A3CA10}"/>
+                <a16:creationId xmlns:a16="http://schemas.microsoft.com/office/drawing/2014/main" id="{93194CBA-565E-49BC-B7B7-6EAABA4D04AD}"/>
               </a:ext>
             </a:extLst>
           </p:cNvPr>
@@ -26120,7 +26120,7 @@
           <p:cNvPr id="17" name="">
             <a:extLst xmlns:a="http://schemas.openxmlformats.org/drawingml/2006/main">
               <a:ext uri="{FF2B5EF4-FFF2-40B4-BE49-F238E27FC236}">
-                <a16:creationId xmlns:a16="http://schemas.microsoft.com/office/drawing/2014/main" id="{06D3B2FF-BC59-4E0C-8B2E-DD4BFD2107C3}"/>
+                <a16:creationId xmlns:a16="http://schemas.microsoft.com/office/drawing/2014/main" id="{4B547EDA-0FFE-4BEF-858D-7BACEDDA9A88}"/>
               </a:ext>
             </a:extLst>
           </p:cNvPr>
@@ -26178,7 +26178,7 @@
           <p:cNvPr id="18" name="">
             <a:extLst xmlns:a="http://schemas.openxmlformats.org/drawingml/2006/main">
               <a:ext uri="{FF2B5EF4-FFF2-40B4-BE49-F238E27FC236}">
-                <a16:creationId xmlns:a16="http://schemas.microsoft.com/office/drawing/2014/main" id="{586C9A1C-B543-4274-BF8E-8CC76CD9265C}"/>
+                <a16:creationId xmlns:a16="http://schemas.microsoft.com/office/drawing/2014/main" id="{57817493-788B-4970-9FE7-9F04CCDE8409}"/>
               </a:ext>
             </a:extLst>
           </p:cNvPr>
@@ -26211,7 +26211,7 @@
           <p:cNvPr id="19" name="">
             <a:extLst xmlns:a="http://schemas.openxmlformats.org/drawingml/2006/main">
               <a:ext uri="{FF2B5EF4-FFF2-40B4-BE49-F238E27FC236}">
-                <a16:creationId xmlns:a16="http://schemas.microsoft.com/office/drawing/2014/main" id="{2443B350-8E7C-45EC-992F-30F7AAAB1F81}"/>
+                <a16:creationId xmlns:a16="http://schemas.microsoft.com/office/drawing/2014/main" id="{E6DB700D-01E4-4E58-992B-CDDBA5EA69EC}"/>
               </a:ext>
             </a:extLst>
           </p:cNvPr>
@@ -26269,7 +26269,7 @@
           <p:cNvPr id="20" name="">
             <a:extLst xmlns:a="http://schemas.openxmlformats.org/drawingml/2006/main">
               <a:ext uri="{FF2B5EF4-FFF2-40B4-BE49-F238E27FC236}">
-                <a16:creationId xmlns:a16="http://schemas.microsoft.com/office/drawing/2014/main" id="{908D061C-93FB-4B5B-B056-15A324BE1453}"/>
+                <a16:creationId xmlns:a16="http://schemas.microsoft.com/office/drawing/2014/main" id="{83E76BCB-7F65-41BF-87A8-FB12C39273B9}"/>
               </a:ext>
             </a:extLst>
           </p:cNvPr>
@@ -26302,7 +26302,7 @@
           <p:cNvPr id="21" name="">
             <a:extLst xmlns:a="http://schemas.openxmlformats.org/drawingml/2006/main">
               <a:ext uri="{FF2B5EF4-FFF2-40B4-BE49-F238E27FC236}">
-                <a16:creationId xmlns:a16="http://schemas.microsoft.com/office/drawing/2014/main" id="{F84B98A0-5B78-41A8-B268-7FDB79D16276}"/>
+                <a16:creationId xmlns:a16="http://schemas.microsoft.com/office/drawing/2014/main" id="{96EFE7F6-55DC-47C0-A3A5-549DBE1A628B}"/>
               </a:ext>
             </a:extLst>
           </p:cNvPr>
@@ -26360,7 +26360,7 @@
           <p:cNvPr id="22" name="">
             <a:extLst xmlns:a="http://schemas.openxmlformats.org/drawingml/2006/main">
               <a:ext uri="{FF2B5EF4-FFF2-40B4-BE49-F238E27FC236}">
-                <a16:creationId xmlns:a16="http://schemas.microsoft.com/office/drawing/2014/main" id="{1C261EC0-FC9A-4E74-875F-9945725E8CE2}"/>
+                <a16:creationId xmlns:a16="http://schemas.microsoft.com/office/drawing/2014/main" id="{39E8988F-3651-40DF-92BB-6850315E3087}"/>
               </a:ext>
             </a:extLst>
           </p:cNvPr>
@@ -26393,7 +26393,7 @@
           <p:cNvPr id="23" name="">
             <a:extLst xmlns:a="http://schemas.openxmlformats.org/drawingml/2006/main">
               <a:ext uri="{FF2B5EF4-FFF2-40B4-BE49-F238E27FC236}">
-                <a16:creationId xmlns:a16="http://schemas.microsoft.com/office/drawing/2014/main" id="{195F1FEB-DAB3-4A13-8681-880E8A337BB3}"/>
+                <a16:creationId xmlns:a16="http://schemas.microsoft.com/office/drawing/2014/main" id="{412C747B-2F89-452D-889D-991FDEC53A6C}"/>
               </a:ext>
             </a:extLst>
           </p:cNvPr>
@@ -26451,7 +26451,7 @@
           <p:cNvPr id="24" name="">
             <a:extLst xmlns:a="http://schemas.openxmlformats.org/drawingml/2006/main">
               <a:ext uri="{FF2B5EF4-FFF2-40B4-BE49-F238E27FC236}">
-                <a16:creationId xmlns:a16="http://schemas.microsoft.com/office/drawing/2014/main" id="{AF09B19C-CF41-431B-93A4-41B1FB8E0450}"/>
+                <a16:creationId xmlns:a16="http://schemas.microsoft.com/office/drawing/2014/main" id="{625DF0D6-6048-489C-BA85-BA629B847C23}"/>
               </a:ext>
             </a:extLst>
           </p:cNvPr>
@@ -26484,7 +26484,7 @@
           <p:cNvPr id="25" name="">
             <a:extLst xmlns:a="http://schemas.openxmlformats.org/drawingml/2006/main">
               <a:ext uri="{FF2B5EF4-FFF2-40B4-BE49-F238E27FC236}">
-                <a16:creationId xmlns:a16="http://schemas.microsoft.com/office/drawing/2014/main" id="{7FD05C02-BEAE-4355-9EC3-B24BF93AD080}"/>
+                <a16:creationId xmlns:a16="http://schemas.microsoft.com/office/drawing/2014/main" id="{4CC51F79-EB65-423B-81A4-88C7B96B802C}"/>
               </a:ext>
             </a:extLst>
           </p:cNvPr>
@@ -26542,7 +26542,7 @@
           <p:cNvPr id="26" name="">
             <a:extLst xmlns:a="http://schemas.openxmlformats.org/drawingml/2006/main">
               <a:ext uri="{FF2B5EF4-FFF2-40B4-BE49-F238E27FC236}">
-                <a16:creationId xmlns:a16="http://schemas.microsoft.com/office/drawing/2014/main" id="{A457FB4D-8E8D-4D5C-AFC1-F728BB74DCD4}"/>
+                <a16:creationId xmlns:a16="http://schemas.microsoft.com/office/drawing/2014/main" id="{2D598408-B7B9-4F7F-A5F8-5665F3E8016B}"/>
               </a:ext>
             </a:extLst>
           </p:cNvPr>
@@ -26575,7 +26575,7 @@
           <p:cNvPr id="27" name="">
             <a:extLst xmlns:a="http://schemas.openxmlformats.org/drawingml/2006/main">
               <a:ext uri="{FF2B5EF4-FFF2-40B4-BE49-F238E27FC236}">
-                <a16:creationId xmlns:a16="http://schemas.microsoft.com/office/drawing/2014/main" id="{A3A2DDA9-22F8-4A63-87C5-C4692F4C9646}"/>
+                <a16:creationId xmlns:a16="http://schemas.microsoft.com/office/drawing/2014/main" id="{CAB0E360-6428-4F45-B32E-B3B3E832BCCB}"/>
               </a:ext>
             </a:extLst>
           </p:cNvPr>
@@ -26633,7 +26633,7 @@
           <p:cNvPr id="28" name="">
             <a:extLst xmlns:a="http://schemas.openxmlformats.org/drawingml/2006/main">
               <a:ext uri="{FF2B5EF4-FFF2-40B4-BE49-F238E27FC236}">
-                <a16:creationId xmlns:a16="http://schemas.microsoft.com/office/drawing/2014/main" id="{D6B6B55E-D9A2-4FE2-906D-083E4775C36C}"/>
+                <a16:creationId xmlns:a16="http://schemas.microsoft.com/office/drawing/2014/main" id="{D40D33FE-6CA3-4FF6-96D4-370E33C77E37}"/>
               </a:ext>
             </a:extLst>
           </p:cNvPr>
@@ -26666,7 +26666,7 @@
           <p:cNvPr id="29" name="">
             <a:extLst xmlns:a="http://schemas.openxmlformats.org/drawingml/2006/main">
               <a:ext uri="{FF2B5EF4-FFF2-40B4-BE49-F238E27FC236}">
-                <a16:creationId xmlns:a16="http://schemas.microsoft.com/office/drawing/2014/main" id="{3221A198-276C-415F-8D00-4CBD987EDCF8}"/>
+                <a16:creationId xmlns:a16="http://schemas.microsoft.com/office/drawing/2014/main" id="{971FD8A0-DDB8-4D6C-A6EA-80F1C8393BE4}"/>
               </a:ext>
             </a:extLst>
           </p:cNvPr>
@@ -26724,7 +26724,7 @@
           <p:cNvPr id="30" name="">
             <a:extLst xmlns:a="http://schemas.openxmlformats.org/drawingml/2006/main">
               <a:ext uri="{FF2B5EF4-FFF2-40B4-BE49-F238E27FC236}">
-                <a16:creationId xmlns:a16="http://schemas.microsoft.com/office/drawing/2014/main" id="{9691957D-F43B-40D1-AC5D-ECAF080467C8}"/>
+                <a16:creationId xmlns:a16="http://schemas.microsoft.com/office/drawing/2014/main" id="{A8821CC8-AA3B-4DD5-9AA2-B2BFA5B1ED12}"/>
               </a:ext>
             </a:extLst>
           </p:cNvPr>
@@ -26757,7 +26757,7 @@
           <p:cNvPr id="31" name="">
             <a:extLst xmlns:a="http://schemas.openxmlformats.org/drawingml/2006/main">
               <a:ext uri="{FF2B5EF4-FFF2-40B4-BE49-F238E27FC236}">
-                <a16:creationId xmlns:a16="http://schemas.microsoft.com/office/drawing/2014/main" id="{AEC563AB-5475-4185-A877-9FA2BCDE3E02}"/>
+                <a16:creationId xmlns:a16="http://schemas.microsoft.com/office/drawing/2014/main" id="{F94B0E20-F232-4C37-B795-ABEBB8D749D1}"/>
               </a:ext>
             </a:extLst>
           </p:cNvPr>
@@ -26815,7 +26815,7 @@
           <p:cNvPr id="32" name="">
             <a:extLst xmlns:a="http://schemas.openxmlformats.org/drawingml/2006/main">
               <a:ext uri="{FF2B5EF4-FFF2-40B4-BE49-F238E27FC236}">
-                <a16:creationId xmlns:a16="http://schemas.microsoft.com/office/drawing/2014/main" id="{7E722DD9-1B8A-4C75-9447-EBFE484F6A66}"/>
+                <a16:creationId xmlns:a16="http://schemas.microsoft.com/office/drawing/2014/main" id="{C22DE31C-2FA2-4870-9DB5-7FF067007EA3}"/>
               </a:ext>
             </a:extLst>
           </p:cNvPr>
@@ -26848,7 +26848,7 @@
           <p:cNvPr id="33" name="">
             <a:extLst xmlns:a="http://schemas.openxmlformats.org/drawingml/2006/main">
               <a:ext uri="{FF2B5EF4-FFF2-40B4-BE49-F238E27FC236}">
-                <a16:creationId xmlns:a16="http://schemas.microsoft.com/office/drawing/2014/main" id="{B540996E-B640-4D94-BA59-2AC7DA749991}"/>
+                <a16:creationId xmlns:a16="http://schemas.microsoft.com/office/drawing/2014/main" id="{02BFC5C5-7974-4035-8BFB-3DFC2C3501C8}"/>
               </a:ext>
             </a:extLst>
           </p:cNvPr>
@@ -26906,7 +26906,7 @@
           <p:cNvPr id="34" name="">
             <a:extLst xmlns:a="http://schemas.openxmlformats.org/drawingml/2006/main">
               <a:ext uri="{FF2B5EF4-FFF2-40B4-BE49-F238E27FC236}">
-                <a16:creationId xmlns:a16="http://schemas.microsoft.com/office/drawing/2014/main" id="{E2EDE009-8C02-4011-8E10-583C3C0B9B8A}"/>
+                <a16:creationId xmlns:a16="http://schemas.microsoft.com/office/drawing/2014/main" id="{D101AE52-F447-4654-A332-226D53267955}"/>
               </a:ext>
             </a:extLst>
           </p:cNvPr>
@@ -26939,7 +26939,7 @@
           <p:cNvPr id="35" name="">
             <a:extLst xmlns:a="http://schemas.openxmlformats.org/drawingml/2006/main">
               <a:ext uri="{FF2B5EF4-FFF2-40B4-BE49-F238E27FC236}">
-                <a16:creationId xmlns:a16="http://schemas.microsoft.com/office/drawing/2014/main" id="{06AC50F4-23EB-4384-BD9A-695A3B63CD63}"/>
+                <a16:creationId xmlns:a16="http://schemas.microsoft.com/office/drawing/2014/main" id="{73200FD9-BE2F-453E-8AF3-6E882CB78C2A}"/>
               </a:ext>
             </a:extLst>
           </p:cNvPr>
@@ -26997,7 +26997,7 @@
           <p:cNvPr id="36" name="">
             <a:extLst xmlns:a="http://schemas.openxmlformats.org/drawingml/2006/main">
               <a:ext uri="{FF2B5EF4-FFF2-40B4-BE49-F238E27FC236}">
-                <a16:creationId xmlns:a16="http://schemas.microsoft.com/office/drawing/2014/main" id="{F1A36788-9724-4BD5-B9FF-38A0BE821383}"/>
+                <a16:creationId xmlns:a16="http://schemas.microsoft.com/office/drawing/2014/main" id="{619BE1A8-7BCE-46E2-95F5-58BC4B90D031}"/>
               </a:ext>
             </a:extLst>
           </p:cNvPr>
@@ -27030,7 +27030,7 @@
           <p:cNvPr id="37" name="">
             <a:extLst xmlns:a="http://schemas.openxmlformats.org/drawingml/2006/main">
               <a:ext uri="{FF2B5EF4-FFF2-40B4-BE49-F238E27FC236}">
-                <a16:creationId xmlns:a16="http://schemas.microsoft.com/office/drawing/2014/main" id="{261444C2-DCEE-4A25-BBD7-545D805DA611}"/>
+                <a16:creationId xmlns:a16="http://schemas.microsoft.com/office/drawing/2014/main" id="{77A32C95-E8FF-4A75-A27D-98C74104E5EE}"/>
               </a:ext>
             </a:extLst>
           </p:cNvPr>
@@ -27088,7 +27088,7 @@
           <p:cNvPr id="38" name="">
             <a:extLst xmlns:a="http://schemas.openxmlformats.org/drawingml/2006/main">
               <a:ext uri="{FF2B5EF4-FFF2-40B4-BE49-F238E27FC236}">
-                <a16:creationId xmlns:a16="http://schemas.microsoft.com/office/drawing/2014/main" id="{6CA48021-9C4C-4920-8D62-FA00928AD2BB}"/>
+                <a16:creationId xmlns:a16="http://schemas.microsoft.com/office/drawing/2014/main" id="{8C6BD92A-19A1-43F2-AF74-FCDE64938537}"/>
               </a:ext>
             </a:extLst>
           </p:cNvPr>
@@ -27121,7 +27121,7 @@
           <p:cNvPr id="39" name="">
             <a:extLst xmlns:a="http://schemas.openxmlformats.org/drawingml/2006/main">
               <a:ext uri="{FF2B5EF4-FFF2-40B4-BE49-F238E27FC236}">
-                <a16:creationId xmlns:a16="http://schemas.microsoft.com/office/drawing/2014/main" id="{57747898-1E93-4EF2-9DC1-67A5ED060461}"/>
+                <a16:creationId xmlns:a16="http://schemas.microsoft.com/office/drawing/2014/main" id="{91444C26-C4FC-4120-A074-FEC6EE9F7C52}"/>
               </a:ext>
             </a:extLst>
           </p:cNvPr>
@@ -27179,7 +27179,7 @@
           <p:cNvPr id="40" name="">
             <a:extLst xmlns:a="http://schemas.openxmlformats.org/drawingml/2006/main">
               <a:ext uri="{FF2B5EF4-FFF2-40B4-BE49-F238E27FC236}">
-                <a16:creationId xmlns:a16="http://schemas.microsoft.com/office/drawing/2014/main" id="{BBAA7DD2-8C93-4F4B-B197-EE565716811B}"/>
+                <a16:creationId xmlns:a16="http://schemas.microsoft.com/office/drawing/2014/main" id="{C2FF85FF-2269-4FD5-8BD5-C854918C62D0}"/>
               </a:ext>
             </a:extLst>
           </p:cNvPr>
@@ -27212,7 +27212,7 @@
           <p:cNvPr id="41" name="">
             <a:extLst xmlns:a="http://schemas.openxmlformats.org/drawingml/2006/main">
               <a:ext uri="{FF2B5EF4-FFF2-40B4-BE49-F238E27FC236}">
-                <a16:creationId xmlns:a16="http://schemas.microsoft.com/office/drawing/2014/main" id="{A5B17B2E-35C3-492E-BFD7-0D3880CD2FDF}"/>
+                <a16:creationId xmlns:a16="http://schemas.microsoft.com/office/drawing/2014/main" id="{6BF6BD9E-DF25-4C6A-AC50-730AF57B919D}"/>
               </a:ext>
             </a:extLst>
           </p:cNvPr>
@@ -27270,7 +27270,7 @@
           <p:cNvPr id="42" name="">
             <a:extLst xmlns:a="http://schemas.openxmlformats.org/drawingml/2006/main">
               <a:ext uri="{FF2B5EF4-FFF2-40B4-BE49-F238E27FC236}">
-                <a16:creationId xmlns:a16="http://schemas.microsoft.com/office/drawing/2014/main" id="{23E47807-C93A-476F-97EB-F670580AE8AD}"/>
+                <a16:creationId xmlns:a16="http://schemas.microsoft.com/office/drawing/2014/main" id="{1C1A6A6D-7987-4AE3-833A-BBB7AF584D93}"/>
               </a:ext>
             </a:extLst>
           </p:cNvPr>
@@ -27303,7 +27303,7 @@
           <p:cNvPr id="43" name="">
             <a:extLst xmlns:a="http://schemas.openxmlformats.org/drawingml/2006/main">
               <a:ext uri="{FF2B5EF4-FFF2-40B4-BE49-F238E27FC236}">
-                <a16:creationId xmlns:a16="http://schemas.microsoft.com/office/drawing/2014/main" id="{3BDA6DF3-15E0-48CE-A948-9D69AE2548AA}"/>
+                <a16:creationId xmlns:a16="http://schemas.microsoft.com/office/drawing/2014/main" id="{66323B07-2C11-4D06-A902-C6EB584B94C5}"/>
               </a:ext>
             </a:extLst>
           </p:cNvPr>
@@ -27361,7 +27361,7 @@
           <p:cNvPr id="44" name="">
             <a:extLst xmlns:a="http://schemas.openxmlformats.org/drawingml/2006/main">
               <a:ext uri="{FF2B5EF4-FFF2-40B4-BE49-F238E27FC236}">
-                <a16:creationId xmlns:a16="http://schemas.microsoft.com/office/drawing/2014/main" id="{053B68B5-2CB3-4AE4-B23D-7D480AEB63B5}"/>
+                <a16:creationId xmlns:a16="http://schemas.microsoft.com/office/drawing/2014/main" id="{1A54761C-BB9F-4D75-B7E9-456D036EA2B3}"/>
               </a:ext>
             </a:extLst>
           </p:cNvPr>
@@ -27394,7 +27394,7 @@
           <p:cNvPr id="45" name="">
             <a:extLst xmlns:a="http://schemas.openxmlformats.org/drawingml/2006/main">
               <a:ext uri="{FF2B5EF4-FFF2-40B4-BE49-F238E27FC236}">
-                <a16:creationId xmlns:a16="http://schemas.microsoft.com/office/drawing/2014/main" id="{416CBFA9-3304-494E-A50A-92741788CFB9}"/>
+                <a16:creationId xmlns:a16="http://schemas.microsoft.com/office/drawing/2014/main" id="{6D2E7DEE-9A07-4495-814C-261360382AF6}"/>
               </a:ext>
             </a:extLst>
           </p:cNvPr>
@@ -27452,7 +27452,7 @@
           <p:cNvPr id="46" name="">
             <a:extLst xmlns:a="http://schemas.openxmlformats.org/drawingml/2006/main">
               <a:ext uri="{FF2B5EF4-FFF2-40B4-BE49-F238E27FC236}">
-                <a16:creationId xmlns:a16="http://schemas.microsoft.com/office/drawing/2014/main" id="{D00F3F35-1BF4-4266-9944-AD4161039A69}"/>
+                <a16:creationId xmlns:a16="http://schemas.microsoft.com/office/drawing/2014/main" id="{1BC57063-F69C-4A01-9287-D51E01A2CB1A}"/>
               </a:ext>
             </a:extLst>
           </p:cNvPr>
@@ -27485,7 +27485,7 @@
           <p:cNvPr id="47" name="">
             <a:extLst xmlns:a="http://schemas.openxmlformats.org/drawingml/2006/main">
               <a:ext uri="{FF2B5EF4-FFF2-40B4-BE49-F238E27FC236}">
-                <a16:creationId xmlns:a16="http://schemas.microsoft.com/office/drawing/2014/main" id="{BD286ED0-1FBD-4E31-904E-728132A2E68A}"/>
+                <a16:creationId xmlns:a16="http://schemas.microsoft.com/office/drawing/2014/main" id="{DF44F74C-B55C-42E7-A760-8A4CE0373AA9}"/>
               </a:ext>
             </a:extLst>
           </p:cNvPr>
@@ -27543,7 +27543,7 @@
           <p:cNvPr id="48" name="">
             <a:extLst xmlns:a="http://schemas.openxmlformats.org/drawingml/2006/main">
               <a:ext uri="{FF2B5EF4-FFF2-40B4-BE49-F238E27FC236}">
-                <a16:creationId xmlns:a16="http://schemas.microsoft.com/office/drawing/2014/main" id="{82F358FA-A561-4CC7-B27A-8AED36EEA73C}"/>
+                <a16:creationId xmlns:a16="http://schemas.microsoft.com/office/drawing/2014/main" id="{407DE675-7867-490E-9B9C-DABBFEEF8EBA}"/>
               </a:ext>
             </a:extLst>
           </p:cNvPr>
@@ -27576,7 +27576,7 @@
           <p:cNvPr id="49" name="">
             <a:extLst xmlns:a="http://schemas.openxmlformats.org/drawingml/2006/main">
               <a:ext uri="{FF2B5EF4-FFF2-40B4-BE49-F238E27FC236}">
-                <a16:creationId xmlns:a16="http://schemas.microsoft.com/office/drawing/2014/main" id="{5301832C-49D9-40BA-8FE5-B0F530232CEF}"/>
+                <a16:creationId xmlns:a16="http://schemas.microsoft.com/office/drawing/2014/main" id="{AB5BA6E5-6A2B-46E5-8544-46DFA824C295}"/>
               </a:ext>
             </a:extLst>
           </p:cNvPr>
@@ -27634,7 +27634,7 @@
           <p:cNvPr id="50" name="">
             <a:extLst xmlns:a="http://schemas.openxmlformats.org/drawingml/2006/main">
               <a:ext uri="{FF2B5EF4-FFF2-40B4-BE49-F238E27FC236}">
-                <a16:creationId xmlns:a16="http://schemas.microsoft.com/office/drawing/2014/main" id="{DE0E5142-C6C0-4A04-B611-E42179567E39}"/>
+                <a16:creationId xmlns:a16="http://schemas.microsoft.com/office/drawing/2014/main" id="{F0E53067-06FF-4121-BDC5-1AF1AEEFDF92}"/>
               </a:ext>
             </a:extLst>
           </p:cNvPr>
@@ -27667,7 +27667,7 @@
           <p:cNvPr id="51" name="">
             <a:extLst xmlns:a="http://schemas.openxmlformats.org/drawingml/2006/main">
               <a:ext uri="{FF2B5EF4-FFF2-40B4-BE49-F238E27FC236}">
-                <a16:creationId xmlns:a16="http://schemas.microsoft.com/office/drawing/2014/main" id="{47E20A34-73C2-4AFA-8BA7-8DB74F74B37C}"/>
+                <a16:creationId xmlns:a16="http://schemas.microsoft.com/office/drawing/2014/main" id="{9096E60F-190F-4BB1-A9FE-61EEBAA98AAF}"/>
               </a:ext>
             </a:extLst>
           </p:cNvPr>
@@ -27725,7 +27725,7 @@
           <p:cNvPr id="52" name="">
             <a:extLst xmlns:a="http://schemas.openxmlformats.org/drawingml/2006/main">
               <a:ext uri="{FF2B5EF4-FFF2-40B4-BE49-F238E27FC236}">
-                <a16:creationId xmlns:a16="http://schemas.microsoft.com/office/drawing/2014/main" id="{063105F7-4FFD-4C94-8856-D4CE45AA694E}"/>
+                <a16:creationId xmlns:a16="http://schemas.microsoft.com/office/drawing/2014/main" id="{E5774B05-0CDC-40D4-8493-76C747553DF7}"/>
               </a:ext>
             </a:extLst>
           </p:cNvPr>
@@ -27758,7 +27758,7 @@
           <p:cNvPr id="53" name="">
             <a:extLst xmlns:a="http://schemas.openxmlformats.org/drawingml/2006/main">
               <a:ext uri="{FF2B5EF4-FFF2-40B4-BE49-F238E27FC236}">
-                <a16:creationId xmlns:a16="http://schemas.microsoft.com/office/drawing/2014/main" id="{2B406001-BF1A-43FA-8715-CE3B0A214C0C}"/>
+                <a16:creationId xmlns:a16="http://schemas.microsoft.com/office/drawing/2014/main" id="{786CE60C-DA4A-4516-BC15-499039F4B4CE}"/>
               </a:ext>
             </a:extLst>
           </p:cNvPr>
@@ -27816,7 +27816,7 @@
           <p:cNvPr id="54" name="">
             <a:extLst xmlns:a="http://schemas.openxmlformats.org/drawingml/2006/main">
               <a:ext uri="{FF2B5EF4-FFF2-40B4-BE49-F238E27FC236}">
-                <a16:creationId xmlns:a16="http://schemas.microsoft.com/office/drawing/2014/main" id="{C8BAA36B-E4CC-4674-A5E3-CFF0F1FDBCEF}"/>
+                <a16:creationId xmlns:a16="http://schemas.microsoft.com/office/drawing/2014/main" id="{9B8F9C3F-F7FF-42E4-B1E3-4580862A7FB8}"/>
               </a:ext>
             </a:extLst>
           </p:cNvPr>
@@ -27849,7 +27849,7 @@
           <p:cNvPr id="55" name="">
             <a:extLst xmlns:a="http://schemas.openxmlformats.org/drawingml/2006/main">
               <a:ext uri="{FF2B5EF4-FFF2-40B4-BE49-F238E27FC236}">
-                <a16:creationId xmlns:a16="http://schemas.microsoft.com/office/drawing/2014/main" id="{B9272F64-77BB-46AA-9DEA-D933F6D005B3}"/>
+                <a16:creationId xmlns:a16="http://schemas.microsoft.com/office/drawing/2014/main" id="{4BB390AF-E9AD-48AF-A8A1-1D2A0F6D6F74}"/>
               </a:ext>
             </a:extLst>
           </p:cNvPr>
@@ -27907,7 +27907,7 @@
           <p:cNvPr id="56" name="">
             <a:extLst xmlns:a="http://schemas.openxmlformats.org/drawingml/2006/main">
               <a:ext uri="{FF2B5EF4-FFF2-40B4-BE49-F238E27FC236}">
-                <a16:creationId xmlns:a16="http://schemas.microsoft.com/office/drawing/2014/main" id="{1BE13E9C-2323-4E8C-9AE2-A498497EC2C8}"/>
+                <a16:creationId xmlns:a16="http://schemas.microsoft.com/office/drawing/2014/main" id="{FAB8E894-0B55-4BB9-8CCA-F8D9D36D413F}"/>
               </a:ext>
             </a:extLst>
           </p:cNvPr>
@@ -27940,7 +27940,7 @@
           <p:cNvPr id="57" name="">
             <a:extLst xmlns:a="http://schemas.openxmlformats.org/drawingml/2006/main">
               <a:ext uri="{FF2B5EF4-FFF2-40B4-BE49-F238E27FC236}">
-                <a16:creationId xmlns:a16="http://schemas.microsoft.com/office/drawing/2014/main" id="{B1F03ED5-8C2B-40E7-B096-B8872FE32B16}"/>
+                <a16:creationId xmlns:a16="http://schemas.microsoft.com/office/drawing/2014/main" id="{3731FF53-5519-47DC-998B-6DE113DA9E2C}"/>
               </a:ext>
             </a:extLst>
           </p:cNvPr>
@@ -27998,7 +27998,7 @@
           <p:cNvPr id="58" name="">
             <a:extLst xmlns:a="http://schemas.openxmlformats.org/drawingml/2006/main">
               <a:ext uri="{FF2B5EF4-FFF2-40B4-BE49-F238E27FC236}">
-                <a16:creationId xmlns:a16="http://schemas.microsoft.com/office/drawing/2014/main" id="{F2650F13-69D7-47F8-88E3-9762BAC73D33}"/>
+                <a16:creationId xmlns:a16="http://schemas.microsoft.com/office/drawing/2014/main" id="{6E8ABE23-E150-464B-B973-B60A50B82CF4}"/>
               </a:ext>
             </a:extLst>
           </p:cNvPr>
@@ -28031,7 +28031,7 @@
           <p:cNvPr id="59" name="">
             <a:extLst xmlns:a="http://schemas.openxmlformats.org/drawingml/2006/main">
               <a:ext uri="{FF2B5EF4-FFF2-40B4-BE49-F238E27FC236}">
-                <a16:creationId xmlns:a16="http://schemas.microsoft.com/office/drawing/2014/main" id="{BD994E74-F0F2-4647-BA0A-A4B800DF04F1}"/>
+                <a16:creationId xmlns:a16="http://schemas.microsoft.com/office/drawing/2014/main" id="{0FD72E37-CFCD-4649-8C34-86A946BAAA47}"/>
               </a:ext>
             </a:extLst>
           </p:cNvPr>
@@ -28089,7 +28089,7 @@
           <p:cNvPr id="60" name="">
             <a:extLst xmlns:a="http://schemas.openxmlformats.org/drawingml/2006/main">
               <a:ext uri="{FF2B5EF4-FFF2-40B4-BE49-F238E27FC236}">
-                <a16:creationId xmlns:a16="http://schemas.microsoft.com/office/drawing/2014/main" id="{C2A4E364-DD72-4184-9E19-7BF2E61D5E4C}"/>
+                <a16:creationId xmlns:a16="http://schemas.microsoft.com/office/drawing/2014/main" id="{5F430D39-1061-4026-AD18-755FEC90F244}"/>
               </a:ext>
             </a:extLst>
           </p:cNvPr>
@@ -28122,7 +28122,7 @@
           <p:cNvPr id="61" name="">
             <a:extLst xmlns:a="http://schemas.openxmlformats.org/drawingml/2006/main">
               <a:ext uri="{FF2B5EF4-FFF2-40B4-BE49-F238E27FC236}">
-                <a16:creationId xmlns:a16="http://schemas.microsoft.com/office/drawing/2014/main" id="{58FA575E-B7C2-430F-8128-81312CBB44AD}"/>
+                <a16:creationId xmlns:a16="http://schemas.microsoft.com/office/drawing/2014/main" id="{E9A5CA61-B520-4D79-86DC-825D4BB7B40D}"/>
               </a:ext>
             </a:extLst>
           </p:cNvPr>
@@ -28180,7 +28180,7 @@
           <p:cNvPr id="62" name="">
             <a:extLst xmlns:a="http://schemas.openxmlformats.org/drawingml/2006/main">
               <a:ext uri="{FF2B5EF4-FFF2-40B4-BE49-F238E27FC236}">
-                <a16:creationId xmlns:a16="http://schemas.microsoft.com/office/drawing/2014/main" id="{FD11F4B9-A8F2-4D17-B361-682876A02D13}"/>
+                <a16:creationId xmlns:a16="http://schemas.microsoft.com/office/drawing/2014/main" id="{0E0ACCEC-D4E6-4B59-AFF3-7683CE12A08D}"/>
               </a:ext>
             </a:extLst>
           </p:cNvPr>
@@ -28213,7 +28213,7 @@
           <p:cNvPr id="63" name="">
             <a:extLst xmlns:a="http://schemas.openxmlformats.org/drawingml/2006/main">
               <a:ext uri="{FF2B5EF4-FFF2-40B4-BE49-F238E27FC236}">
-                <a16:creationId xmlns:a16="http://schemas.microsoft.com/office/drawing/2014/main" id="{FB8B71A8-0EBE-497F-8AAF-4381583E2D4D}"/>
+                <a16:creationId xmlns:a16="http://schemas.microsoft.com/office/drawing/2014/main" id="{BD3BB4DF-16B7-46D3-B3C3-602E4EDA5470}"/>
               </a:ext>
             </a:extLst>
           </p:cNvPr>
@@ -28271,7 +28271,7 @@
           <p:cNvPr id="64" name="">
             <a:extLst xmlns:a="http://schemas.openxmlformats.org/drawingml/2006/main">
               <a:ext uri="{FF2B5EF4-FFF2-40B4-BE49-F238E27FC236}">
-                <a16:creationId xmlns:a16="http://schemas.microsoft.com/office/drawing/2014/main" id="{AF7C1D31-19C1-4D11-A824-45865D2363D5}"/>
+                <a16:creationId xmlns:a16="http://schemas.microsoft.com/office/drawing/2014/main" id="{8E68E396-0D1F-4A16-99D4-038D05FB5117}"/>
               </a:ext>
             </a:extLst>
           </p:cNvPr>
@@ -28304,7 +28304,7 @@
           <p:cNvPr id="65" name="">
             <a:extLst xmlns:a="http://schemas.openxmlformats.org/drawingml/2006/main">
               <a:ext uri="{FF2B5EF4-FFF2-40B4-BE49-F238E27FC236}">
-                <a16:creationId xmlns:a16="http://schemas.microsoft.com/office/drawing/2014/main" id="{CC960A41-62B3-4040-A1E8-E215AAED0523}"/>
+                <a16:creationId xmlns:a16="http://schemas.microsoft.com/office/drawing/2014/main" id="{A6253DA6-457C-4CCE-96EF-7ACDF0E66E86}"/>
               </a:ext>
             </a:extLst>
           </p:cNvPr>
@@ -28362,7 +28362,7 @@
           <p:cNvPr id="66" name="">
             <a:extLst xmlns:a="http://schemas.openxmlformats.org/drawingml/2006/main">
               <a:ext uri="{FF2B5EF4-FFF2-40B4-BE49-F238E27FC236}">
-                <a16:creationId xmlns:a16="http://schemas.microsoft.com/office/drawing/2014/main" id="{18DEC65B-6FC0-46E4-BC91-B95DAE7D5B73}"/>
+                <a16:creationId xmlns:a16="http://schemas.microsoft.com/office/drawing/2014/main" id="{AF2596DD-2578-47FA-8B5C-2162D6582F8E}"/>
               </a:ext>
             </a:extLst>
           </p:cNvPr>
@@ -28395,7 +28395,7 @@
           <p:cNvPr id="67" name="">
             <a:extLst xmlns:a="http://schemas.openxmlformats.org/drawingml/2006/main">
               <a:ext uri="{FF2B5EF4-FFF2-40B4-BE49-F238E27FC236}">
-                <a16:creationId xmlns:a16="http://schemas.microsoft.com/office/drawing/2014/main" id="{9C16CD9D-6682-40FE-81EF-27D57C77362A}"/>
+                <a16:creationId xmlns:a16="http://schemas.microsoft.com/office/drawing/2014/main" id="{02FE3D0B-DE30-46FB-96D8-759FC024B6ED}"/>
               </a:ext>
             </a:extLst>
           </p:cNvPr>
@@ -28453,7 +28453,7 @@
           <p:cNvPr id="68" name="">
             <a:extLst xmlns:a="http://schemas.openxmlformats.org/drawingml/2006/main">
               <a:ext uri="{FF2B5EF4-FFF2-40B4-BE49-F238E27FC236}">
-                <a16:creationId xmlns:a16="http://schemas.microsoft.com/office/drawing/2014/main" id="{27067820-F163-4091-9A76-31004184DBA0}"/>
+                <a16:creationId xmlns:a16="http://schemas.microsoft.com/office/drawing/2014/main" id="{DD632417-11A9-4B6C-8C89-8E79765B738A}"/>
               </a:ext>
             </a:extLst>
           </p:cNvPr>
@@ -28486,7 +28486,7 @@
           <p:cNvPr id="69" name="">
             <a:extLst xmlns:a="http://schemas.openxmlformats.org/drawingml/2006/main">
               <a:ext uri="{FF2B5EF4-FFF2-40B4-BE49-F238E27FC236}">
-                <a16:creationId xmlns:a16="http://schemas.microsoft.com/office/drawing/2014/main" id="{0998EC43-1946-4B80-B8B7-BDE56674C51F}"/>
+                <a16:creationId xmlns:a16="http://schemas.microsoft.com/office/drawing/2014/main" id="{A3ABE1A8-8281-4669-967C-3D67868B8123}"/>
               </a:ext>
             </a:extLst>
           </p:cNvPr>
@@ -28544,7 +28544,7 @@
           <p:cNvPr id="70" name="">
             <a:extLst xmlns:a="http://schemas.openxmlformats.org/drawingml/2006/main">
               <a:ext uri="{FF2B5EF4-FFF2-40B4-BE49-F238E27FC236}">
-                <a16:creationId xmlns:a16="http://schemas.microsoft.com/office/drawing/2014/main" id="{F057D273-FFA8-4F84-99E3-4ED92A4D0138}"/>
+                <a16:creationId xmlns:a16="http://schemas.microsoft.com/office/drawing/2014/main" id="{0F60D014-9380-4625-BC1B-2C311332B6FC}"/>
               </a:ext>
             </a:extLst>
           </p:cNvPr>
@@ -28579,7 +28579,7 @@
           <p:cNvPr id="71" name="">
             <a:extLst xmlns:a="http://schemas.openxmlformats.org/drawingml/2006/main">
               <a:ext uri="{FF2B5EF4-FFF2-40B4-BE49-F238E27FC236}">
-                <a16:creationId xmlns:a16="http://schemas.microsoft.com/office/drawing/2014/main" id="{0E236F27-ABD5-45E6-9C87-D0B7D8BA3C99}"/>
+                <a16:creationId xmlns:a16="http://schemas.microsoft.com/office/drawing/2014/main" id="{679BDCE0-6E2C-4BEA-8304-2ACBB69DF1F9}"/>
               </a:ext>
             </a:extLst>
           </p:cNvPr>
@@ -28635,7 +28635,7 @@
     </p:spTree>
     <p:extLst>
       <p:ext uri="{BB962C8B-B14F-4D97-AF65-F5344CB8AC3E}">
-        <p14:creationId xmlns:p14="http://schemas.microsoft.com/office/powerpoint/2010/main" val="824964193"/>
+        <p14:creationId xmlns:p14="http://schemas.microsoft.com/office/powerpoint/2010/main" val="483839750"/>
       </p:ext>
     </p:extLst>
   </p:cSld>
@@ -28666,7 +28666,7 @@
           <p:cNvPr id="52" name="eyebrow-9">
             <a:extLst xmlns:a="http://schemas.openxmlformats.org/drawingml/2006/main">
               <a:ext uri="{FF2B5EF4-FFF2-40B4-BE49-F238E27FC236}">
-                <a16:creationId xmlns:a16="http://schemas.microsoft.com/office/drawing/2014/main" id="{0ED12171-192E-4AC0-BD30-0854D6729274}"/>
+                <a16:creationId xmlns:a16="http://schemas.microsoft.com/office/drawing/2014/main" id="{6B349826-45EE-41C8-9669-7AD960E0E3BC}"/>
               </a:ext>
             </a:extLst>
           </p:cNvPr>
@@ -28724,7 +28724,7 @@
           <p:cNvPr id="2" name="title-9">
             <a:extLst xmlns:a="http://schemas.openxmlformats.org/drawingml/2006/main">
               <a:ext uri="{FF2B5EF4-FFF2-40B4-BE49-F238E27FC236}">
-                <a16:creationId xmlns:a16="http://schemas.microsoft.com/office/drawing/2014/main" id="{1406A173-BAC9-4B25-B0CD-C231C39055AB}"/>
+                <a16:creationId xmlns:a16="http://schemas.microsoft.com/office/drawing/2014/main" id="{63D39480-3BDF-4A94-8420-A184040F6180}"/>
               </a:ext>
             </a:extLst>
           </p:cNvPr>
@@ -28782,7 +28782,7 @@
           <p:cNvPr id="3" name="">
             <a:extLst xmlns:a="http://schemas.openxmlformats.org/drawingml/2006/main">
               <a:ext uri="{FF2B5EF4-FFF2-40B4-BE49-F238E27FC236}">
-                <a16:creationId xmlns:a16="http://schemas.microsoft.com/office/drawing/2014/main" id="{76AC0178-0DBC-431D-915E-671AAE99450B}"/>
+                <a16:creationId xmlns:a16="http://schemas.microsoft.com/office/drawing/2014/main" id="{5DB6FD71-D437-4BA4-8083-FCC10CD63237}"/>
               </a:ext>
             </a:extLst>
           </p:cNvPr>
@@ -28813,7 +28813,7 @@
           <p:cNvPr id="4" name="">
             <a:extLst xmlns:a="http://schemas.openxmlformats.org/drawingml/2006/main">
               <a:ext uri="{FF2B5EF4-FFF2-40B4-BE49-F238E27FC236}">
-                <a16:creationId xmlns:a16="http://schemas.microsoft.com/office/drawing/2014/main" id="{5854D6B8-867D-45F3-A30B-CB3F0DE51A7A}"/>
+                <a16:creationId xmlns:a16="http://schemas.microsoft.com/office/drawing/2014/main" id="{E53071EC-E7D7-45E2-8EA0-02751E6BBFB2}"/>
               </a:ext>
             </a:extLst>
           </p:cNvPr>
@@ -28861,7 +28861,7 @@
                 <a:ea typeface="Aptos"/>
                 <a:cs typeface="Aptos"/>
               </a:rPr>
-              <a:t>BES v2.0 · Propuesta ejecutiva</a:t>
+              <a:t>BES v2.0 · Aprobado y liberado</a:t>
             </a:r>
           </a:p>
         </p:txBody>
@@ -28871,7 +28871,7 @@
           <p:cNvPr id="5" name="">
             <a:extLst xmlns:a="http://schemas.openxmlformats.org/drawingml/2006/main">
               <a:ext uri="{FF2B5EF4-FFF2-40B4-BE49-F238E27FC236}">
-                <a16:creationId xmlns:a16="http://schemas.microsoft.com/office/drawing/2014/main" id="{C8107D6E-580D-4900-A1DA-2DBFEB894CE0}"/>
+                <a16:creationId xmlns:a16="http://schemas.microsoft.com/office/drawing/2014/main" id="{58BB6F3E-17C6-44FB-B5EB-6B1395253403}"/>
               </a:ext>
             </a:extLst>
           </p:cNvPr>
@@ -28929,7 +28929,7 @@
           <p:cNvPr id="6" name="">
             <a:extLst xmlns:a="http://schemas.openxmlformats.org/drawingml/2006/main">
               <a:ext uri="{FF2B5EF4-FFF2-40B4-BE49-F238E27FC236}">
-                <a16:creationId xmlns:a16="http://schemas.microsoft.com/office/drawing/2014/main" id="{08A36B83-46D4-4021-B028-31411A57BDDA}"/>
+                <a16:creationId xmlns:a16="http://schemas.microsoft.com/office/drawing/2014/main" id="{ECECE42F-255C-4FBA-B5BE-AAA03F7FDC1E}"/>
               </a:ext>
             </a:extLst>
           </p:cNvPr>
@@ -28964,7 +28964,7 @@
           <p:cNvPr id="7" name="">
             <a:extLst xmlns:a="http://schemas.openxmlformats.org/drawingml/2006/main">
               <a:ext uri="{FF2B5EF4-FFF2-40B4-BE49-F238E27FC236}">
-                <a16:creationId xmlns:a16="http://schemas.microsoft.com/office/drawing/2014/main" id="{A8EDF9C9-DD29-4F37-9D6A-5F5AFCE6F76E}"/>
+                <a16:creationId xmlns:a16="http://schemas.microsoft.com/office/drawing/2014/main" id="{26EE176B-2DB8-4DCC-963E-9B08746557C6}"/>
               </a:ext>
             </a:extLst>
           </p:cNvPr>
@@ -28995,7 +28995,7 @@
           <p:cNvPr id="8" name="">
             <a:extLst xmlns:a="http://schemas.openxmlformats.org/drawingml/2006/main">
               <a:ext uri="{FF2B5EF4-FFF2-40B4-BE49-F238E27FC236}">
-                <a16:creationId xmlns:a16="http://schemas.microsoft.com/office/drawing/2014/main" id="{C80B46D4-59C5-4946-91BD-EB349BB05EB1}"/>
+                <a16:creationId xmlns:a16="http://schemas.microsoft.com/office/drawing/2014/main" id="{4A3A9640-B0C0-4C68-8BEE-17AE4EA37CE5}"/>
               </a:ext>
             </a:extLst>
           </p:cNvPr>
@@ -29053,7 +29053,7 @@
           <p:cNvPr id="9" name="">
             <a:extLst xmlns:a="http://schemas.openxmlformats.org/drawingml/2006/main">
               <a:ext uri="{FF2B5EF4-FFF2-40B4-BE49-F238E27FC236}">
-                <a16:creationId xmlns:a16="http://schemas.microsoft.com/office/drawing/2014/main" id="{8301B1E6-563D-44B3-899D-3B5DACB7EC14}"/>
+                <a16:creationId xmlns:a16="http://schemas.microsoft.com/office/drawing/2014/main" id="{ACB1E981-A2AA-492A-A1F1-23035FCFA92F}"/>
               </a:ext>
             </a:extLst>
           </p:cNvPr>
@@ -29111,7 +29111,7 @@
           <p:cNvPr id="10" name="">
             <a:extLst xmlns:a="http://schemas.openxmlformats.org/drawingml/2006/main">
               <a:ext uri="{FF2B5EF4-FFF2-40B4-BE49-F238E27FC236}">
-                <a16:creationId xmlns:a16="http://schemas.microsoft.com/office/drawing/2014/main" id="{97929DB5-B71E-4C90-8A6D-1FD6FBAAEBBA}"/>
+                <a16:creationId xmlns:a16="http://schemas.microsoft.com/office/drawing/2014/main" id="{7D55AD7F-F769-425B-A3B8-27760CA6DD35}"/>
               </a:ext>
             </a:extLst>
           </p:cNvPr>
@@ -29169,7 +29169,7 @@
           <p:cNvPr id="11" name="">
             <a:extLst xmlns:a="http://schemas.openxmlformats.org/drawingml/2006/main">
               <a:ext uri="{FF2B5EF4-FFF2-40B4-BE49-F238E27FC236}">
-                <a16:creationId xmlns:a16="http://schemas.microsoft.com/office/drawing/2014/main" id="{77E2D134-9D70-4AB9-A6DF-E221A20898B5}"/>
+                <a16:creationId xmlns:a16="http://schemas.microsoft.com/office/drawing/2014/main" id="{8D156DC1-763F-439F-9FD3-68385AD1663F}"/>
               </a:ext>
             </a:extLst>
           </p:cNvPr>
@@ -29204,7 +29204,7 @@
           <p:cNvPr id="12" name="">
             <a:extLst xmlns:a="http://schemas.openxmlformats.org/drawingml/2006/main">
               <a:ext uri="{FF2B5EF4-FFF2-40B4-BE49-F238E27FC236}">
-                <a16:creationId xmlns:a16="http://schemas.microsoft.com/office/drawing/2014/main" id="{03F0490F-0E40-40E5-84BF-01FCF4E538D4}"/>
+                <a16:creationId xmlns:a16="http://schemas.microsoft.com/office/drawing/2014/main" id="{3D089509-62FE-462D-B90D-C4E1D794B679}"/>
               </a:ext>
             </a:extLst>
           </p:cNvPr>
@@ -29235,7 +29235,7 @@
           <p:cNvPr id="13" name="">
             <a:extLst xmlns:a="http://schemas.openxmlformats.org/drawingml/2006/main">
               <a:ext uri="{FF2B5EF4-FFF2-40B4-BE49-F238E27FC236}">
-                <a16:creationId xmlns:a16="http://schemas.microsoft.com/office/drawing/2014/main" id="{DD80C535-F8E4-4F89-BC7E-59116EFD3352}"/>
+                <a16:creationId xmlns:a16="http://schemas.microsoft.com/office/drawing/2014/main" id="{59B1D942-E3F6-4343-AB4F-842EA152CB3D}"/>
               </a:ext>
             </a:extLst>
           </p:cNvPr>
@@ -29293,7 +29293,7 @@
           <p:cNvPr id="14" name="">
             <a:extLst xmlns:a="http://schemas.openxmlformats.org/drawingml/2006/main">
               <a:ext uri="{FF2B5EF4-FFF2-40B4-BE49-F238E27FC236}">
-                <a16:creationId xmlns:a16="http://schemas.microsoft.com/office/drawing/2014/main" id="{56B8835E-0AE9-4172-B803-7BCEC043214E}"/>
+                <a16:creationId xmlns:a16="http://schemas.microsoft.com/office/drawing/2014/main" id="{8CD41B02-8D23-48E3-BEE1-1646535B3ABE}"/>
               </a:ext>
             </a:extLst>
           </p:cNvPr>
@@ -29351,7 +29351,7 @@
           <p:cNvPr id="15" name="">
             <a:extLst xmlns:a="http://schemas.openxmlformats.org/drawingml/2006/main">
               <a:ext uri="{FF2B5EF4-FFF2-40B4-BE49-F238E27FC236}">
-                <a16:creationId xmlns:a16="http://schemas.microsoft.com/office/drawing/2014/main" id="{4F9D22EC-A971-4A02-9C1E-3FE4462770C6}"/>
+                <a16:creationId xmlns:a16="http://schemas.microsoft.com/office/drawing/2014/main" id="{201723D2-90B6-456A-8FDF-921214AFB513}"/>
               </a:ext>
             </a:extLst>
           </p:cNvPr>
@@ -29409,7 +29409,7 @@
           <p:cNvPr id="16" name="">
             <a:extLst xmlns:a="http://schemas.openxmlformats.org/drawingml/2006/main">
               <a:ext uri="{FF2B5EF4-FFF2-40B4-BE49-F238E27FC236}">
-                <a16:creationId xmlns:a16="http://schemas.microsoft.com/office/drawing/2014/main" id="{3A68A562-CEF3-46CB-82D6-409C160B9512}"/>
+                <a16:creationId xmlns:a16="http://schemas.microsoft.com/office/drawing/2014/main" id="{80059BAF-D011-4112-A647-7187603FAAEF}"/>
               </a:ext>
             </a:extLst>
           </p:cNvPr>
@@ -29444,7 +29444,7 @@
           <p:cNvPr id="17" name="">
             <a:extLst xmlns:a="http://schemas.openxmlformats.org/drawingml/2006/main">
               <a:ext uri="{FF2B5EF4-FFF2-40B4-BE49-F238E27FC236}">
-                <a16:creationId xmlns:a16="http://schemas.microsoft.com/office/drawing/2014/main" id="{75EB5E98-40DD-41CD-B5C8-2B6A5A83EEF4}"/>
+                <a16:creationId xmlns:a16="http://schemas.microsoft.com/office/drawing/2014/main" id="{E08EB32C-481A-477B-B664-797C014917B0}"/>
               </a:ext>
             </a:extLst>
           </p:cNvPr>
@@ -29475,7 +29475,7 @@
           <p:cNvPr id="18" name="">
             <a:extLst xmlns:a="http://schemas.openxmlformats.org/drawingml/2006/main">
               <a:ext uri="{FF2B5EF4-FFF2-40B4-BE49-F238E27FC236}">
-                <a16:creationId xmlns:a16="http://schemas.microsoft.com/office/drawing/2014/main" id="{6668633F-FD4E-4312-A04A-9DF9FD0A4A1A}"/>
+                <a16:creationId xmlns:a16="http://schemas.microsoft.com/office/drawing/2014/main" id="{0461FC99-FC9D-46A3-BECF-705219AAE2ED}"/>
               </a:ext>
             </a:extLst>
           </p:cNvPr>
@@ -29533,7 +29533,7 @@
           <p:cNvPr id="19" name="">
             <a:extLst xmlns:a="http://schemas.openxmlformats.org/drawingml/2006/main">
               <a:ext uri="{FF2B5EF4-FFF2-40B4-BE49-F238E27FC236}">
-                <a16:creationId xmlns:a16="http://schemas.microsoft.com/office/drawing/2014/main" id="{89FFB9D3-4959-4544-8E3D-4EE04CB216C9}"/>
+                <a16:creationId xmlns:a16="http://schemas.microsoft.com/office/drawing/2014/main" id="{558F7A41-3FC9-4C45-81CD-6FB156975CF8}"/>
               </a:ext>
             </a:extLst>
           </p:cNvPr>
@@ -29591,7 +29591,7 @@
           <p:cNvPr id="20" name="">
             <a:extLst xmlns:a="http://schemas.openxmlformats.org/drawingml/2006/main">
               <a:ext uri="{FF2B5EF4-FFF2-40B4-BE49-F238E27FC236}">
-                <a16:creationId xmlns:a16="http://schemas.microsoft.com/office/drawing/2014/main" id="{17616452-FB8C-4A1A-A0C1-416230550096}"/>
+                <a16:creationId xmlns:a16="http://schemas.microsoft.com/office/drawing/2014/main" id="{5CD9F005-17A8-4EEB-9827-87DEAD43AAAD}"/>
               </a:ext>
             </a:extLst>
           </p:cNvPr>
@@ -29649,7 +29649,7 @@
           <p:cNvPr id="21" name="">
             <a:extLst xmlns:a="http://schemas.openxmlformats.org/drawingml/2006/main">
               <a:ext uri="{FF2B5EF4-FFF2-40B4-BE49-F238E27FC236}">
-                <a16:creationId xmlns:a16="http://schemas.microsoft.com/office/drawing/2014/main" id="{4D18210F-3FCE-4E9A-95A0-41D90658FD96}"/>
+                <a16:creationId xmlns:a16="http://schemas.microsoft.com/office/drawing/2014/main" id="{2C82A18E-31BF-4A42-A647-48A7722FEA67}"/>
               </a:ext>
             </a:extLst>
           </p:cNvPr>
@@ -29684,7 +29684,7 @@
           <p:cNvPr id="22" name="">
             <a:extLst xmlns:a="http://schemas.openxmlformats.org/drawingml/2006/main">
               <a:ext uri="{FF2B5EF4-FFF2-40B4-BE49-F238E27FC236}">
-                <a16:creationId xmlns:a16="http://schemas.microsoft.com/office/drawing/2014/main" id="{27F43118-41E6-42E5-8FF3-00F6D1F680AD}"/>
+                <a16:creationId xmlns:a16="http://schemas.microsoft.com/office/drawing/2014/main" id="{53BDAEF7-5E80-465A-9447-5F28B68B5497}"/>
               </a:ext>
             </a:extLst>
           </p:cNvPr>
@@ -29715,7 +29715,7 @@
           <p:cNvPr id="23" name="">
             <a:extLst xmlns:a="http://schemas.openxmlformats.org/drawingml/2006/main">
               <a:ext uri="{FF2B5EF4-FFF2-40B4-BE49-F238E27FC236}">
-                <a16:creationId xmlns:a16="http://schemas.microsoft.com/office/drawing/2014/main" id="{B6B044E2-4C0C-4F44-B3B0-4CE73D9FFD49}"/>
+                <a16:creationId xmlns:a16="http://schemas.microsoft.com/office/drawing/2014/main" id="{8DA71478-2433-4341-8A39-CD09E53928B4}"/>
               </a:ext>
             </a:extLst>
           </p:cNvPr>
@@ -29773,7 +29773,7 @@
           <p:cNvPr id="24" name="">
             <a:extLst xmlns:a="http://schemas.openxmlformats.org/drawingml/2006/main">
               <a:ext uri="{FF2B5EF4-FFF2-40B4-BE49-F238E27FC236}">
-                <a16:creationId xmlns:a16="http://schemas.microsoft.com/office/drawing/2014/main" id="{6C93413F-B6FC-4A1D-9C5C-BE09A056E997}"/>
+                <a16:creationId xmlns:a16="http://schemas.microsoft.com/office/drawing/2014/main" id="{0D5381BC-7B13-4955-B745-56526CC13A22}"/>
               </a:ext>
             </a:extLst>
           </p:cNvPr>
@@ -29831,7 +29831,7 @@
           <p:cNvPr id="25" name="">
             <a:extLst xmlns:a="http://schemas.openxmlformats.org/drawingml/2006/main">
               <a:ext uri="{FF2B5EF4-FFF2-40B4-BE49-F238E27FC236}">
-                <a16:creationId xmlns:a16="http://schemas.microsoft.com/office/drawing/2014/main" id="{DA2E1D92-7703-4FD5-8704-8ABBEC386410}"/>
+                <a16:creationId xmlns:a16="http://schemas.microsoft.com/office/drawing/2014/main" id="{52AB19F5-B085-46D1-B5CA-890C6962FB18}"/>
               </a:ext>
             </a:extLst>
           </p:cNvPr>
@@ -29889,7 +29889,7 @@
           <p:cNvPr id="26" name="">
             <a:extLst xmlns:a="http://schemas.openxmlformats.org/drawingml/2006/main">
               <a:ext uri="{FF2B5EF4-FFF2-40B4-BE49-F238E27FC236}">
-                <a16:creationId xmlns:a16="http://schemas.microsoft.com/office/drawing/2014/main" id="{6AABC680-C547-458C-AB04-DF827EA8E8E8}"/>
+                <a16:creationId xmlns:a16="http://schemas.microsoft.com/office/drawing/2014/main" id="{B4266428-D633-41F2-B4E5-428432C6E1E8}"/>
               </a:ext>
             </a:extLst>
           </p:cNvPr>
@@ -29924,7 +29924,7 @@
           <p:cNvPr id="27" name="">
             <a:extLst xmlns:a="http://schemas.openxmlformats.org/drawingml/2006/main">
               <a:ext uri="{FF2B5EF4-FFF2-40B4-BE49-F238E27FC236}">
-                <a16:creationId xmlns:a16="http://schemas.microsoft.com/office/drawing/2014/main" id="{4592F19D-2A8B-4EDA-8572-C152D7186F0E}"/>
+                <a16:creationId xmlns:a16="http://schemas.microsoft.com/office/drawing/2014/main" id="{856C32FA-A377-44CD-934E-58C31653CAB4}"/>
               </a:ext>
             </a:extLst>
           </p:cNvPr>
@@ -29955,7 +29955,7 @@
           <p:cNvPr id="28" name="">
             <a:extLst xmlns:a="http://schemas.openxmlformats.org/drawingml/2006/main">
               <a:ext uri="{FF2B5EF4-FFF2-40B4-BE49-F238E27FC236}">
-                <a16:creationId xmlns:a16="http://schemas.microsoft.com/office/drawing/2014/main" id="{1BDF4DCA-1ACD-4989-A788-0522F3E7D32F}"/>
+                <a16:creationId xmlns:a16="http://schemas.microsoft.com/office/drawing/2014/main" id="{F650420D-616B-4378-AD1D-B5E581C49EB2}"/>
               </a:ext>
             </a:extLst>
           </p:cNvPr>
@@ -30013,7 +30013,7 @@
           <p:cNvPr id="29" name="">
             <a:extLst xmlns:a="http://schemas.openxmlformats.org/drawingml/2006/main">
               <a:ext uri="{FF2B5EF4-FFF2-40B4-BE49-F238E27FC236}">
-                <a16:creationId xmlns:a16="http://schemas.microsoft.com/office/drawing/2014/main" id="{0E6C19B3-6882-41E0-94A9-24B085A1F6C3}"/>
+                <a16:creationId xmlns:a16="http://schemas.microsoft.com/office/drawing/2014/main" id="{56C59846-4B96-43DF-B114-E4B2FD630C42}"/>
               </a:ext>
             </a:extLst>
           </p:cNvPr>
@@ -30071,7 +30071,7 @@
           <p:cNvPr id="30" name="">
             <a:extLst xmlns:a="http://schemas.openxmlformats.org/drawingml/2006/main">
               <a:ext uri="{FF2B5EF4-FFF2-40B4-BE49-F238E27FC236}">
-                <a16:creationId xmlns:a16="http://schemas.microsoft.com/office/drawing/2014/main" id="{B46C0FD4-ABE1-4FF5-B65D-447CE08BCDCB}"/>
+                <a16:creationId xmlns:a16="http://schemas.microsoft.com/office/drawing/2014/main" id="{64290F38-E304-4512-957E-C5E0C03AF980}"/>
               </a:ext>
             </a:extLst>
           </p:cNvPr>
@@ -30129,7 +30129,7 @@
           <p:cNvPr id="31" name="">
             <a:extLst xmlns:a="http://schemas.openxmlformats.org/drawingml/2006/main">
               <a:ext uri="{FF2B5EF4-FFF2-40B4-BE49-F238E27FC236}">
-                <a16:creationId xmlns:a16="http://schemas.microsoft.com/office/drawing/2014/main" id="{458A0572-44C6-424E-95AA-2D4F19CB460E}"/>
+                <a16:creationId xmlns:a16="http://schemas.microsoft.com/office/drawing/2014/main" id="{058DB002-F0BB-47CC-A152-3C5502F7EECD}"/>
               </a:ext>
             </a:extLst>
           </p:cNvPr>
@@ -30164,7 +30164,7 @@
           <p:cNvPr id="32" name="">
             <a:extLst xmlns:a="http://schemas.openxmlformats.org/drawingml/2006/main">
               <a:ext uri="{FF2B5EF4-FFF2-40B4-BE49-F238E27FC236}">
-                <a16:creationId xmlns:a16="http://schemas.microsoft.com/office/drawing/2014/main" id="{16887FD2-75F3-4BF9-8B18-676BF8C02C00}"/>
+                <a16:creationId xmlns:a16="http://schemas.microsoft.com/office/drawing/2014/main" id="{D6A4A8FD-BF2B-4D21-8DF5-8D835DB07027}"/>
               </a:ext>
             </a:extLst>
           </p:cNvPr>
@@ -30195,7 +30195,7 @@
           <p:cNvPr id="33" name="">
             <a:extLst xmlns:a="http://schemas.openxmlformats.org/drawingml/2006/main">
               <a:ext uri="{FF2B5EF4-FFF2-40B4-BE49-F238E27FC236}">
-                <a16:creationId xmlns:a16="http://schemas.microsoft.com/office/drawing/2014/main" id="{31CFC017-72E0-442C-96C5-8147B2F45405}"/>
+                <a16:creationId xmlns:a16="http://schemas.microsoft.com/office/drawing/2014/main" id="{813D225D-ADA5-436C-9A0C-1F20B2A5ACB1}"/>
               </a:ext>
             </a:extLst>
           </p:cNvPr>
@@ -30253,7 +30253,7 @@
           <p:cNvPr id="34" name="">
             <a:extLst xmlns:a="http://schemas.openxmlformats.org/drawingml/2006/main">
               <a:ext uri="{FF2B5EF4-FFF2-40B4-BE49-F238E27FC236}">
-                <a16:creationId xmlns:a16="http://schemas.microsoft.com/office/drawing/2014/main" id="{FEBEB7A9-59A8-4D39-B911-F031E980E82C}"/>
+                <a16:creationId xmlns:a16="http://schemas.microsoft.com/office/drawing/2014/main" id="{EC60A586-A08C-4661-B274-FFA09D2B212D}"/>
               </a:ext>
             </a:extLst>
           </p:cNvPr>
@@ -30311,7 +30311,7 @@
           <p:cNvPr id="35" name="">
             <a:extLst xmlns:a="http://schemas.openxmlformats.org/drawingml/2006/main">
               <a:ext uri="{FF2B5EF4-FFF2-40B4-BE49-F238E27FC236}">
-                <a16:creationId xmlns:a16="http://schemas.microsoft.com/office/drawing/2014/main" id="{C5A6B97A-BA85-4A35-ADF0-6730BF3209F3}"/>
+                <a16:creationId xmlns:a16="http://schemas.microsoft.com/office/drawing/2014/main" id="{F1722D12-3991-46BD-9EA5-A2A3CFC08545}"/>
               </a:ext>
             </a:extLst>
           </p:cNvPr>
@@ -30369,7 +30369,7 @@
           <p:cNvPr id="36" name="">
             <a:extLst xmlns:a="http://schemas.openxmlformats.org/drawingml/2006/main">
               <a:ext uri="{FF2B5EF4-FFF2-40B4-BE49-F238E27FC236}">
-                <a16:creationId xmlns:a16="http://schemas.microsoft.com/office/drawing/2014/main" id="{B8FB156B-5B84-4BF3-94E6-01E8344C3763}"/>
+                <a16:creationId xmlns:a16="http://schemas.microsoft.com/office/drawing/2014/main" id="{DD7B2BB1-1FD5-4000-8258-8316A480A1A0}"/>
               </a:ext>
             </a:extLst>
           </p:cNvPr>
@@ -30404,7 +30404,7 @@
           <p:cNvPr id="37" name="">
             <a:extLst xmlns:a="http://schemas.openxmlformats.org/drawingml/2006/main">
               <a:ext uri="{FF2B5EF4-FFF2-40B4-BE49-F238E27FC236}">
-                <a16:creationId xmlns:a16="http://schemas.microsoft.com/office/drawing/2014/main" id="{1DE18519-0995-49D8-B7B5-5968F9DFFE2E}"/>
+                <a16:creationId xmlns:a16="http://schemas.microsoft.com/office/drawing/2014/main" id="{873C9E9E-9240-40BC-8BED-B84A5C247ED5}"/>
               </a:ext>
             </a:extLst>
           </p:cNvPr>
@@ -30435,7 +30435,7 @@
           <p:cNvPr id="38" name="">
             <a:extLst xmlns:a="http://schemas.openxmlformats.org/drawingml/2006/main">
               <a:ext uri="{FF2B5EF4-FFF2-40B4-BE49-F238E27FC236}">
-                <a16:creationId xmlns:a16="http://schemas.microsoft.com/office/drawing/2014/main" id="{FFDADA10-BF89-4A37-983C-0E46614A33BF}"/>
+                <a16:creationId xmlns:a16="http://schemas.microsoft.com/office/drawing/2014/main" id="{FF229112-EB1F-49D1-BEF3-030B8AFCE115}"/>
               </a:ext>
             </a:extLst>
           </p:cNvPr>
@@ -30493,7 +30493,7 @@
           <p:cNvPr id="39" name="">
             <a:extLst xmlns:a="http://schemas.openxmlformats.org/drawingml/2006/main">
               <a:ext uri="{FF2B5EF4-FFF2-40B4-BE49-F238E27FC236}">
-                <a16:creationId xmlns:a16="http://schemas.microsoft.com/office/drawing/2014/main" id="{3C7C2372-67DA-41BB-9B59-2EC9519EB8BE}"/>
+                <a16:creationId xmlns:a16="http://schemas.microsoft.com/office/drawing/2014/main" id="{96CC6448-D63D-4E14-B560-BDDFE20B8CD0}"/>
               </a:ext>
             </a:extLst>
           </p:cNvPr>
@@ -30551,7 +30551,7 @@
           <p:cNvPr id="40" name="">
             <a:extLst xmlns:a="http://schemas.openxmlformats.org/drawingml/2006/main">
               <a:ext uri="{FF2B5EF4-FFF2-40B4-BE49-F238E27FC236}">
-                <a16:creationId xmlns:a16="http://schemas.microsoft.com/office/drawing/2014/main" id="{84CF7921-56F2-4CEE-BE5F-F14F9B686FF8}"/>
+                <a16:creationId xmlns:a16="http://schemas.microsoft.com/office/drawing/2014/main" id="{20772130-40AC-4C7A-847F-1B10F616B488}"/>
               </a:ext>
             </a:extLst>
           </p:cNvPr>
@@ -30609,7 +30609,7 @@
           <p:cNvPr id="41" name="">
             <a:extLst xmlns:a="http://schemas.openxmlformats.org/drawingml/2006/main">
               <a:ext uri="{FF2B5EF4-FFF2-40B4-BE49-F238E27FC236}">
-                <a16:creationId xmlns:a16="http://schemas.microsoft.com/office/drawing/2014/main" id="{5B25F847-40AB-47F9-A367-B3A6817E4767}"/>
+                <a16:creationId xmlns:a16="http://schemas.microsoft.com/office/drawing/2014/main" id="{DEE358CB-32F8-4D53-BDB1-30FD8DC6B978}"/>
               </a:ext>
             </a:extLst>
           </p:cNvPr>
@@ -30644,7 +30644,7 @@
           <p:cNvPr id="42" name="">
             <a:extLst xmlns:a="http://schemas.openxmlformats.org/drawingml/2006/main">
               <a:ext uri="{FF2B5EF4-FFF2-40B4-BE49-F238E27FC236}">
-                <a16:creationId xmlns:a16="http://schemas.microsoft.com/office/drawing/2014/main" id="{61003B80-7917-4F2C-9388-DFE777CF831A}"/>
+                <a16:creationId xmlns:a16="http://schemas.microsoft.com/office/drawing/2014/main" id="{9A9CAA51-9CF7-4C4D-8CC3-E2B6310536B5}"/>
               </a:ext>
             </a:extLst>
           </p:cNvPr>
@@ -30675,7 +30675,7 @@
           <p:cNvPr id="43" name="">
             <a:extLst xmlns:a="http://schemas.openxmlformats.org/drawingml/2006/main">
               <a:ext uri="{FF2B5EF4-FFF2-40B4-BE49-F238E27FC236}">
-                <a16:creationId xmlns:a16="http://schemas.microsoft.com/office/drawing/2014/main" id="{33526D07-72BD-4F94-A6F3-C9E5B09266B1}"/>
+                <a16:creationId xmlns:a16="http://schemas.microsoft.com/office/drawing/2014/main" id="{60FC22F0-10B2-4097-96F2-9AA1FF49E90E}"/>
               </a:ext>
             </a:extLst>
           </p:cNvPr>
@@ -30733,7 +30733,7 @@
           <p:cNvPr id="44" name="">
             <a:extLst xmlns:a="http://schemas.openxmlformats.org/drawingml/2006/main">
               <a:ext uri="{FF2B5EF4-FFF2-40B4-BE49-F238E27FC236}">
-                <a16:creationId xmlns:a16="http://schemas.microsoft.com/office/drawing/2014/main" id="{CEC07134-E1F4-4199-A3A7-9F270E1DF7F4}"/>
+                <a16:creationId xmlns:a16="http://schemas.microsoft.com/office/drawing/2014/main" id="{3D7AC0FB-A7DC-4E13-91D6-4EF8B2ABD6E4}"/>
               </a:ext>
             </a:extLst>
           </p:cNvPr>
@@ -30791,7 +30791,7 @@
           <p:cNvPr id="45" name="">
             <a:extLst xmlns:a="http://schemas.openxmlformats.org/drawingml/2006/main">
               <a:ext uri="{FF2B5EF4-FFF2-40B4-BE49-F238E27FC236}">
-                <a16:creationId xmlns:a16="http://schemas.microsoft.com/office/drawing/2014/main" id="{869323EC-DF26-4CEE-84CB-50BA2616AC66}"/>
+                <a16:creationId xmlns:a16="http://schemas.microsoft.com/office/drawing/2014/main" id="{38796674-7AAB-470C-9148-B6A61C0BF7BF}"/>
               </a:ext>
             </a:extLst>
           </p:cNvPr>
@@ -30849,7 +30849,7 @@
           <p:cNvPr id="46" name="">
             <a:extLst xmlns:a="http://schemas.openxmlformats.org/drawingml/2006/main">
               <a:ext uri="{FF2B5EF4-FFF2-40B4-BE49-F238E27FC236}">
-                <a16:creationId xmlns:a16="http://schemas.microsoft.com/office/drawing/2014/main" id="{BE3CA550-8A49-43B1-8613-FE7118116F83}"/>
+                <a16:creationId xmlns:a16="http://schemas.microsoft.com/office/drawing/2014/main" id="{E0590BC1-B7D5-4F12-96BC-642668AB1F51}"/>
               </a:ext>
             </a:extLst>
           </p:cNvPr>
@@ -30884,7 +30884,7 @@
           <p:cNvPr id="47" name="">
             <a:extLst xmlns:a="http://schemas.openxmlformats.org/drawingml/2006/main">
               <a:ext uri="{FF2B5EF4-FFF2-40B4-BE49-F238E27FC236}">
-                <a16:creationId xmlns:a16="http://schemas.microsoft.com/office/drawing/2014/main" id="{5C61C861-90C3-4351-A8D0-E94C865BB5F0}"/>
+                <a16:creationId xmlns:a16="http://schemas.microsoft.com/office/drawing/2014/main" id="{F0B90D5E-C60F-4B8B-A973-68CA9B34D4BB}"/>
               </a:ext>
             </a:extLst>
           </p:cNvPr>
@@ -30915,7 +30915,7 @@
           <p:cNvPr id="48" name="">
             <a:extLst xmlns:a="http://schemas.openxmlformats.org/drawingml/2006/main">
               <a:ext uri="{FF2B5EF4-FFF2-40B4-BE49-F238E27FC236}">
-                <a16:creationId xmlns:a16="http://schemas.microsoft.com/office/drawing/2014/main" id="{A4F59333-A83F-4C97-8274-F511A19B6B47}"/>
+                <a16:creationId xmlns:a16="http://schemas.microsoft.com/office/drawing/2014/main" id="{F0988C36-6395-465C-A8D7-ECC12BD62E01}"/>
               </a:ext>
             </a:extLst>
           </p:cNvPr>
@@ -30973,7 +30973,7 @@
           <p:cNvPr id="49" name="">
             <a:extLst xmlns:a="http://schemas.openxmlformats.org/drawingml/2006/main">
               <a:ext uri="{FF2B5EF4-FFF2-40B4-BE49-F238E27FC236}">
-                <a16:creationId xmlns:a16="http://schemas.microsoft.com/office/drawing/2014/main" id="{97E01915-86E4-4FE3-9E4A-7A0EBB8D5CD4}"/>
+                <a16:creationId xmlns:a16="http://schemas.microsoft.com/office/drawing/2014/main" id="{E8C12ED8-95A5-4AD5-A217-A1C465A40F20}"/>
               </a:ext>
             </a:extLst>
           </p:cNvPr>
@@ -31031,7 +31031,7 @@
           <p:cNvPr id="50" name="">
             <a:extLst xmlns:a="http://schemas.openxmlformats.org/drawingml/2006/main">
               <a:ext uri="{FF2B5EF4-FFF2-40B4-BE49-F238E27FC236}">
-                <a16:creationId xmlns:a16="http://schemas.microsoft.com/office/drawing/2014/main" id="{846E0A9D-86F9-4B8C-A285-07F833A6A70D}"/>
+                <a16:creationId xmlns:a16="http://schemas.microsoft.com/office/drawing/2014/main" id="{D6880B7B-A74F-431E-97CA-61D0DEF4D1A5}"/>
               </a:ext>
             </a:extLst>
           </p:cNvPr>
@@ -31089,7 +31089,7 @@
           <p:cNvPr id="51" name="">
             <a:extLst xmlns:a="http://schemas.openxmlformats.org/drawingml/2006/main">
               <a:ext uri="{FF2B5EF4-FFF2-40B4-BE49-F238E27FC236}">
-                <a16:creationId xmlns:a16="http://schemas.microsoft.com/office/drawing/2014/main" id="{08945F6B-CE96-40F1-B5F6-519C117DBDEF}"/>
+                <a16:creationId xmlns:a16="http://schemas.microsoft.com/office/drawing/2014/main" id="{410A8064-68F1-4751-B60C-9AD54E2A23A7}"/>
               </a:ext>
             </a:extLst>
           </p:cNvPr>
@@ -31145,7 +31145,7 @@
     </p:spTree>
     <p:extLst>
       <p:ext uri="{BB962C8B-B14F-4D97-AF65-F5344CB8AC3E}">
-        <p14:creationId xmlns:p14="http://schemas.microsoft.com/office/powerpoint/2010/main" val="305273507"/>
+        <p14:creationId xmlns:p14="http://schemas.microsoft.com/office/powerpoint/2010/main" val="432114708"/>
       </p:ext>
     </p:extLst>
   </p:cSld>
